--- a/output/wordlabs-en-prefix-3day.pptx
+++ b/output/wordlabs-en-prefix-3day.pptx
@@ -4240,7 +4240,7 @@
                 <a:ea typeface="Calibri" pitchFamily="34" charset="-122"/>
                 <a:cs typeface="Calibri" pitchFamily="34" charset="-120"/>
               </a:rPr>
-              <a:t>"to make or put into"</a:t>
+              <a:t>"to make, put into"</a:t>
             </a:r>
             <a:endParaRPr lang="en-US" sz="2200" dirty="0"/>
           </a:p>
@@ -5288,7 +5288,7 @@
                 <a:ea typeface="Calibri" pitchFamily="34" charset="-122"/>
                 <a:cs typeface="Calibri" pitchFamily="34" charset="-120"/>
               </a:rPr>
-              <a:t>Word Labs  •  wordlabs.app  •  Prefix: 'en-' = to make or put into</a:t>
+              <a:t>Word Labs  •  wordlabs.app  •  Prefix: 'en-' = to make, put into</a:t>
             </a:r>
             <a:endParaRPr lang="en-US" sz="800" dirty="0"/>
           </a:p>
@@ -5928,7 +5928,7 @@
                 <a:ea typeface="Calibri" pitchFamily="34" charset="-122"/>
                 <a:cs typeface="Calibri" pitchFamily="34" charset="-120"/>
               </a:rPr>
-              <a:t>Word Labs  •  wordlabs.app  •  Prefix: 'en-' = to make or put into</a:t>
+              <a:t>Word Labs  •  wordlabs.app  •  Prefix: 'en-' = to make, put into</a:t>
             </a:r>
             <a:endParaRPr lang="en-US" sz="800" dirty="0"/>
           </a:p>
@@ -6040,7 +6040,7 @@
                 <a:ea typeface="Calibri" pitchFamily="34" charset="-122"/>
                 <a:cs typeface="Calibri" pitchFamily="34" charset="-120"/>
               </a:rPr>
-              <a:t>Pollution can </a:t>
+              <a:t>The teacher tried to </a:t>
             </a:r>
             <a:pPr algn="l" indent="0" marL="0">
               <a:buNone/>
@@ -6057,7 +6057,7 @@
                 <a:ea typeface="Calibri" pitchFamily="34" charset="-122"/>
                 <a:cs typeface="Calibri" pitchFamily="34" charset="-120"/>
               </a:rPr>
-              <a:t>endanger</a:t>
+              <a:t>encourage</a:t>
             </a:r>
             <a:pPr algn="l" indent="0" marL="0">
               <a:buNone/>
@@ -6071,7 +6071,7 @@
                 <a:ea typeface="Calibri" pitchFamily="34" charset="-122"/>
                 <a:cs typeface="Calibri" pitchFamily="34" charset="-120"/>
               </a:rPr>
-              <a:t> wildlife, so we must all </a:t>
+              <a:t> her students and </a:t>
             </a:r>
             <a:pPr algn="l" indent="0" marL="0">
               <a:buNone/>
@@ -6088,7 +6088,7 @@
                 <a:ea typeface="Calibri" pitchFamily="34" charset="-122"/>
                 <a:cs typeface="Calibri" pitchFamily="34" charset="-120"/>
               </a:rPr>
-              <a:t>enjoy</a:t>
+              <a:t>enjoyed</a:t>
             </a:r>
             <a:pPr algn="l" indent="0" marL="0">
               <a:buNone/>
@@ -6102,7 +6102,7 @@
                 <a:ea typeface="Calibri" pitchFamily="34" charset="-122"/>
                 <a:cs typeface="Calibri" pitchFamily="34" charset="-120"/>
               </a:rPr>
-              <a:t> and protect our environment.</a:t>
+              <a:t> watching them succeed.</a:t>
             </a:r>
             <a:endParaRPr lang="en-US" sz="1800" dirty="0"/>
           </a:p>
@@ -6257,7 +6257,7 @@
                 <a:ea typeface="Trebuchet MS" pitchFamily="34" charset="-122"/>
                 <a:cs typeface="Trebuchet MS" pitchFamily="34" charset="-120"/>
               </a:rPr>
-              <a:t>endanger</a:t>
+              <a:t>encourage</a:t>
             </a:r>
             <a:endParaRPr lang="en-US" sz="1400" dirty="0"/>
           </a:p>
@@ -6385,7 +6385,7 @@
                 <a:ea typeface="Trebuchet MS" pitchFamily="34" charset="-122"/>
                 <a:cs typeface="Trebuchet MS" pitchFamily="34" charset="-120"/>
               </a:rPr>
-              <a:t>enjoy</a:t>
+              <a:t>enjoyed</a:t>
             </a:r>
             <a:endParaRPr lang="en-US" sz="1400" dirty="0"/>
           </a:p>
@@ -6716,7 +6716,7 @@
                 <a:ea typeface="Calibri" pitchFamily="34" charset="-122"/>
                 <a:cs typeface="Calibri" pitchFamily="34" charset="-120"/>
               </a:rPr>
-              <a:t>Word Labs  •  wordlabs.app  •  Prefix: 'en-' = to make or put into</a:t>
+              <a:t>Word Labs  •  wordlabs.app  •  Prefix: 'en-' = to make, put into</a:t>
             </a:r>
             <a:endParaRPr lang="en-US" sz="800" dirty="0"/>
           </a:p>
@@ -6855,7 +6855,7 @@
                 <a:ea typeface="Trebuchet MS" pitchFamily="34" charset="-122"/>
                 <a:cs typeface="Trebuchet MS" pitchFamily="34" charset="-120"/>
               </a:rPr>
-              <a:t>endanger</a:t>
+              <a:t>encourage</a:t>
             </a:r>
             <a:endParaRPr lang="en-US" sz="2800" dirty="0"/>
           </a:p>
@@ -7543,7 +7543,7 @@
                 <a:ea typeface="Calibri" pitchFamily="34" charset="-122"/>
                 <a:cs typeface="Calibri" pitchFamily="34" charset="-120"/>
               </a:rPr>
-              <a:t>Word Labs  •  wordlabs.app  •  Prefix: 'en-' = to make or put into</a:t>
+              <a:t>Word Labs  •  wordlabs.app  •  Prefix: 'en-' = to make, put into</a:t>
             </a:r>
             <a:endParaRPr lang="en-US" sz="800" dirty="0"/>
           </a:p>
@@ -7682,7 +7682,7 @@
                 <a:ea typeface="Trebuchet MS" pitchFamily="34" charset="-122"/>
                 <a:cs typeface="Trebuchet MS" pitchFamily="34" charset="-120"/>
               </a:rPr>
-              <a:t>endanger</a:t>
+              <a:t>encourage</a:t>
             </a:r>
             <a:endParaRPr lang="en-US" sz="2800" dirty="0"/>
           </a:p>
@@ -7860,7 +7860,7 @@
                 <a:ea typeface="Calibri" pitchFamily="34" charset="-122"/>
                 <a:cs typeface="Calibri" pitchFamily="34" charset="-120"/>
               </a:rPr>
-              <a:t>to put into</a:t>
+              <a:t>to make, put into</a:t>
             </a:r>
             <a:endParaRPr lang="en-US" sz="850" dirty="0"/>
           </a:p>
@@ -7933,7 +7933,7 @@
                 <a:ea typeface="Trebuchet MS" pitchFamily="34" charset="-122"/>
                 <a:cs typeface="Trebuchet MS" pitchFamily="34" charset="-120"/>
               </a:rPr>
-              <a:t>danger</a:t>
+              <a:t>courage</a:t>
             </a:r>
             <a:endParaRPr lang="en-US" sz="1300" dirty="0"/>
           </a:p>
@@ -7972,7 +7972,7 @@
                 <a:ea typeface="Calibri" pitchFamily="34" charset="-122"/>
                 <a:cs typeface="Calibri" pitchFamily="34" charset="-120"/>
               </a:rPr>
-              <a:t>risk or harm</a:t>
+              <a:t>bravery, confidence</a:t>
             </a:r>
             <a:endParaRPr lang="en-US" sz="850" dirty="0"/>
           </a:p>
@@ -8528,7 +8528,7 @@
                 <a:ea typeface="Calibri" pitchFamily="34" charset="-122"/>
                 <a:cs typeface="Calibri" pitchFamily="34" charset="-120"/>
               </a:rPr>
-              <a:t>Word Labs  •  wordlabs.app  •  Prefix: 'en-' = to make or put into</a:t>
+              <a:t>Word Labs  •  wordlabs.app  •  Prefix: 'en-' = to make, put into</a:t>
             </a:r>
             <a:endParaRPr lang="en-US" sz="800" dirty="0"/>
           </a:p>
@@ -8667,7 +8667,7 @@
                 <a:ea typeface="Trebuchet MS" pitchFamily="34" charset="-122"/>
                 <a:cs typeface="Trebuchet MS" pitchFamily="34" charset="-120"/>
               </a:rPr>
-              <a:t>endanger</a:t>
+              <a:t>encourage</a:t>
             </a:r>
             <a:endParaRPr lang="en-US" sz="2800" dirty="0"/>
           </a:p>
@@ -8845,7 +8845,7 @@
                 <a:ea typeface="Calibri" pitchFamily="34" charset="-122"/>
                 <a:cs typeface="Calibri" pitchFamily="34" charset="-120"/>
               </a:rPr>
-              <a:t>to put into</a:t>
+              <a:t>to make, put into</a:t>
             </a:r>
             <a:endParaRPr lang="en-US" sz="850" dirty="0"/>
           </a:p>
@@ -8918,7 +8918,7 @@
                 <a:ea typeface="Trebuchet MS" pitchFamily="34" charset="-122"/>
                 <a:cs typeface="Trebuchet MS" pitchFamily="34" charset="-120"/>
               </a:rPr>
-              <a:t>danger</a:t>
+              <a:t>courage</a:t>
             </a:r>
             <a:endParaRPr lang="en-US" sz="1300" dirty="0"/>
           </a:p>
@@ -8957,7 +8957,7 @@
                 <a:ea typeface="Calibri" pitchFamily="34" charset="-122"/>
                 <a:cs typeface="Calibri" pitchFamily="34" charset="-120"/>
               </a:rPr>
-              <a:t>risk or harm</a:t>
+              <a:t>bravery, confidence</a:t>
             </a:r>
             <a:endParaRPr lang="en-US" sz="850" dirty="0"/>
           </a:p>
@@ -9221,7 +9221,7 @@
                 <a:ea typeface="Trebuchet MS" pitchFamily="34" charset="-122"/>
                 <a:cs typeface="Trebuchet MS" pitchFamily="34" charset="-120"/>
               </a:rPr>
-              <a:t>dan</a:t>
+              <a:t>cour</a:t>
             </a:r>
             <a:endParaRPr lang="en-US" sz="1400" dirty="0"/>
           </a:p>
@@ -9326,7 +9326,7 @@
                 <a:ea typeface="Trebuchet MS" pitchFamily="34" charset="-122"/>
                 <a:cs typeface="Trebuchet MS" pitchFamily="34" charset="-120"/>
               </a:rPr>
-              <a:t>ger</a:t>
+              <a:t>age</a:t>
             </a:r>
             <a:endParaRPr lang="en-US" sz="1400" dirty="0"/>
           </a:p>
@@ -9750,7 +9750,7 @@
                 <a:ea typeface="Calibri" pitchFamily="34" charset="-122"/>
                 <a:cs typeface="Calibri" pitchFamily="34" charset="-120"/>
               </a:rPr>
-              <a:t>Word Labs  •  wordlabs.app  •  Prefix: 'en-' = to make or put into</a:t>
+              <a:t>Word Labs  •  wordlabs.app  •  Prefix: 'en-' = to make, put into</a:t>
             </a:r>
             <a:endParaRPr lang="en-US" sz="800" dirty="0"/>
           </a:p>
@@ -9889,7 +9889,7 @@
                 <a:ea typeface="Trebuchet MS" pitchFamily="34" charset="-122"/>
                 <a:cs typeface="Trebuchet MS" pitchFamily="34" charset="-120"/>
               </a:rPr>
-              <a:t>endanger</a:t>
+              <a:t>encourage</a:t>
             </a:r>
             <a:endParaRPr lang="en-US" sz="2800" dirty="0"/>
           </a:p>
@@ -10067,7 +10067,7 @@
                 <a:ea typeface="Calibri" pitchFamily="34" charset="-122"/>
                 <a:cs typeface="Calibri" pitchFamily="34" charset="-120"/>
               </a:rPr>
-              <a:t>to put into</a:t>
+              <a:t>to make, put into</a:t>
             </a:r>
             <a:endParaRPr lang="en-US" sz="850" dirty="0"/>
           </a:p>
@@ -10140,7 +10140,7 @@
                 <a:ea typeface="Trebuchet MS" pitchFamily="34" charset="-122"/>
                 <a:cs typeface="Trebuchet MS" pitchFamily="34" charset="-120"/>
               </a:rPr>
-              <a:t>danger</a:t>
+              <a:t>courage</a:t>
             </a:r>
             <a:endParaRPr lang="en-US" sz="1300" dirty="0"/>
           </a:p>
@@ -10179,7 +10179,7 @@
                 <a:ea typeface="Calibri" pitchFamily="34" charset="-122"/>
                 <a:cs typeface="Calibri" pitchFamily="34" charset="-120"/>
               </a:rPr>
-              <a:t>risk or harm</a:t>
+              <a:t>bravery, confidence</a:t>
             </a:r>
             <a:endParaRPr lang="en-US" sz="850" dirty="0"/>
           </a:p>
@@ -10443,7 +10443,7 @@
                 <a:ea typeface="Trebuchet MS" pitchFamily="34" charset="-122"/>
                 <a:cs typeface="Trebuchet MS" pitchFamily="34" charset="-120"/>
               </a:rPr>
-              <a:t>dan</a:t>
+              <a:t>cour</a:t>
             </a:r>
             <a:endParaRPr lang="en-US" sz="1400" dirty="0"/>
           </a:p>
@@ -10548,7 +10548,7 @@
                 <a:ea typeface="Trebuchet MS" pitchFamily="34" charset="-122"/>
                 <a:cs typeface="Trebuchet MS" pitchFamily="34" charset="-120"/>
               </a:rPr>
-              <a:t>ger</a:t>
+              <a:t>age</a:t>
             </a:r>
             <a:endParaRPr lang="en-US" sz="1400" dirty="0"/>
           </a:p>
@@ -10629,11 +10629,11 @@
         <p:spPr>
           <a:xfrm>
             <a:off x="1874520" y="4096512"/>
-            <a:ext cx="6903720" cy="658368"/>
+            <a:ext cx="6903720" cy="804672"/>
           </a:xfrm>
           <a:prstGeom prst="rect">
             <a:avLst>
-              <a:gd name="adj" fmla="val 8333"/>
+              <a:gd name="adj" fmla="val 6818"/>
             </a:avLst>
           </a:prstGeom>
           <a:solidFill>
@@ -10655,12 +10655,12 @@
         </p:nvSpPr>
         <p:spPr>
           <a:xfrm>
-            <a:off x="2124837" y="4169664"/>
-            <a:ext cx="685800" cy="475488"/>
+            <a:off x="2427732" y="4169664"/>
+            <a:ext cx="685800" cy="384048"/>
           </a:xfrm>
           <a:prstGeom prst="rect">
             <a:avLst>
-              <a:gd name="adj" fmla="val 7692"/>
+              <a:gd name="adj" fmla="val 9524"/>
             </a:avLst>
           </a:prstGeom>
           <a:solidFill>
@@ -10682,8 +10682,8 @@
         </p:nvSpPr>
         <p:spPr>
           <a:xfrm>
-            <a:off x="2124837" y="4169664"/>
-            <a:ext cx="685800" cy="475488"/>
+            <a:off x="2427732" y="4169664"/>
+            <a:ext cx="685800" cy="384048"/>
           </a:xfrm>
           <a:prstGeom prst="rect">
             <a:avLst/>
@@ -10721,12 +10721,12 @@
         </p:nvSpPr>
         <p:spPr>
           <a:xfrm>
-            <a:off x="3033522" y="4169664"/>
-            <a:ext cx="685800" cy="475488"/>
+            <a:off x="3639312" y="4169664"/>
+            <a:ext cx="685800" cy="384048"/>
           </a:xfrm>
           <a:prstGeom prst="rect">
             <a:avLst>
-              <a:gd name="adj" fmla="val 7692"/>
+              <a:gd name="adj" fmla="val 9524"/>
             </a:avLst>
           </a:prstGeom>
           <a:solidFill>
@@ -10748,8 +10748,8 @@
         </p:nvSpPr>
         <p:spPr>
           <a:xfrm>
-            <a:off x="3033522" y="4169664"/>
-            <a:ext cx="685800" cy="475488"/>
+            <a:off x="3639312" y="4169664"/>
+            <a:ext cx="685800" cy="384048"/>
           </a:xfrm>
           <a:prstGeom prst="rect">
             <a:avLst/>
@@ -10787,12 +10787,12 @@
         </p:nvSpPr>
         <p:spPr>
           <a:xfrm>
-            <a:off x="3942207" y="4169664"/>
-            <a:ext cx="685800" cy="475488"/>
+            <a:off x="4850892" y="4169664"/>
+            <a:ext cx="685800" cy="384048"/>
           </a:xfrm>
           <a:prstGeom prst="rect">
             <a:avLst>
-              <a:gd name="adj" fmla="val 7692"/>
+              <a:gd name="adj" fmla="val 9524"/>
             </a:avLst>
           </a:prstGeom>
           <a:solidFill>
@@ -10814,8 +10814,8 @@
         </p:nvSpPr>
         <p:spPr>
           <a:xfrm>
-            <a:off x="3942207" y="4169664"/>
-            <a:ext cx="685800" cy="475488"/>
+            <a:off x="4850892" y="4169664"/>
+            <a:ext cx="685800" cy="384048"/>
           </a:xfrm>
           <a:prstGeom prst="rect">
             <a:avLst/>
@@ -10839,7 +10839,7 @@
                 <a:ea typeface="Trebuchet MS" pitchFamily="34" charset="-122"/>
                 <a:cs typeface="Trebuchet MS" pitchFamily="34" charset="-120"/>
               </a:rPr>
-              <a:t>d</a:t>
+              <a:t>c</a:t>
             </a:r>
             <a:endParaRPr lang="en-US" sz="900" dirty="0"/>
           </a:p>
@@ -10853,12 +10853,12 @@
         </p:nvSpPr>
         <p:spPr>
           <a:xfrm>
-            <a:off x="4850892" y="4169664"/>
-            <a:ext cx="685800" cy="475488"/>
+            <a:off x="6062472" y="4169664"/>
+            <a:ext cx="685800" cy="384048"/>
           </a:xfrm>
           <a:prstGeom prst="rect">
             <a:avLst>
-              <a:gd name="adj" fmla="val 7692"/>
+              <a:gd name="adj" fmla="val 9524"/>
             </a:avLst>
           </a:prstGeom>
           <a:solidFill>
@@ -10880,8 +10880,8 @@
         </p:nvSpPr>
         <p:spPr>
           <a:xfrm>
-            <a:off x="4850892" y="4169664"/>
-            <a:ext cx="685800" cy="475488"/>
+            <a:off x="6062472" y="4169664"/>
+            <a:ext cx="685800" cy="384048"/>
           </a:xfrm>
           <a:prstGeom prst="rect">
             <a:avLst/>
@@ -10905,7 +10905,7 @@
                 <a:ea typeface="Trebuchet MS" pitchFamily="34" charset="-122"/>
                 <a:cs typeface="Trebuchet MS" pitchFamily="34" charset="-120"/>
               </a:rPr>
-              <a:t>a</a:t>
+              <a:t>our</a:t>
             </a:r>
             <a:endParaRPr lang="en-US" sz="900" dirty="0"/>
           </a:p>
@@ -10913,18 +10913,57 @@
       </p:sp>
       <p:sp>
         <p:nvSpPr>
-          <p:cNvPr id="44" name="Shape 42"/>
-          <p:cNvSpPr/>
-          <p:nvPr/>
-        </p:nvSpPr>
-        <p:spPr>
-          <a:xfrm>
-            <a:off x="5759577" y="4169664"/>
-            <a:ext cx="685800" cy="475488"/>
+          <p:cNvPr id="44" name="Text 42"/>
+          <p:cNvSpPr/>
+          <p:nvPr/>
+        </p:nvSpPr>
+        <p:spPr>
+          <a:xfrm>
+            <a:off x="6062472" y="4572000"/>
+            <a:ext cx="685800" cy="219456"/>
+          </a:xfrm>
+          <a:prstGeom prst="rect">
+            <a:avLst/>
+          </a:prstGeom>
+          <a:noFill/>
+          <a:ln/>
+        </p:spPr>
+        <p:txBody>
+          <a:bodyPr wrap="square" lIns="0" tIns="0" rIns="0" bIns="0" rtlCol="0" anchor="t"/>
+          <a:lstStyle/>
+          <a:p>
+            <a:pPr algn="ctr" indent="0" marL="0">
+              <a:buNone/>
+            </a:pPr>
+            <a:r>
+              <a:rPr lang="en-US" sz="750" i="1" dirty="0">
+                <a:solidFill>
+                  <a:srgbClr val="94A3B8"/>
+                </a:solidFill>
+                <a:latin typeface="Calibri" pitchFamily="34" charset="0"/>
+                <a:ea typeface="Calibri" pitchFamily="34" charset="-122"/>
+                <a:cs typeface="Calibri" pitchFamily="34" charset="-120"/>
+              </a:rPr>
+              <a:t>/er/</a:t>
+            </a:r>
+            <a:endParaRPr lang="en-US" sz="750" dirty="0"/>
+          </a:p>
+        </p:txBody>
+      </p:sp>
+      <p:sp>
+        <p:nvSpPr>
+          <p:cNvPr id="45" name="Shape 43"/>
+          <p:cNvSpPr/>
+          <p:nvPr/>
+        </p:nvSpPr>
+        <p:spPr>
+          <a:xfrm>
+            <a:off x="7274052" y="4169664"/>
+            <a:ext cx="685800" cy="384048"/>
           </a:xfrm>
           <a:prstGeom prst="rect">
             <a:avLst>
-              <a:gd name="adj" fmla="val 7692"/>
+              <a:gd name="adj" fmla="val 9524"/>
             </a:avLst>
           </a:prstGeom>
           <a:solidFill>
@@ -10940,14 +10979,14 @@
       </p:sp>
       <p:sp>
         <p:nvSpPr>
-          <p:cNvPr id="45" name="Text 43"/>
-          <p:cNvSpPr/>
-          <p:nvPr/>
-        </p:nvSpPr>
-        <p:spPr>
-          <a:xfrm>
-            <a:off x="5759577" y="4169664"/>
-            <a:ext cx="685800" cy="475488"/>
+          <p:cNvPr id="46" name="Text 44"/>
+          <p:cNvSpPr/>
+          <p:nvPr/>
+        </p:nvSpPr>
+        <p:spPr>
+          <a:xfrm>
+            <a:off x="7274052" y="4169664"/>
+            <a:ext cx="685800" cy="384048"/>
           </a:xfrm>
           <a:prstGeom prst="rect">
             <a:avLst/>
@@ -10971,7 +11010,7 @@
                 <a:ea typeface="Trebuchet MS" pitchFamily="34" charset="-122"/>
                 <a:cs typeface="Trebuchet MS" pitchFamily="34" charset="-120"/>
               </a:rPr>
-              <a:t>n</a:t>
+              <a:t>age</a:t>
             </a:r>
             <a:endParaRPr lang="en-US" sz="900" dirty="0"/>
           </a:p>
@@ -10979,133 +11018,40 @@
       </p:sp>
       <p:sp>
         <p:nvSpPr>
-          <p:cNvPr id="46" name="Shape 44"/>
-          <p:cNvSpPr/>
-          <p:nvPr/>
-        </p:nvSpPr>
-        <p:spPr>
-          <a:xfrm>
-            <a:off x="6668262" y="4169664"/>
-            <a:ext cx="685800" cy="475488"/>
-          </a:xfrm>
-          <a:prstGeom prst="rect">
-            <a:avLst>
-              <a:gd name="adj" fmla="val 7692"/>
-            </a:avLst>
-          </a:prstGeom>
-          <a:solidFill>
-            <a:srgbClr val="FFFFFF"/>
-          </a:solidFill>
-          <a:ln w="12700">
-            <a:solidFill>
-              <a:srgbClr val="DB2777"/>
-            </a:solidFill>
-            <a:prstDash val="solid"/>
-          </a:ln>
-        </p:spPr>
-      </p:sp>
-      <p:sp>
-        <p:nvSpPr>
           <p:cNvPr id="47" name="Text 45"/>
           <p:cNvSpPr/>
           <p:nvPr/>
         </p:nvSpPr>
         <p:spPr>
           <a:xfrm>
-            <a:off x="6668262" y="4169664"/>
-            <a:ext cx="685800" cy="475488"/>
-          </a:xfrm>
-          <a:prstGeom prst="rect">
-            <a:avLst/>
-          </a:prstGeom>
-          <a:noFill/>
-          <a:ln/>
-        </p:spPr>
-        <p:txBody>
-          <a:bodyPr wrap="square" lIns="0" tIns="0" rIns="0" bIns="0" rtlCol="0" anchor="ctr"/>
-          <a:lstStyle/>
-          <a:p>
-            <a:pPr algn="ctr" indent="0" marL="0">
-              <a:buNone/>
-            </a:pPr>
-            <a:r>
-              <a:rPr lang="en-US" sz="900" b="1" dirty="0">
-                <a:solidFill>
-                  <a:srgbClr val="9D174D"/>
-                </a:solidFill>
-                <a:latin typeface="Trebuchet MS" pitchFamily="34" charset="0"/>
-                <a:ea typeface="Trebuchet MS" pitchFamily="34" charset="-122"/>
-                <a:cs typeface="Trebuchet MS" pitchFamily="34" charset="-120"/>
-              </a:rPr>
-              <a:t>g</a:t>
-            </a:r>
-            <a:endParaRPr lang="en-US" sz="900" dirty="0"/>
-          </a:p>
-        </p:txBody>
-      </p:sp>
-      <p:sp>
-        <p:nvSpPr>
-          <p:cNvPr id="48" name="Shape 46"/>
-          <p:cNvSpPr/>
-          <p:nvPr/>
-        </p:nvSpPr>
-        <p:spPr>
-          <a:xfrm>
-            <a:off x="7576947" y="4169664"/>
-            <a:ext cx="685800" cy="475488"/>
-          </a:xfrm>
-          <a:prstGeom prst="rect">
-            <a:avLst>
-              <a:gd name="adj" fmla="val 7692"/>
-            </a:avLst>
-          </a:prstGeom>
-          <a:solidFill>
-            <a:srgbClr val="FFFFFF"/>
-          </a:solidFill>
-          <a:ln w="12700">
-            <a:solidFill>
-              <a:srgbClr val="DB2777"/>
-            </a:solidFill>
-            <a:prstDash val="solid"/>
-          </a:ln>
-        </p:spPr>
-      </p:sp>
-      <p:sp>
-        <p:nvSpPr>
-          <p:cNvPr id="49" name="Text 47"/>
-          <p:cNvSpPr/>
-          <p:nvPr/>
-        </p:nvSpPr>
-        <p:spPr>
-          <a:xfrm>
-            <a:off x="7576947" y="4169664"/>
-            <a:ext cx="685800" cy="475488"/>
-          </a:xfrm>
-          <a:prstGeom prst="rect">
-            <a:avLst/>
-          </a:prstGeom>
-          <a:noFill/>
-          <a:ln/>
-        </p:spPr>
-        <p:txBody>
-          <a:bodyPr wrap="square" lIns="0" tIns="0" rIns="0" bIns="0" rtlCol="0" anchor="ctr"/>
-          <a:lstStyle/>
-          <a:p>
-            <a:pPr algn="ctr" indent="0" marL="0">
-              <a:buNone/>
-            </a:pPr>
-            <a:r>
-              <a:rPr lang="en-US" sz="900" b="1" dirty="0">
-                <a:solidFill>
-                  <a:srgbClr val="9D174D"/>
-                </a:solidFill>
-                <a:latin typeface="Trebuchet MS" pitchFamily="34" charset="0"/>
-                <a:ea typeface="Trebuchet MS" pitchFamily="34" charset="-122"/>
-                <a:cs typeface="Trebuchet MS" pitchFamily="34" charset="-120"/>
-              </a:rPr>
-              <a:t>er</a:t>
-            </a:r>
-            <a:endParaRPr lang="en-US" sz="900" dirty="0"/>
+            <a:off x="7274052" y="4572000"/>
+            <a:ext cx="685800" cy="219456"/>
+          </a:xfrm>
+          <a:prstGeom prst="rect">
+            <a:avLst/>
+          </a:prstGeom>
+          <a:noFill/>
+          <a:ln/>
+        </p:spPr>
+        <p:txBody>
+          <a:bodyPr wrap="square" lIns="0" tIns="0" rIns="0" bIns="0" rtlCol="0" anchor="t"/>
+          <a:lstStyle/>
+          <a:p>
+            <a:pPr algn="ctr" indent="0" marL="0">
+              <a:buNone/>
+            </a:pPr>
+            <a:r>
+              <a:rPr lang="en-US" sz="750" i="1" dirty="0">
+                <a:solidFill>
+                  <a:srgbClr val="94A3B8"/>
+                </a:solidFill>
+                <a:latin typeface="Calibri" pitchFamily="34" charset="0"/>
+                <a:ea typeface="Calibri" pitchFamily="34" charset="-122"/>
+                <a:cs typeface="Calibri" pitchFamily="34" charset="-120"/>
+              </a:rPr>
+              <a:t>/ij/</a:t>
+            </a:r>
+            <a:endParaRPr lang="en-US" sz="750" dirty="0"/>
           </a:p>
         </p:txBody>
       </p:sp>
@@ -11395,7 +11341,7 @@
                 <a:ea typeface="Calibri" pitchFamily="34" charset="-122"/>
                 <a:cs typeface="Calibri" pitchFamily="34" charset="-120"/>
               </a:rPr>
-              <a:t>Word Labs  •  wordlabs.app  •  Prefix: 'en-' = to make or put into</a:t>
+              <a:t>Word Labs  •  wordlabs.app  •  Prefix: 'en-' = to make, put into</a:t>
             </a:r>
             <a:endParaRPr lang="en-US" sz="800" dirty="0"/>
           </a:p>
@@ -11534,7 +11480,7 @@
                 <a:ea typeface="Trebuchet MS" pitchFamily="34" charset="-122"/>
                 <a:cs typeface="Trebuchet MS" pitchFamily="34" charset="-120"/>
               </a:rPr>
-              <a:t>enjoy</a:t>
+              <a:t>enjoyed</a:t>
             </a:r>
             <a:endParaRPr lang="en-US" sz="2800" dirty="0"/>
           </a:p>
@@ -12222,7 +12168,7 @@
                 <a:ea typeface="Calibri" pitchFamily="34" charset="-122"/>
                 <a:cs typeface="Calibri" pitchFamily="34" charset="-120"/>
               </a:rPr>
-              <a:t>Word Labs  •  wordlabs.app  •  Prefix: 'en-' = to make or put into</a:t>
+              <a:t>Word Labs  •  wordlabs.app  •  Prefix: 'en-' = to make, put into</a:t>
             </a:r>
             <a:endParaRPr lang="en-US" sz="800" dirty="0"/>
           </a:p>
@@ -12361,7 +12307,7 @@
                 <a:ea typeface="Trebuchet MS" pitchFamily="34" charset="-122"/>
                 <a:cs typeface="Trebuchet MS" pitchFamily="34" charset="-120"/>
               </a:rPr>
-              <a:t>enjoy</a:t>
+              <a:t>enjoyed</a:t>
             </a:r>
             <a:endParaRPr lang="en-US" sz="2800" dirty="0"/>
           </a:p>
@@ -12441,7 +12387,7 @@
         </p:nvSpPr>
         <p:spPr>
           <a:xfrm>
-            <a:off x="2938272" y="2258568"/>
+            <a:off x="2221992" y="2258568"/>
             <a:ext cx="1828800" cy="292608"/>
           </a:xfrm>
           <a:prstGeom prst="rect">
@@ -12475,7 +12421,7 @@
         </p:nvSpPr>
         <p:spPr>
           <a:xfrm>
-            <a:off x="2938272" y="2258568"/>
+            <a:off x="2221992" y="2258568"/>
             <a:ext cx="1828800" cy="292608"/>
           </a:xfrm>
           <a:prstGeom prst="rect">
@@ -12514,7 +12460,7 @@
         </p:nvSpPr>
         <p:spPr>
           <a:xfrm>
-            <a:off x="2938272" y="2569464"/>
+            <a:off x="2221992" y="2569464"/>
             <a:ext cx="1828800" cy="201168"/>
           </a:xfrm>
           <a:prstGeom prst="rect">
@@ -12539,7 +12485,7 @@
                 <a:ea typeface="Calibri" pitchFamily="34" charset="-122"/>
                 <a:cs typeface="Calibri" pitchFamily="34" charset="-120"/>
               </a:rPr>
-              <a:t>to make or put into</a:t>
+              <a:t>to make, put into</a:t>
             </a:r>
             <a:endParaRPr lang="en-US" sz="850" dirty="0"/>
           </a:p>
@@ -12553,7 +12499,7 @@
         </p:nvSpPr>
         <p:spPr>
           <a:xfrm>
-            <a:off x="5803392" y="2258568"/>
+            <a:off x="4370832" y="2258568"/>
             <a:ext cx="1828800" cy="292608"/>
           </a:xfrm>
           <a:prstGeom prst="rect">
@@ -12587,7 +12533,7 @@
         </p:nvSpPr>
         <p:spPr>
           <a:xfrm>
-            <a:off x="5803392" y="2258568"/>
+            <a:off x="4370832" y="2258568"/>
             <a:ext cx="1828800" cy="292608"/>
           </a:xfrm>
           <a:prstGeom prst="rect">
@@ -12626,7 +12572,7 @@
         </p:nvSpPr>
         <p:spPr>
           <a:xfrm>
-            <a:off x="5803392" y="2569464"/>
+            <a:off x="4370832" y="2569464"/>
             <a:ext cx="1828800" cy="201168"/>
           </a:xfrm>
           <a:prstGeom prst="rect">
@@ -12651,7 +12597,7 @@
                 <a:ea typeface="Calibri" pitchFamily="34" charset="-122"/>
                 <a:cs typeface="Calibri" pitchFamily="34" charset="-120"/>
               </a:rPr>
-              <a:t>happiness or pleasure</a:t>
+              <a:t>happiness, pleasure</a:t>
             </a:r>
             <a:endParaRPr lang="en-US" sz="850" dirty="0"/>
           </a:p>
@@ -12660,6 +12606,118 @@
       <p:sp>
         <p:nvSpPr>
           <p:cNvPr id="22" name="Shape 20"/>
+          <p:cNvSpPr/>
+          <p:nvPr/>
+        </p:nvSpPr>
+        <p:spPr>
+          <a:xfrm>
+            <a:off x="6519672" y="2258568"/>
+            <a:ext cx="1828800" cy="292608"/>
+          </a:xfrm>
+          <a:prstGeom prst="rect">
+            <a:avLst>
+              <a:gd name="adj" fmla="val 25000"/>
+            </a:avLst>
+          </a:prstGeom>
+          <a:solidFill>
+            <a:srgbClr val="FCE7F3"/>
+          </a:solidFill>
+          <a:ln w="19050">
+            <a:solidFill>
+              <a:srgbClr val="DB2777"/>
+            </a:solidFill>
+            <a:prstDash val="solid"/>
+          </a:ln>
+          <a:effectLst>
+            <a:outerShdw sx="100000" sy="100000" kx="0" ky="0" algn="bl" rotWithShape="0" blurRad="101600" dist="38100" dir="8100000">
+              <a:srgbClr val="000000">
+                <a:alpha val="12000"/>
+              </a:srgbClr>
+            </a:outerShdw>
+          </a:effectLst>
+        </p:spPr>
+      </p:sp>
+      <p:sp>
+        <p:nvSpPr>
+          <p:cNvPr id="23" name="Text 21"/>
+          <p:cNvSpPr/>
+          <p:nvPr/>
+        </p:nvSpPr>
+        <p:spPr>
+          <a:xfrm>
+            <a:off x="6519672" y="2258568"/>
+            <a:ext cx="1828800" cy="292608"/>
+          </a:xfrm>
+          <a:prstGeom prst="rect">
+            <a:avLst/>
+          </a:prstGeom>
+          <a:noFill/>
+          <a:ln/>
+        </p:spPr>
+        <p:txBody>
+          <a:bodyPr wrap="square" lIns="0" tIns="0" rIns="0" bIns="0" rtlCol="0" anchor="ctr"/>
+          <a:lstStyle/>
+          <a:p>
+            <a:pPr algn="ctr" indent="0" marL="0">
+              <a:buNone/>
+            </a:pPr>
+            <a:r>
+              <a:rPr lang="en-US" sz="1300" b="1" dirty="0">
+                <a:solidFill>
+                  <a:srgbClr val="9D174D"/>
+                </a:solidFill>
+                <a:latin typeface="Trebuchet MS" pitchFamily="34" charset="0"/>
+                <a:ea typeface="Trebuchet MS" pitchFamily="34" charset="-122"/>
+                <a:cs typeface="Trebuchet MS" pitchFamily="34" charset="-120"/>
+              </a:rPr>
+              <a:t>ed</a:t>
+            </a:r>
+            <a:endParaRPr lang="en-US" sz="1300" dirty="0"/>
+          </a:p>
+        </p:txBody>
+      </p:sp>
+      <p:sp>
+        <p:nvSpPr>
+          <p:cNvPr id="24" name="Text 22"/>
+          <p:cNvSpPr/>
+          <p:nvPr/>
+        </p:nvSpPr>
+        <p:spPr>
+          <a:xfrm>
+            <a:off x="6519672" y="2569464"/>
+            <a:ext cx="1828800" cy="201168"/>
+          </a:xfrm>
+          <a:prstGeom prst="rect">
+            <a:avLst/>
+          </a:prstGeom>
+          <a:noFill/>
+          <a:ln/>
+        </p:spPr>
+        <p:txBody>
+          <a:bodyPr wrap="square" lIns="0" tIns="0" rIns="0" bIns="0" rtlCol="0" anchor="t"/>
+          <a:lstStyle/>
+          <a:p>
+            <a:pPr algn="ctr" indent="0" marL="0">
+              <a:buNone/>
+            </a:pPr>
+            <a:r>
+              <a:rPr lang="en-US" sz="850" dirty="0">
+                <a:solidFill>
+                  <a:srgbClr val="475569"/>
+                </a:solidFill>
+                <a:latin typeface="Calibri" pitchFamily="34" charset="0"/>
+                <a:ea typeface="Calibri" pitchFamily="34" charset="-122"/>
+                <a:cs typeface="Calibri" pitchFamily="34" charset="-120"/>
+              </a:rPr>
+              <a:t>past tense</a:t>
+            </a:r>
+            <a:endParaRPr lang="en-US" sz="850" dirty="0"/>
+          </a:p>
+        </p:txBody>
+      </p:sp>
+      <p:sp>
+        <p:nvSpPr>
+          <p:cNvPr id="25" name="Shape 23"/>
           <p:cNvSpPr/>
           <p:nvPr/>
         </p:nvSpPr>
@@ -12686,7 +12744,7 @@
       </p:sp>
       <p:sp>
         <p:nvSpPr>
-          <p:cNvPr id="23" name="Text 21"/>
+          <p:cNvPr id="26" name="Text 24"/>
           <p:cNvSpPr/>
           <p:nvPr/>
         </p:nvSpPr>
@@ -12725,7 +12783,7 @@
       </p:sp>
       <p:sp>
         <p:nvSpPr>
-          <p:cNvPr id="24" name="Shape 22"/>
+          <p:cNvPr id="27" name="Shape 25"/>
           <p:cNvSpPr/>
           <p:nvPr/>
         </p:nvSpPr>
@@ -12752,7 +12810,7 @@
       </p:sp>
       <p:sp>
         <p:nvSpPr>
-          <p:cNvPr id="25" name="Text 23"/>
+          <p:cNvPr id="28" name="Text 26"/>
           <p:cNvSpPr/>
           <p:nvPr/>
         </p:nvSpPr>
@@ -12791,7 +12849,7 @@
       </p:sp>
       <p:sp>
         <p:nvSpPr>
-          <p:cNvPr id="26" name="Shape 24"/>
+          <p:cNvPr id="29" name="Shape 27"/>
           <p:cNvSpPr/>
           <p:nvPr/>
         </p:nvSpPr>
@@ -12818,7 +12876,7 @@
       </p:sp>
       <p:sp>
         <p:nvSpPr>
-          <p:cNvPr id="27" name="Text 25"/>
+          <p:cNvPr id="30" name="Text 28"/>
           <p:cNvSpPr/>
           <p:nvPr/>
         </p:nvSpPr>
@@ -12857,7 +12915,7 @@
       </p:sp>
       <p:sp>
         <p:nvSpPr>
-          <p:cNvPr id="28" name="Shape 26"/>
+          <p:cNvPr id="31" name="Shape 29"/>
           <p:cNvSpPr/>
           <p:nvPr/>
         </p:nvSpPr>
@@ -12884,7 +12942,7 @@
       </p:sp>
       <p:sp>
         <p:nvSpPr>
-          <p:cNvPr id="29" name="Text 27"/>
+          <p:cNvPr id="32" name="Text 30"/>
           <p:cNvSpPr/>
           <p:nvPr/>
         </p:nvSpPr>
@@ -13207,7 +13265,7 @@
                 <a:ea typeface="Calibri" pitchFamily="34" charset="-122"/>
                 <a:cs typeface="Calibri" pitchFamily="34" charset="-120"/>
               </a:rPr>
-              <a:t>Word Labs  •  wordlabs.app  •  Prefix: 'en-' = to make or put into</a:t>
+              <a:t>Word Labs  •  wordlabs.app  •  Prefix: 'en-' = to make, put into</a:t>
             </a:r>
             <a:endParaRPr lang="en-US" sz="800" dirty="0"/>
           </a:p>
@@ -13346,7 +13404,7 @@
                 <a:ea typeface="Trebuchet MS" pitchFamily="34" charset="-122"/>
                 <a:cs typeface="Trebuchet MS" pitchFamily="34" charset="-120"/>
               </a:rPr>
-              <a:t>enjoy</a:t>
+              <a:t>enjoyed</a:t>
             </a:r>
             <a:endParaRPr lang="en-US" sz="2800" dirty="0"/>
           </a:p>
@@ -13426,7 +13484,7 @@
         </p:nvSpPr>
         <p:spPr>
           <a:xfrm>
-            <a:off x="2938272" y="2258568"/>
+            <a:off x="2221992" y="2258568"/>
             <a:ext cx="1828800" cy="292608"/>
           </a:xfrm>
           <a:prstGeom prst="rect">
@@ -13460,7 +13518,7 @@
         </p:nvSpPr>
         <p:spPr>
           <a:xfrm>
-            <a:off x="2938272" y="2258568"/>
+            <a:off x="2221992" y="2258568"/>
             <a:ext cx="1828800" cy="292608"/>
           </a:xfrm>
           <a:prstGeom prst="rect">
@@ -13499,7 +13557,7 @@
         </p:nvSpPr>
         <p:spPr>
           <a:xfrm>
-            <a:off x="2938272" y="2569464"/>
+            <a:off x="2221992" y="2569464"/>
             <a:ext cx="1828800" cy="201168"/>
           </a:xfrm>
           <a:prstGeom prst="rect">
@@ -13524,7 +13582,7 @@
                 <a:ea typeface="Calibri" pitchFamily="34" charset="-122"/>
                 <a:cs typeface="Calibri" pitchFamily="34" charset="-120"/>
               </a:rPr>
-              <a:t>to make or put into</a:t>
+              <a:t>to make, put into</a:t>
             </a:r>
             <a:endParaRPr lang="en-US" sz="850" dirty="0"/>
           </a:p>
@@ -13538,7 +13596,7 @@
         </p:nvSpPr>
         <p:spPr>
           <a:xfrm>
-            <a:off x="5803392" y="2258568"/>
+            <a:off x="4370832" y="2258568"/>
             <a:ext cx="1828800" cy="292608"/>
           </a:xfrm>
           <a:prstGeom prst="rect">
@@ -13572,7 +13630,7 @@
         </p:nvSpPr>
         <p:spPr>
           <a:xfrm>
-            <a:off x="5803392" y="2258568"/>
+            <a:off x="4370832" y="2258568"/>
             <a:ext cx="1828800" cy="292608"/>
           </a:xfrm>
           <a:prstGeom prst="rect">
@@ -13611,7 +13669,7 @@
         </p:nvSpPr>
         <p:spPr>
           <a:xfrm>
-            <a:off x="5803392" y="2569464"/>
+            <a:off x="4370832" y="2569464"/>
             <a:ext cx="1828800" cy="201168"/>
           </a:xfrm>
           <a:prstGeom prst="rect">
@@ -13636,7 +13694,7 @@
                 <a:ea typeface="Calibri" pitchFamily="34" charset="-122"/>
                 <a:cs typeface="Calibri" pitchFamily="34" charset="-120"/>
               </a:rPr>
-              <a:t>happiness or pleasure</a:t>
+              <a:t>happiness, pleasure</a:t>
             </a:r>
             <a:endParaRPr lang="en-US" sz="850" dirty="0"/>
           </a:p>
@@ -13645,6 +13703,118 @@
       <p:sp>
         <p:nvSpPr>
           <p:cNvPr id="22" name="Shape 20"/>
+          <p:cNvSpPr/>
+          <p:nvPr/>
+        </p:nvSpPr>
+        <p:spPr>
+          <a:xfrm>
+            <a:off x="6519672" y="2258568"/>
+            <a:ext cx="1828800" cy="292608"/>
+          </a:xfrm>
+          <a:prstGeom prst="rect">
+            <a:avLst>
+              <a:gd name="adj" fmla="val 25000"/>
+            </a:avLst>
+          </a:prstGeom>
+          <a:solidFill>
+            <a:srgbClr val="FCE7F3"/>
+          </a:solidFill>
+          <a:ln w="19050">
+            <a:solidFill>
+              <a:srgbClr val="DB2777"/>
+            </a:solidFill>
+            <a:prstDash val="solid"/>
+          </a:ln>
+          <a:effectLst>
+            <a:outerShdw sx="100000" sy="100000" kx="0" ky="0" algn="bl" rotWithShape="0" blurRad="101600" dist="38100" dir="8100000">
+              <a:srgbClr val="000000">
+                <a:alpha val="12000"/>
+              </a:srgbClr>
+            </a:outerShdw>
+          </a:effectLst>
+        </p:spPr>
+      </p:sp>
+      <p:sp>
+        <p:nvSpPr>
+          <p:cNvPr id="23" name="Text 21"/>
+          <p:cNvSpPr/>
+          <p:nvPr/>
+        </p:nvSpPr>
+        <p:spPr>
+          <a:xfrm>
+            <a:off x="6519672" y="2258568"/>
+            <a:ext cx="1828800" cy="292608"/>
+          </a:xfrm>
+          <a:prstGeom prst="rect">
+            <a:avLst/>
+          </a:prstGeom>
+          <a:noFill/>
+          <a:ln/>
+        </p:spPr>
+        <p:txBody>
+          <a:bodyPr wrap="square" lIns="0" tIns="0" rIns="0" bIns="0" rtlCol="0" anchor="ctr"/>
+          <a:lstStyle/>
+          <a:p>
+            <a:pPr algn="ctr" indent="0" marL="0">
+              <a:buNone/>
+            </a:pPr>
+            <a:r>
+              <a:rPr lang="en-US" sz="1300" b="1" dirty="0">
+                <a:solidFill>
+                  <a:srgbClr val="9D174D"/>
+                </a:solidFill>
+                <a:latin typeface="Trebuchet MS" pitchFamily="34" charset="0"/>
+                <a:ea typeface="Trebuchet MS" pitchFamily="34" charset="-122"/>
+                <a:cs typeface="Trebuchet MS" pitchFamily="34" charset="-120"/>
+              </a:rPr>
+              <a:t>ed</a:t>
+            </a:r>
+            <a:endParaRPr lang="en-US" sz="1300" dirty="0"/>
+          </a:p>
+        </p:txBody>
+      </p:sp>
+      <p:sp>
+        <p:nvSpPr>
+          <p:cNvPr id="24" name="Text 22"/>
+          <p:cNvSpPr/>
+          <p:nvPr/>
+        </p:nvSpPr>
+        <p:spPr>
+          <a:xfrm>
+            <a:off x="6519672" y="2569464"/>
+            <a:ext cx="1828800" cy="201168"/>
+          </a:xfrm>
+          <a:prstGeom prst="rect">
+            <a:avLst/>
+          </a:prstGeom>
+          <a:noFill/>
+          <a:ln/>
+        </p:spPr>
+        <p:txBody>
+          <a:bodyPr wrap="square" lIns="0" tIns="0" rIns="0" bIns="0" rtlCol="0" anchor="t"/>
+          <a:lstStyle/>
+          <a:p>
+            <a:pPr algn="ctr" indent="0" marL="0">
+              <a:buNone/>
+            </a:pPr>
+            <a:r>
+              <a:rPr lang="en-US" sz="850" dirty="0">
+                <a:solidFill>
+                  <a:srgbClr val="475569"/>
+                </a:solidFill>
+                <a:latin typeface="Calibri" pitchFamily="34" charset="0"/>
+                <a:ea typeface="Calibri" pitchFamily="34" charset="-122"/>
+                <a:cs typeface="Calibri" pitchFamily="34" charset="-120"/>
+              </a:rPr>
+              <a:t>past tense</a:t>
+            </a:r>
+            <a:endParaRPr lang="en-US" sz="850" dirty="0"/>
+          </a:p>
+        </p:txBody>
+      </p:sp>
+      <p:sp>
+        <p:nvSpPr>
+          <p:cNvPr id="25" name="Shape 23"/>
           <p:cNvSpPr/>
           <p:nvPr/>
         </p:nvSpPr>
@@ -13671,7 +13841,7 @@
       </p:sp>
       <p:sp>
         <p:nvSpPr>
-          <p:cNvPr id="23" name="Text 21"/>
+          <p:cNvPr id="26" name="Text 24"/>
           <p:cNvSpPr/>
           <p:nvPr/>
         </p:nvSpPr>
@@ -13710,7 +13880,7 @@
       </p:sp>
       <p:sp>
         <p:nvSpPr>
-          <p:cNvPr id="24" name="Shape 22"/>
+          <p:cNvPr id="27" name="Shape 25"/>
           <p:cNvSpPr/>
           <p:nvPr/>
         </p:nvSpPr>
@@ -13737,7 +13907,7 @@
       </p:sp>
       <p:sp>
         <p:nvSpPr>
-          <p:cNvPr id="25" name="Shape 23"/>
+          <p:cNvPr id="28" name="Shape 26"/>
           <p:cNvSpPr/>
           <p:nvPr/>
         </p:nvSpPr>
@@ -13764,7 +13934,7 @@
       </p:sp>
       <p:sp>
         <p:nvSpPr>
-          <p:cNvPr id="26" name="Text 24"/>
+          <p:cNvPr id="29" name="Text 27"/>
           <p:cNvSpPr/>
           <p:nvPr/>
         </p:nvSpPr>
@@ -13803,7 +13973,7 @@
       </p:sp>
       <p:sp>
         <p:nvSpPr>
-          <p:cNvPr id="27" name="Text 25"/>
+          <p:cNvPr id="30" name="Text 28"/>
           <p:cNvSpPr/>
           <p:nvPr/>
         </p:nvSpPr>
@@ -13842,7 +14012,7 @@
       </p:sp>
       <p:sp>
         <p:nvSpPr>
-          <p:cNvPr id="28" name="Shape 26"/>
+          <p:cNvPr id="31" name="Shape 29"/>
           <p:cNvSpPr/>
           <p:nvPr/>
         </p:nvSpPr>
@@ -13869,7 +14039,7 @@
       </p:sp>
       <p:sp>
         <p:nvSpPr>
-          <p:cNvPr id="29" name="Text 27"/>
+          <p:cNvPr id="32" name="Text 30"/>
           <p:cNvSpPr/>
           <p:nvPr/>
         </p:nvSpPr>
@@ -13900,7 +14070,7 @@
                 <a:ea typeface="Trebuchet MS" pitchFamily="34" charset="-122"/>
                 <a:cs typeface="Trebuchet MS" pitchFamily="34" charset="-120"/>
               </a:rPr>
-              <a:t>joy</a:t>
+              <a:t>joyed</a:t>
             </a:r>
             <a:endParaRPr lang="en-US" sz="1400" dirty="0"/>
           </a:p>
@@ -13908,7 +14078,7 @@
       </p:sp>
       <p:sp>
         <p:nvSpPr>
-          <p:cNvPr id="30" name="Shape 28"/>
+          <p:cNvPr id="33" name="Shape 31"/>
           <p:cNvSpPr/>
           <p:nvPr/>
         </p:nvSpPr>
@@ -13935,7 +14105,7 @@
       </p:sp>
       <p:sp>
         <p:nvSpPr>
-          <p:cNvPr id="31" name="Text 29"/>
+          <p:cNvPr id="34" name="Text 32"/>
           <p:cNvSpPr/>
           <p:nvPr/>
         </p:nvSpPr>
@@ -13974,7 +14144,7 @@
       </p:sp>
       <p:sp>
         <p:nvSpPr>
-          <p:cNvPr id="32" name="Shape 30"/>
+          <p:cNvPr id="35" name="Shape 33"/>
           <p:cNvSpPr/>
           <p:nvPr/>
         </p:nvSpPr>
@@ -14001,7 +14171,7 @@
       </p:sp>
       <p:sp>
         <p:nvSpPr>
-          <p:cNvPr id="33" name="Text 31"/>
+          <p:cNvPr id="36" name="Text 34"/>
           <p:cNvSpPr/>
           <p:nvPr/>
         </p:nvSpPr>
@@ -14233,7 +14403,7 @@
                 <a:ea typeface="Calibri" pitchFamily="34" charset="-122"/>
                 <a:cs typeface="Calibri" pitchFamily="34" charset="-120"/>
               </a:rPr>
-              <a:t>Prefix 'en-' — to make or put into</a:t>
+              <a:t>Prefix 'en-' — to make, put into</a:t>
             </a:r>
             <a:endParaRPr lang="en-US" sz="1600" dirty="0"/>
           </a:p>
@@ -14589,7 +14759,7 @@
                 <a:ea typeface="Calibri" pitchFamily="34" charset="-122"/>
                 <a:cs typeface="Calibri" pitchFamily="34" charset="-120"/>
               </a:rPr>
-              <a:t>Word Labs  •  wordlabs.app  •  Prefix: 'en-' = to make or put into</a:t>
+              <a:t>Word Labs  •  wordlabs.app  •  Prefix: 'en-' = to make, put into</a:t>
             </a:r>
             <a:endParaRPr lang="en-US" sz="800" dirty="0"/>
           </a:p>
@@ -14728,7 +14898,7 @@
                 <a:ea typeface="Trebuchet MS" pitchFamily="34" charset="-122"/>
                 <a:cs typeface="Trebuchet MS" pitchFamily="34" charset="-120"/>
               </a:rPr>
-              <a:t>enjoy</a:t>
+              <a:t>enjoyed</a:t>
             </a:r>
             <a:endParaRPr lang="en-US" sz="2800" dirty="0"/>
           </a:p>
@@ -14808,7 +14978,7 @@
         </p:nvSpPr>
         <p:spPr>
           <a:xfrm>
-            <a:off x="2938272" y="2258568"/>
+            <a:off x="2221992" y="2258568"/>
             <a:ext cx="1828800" cy="292608"/>
           </a:xfrm>
           <a:prstGeom prst="rect">
@@ -14842,7 +15012,7 @@
         </p:nvSpPr>
         <p:spPr>
           <a:xfrm>
-            <a:off x="2938272" y="2258568"/>
+            <a:off x="2221992" y="2258568"/>
             <a:ext cx="1828800" cy="292608"/>
           </a:xfrm>
           <a:prstGeom prst="rect">
@@ -14881,7 +15051,7 @@
         </p:nvSpPr>
         <p:spPr>
           <a:xfrm>
-            <a:off x="2938272" y="2569464"/>
+            <a:off x="2221992" y="2569464"/>
             <a:ext cx="1828800" cy="201168"/>
           </a:xfrm>
           <a:prstGeom prst="rect">
@@ -14906,7 +15076,7 @@
                 <a:ea typeface="Calibri" pitchFamily="34" charset="-122"/>
                 <a:cs typeface="Calibri" pitchFamily="34" charset="-120"/>
               </a:rPr>
-              <a:t>to make or put into</a:t>
+              <a:t>to make, put into</a:t>
             </a:r>
             <a:endParaRPr lang="en-US" sz="850" dirty="0"/>
           </a:p>
@@ -14920,7 +15090,7 @@
         </p:nvSpPr>
         <p:spPr>
           <a:xfrm>
-            <a:off x="5803392" y="2258568"/>
+            <a:off x="4370832" y="2258568"/>
             <a:ext cx="1828800" cy="292608"/>
           </a:xfrm>
           <a:prstGeom prst="rect">
@@ -14954,7 +15124,7 @@
         </p:nvSpPr>
         <p:spPr>
           <a:xfrm>
-            <a:off x="5803392" y="2258568"/>
+            <a:off x="4370832" y="2258568"/>
             <a:ext cx="1828800" cy="292608"/>
           </a:xfrm>
           <a:prstGeom prst="rect">
@@ -14993,7 +15163,7 @@
         </p:nvSpPr>
         <p:spPr>
           <a:xfrm>
-            <a:off x="5803392" y="2569464"/>
+            <a:off x="4370832" y="2569464"/>
             <a:ext cx="1828800" cy="201168"/>
           </a:xfrm>
           <a:prstGeom prst="rect">
@@ -15018,7 +15188,7 @@
                 <a:ea typeface="Calibri" pitchFamily="34" charset="-122"/>
                 <a:cs typeface="Calibri" pitchFamily="34" charset="-120"/>
               </a:rPr>
-              <a:t>happiness or pleasure</a:t>
+              <a:t>happiness, pleasure</a:t>
             </a:r>
             <a:endParaRPr lang="en-US" sz="850" dirty="0"/>
           </a:p>
@@ -15027,6 +15197,118 @@
       <p:sp>
         <p:nvSpPr>
           <p:cNvPr id="22" name="Shape 20"/>
+          <p:cNvSpPr/>
+          <p:nvPr/>
+        </p:nvSpPr>
+        <p:spPr>
+          <a:xfrm>
+            <a:off x="6519672" y="2258568"/>
+            <a:ext cx="1828800" cy="292608"/>
+          </a:xfrm>
+          <a:prstGeom prst="rect">
+            <a:avLst>
+              <a:gd name="adj" fmla="val 25000"/>
+            </a:avLst>
+          </a:prstGeom>
+          <a:solidFill>
+            <a:srgbClr val="FCE7F3"/>
+          </a:solidFill>
+          <a:ln w="19050">
+            <a:solidFill>
+              <a:srgbClr val="DB2777"/>
+            </a:solidFill>
+            <a:prstDash val="solid"/>
+          </a:ln>
+          <a:effectLst>
+            <a:outerShdw sx="100000" sy="100000" kx="0" ky="0" algn="bl" rotWithShape="0" blurRad="101600" dist="38100" dir="8100000">
+              <a:srgbClr val="000000">
+                <a:alpha val="12000"/>
+              </a:srgbClr>
+            </a:outerShdw>
+          </a:effectLst>
+        </p:spPr>
+      </p:sp>
+      <p:sp>
+        <p:nvSpPr>
+          <p:cNvPr id="23" name="Text 21"/>
+          <p:cNvSpPr/>
+          <p:nvPr/>
+        </p:nvSpPr>
+        <p:spPr>
+          <a:xfrm>
+            <a:off x="6519672" y="2258568"/>
+            <a:ext cx="1828800" cy="292608"/>
+          </a:xfrm>
+          <a:prstGeom prst="rect">
+            <a:avLst/>
+          </a:prstGeom>
+          <a:noFill/>
+          <a:ln/>
+        </p:spPr>
+        <p:txBody>
+          <a:bodyPr wrap="square" lIns="0" tIns="0" rIns="0" bIns="0" rtlCol="0" anchor="ctr"/>
+          <a:lstStyle/>
+          <a:p>
+            <a:pPr algn="ctr" indent="0" marL="0">
+              <a:buNone/>
+            </a:pPr>
+            <a:r>
+              <a:rPr lang="en-US" sz="1300" b="1" dirty="0">
+                <a:solidFill>
+                  <a:srgbClr val="9D174D"/>
+                </a:solidFill>
+                <a:latin typeface="Trebuchet MS" pitchFamily="34" charset="0"/>
+                <a:ea typeface="Trebuchet MS" pitchFamily="34" charset="-122"/>
+                <a:cs typeface="Trebuchet MS" pitchFamily="34" charset="-120"/>
+              </a:rPr>
+              <a:t>ed</a:t>
+            </a:r>
+            <a:endParaRPr lang="en-US" sz="1300" dirty="0"/>
+          </a:p>
+        </p:txBody>
+      </p:sp>
+      <p:sp>
+        <p:nvSpPr>
+          <p:cNvPr id="24" name="Text 22"/>
+          <p:cNvSpPr/>
+          <p:nvPr/>
+        </p:nvSpPr>
+        <p:spPr>
+          <a:xfrm>
+            <a:off x="6519672" y="2569464"/>
+            <a:ext cx="1828800" cy="201168"/>
+          </a:xfrm>
+          <a:prstGeom prst="rect">
+            <a:avLst/>
+          </a:prstGeom>
+          <a:noFill/>
+          <a:ln/>
+        </p:spPr>
+        <p:txBody>
+          <a:bodyPr wrap="square" lIns="0" tIns="0" rIns="0" bIns="0" rtlCol="0" anchor="t"/>
+          <a:lstStyle/>
+          <a:p>
+            <a:pPr algn="ctr" indent="0" marL="0">
+              <a:buNone/>
+            </a:pPr>
+            <a:r>
+              <a:rPr lang="en-US" sz="850" dirty="0">
+                <a:solidFill>
+                  <a:srgbClr val="475569"/>
+                </a:solidFill>
+                <a:latin typeface="Calibri" pitchFamily="34" charset="0"/>
+                <a:ea typeface="Calibri" pitchFamily="34" charset="-122"/>
+                <a:cs typeface="Calibri" pitchFamily="34" charset="-120"/>
+              </a:rPr>
+              <a:t>past tense</a:t>
+            </a:r>
+            <a:endParaRPr lang="en-US" sz="850" dirty="0"/>
+          </a:p>
+        </p:txBody>
+      </p:sp>
+      <p:sp>
+        <p:nvSpPr>
+          <p:cNvPr id="25" name="Shape 23"/>
           <p:cNvSpPr/>
           <p:nvPr/>
         </p:nvSpPr>
@@ -15053,7 +15335,7 @@
       </p:sp>
       <p:sp>
         <p:nvSpPr>
-          <p:cNvPr id="23" name="Text 21"/>
+          <p:cNvPr id="26" name="Text 24"/>
           <p:cNvSpPr/>
           <p:nvPr/>
         </p:nvSpPr>
@@ -15092,7 +15374,7 @@
       </p:sp>
       <p:sp>
         <p:nvSpPr>
-          <p:cNvPr id="24" name="Shape 22"/>
+          <p:cNvPr id="27" name="Shape 25"/>
           <p:cNvSpPr/>
           <p:nvPr/>
         </p:nvSpPr>
@@ -15119,7 +15401,7 @@
       </p:sp>
       <p:sp>
         <p:nvSpPr>
-          <p:cNvPr id="25" name="Shape 23"/>
+          <p:cNvPr id="28" name="Shape 26"/>
           <p:cNvSpPr/>
           <p:nvPr/>
         </p:nvSpPr>
@@ -15146,7 +15428,7 @@
       </p:sp>
       <p:sp>
         <p:nvSpPr>
-          <p:cNvPr id="26" name="Text 24"/>
+          <p:cNvPr id="29" name="Text 27"/>
           <p:cNvSpPr/>
           <p:nvPr/>
         </p:nvSpPr>
@@ -15185,7 +15467,7 @@
       </p:sp>
       <p:sp>
         <p:nvSpPr>
-          <p:cNvPr id="27" name="Text 25"/>
+          <p:cNvPr id="30" name="Text 28"/>
           <p:cNvSpPr/>
           <p:nvPr/>
         </p:nvSpPr>
@@ -15224,7 +15506,7 @@
       </p:sp>
       <p:sp>
         <p:nvSpPr>
-          <p:cNvPr id="28" name="Shape 26"/>
+          <p:cNvPr id="31" name="Shape 29"/>
           <p:cNvSpPr/>
           <p:nvPr/>
         </p:nvSpPr>
@@ -15251,7 +15533,7 @@
       </p:sp>
       <p:sp>
         <p:nvSpPr>
-          <p:cNvPr id="29" name="Text 27"/>
+          <p:cNvPr id="32" name="Text 30"/>
           <p:cNvSpPr/>
           <p:nvPr/>
         </p:nvSpPr>
@@ -15282,7 +15564,7 @@
                 <a:ea typeface="Trebuchet MS" pitchFamily="34" charset="-122"/>
                 <a:cs typeface="Trebuchet MS" pitchFamily="34" charset="-120"/>
               </a:rPr>
-              <a:t>joy</a:t>
+              <a:t>joyed</a:t>
             </a:r>
             <a:endParaRPr lang="en-US" sz="1400" dirty="0"/>
           </a:p>
@@ -15290,7 +15572,7 @@
       </p:sp>
       <p:sp>
         <p:nvSpPr>
-          <p:cNvPr id="30" name="Shape 28"/>
+          <p:cNvPr id="33" name="Shape 31"/>
           <p:cNvSpPr/>
           <p:nvPr/>
         </p:nvSpPr>
@@ -15317,7 +15599,7 @@
       </p:sp>
       <p:sp>
         <p:nvSpPr>
-          <p:cNvPr id="31" name="Text 29"/>
+          <p:cNvPr id="34" name="Text 32"/>
           <p:cNvSpPr/>
           <p:nvPr/>
         </p:nvSpPr>
@@ -15356,7 +15638,7 @@
       </p:sp>
       <p:sp>
         <p:nvSpPr>
-          <p:cNvPr id="32" name="Shape 30"/>
+          <p:cNvPr id="35" name="Shape 33"/>
           <p:cNvSpPr/>
           <p:nvPr/>
         </p:nvSpPr>
@@ -15383,13 +15665,13 @@
       </p:sp>
       <p:sp>
         <p:nvSpPr>
-          <p:cNvPr id="33" name="Shape 31"/>
-          <p:cNvSpPr/>
-          <p:nvPr/>
-        </p:nvSpPr>
-        <p:spPr>
-          <a:xfrm>
-            <a:off x="2670048" y="4169664"/>
+          <p:cNvPr id="36" name="Shape 34"/>
+          <p:cNvSpPr/>
+          <p:nvPr/>
+        </p:nvSpPr>
+        <p:spPr>
+          <a:xfrm>
+            <a:off x="2427732" y="4169664"/>
             <a:ext cx="685800" cy="475488"/>
           </a:xfrm>
           <a:prstGeom prst="rect">
@@ -15410,13 +15692,13 @@
       </p:sp>
       <p:sp>
         <p:nvSpPr>
-          <p:cNvPr id="34" name="Text 32"/>
-          <p:cNvSpPr/>
-          <p:nvPr/>
-        </p:nvSpPr>
-        <p:spPr>
-          <a:xfrm>
-            <a:off x="2670048" y="4169664"/>
+          <p:cNvPr id="37" name="Text 35"/>
+          <p:cNvSpPr/>
+          <p:nvPr/>
+        </p:nvSpPr>
+        <p:spPr>
+          <a:xfrm>
+            <a:off x="2427732" y="4169664"/>
             <a:ext cx="685800" cy="475488"/>
           </a:xfrm>
           <a:prstGeom prst="rect">
@@ -15449,13 +15731,13 @@
       </p:sp>
       <p:sp>
         <p:nvSpPr>
-          <p:cNvPr id="35" name="Shape 33"/>
-          <p:cNvSpPr/>
-          <p:nvPr/>
-        </p:nvSpPr>
-        <p:spPr>
-          <a:xfrm>
-            <a:off x="4123944" y="4169664"/>
+          <p:cNvPr id="38" name="Shape 36"/>
+          <p:cNvSpPr/>
+          <p:nvPr/>
+        </p:nvSpPr>
+        <p:spPr>
+          <a:xfrm>
+            <a:off x="3639312" y="4169664"/>
             <a:ext cx="685800" cy="475488"/>
           </a:xfrm>
           <a:prstGeom prst="rect">
@@ -15476,13 +15758,13 @@
       </p:sp>
       <p:sp>
         <p:nvSpPr>
-          <p:cNvPr id="36" name="Text 34"/>
-          <p:cNvSpPr/>
-          <p:nvPr/>
-        </p:nvSpPr>
-        <p:spPr>
-          <a:xfrm>
-            <a:off x="4123944" y="4169664"/>
+          <p:cNvPr id="39" name="Text 37"/>
+          <p:cNvSpPr/>
+          <p:nvPr/>
+        </p:nvSpPr>
+        <p:spPr>
+          <a:xfrm>
+            <a:off x="3639312" y="4169664"/>
             <a:ext cx="685800" cy="475488"/>
           </a:xfrm>
           <a:prstGeom prst="rect">
@@ -15515,13 +15797,13 @@
       </p:sp>
       <p:sp>
         <p:nvSpPr>
-          <p:cNvPr id="37" name="Shape 35"/>
-          <p:cNvSpPr/>
-          <p:nvPr/>
-        </p:nvSpPr>
-        <p:spPr>
-          <a:xfrm>
-            <a:off x="5577840" y="4169664"/>
+          <p:cNvPr id="40" name="Shape 38"/>
+          <p:cNvSpPr/>
+          <p:nvPr/>
+        </p:nvSpPr>
+        <p:spPr>
+          <a:xfrm>
+            <a:off x="4850892" y="4169664"/>
             <a:ext cx="685800" cy="475488"/>
           </a:xfrm>
           <a:prstGeom prst="rect">
@@ -15542,13 +15824,13 @@
       </p:sp>
       <p:sp>
         <p:nvSpPr>
-          <p:cNvPr id="38" name="Text 36"/>
-          <p:cNvSpPr/>
-          <p:nvPr/>
-        </p:nvSpPr>
-        <p:spPr>
-          <a:xfrm>
-            <a:off x="5577840" y="4169664"/>
+          <p:cNvPr id="41" name="Text 39"/>
+          <p:cNvSpPr/>
+          <p:nvPr/>
+        </p:nvSpPr>
+        <p:spPr>
+          <a:xfrm>
+            <a:off x="4850892" y="4169664"/>
             <a:ext cx="685800" cy="475488"/>
           </a:xfrm>
           <a:prstGeom prst="rect">
@@ -15581,13 +15863,13 @@
       </p:sp>
       <p:sp>
         <p:nvSpPr>
-          <p:cNvPr id="39" name="Shape 37"/>
-          <p:cNvSpPr/>
-          <p:nvPr/>
-        </p:nvSpPr>
-        <p:spPr>
-          <a:xfrm>
-            <a:off x="7031736" y="4169664"/>
+          <p:cNvPr id="42" name="Shape 40"/>
+          <p:cNvSpPr/>
+          <p:nvPr/>
+        </p:nvSpPr>
+        <p:spPr>
+          <a:xfrm>
+            <a:off x="6062472" y="4169664"/>
             <a:ext cx="685800" cy="475488"/>
           </a:xfrm>
           <a:prstGeom prst="rect">
@@ -15608,13 +15890,13 @@
       </p:sp>
       <p:sp>
         <p:nvSpPr>
-          <p:cNvPr id="40" name="Text 38"/>
-          <p:cNvSpPr/>
-          <p:nvPr/>
-        </p:nvSpPr>
-        <p:spPr>
-          <a:xfrm>
-            <a:off x="7031736" y="4169664"/>
+          <p:cNvPr id="43" name="Text 41"/>
+          <p:cNvSpPr/>
+          <p:nvPr/>
+        </p:nvSpPr>
+        <p:spPr>
+          <a:xfrm>
+            <a:off x="6062472" y="4169664"/>
             <a:ext cx="685800" cy="475488"/>
           </a:xfrm>
           <a:prstGeom prst="rect">
@@ -15640,6 +15922,72 @@
                 <a:cs typeface="Trebuchet MS" pitchFamily="34" charset="-120"/>
               </a:rPr>
               <a:t>oy</a:t>
+            </a:r>
+            <a:endParaRPr lang="en-US" sz="900" dirty="0"/>
+          </a:p>
+        </p:txBody>
+      </p:sp>
+      <p:sp>
+        <p:nvSpPr>
+          <p:cNvPr id="44" name="Shape 42"/>
+          <p:cNvSpPr/>
+          <p:nvPr/>
+        </p:nvSpPr>
+        <p:spPr>
+          <a:xfrm>
+            <a:off x="7274052" y="4169664"/>
+            <a:ext cx="685800" cy="475488"/>
+          </a:xfrm>
+          <a:prstGeom prst="rect">
+            <a:avLst>
+              <a:gd name="adj" fmla="val 7692"/>
+            </a:avLst>
+          </a:prstGeom>
+          <a:solidFill>
+            <a:srgbClr val="FFFFFF"/>
+          </a:solidFill>
+          <a:ln w="12700">
+            <a:solidFill>
+              <a:srgbClr val="DB2777"/>
+            </a:solidFill>
+            <a:prstDash val="solid"/>
+          </a:ln>
+        </p:spPr>
+      </p:sp>
+      <p:sp>
+        <p:nvSpPr>
+          <p:cNvPr id="45" name="Text 43"/>
+          <p:cNvSpPr/>
+          <p:nvPr/>
+        </p:nvSpPr>
+        <p:spPr>
+          <a:xfrm>
+            <a:off x="7274052" y="4169664"/>
+            <a:ext cx="685800" cy="475488"/>
+          </a:xfrm>
+          <a:prstGeom prst="rect">
+            <a:avLst/>
+          </a:prstGeom>
+          <a:noFill/>
+          <a:ln/>
+        </p:spPr>
+        <p:txBody>
+          <a:bodyPr wrap="square" lIns="0" tIns="0" rIns="0" bIns="0" rtlCol="0" anchor="ctr"/>
+          <a:lstStyle/>
+          <a:p>
+            <a:pPr algn="ctr" indent="0" marL="0">
+              <a:buNone/>
+            </a:pPr>
+            <a:r>
+              <a:rPr lang="en-US" sz="900" b="1" dirty="0">
+                <a:solidFill>
+                  <a:srgbClr val="9D174D"/>
+                </a:solidFill>
+                <a:latin typeface="Trebuchet MS" pitchFamily="34" charset="0"/>
+                <a:ea typeface="Trebuchet MS" pitchFamily="34" charset="-122"/>
+                <a:cs typeface="Trebuchet MS" pitchFamily="34" charset="-120"/>
+              </a:rPr>
+              <a:t>ed</a:t>
             </a:r>
             <a:endParaRPr lang="en-US" sz="900" dirty="0"/>
           </a:p>
@@ -16213,7 +16561,7 @@
                 <a:ea typeface="Calibri" pitchFamily="34" charset="-122"/>
                 <a:cs typeface="Calibri" pitchFamily="34" charset="-120"/>
               </a:rPr>
-              <a:t>Word Labs  •  wordlabs.app  •  Prefix: 'en-' = to make or put into</a:t>
+              <a:t>Word Labs  •  wordlabs.app  •  Prefix: 'en-' = to make, put into</a:t>
             </a:r>
             <a:endParaRPr lang="en-US" sz="800" dirty="0"/>
           </a:p>
@@ -16853,7 +17201,7 @@
                 <a:ea typeface="Calibri" pitchFamily="34" charset="-122"/>
                 <a:cs typeface="Calibri" pitchFamily="34" charset="-120"/>
               </a:rPr>
-              <a:t>Word Labs  •  wordlabs.app  •  Prefix: 'en-' = to make or put into</a:t>
+              <a:t>Word Labs  •  wordlabs.app  •  Prefix: 'en-' = to make, put into</a:t>
             </a:r>
             <a:endParaRPr lang="en-US" sz="800" dirty="0"/>
           </a:p>
@@ -16965,7 +17313,7 @@
                 <a:ea typeface="Calibri" pitchFamily="34" charset="-122"/>
                 <a:cs typeface="Calibri" pitchFamily="34" charset="-120"/>
               </a:rPr>
-              <a:t>When we </a:t>
+              <a:t>We must </a:t>
             </a:r>
             <a:pPr algn="l" indent="0" marL="0">
               <a:buNone/>
@@ -16982,7 +17330,7 @@
                 <a:ea typeface="Calibri" pitchFamily="34" charset="-122"/>
                 <a:cs typeface="Calibri" pitchFamily="34" charset="-120"/>
               </a:rPr>
-              <a:t>encourage</a:t>
+              <a:t>enforce</a:t>
             </a:r>
             <a:pPr algn="l" indent="0" marL="0">
               <a:buNone/>
@@ -16996,7 +17344,7 @@
                 <a:ea typeface="Calibri" pitchFamily="34" charset="-122"/>
                 <a:cs typeface="Calibri" pitchFamily="34" charset="-120"/>
               </a:rPr>
-              <a:t> each other, we can </a:t>
+              <a:t> the rules to </a:t>
             </a:r>
             <a:pPr algn="l" indent="0" marL="0">
               <a:buNone/>
@@ -17013,7 +17361,7 @@
                 <a:ea typeface="Calibri" pitchFamily="34" charset="-122"/>
                 <a:cs typeface="Calibri" pitchFamily="34" charset="-120"/>
               </a:rPr>
-              <a:t>enlarge</a:t>
+              <a:t>ensure</a:t>
             </a:r>
             <a:pPr algn="l" indent="0" marL="0">
               <a:buNone/>
@@ -17027,7 +17375,7 @@
                 <a:ea typeface="Calibri" pitchFamily="34" charset="-122"/>
                 <a:cs typeface="Calibri" pitchFamily="34" charset="-120"/>
               </a:rPr>
-              <a:t> our skills and </a:t>
+              <a:t> the safety of all, and to </a:t>
             </a:r>
             <a:pPr algn="l" indent="0" marL="0">
               <a:buNone/>
@@ -17058,7 +17406,7 @@
                 <a:ea typeface="Calibri" pitchFamily="34" charset="-122"/>
                 <a:cs typeface="Calibri" pitchFamily="34" charset="-120"/>
               </a:rPr>
-              <a:t> our learning together.</a:t>
+              <a:t> everyone's experience.</a:t>
             </a:r>
             <a:endParaRPr lang="en-US" sz="1800" dirty="0"/>
           </a:p>
@@ -17213,7 +17561,7 @@
                 <a:ea typeface="Trebuchet MS" pitchFamily="34" charset="-122"/>
                 <a:cs typeface="Trebuchet MS" pitchFamily="34" charset="-120"/>
               </a:rPr>
-              <a:t>encourage</a:t>
+              <a:t>enforce</a:t>
             </a:r>
             <a:endParaRPr lang="en-US" sz="1400" dirty="0"/>
           </a:p>
@@ -17341,7 +17689,7 @@
                 <a:ea typeface="Trebuchet MS" pitchFamily="34" charset="-122"/>
                 <a:cs typeface="Trebuchet MS" pitchFamily="34" charset="-120"/>
               </a:rPr>
-              <a:t>enlarge</a:t>
+              <a:t>ensure</a:t>
             </a:r>
             <a:endParaRPr lang="en-US" sz="1400" dirty="0"/>
           </a:p>
@@ -17800,7 +18148,7 @@
                 <a:ea typeface="Calibri" pitchFamily="34" charset="-122"/>
                 <a:cs typeface="Calibri" pitchFamily="34" charset="-120"/>
               </a:rPr>
-              <a:t>Word Labs  •  wordlabs.app  •  Prefix: 'en-' = to make or put into</a:t>
+              <a:t>Word Labs  •  wordlabs.app  •  Prefix: 'en-' = to make, put into</a:t>
             </a:r>
             <a:endParaRPr lang="en-US" sz="800" dirty="0"/>
           </a:p>
@@ -17939,7 +18287,7 @@
                 <a:ea typeface="Trebuchet MS" pitchFamily="34" charset="-122"/>
                 <a:cs typeface="Trebuchet MS" pitchFamily="34" charset="-120"/>
               </a:rPr>
-              <a:t>encourage</a:t>
+              <a:t>enforce</a:t>
             </a:r>
             <a:endParaRPr lang="en-US" sz="2800" dirty="0"/>
           </a:p>
@@ -18627,7 +18975,7 @@
                 <a:ea typeface="Calibri" pitchFamily="34" charset="-122"/>
                 <a:cs typeface="Calibri" pitchFamily="34" charset="-120"/>
               </a:rPr>
-              <a:t>Word Labs  •  wordlabs.app  •  Prefix: 'en-' = to make or put into</a:t>
+              <a:t>Word Labs  •  wordlabs.app  •  Prefix: 'en-' = to make, put into</a:t>
             </a:r>
             <a:endParaRPr lang="en-US" sz="800" dirty="0"/>
           </a:p>
@@ -18766,7 +19114,7 @@
                 <a:ea typeface="Trebuchet MS" pitchFamily="34" charset="-122"/>
                 <a:cs typeface="Trebuchet MS" pitchFamily="34" charset="-120"/>
               </a:rPr>
-              <a:t>encourage</a:t>
+              <a:t>enforce</a:t>
             </a:r>
             <a:endParaRPr lang="en-US" sz="2800" dirty="0"/>
           </a:p>
@@ -18944,7 +19292,7 @@
                 <a:ea typeface="Calibri" pitchFamily="34" charset="-122"/>
                 <a:cs typeface="Calibri" pitchFamily="34" charset="-120"/>
               </a:rPr>
-              <a:t>to make or put into</a:t>
+              <a:t>to make, put into</a:t>
             </a:r>
             <a:endParaRPr lang="en-US" sz="850" dirty="0"/>
           </a:p>
@@ -19017,7 +19365,7 @@
                 <a:ea typeface="Trebuchet MS" pitchFamily="34" charset="-122"/>
                 <a:cs typeface="Trebuchet MS" pitchFamily="34" charset="-120"/>
               </a:rPr>
-              <a:t>courage</a:t>
+              <a:t>force</a:t>
             </a:r>
             <a:endParaRPr lang="en-US" sz="1300" dirty="0"/>
           </a:p>
@@ -19056,7 +19404,7 @@
                 <a:ea typeface="Calibri" pitchFamily="34" charset="-122"/>
                 <a:cs typeface="Calibri" pitchFamily="34" charset="-120"/>
               </a:rPr>
-              <a:t>bravery or confidence</a:t>
+              <a:t>strength, power</a:t>
             </a:r>
             <a:endParaRPr lang="en-US" sz="850" dirty="0"/>
           </a:p>
@@ -19612,7 +19960,7 @@
                 <a:ea typeface="Calibri" pitchFamily="34" charset="-122"/>
                 <a:cs typeface="Calibri" pitchFamily="34" charset="-120"/>
               </a:rPr>
-              <a:t>Word Labs  •  wordlabs.app  •  Prefix: 'en-' = to make or put into</a:t>
+              <a:t>Word Labs  •  wordlabs.app  •  Prefix: 'en-' = to make, put into</a:t>
             </a:r>
             <a:endParaRPr lang="en-US" sz="800" dirty="0"/>
           </a:p>
@@ -19751,7 +20099,7 @@
                 <a:ea typeface="Trebuchet MS" pitchFamily="34" charset="-122"/>
                 <a:cs typeface="Trebuchet MS" pitchFamily="34" charset="-120"/>
               </a:rPr>
-              <a:t>encourage</a:t>
+              <a:t>enforce</a:t>
             </a:r>
             <a:endParaRPr lang="en-US" sz="2800" dirty="0"/>
           </a:p>
@@ -19929,7 +20277,7 @@
                 <a:ea typeface="Calibri" pitchFamily="34" charset="-122"/>
                 <a:cs typeface="Calibri" pitchFamily="34" charset="-120"/>
               </a:rPr>
-              <a:t>to make or put into</a:t>
+              <a:t>to make, put into</a:t>
             </a:r>
             <a:endParaRPr lang="en-US" sz="850" dirty="0"/>
           </a:p>
@@ -20002,7 +20350,7 @@
                 <a:ea typeface="Trebuchet MS" pitchFamily="34" charset="-122"/>
                 <a:cs typeface="Trebuchet MS" pitchFamily="34" charset="-120"/>
               </a:rPr>
-              <a:t>courage</a:t>
+              <a:t>force</a:t>
             </a:r>
             <a:endParaRPr lang="en-US" sz="1300" dirty="0"/>
           </a:p>
@@ -20041,7 +20389,7 @@
                 <a:ea typeface="Calibri" pitchFamily="34" charset="-122"/>
                 <a:cs typeface="Calibri" pitchFamily="34" charset="-120"/>
               </a:rPr>
-              <a:t>bravery or confidence</a:t>
+              <a:t>strength, power</a:t>
             </a:r>
             <a:endParaRPr lang="en-US" sz="850" dirty="0"/>
           </a:p>
@@ -20148,7 +20496,7 @@
         </p:nvSpPr>
         <p:spPr>
           <a:xfrm>
-            <a:off x="2313432" y="3364992"/>
+            <a:off x="2999232" y="3364992"/>
             <a:ext cx="1645920" cy="475488"/>
           </a:xfrm>
           <a:prstGeom prst="rect">
@@ -20175,7 +20523,7 @@
         </p:nvSpPr>
         <p:spPr>
           <a:xfrm>
-            <a:off x="2313432" y="3364992"/>
+            <a:off x="2999232" y="3364992"/>
             <a:ext cx="1645920" cy="475488"/>
           </a:xfrm>
           <a:prstGeom prst="rect">
@@ -20214,8 +20562,8 @@
         </p:nvSpPr>
         <p:spPr>
           <a:xfrm>
-            <a:off x="3959352" y="3364992"/>
-            <a:ext cx="411480" cy="475488"/>
+            <a:off x="4645152" y="3364992"/>
+            <a:ext cx="1097280" cy="475488"/>
           </a:xfrm>
           <a:prstGeom prst="rect">
             <a:avLst/>
@@ -20253,7 +20601,7 @@
         </p:nvSpPr>
         <p:spPr>
           <a:xfrm>
-            <a:off x="4370832" y="3364992"/>
+            <a:off x="5742432" y="3364992"/>
             <a:ext cx="1645920" cy="475488"/>
           </a:xfrm>
           <a:prstGeom prst="rect">
@@ -20280,7 +20628,7 @@
         </p:nvSpPr>
         <p:spPr>
           <a:xfrm>
-            <a:off x="4370832" y="3364992"/>
+            <a:off x="5742432" y="3364992"/>
             <a:ext cx="1645920" cy="475488"/>
           </a:xfrm>
           <a:prstGeom prst="rect">
@@ -20305,7 +20653,7 @@
                 <a:ea typeface="Trebuchet MS" pitchFamily="34" charset="-122"/>
                 <a:cs typeface="Trebuchet MS" pitchFamily="34" charset="-120"/>
               </a:rPr>
-              <a:t>cour</a:t>
+              <a:t>force</a:t>
             </a:r>
             <a:endParaRPr lang="en-US" sz="1400" dirty="0"/>
           </a:p>
@@ -20313,14 +20661,41 @@
       </p:sp>
       <p:sp>
         <p:nvSpPr>
-          <p:cNvPr id="30" name="Text 28"/>
-          <p:cNvSpPr/>
-          <p:nvPr/>
-        </p:nvSpPr>
-        <p:spPr>
-          <a:xfrm>
-            <a:off x="6016752" y="3364992"/>
-            <a:ext cx="411480" cy="475488"/>
+          <p:cNvPr id="30" name="Shape 28"/>
+          <p:cNvSpPr/>
+          <p:nvPr/>
+        </p:nvSpPr>
+        <p:spPr>
+          <a:xfrm>
+            <a:off x="365760" y="4096512"/>
+            <a:ext cx="1371600" cy="804672"/>
+          </a:xfrm>
+          <a:prstGeom prst="rect">
+            <a:avLst>
+              <a:gd name="adj" fmla="val 6818"/>
+            </a:avLst>
+          </a:prstGeom>
+          <a:solidFill>
+            <a:srgbClr val="E2E8F0"/>
+          </a:solidFill>
+          <a:ln w="12700">
+            <a:solidFill>
+              <a:srgbClr val="E2E8F0"/>
+            </a:solidFill>
+            <a:prstDash val="solid"/>
+          </a:ln>
+        </p:spPr>
+      </p:sp>
+      <p:sp>
+        <p:nvSpPr>
+          <p:cNvPr id="31" name="Text 29"/>
+          <p:cNvSpPr/>
+          <p:nvPr/>
+        </p:nvSpPr>
+        <p:spPr>
+          <a:xfrm>
+            <a:off x="365760" y="4096512"/>
+            <a:ext cx="1371600" cy="804672"/>
           </a:xfrm>
           <a:prstGeom prst="rect">
             <a:avLst/>
@@ -20336,96 +20711,30 @@
               <a:buNone/>
             </a:pPr>
             <a:r>
-              <a:rPr lang="en-US" sz="1600" b="1" dirty="0">
-                <a:solidFill>
-                  <a:srgbClr val="0D9488"/>
+              <a:rPr lang="en-US" sz="1100" b="1" dirty="0">
+                <a:solidFill>
+                  <a:srgbClr val="475569"/>
                 </a:solidFill>
                 <a:latin typeface="Trebuchet MS" pitchFamily="34" charset="0"/>
                 <a:ea typeface="Trebuchet MS" pitchFamily="34" charset="-122"/>
                 <a:cs typeface="Trebuchet MS" pitchFamily="34" charset="-120"/>
               </a:rPr>
-              <a:t>·</a:t>
-            </a:r>
-            <a:endParaRPr lang="en-US" sz="1600" dirty="0"/>
-          </a:p>
-        </p:txBody>
-      </p:sp>
-      <p:sp>
-        <p:nvSpPr>
-          <p:cNvPr id="31" name="Shape 29"/>
-          <p:cNvSpPr/>
-          <p:nvPr/>
-        </p:nvSpPr>
-        <p:spPr>
-          <a:xfrm>
-            <a:off x="6428232" y="3364992"/>
-            <a:ext cx="1645920" cy="475488"/>
-          </a:xfrm>
-          <a:prstGeom prst="rect">
-            <a:avLst>
-              <a:gd name="adj" fmla="val 9615"/>
-            </a:avLst>
-          </a:prstGeom>
-          <a:solidFill>
-            <a:srgbClr val="FFFFFF"/>
-          </a:solidFill>
-          <a:ln w="12700">
-            <a:solidFill>
-              <a:srgbClr val="0D9488"/>
-            </a:solidFill>
-            <a:prstDash val="solid"/>
-          </a:ln>
-        </p:spPr>
-      </p:sp>
-      <p:sp>
-        <p:nvSpPr>
-          <p:cNvPr id="32" name="Text 30"/>
-          <p:cNvSpPr/>
-          <p:nvPr/>
-        </p:nvSpPr>
-        <p:spPr>
-          <a:xfrm>
-            <a:off x="6428232" y="3364992"/>
-            <a:ext cx="1645920" cy="475488"/>
-          </a:xfrm>
-          <a:prstGeom prst="rect">
-            <a:avLst/>
-          </a:prstGeom>
-          <a:noFill/>
-          <a:ln/>
-        </p:spPr>
-        <p:txBody>
-          <a:bodyPr wrap="square" lIns="0" tIns="0" rIns="0" bIns="0" rtlCol="0" anchor="ctr"/>
-          <a:lstStyle/>
-          <a:p>
-            <a:pPr algn="ctr" indent="0" marL="0">
-              <a:buNone/>
-            </a:pPr>
-            <a:r>
-              <a:rPr lang="en-US" sz="1400" b="1" dirty="0">
-                <a:solidFill>
-                  <a:srgbClr val="0D9488"/>
-                </a:solidFill>
-                <a:latin typeface="Trebuchet MS" pitchFamily="34" charset="0"/>
-                <a:ea typeface="Trebuchet MS" pitchFamily="34" charset="-122"/>
-                <a:cs typeface="Trebuchet MS" pitchFamily="34" charset="-120"/>
-              </a:rPr>
-              <a:t>age</a:t>
-            </a:r>
-            <a:endParaRPr lang="en-US" sz="1400" dirty="0"/>
-          </a:p>
-        </p:txBody>
-      </p:sp>
-      <p:sp>
-        <p:nvSpPr>
-          <p:cNvPr id="33" name="Shape 31"/>
-          <p:cNvSpPr/>
-          <p:nvPr/>
-        </p:nvSpPr>
-        <p:spPr>
-          <a:xfrm>
-            <a:off x="365760" y="4096512"/>
-            <a:ext cx="1371600" cy="804672"/>
+              <a:t>Phonemes</a:t>
+            </a:r>
+            <a:endParaRPr lang="en-US" sz="1100" dirty="0"/>
+          </a:p>
+        </p:txBody>
+      </p:sp>
+      <p:sp>
+        <p:nvSpPr>
+          <p:cNvPr id="32" name="Shape 30"/>
+          <p:cNvSpPr/>
+          <p:nvPr/>
+        </p:nvSpPr>
+        <p:spPr>
+          <a:xfrm>
+            <a:off x="1874520" y="4096512"/>
+            <a:ext cx="6903720" cy="804672"/>
           </a:xfrm>
           <a:prstGeom prst="rect">
             <a:avLst>
@@ -20433,85 +20742,19 @@
             </a:avLst>
           </a:prstGeom>
           <a:solidFill>
-            <a:srgbClr val="E2E8F0"/>
+            <a:srgbClr val="F8FAFC"/>
           </a:solidFill>
           <a:ln w="12700">
             <a:solidFill>
               <a:srgbClr val="E2E8F0"/>
             </a:solidFill>
-            <a:prstDash val="solid"/>
-          </a:ln>
-        </p:spPr>
-      </p:sp>
-      <p:sp>
-        <p:nvSpPr>
-          <p:cNvPr id="34" name="Text 32"/>
-          <p:cNvSpPr/>
-          <p:nvPr/>
-        </p:nvSpPr>
-        <p:spPr>
-          <a:xfrm>
-            <a:off x="365760" y="4096512"/>
-            <a:ext cx="1371600" cy="804672"/>
-          </a:xfrm>
-          <a:prstGeom prst="rect">
-            <a:avLst/>
-          </a:prstGeom>
-          <a:noFill/>
-          <a:ln/>
-        </p:spPr>
-        <p:txBody>
-          <a:bodyPr wrap="square" lIns="0" tIns="0" rIns="0" bIns="0" rtlCol="0" anchor="ctr"/>
-          <a:lstStyle/>
-          <a:p>
-            <a:pPr algn="ctr" indent="0" marL="0">
-              <a:buNone/>
-            </a:pPr>
-            <a:r>
-              <a:rPr lang="en-US" sz="1100" b="1" dirty="0">
-                <a:solidFill>
-                  <a:srgbClr val="475569"/>
-                </a:solidFill>
-                <a:latin typeface="Trebuchet MS" pitchFamily="34" charset="0"/>
-                <a:ea typeface="Trebuchet MS" pitchFamily="34" charset="-122"/>
-                <a:cs typeface="Trebuchet MS" pitchFamily="34" charset="-120"/>
-              </a:rPr>
-              <a:t>Phonemes</a:t>
-            </a:r>
-            <a:endParaRPr lang="en-US" sz="1100" dirty="0"/>
-          </a:p>
-        </p:txBody>
-      </p:sp>
-      <p:sp>
-        <p:nvSpPr>
-          <p:cNvPr id="35" name="Shape 33"/>
-          <p:cNvSpPr/>
-          <p:nvPr/>
-        </p:nvSpPr>
-        <p:spPr>
-          <a:xfrm>
-            <a:off x="1874520" y="4096512"/>
-            <a:ext cx="6903720" cy="804672"/>
-          </a:xfrm>
-          <a:prstGeom prst="rect">
-            <a:avLst>
-              <a:gd name="adj" fmla="val 6818"/>
-            </a:avLst>
-          </a:prstGeom>
-          <a:solidFill>
-            <a:srgbClr val="F8FAFC"/>
-          </a:solidFill>
-          <a:ln w="12700">
-            <a:solidFill>
-              <a:srgbClr val="E2E8F0"/>
-            </a:solidFill>
             <a:prstDash val="dash"/>
           </a:ln>
         </p:spPr>
       </p:sp>
       <p:sp>
         <p:nvSpPr>
-          <p:cNvPr id="36" name="Text 34"/>
+          <p:cNvPr id="33" name="Text 31"/>
           <p:cNvSpPr/>
           <p:nvPr/>
         </p:nvSpPr>
@@ -20834,7 +21077,7 @@
                 <a:ea typeface="Calibri" pitchFamily="34" charset="-122"/>
                 <a:cs typeface="Calibri" pitchFamily="34" charset="-120"/>
               </a:rPr>
-              <a:t>Word Labs  •  wordlabs.app  •  Prefix: 'en-' = to make or put into</a:t>
+              <a:t>Word Labs  •  wordlabs.app  •  Prefix: 'en-' = to make, put into</a:t>
             </a:r>
             <a:endParaRPr lang="en-US" sz="800" dirty="0"/>
           </a:p>
@@ -20973,7 +21216,7 @@
                 <a:ea typeface="Trebuchet MS" pitchFamily="34" charset="-122"/>
                 <a:cs typeface="Trebuchet MS" pitchFamily="34" charset="-120"/>
               </a:rPr>
-              <a:t>encourage</a:t>
+              <a:t>enforce</a:t>
             </a:r>
             <a:endParaRPr lang="en-US" sz="2800" dirty="0"/>
           </a:p>
@@ -21151,7 +21394,7 @@
                 <a:ea typeface="Calibri" pitchFamily="34" charset="-122"/>
                 <a:cs typeface="Calibri" pitchFamily="34" charset="-120"/>
               </a:rPr>
-              <a:t>to make or put into</a:t>
+              <a:t>to make, put into</a:t>
             </a:r>
             <a:endParaRPr lang="en-US" sz="850" dirty="0"/>
           </a:p>
@@ -21224,7 +21467,7 @@
                 <a:ea typeface="Trebuchet MS" pitchFamily="34" charset="-122"/>
                 <a:cs typeface="Trebuchet MS" pitchFamily="34" charset="-120"/>
               </a:rPr>
-              <a:t>courage</a:t>
+              <a:t>force</a:t>
             </a:r>
             <a:endParaRPr lang="en-US" sz="1300" dirty="0"/>
           </a:p>
@@ -21263,7 +21506,7 @@
                 <a:ea typeface="Calibri" pitchFamily="34" charset="-122"/>
                 <a:cs typeface="Calibri" pitchFamily="34" charset="-120"/>
               </a:rPr>
-              <a:t>bravery or confidence</a:t>
+              <a:t>strength, power</a:t>
             </a:r>
             <a:endParaRPr lang="en-US" sz="850" dirty="0"/>
           </a:p>
@@ -21370,7 +21613,7 @@
         </p:nvSpPr>
         <p:spPr>
           <a:xfrm>
-            <a:off x="2313432" y="3364992"/>
+            <a:off x="2999232" y="3364992"/>
             <a:ext cx="1645920" cy="475488"/>
           </a:xfrm>
           <a:prstGeom prst="rect">
@@ -21397,7 +21640,7 @@
         </p:nvSpPr>
         <p:spPr>
           <a:xfrm>
-            <a:off x="2313432" y="3364992"/>
+            <a:off x="2999232" y="3364992"/>
             <a:ext cx="1645920" cy="475488"/>
           </a:xfrm>
           <a:prstGeom prst="rect">
@@ -21436,8 +21679,8 @@
         </p:nvSpPr>
         <p:spPr>
           <a:xfrm>
-            <a:off x="3959352" y="3364992"/>
-            <a:ext cx="411480" cy="475488"/>
+            <a:off x="4645152" y="3364992"/>
+            <a:ext cx="1097280" cy="475488"/>
           </a:xfrm>
           <a:prstGeom prst="rect">
             <a:avLst/>
@@ -21475,7 +21718,7 @@
         </p:nvSpPr>
         <p:spPr>
           <a:xfrm>
-            <a:off x="4370832" y="3364992"/>
+            <a:off x="5742432" y="3364992"/>
             <a:ext cx="1645920" cy="475488"/>
           </a:xfrm>
           <a:prstGeom prst="rect">
@@ -21502,7 +21745,7 @@
         </p:nvSpPr>
         <p:spPr>
           <a:xfrm>
-            <a:off x="4370832" y="3364992"/>
+            <a:off x="5742432" y="3364992"/>
             <a:ext cx="1645920" cy="475488"/>
           </a:xfrm>
           <a:prstGeom prst="rect">
@@ -21527,7 +21770,7 @@
                 <a:ea typeface="Trebuchet MS" pitchFamily="34" charset="-122"/>
                 <a:cs typeface="Trebuchet MS" pitchFamily="34" charset="-120"/>
               </a:rPr>
-              <a:t>cour</a:t>
+              <a:t>force</a:t>
             </a:r>
             <a:endParaRPr lang="en-US" sz="1400" dirty="0"/>
           </a:p>
@@ -21535,14 +21778,41 @@
       </p:sp>
       <p:sp>
         <p:nvSpPr>
-          <p:cNvPr id="30" name="Text 28"/>
-          <p:cNvSpPr/>
-          <p:nvPr/>
-        </p:nvSpPr>
-        <p:spPr>
-          <a:xfrm>
-            <a:off x="6016752" y="3364992"/>
-            <a:ext cx="411480" cy="475488"/>
+          <p:cNvPr id="30" name="Shape 28"/>
+          <p:cNvSpPr/>
+          <p:nvPr/>
+        </p:nvSpPr>
+        <p:spPr>
+          <a:xfrm>
+            <a:off x="365760" y="4096512"/>
+            <a:ext cx="1371600" cy="804672"/>
+          </a:xfrm>
+          <a:prstGeom prst="rect">
+            <a:avLst>
+              <a:gd name="adj" fmla="val 6818"/>
+            </a:avLst>
+          </a:prstGeom>
+          <a:solidFill>
+            <a:srgbClr val="E2E8F0"/>
+          </a:solidFill>
+          <a:ln w="12700">
+            <a:solidFill>
+              <a:srgbClr val="E2E8F0"/>
+            </a:solidFill>
+            <a:prstDash val="solid"/>
+          </a:ln>
+        </p:spPr>
+      </p:sp>
+      <p:sp>
+        <p:nvSpPr>
+          <p:cNvPr id="31" name="Text 29"/>
+          <p:cNvSpPr/>
+          <p:nvPr/>
+        </p:nvSpPr>
+        <p:spPr>
+          <a:xfrm>
+            <a:off x="365760" y="4096512"/>
+            <a:ext cx="1371600" cy="804672"/>
           </a:xfrm>
           <a:prstGeom prst="rect">
             <a:avLst/>
@@ -21558,57 +21828,84 @@
               <a:buNone/>
             </a:pPr>
             <a:r>
-              <a:rPr lang="en-US" sz="1600" b="1" dirty="0">
-                <a:solidFill>
-                  <a:srgbClr val="0D9488"/>
+              <a:rPr lang="en-US" sz="1100" b="1" dirty="0">
+                <a:solidFill>
+                  <a:srgbClr val="475569"/>
                 </a:solidFill>
                 <a:latin typeface="Trebuchet MS" pitchFamily="34" charset="0"/>
                 <a:ea typeface="Trebuchet MS" pitchFamily="34" charset="-122"/>
                 <a:cs typeface="Trebuchet MS" pitchFamily="34" charset="-120"/>
               </a:rPr>
-              <a:t>·</a:t>
-            </a:r>
-            <a:endParaRPr lang="en-US" sz="1600" dirty="0"/>
-          </a:p>
-        </p:txBody>
-      </p:sp>
-      <p:sp>
-        <p:nvSpPr>
-          <p:cNvPr id="31" name="Shape 29"/>
-          <p:cNvSpPr/>
-          <p:nvPr/>
-        </p:nvSpPr>
-        <p:spPr>
-          <a:xfrm>
-            <a:off x="6428232" y="3364992"/>
-            <a:ext cx="1645920" cy="475488"/>
+              <a:t>Phonemes</a:t>
+            </a:r>
+            <a:endParaRPr lang="en-US" sz="1100" dirty="0"/>
+          </a:p>
+        </p:txBody>
+      </p:sp>
+      <p:sp>
+        <p:nvSpPr>
+          <p:cNvPr id="32" name="Shape 30"/>
+          <p:cNvSpPr/>
+          <p:nvPr/>
+        </p:nvSpPr>
+        <p:spPr>
+          <a:xfrm>
+            <a:off x="1874520" y="4096512"/>
+            <a:ext cx="6903720" cy="804672"/>
           </a:xfrm>
           <a:prstGeom prst="rect">
             <a:avLst>
-              <a:gd name="adj" fmla="val 9615"/>
+              <a:gd name="adj" fmla="val 6818"/>
             </a:avLst>
           </a:prstGeom>
           <a:solidFill>
+            <a:srgbClr val="FCE7F3"/>
+          </a:solidFill>
+          <a:ln w="12700">
+            <a:solidFill>
+              <a:srgbClr val="DB2777"/>
+            </a:solidFill>
+            <a:prstDash val="solid"/>
+          </a:ln>
+        </p:spPr>
+      </p:sp>
+      <p:sp>
+        <p:nvSpPr>
+          <p:cNvPr id="33" name="Shape 31"/>
+          <p:cNvSpPr/>
+          <p:nvPr/>
+        </p:nvSpPr>
+        <p:spPr>
+          <a:xfrm>
+            <a:off x="2427732" y="4169664"/>
+            <a:ext cx="685800" cy="384048"/>
+          </a:xfrm>
+          <a:prstGeom prst="rect">
+            <a:avLst>
+              <a:gd name="adj" fmla="val 9524"/>
+            </a:avLst>
+          </a:prstGeom>
+          <a:solidFill>
             <a:srgbClr val="FFFFFF"/>
           </a:solidFill>
           <a:ln w="12700">
             <a:solidFill>
-              <a:srgbClr val="0D9488"/>
-            </a:solidFill>
-            <a:prstDash val="solid"/>
-          </a:ln>
-        </p:spPr>
-      </p:sp>
-      <p:sp>
-        <p:nvSpPr>
-          <p:cNvPr id="32" name="Text 30"/>
-          <p:cNvSpPr/>
-          <p:nvPr/>
-        </p:nvSpPr>
-        <p:spPr>
-          <a:xfrm>
-            <a:off x="6428232" y="3364992"/>
-            <a:ext cx="1645920" cy="475488"/>
+              <a:srgbClr val="DB2777"/>
+            </a:solidFill>
+            <a:prstDash val="solid"/>
+          </a:ln>
+        </p:spPr>
+      </p:sp>
+      <p:sp>
+        <p:nvSpPr>
+          <p:cNvPr id="34" name="Text 32"/>
+          <p:cNvSpPr/>
+          <p:nvPr/>
+        </p:nvSpPr>
+        <p:spPr>
+          <a:xfrm>
+            <a:off x="2427732" y="4169664"/>
+            <a:ext cx="685800" cy="384048"/>
           </a:xfrm>
           <a:prstGeom prst="rect">
             <a:avLst/>
@@ -21624,57 +21921,57 @@
               <a:buNone/>
             </a:pPr>
             <a:r>
-              <a:rPr lang="en-US" sz="1400" b="1" dirty="0">
-                <a:solidFill>
-                  <a:srgbClr val="0D9488"/>
+              <a:rPr lang="en-US" sz="900" b="1" dirty="0">
+                <a:solidFill>
+                  <a:srgbClr val="9D174D"/>
                 </a:solidFill>
                 <a:latin typeface="Trebuchet MS" pitchFamily="34" charset="0"/>
                 <a:ea typeface="Trebuchet MS" pitchFamily="34" charset="-122"/>
                 <a:cs typeface="Trebuchet MS" pitchFamily="34" charset="-120"/>
               </a:rPr>
-              <a:t>age</a:t>
-            </a:r>
-            <a:endParaRPr lang="en-US" sz="1400" dirty="0"/>
-          </a:p>
-        </p:txBody>
-      </p:sp>
-      <p:sp>
-        <p:nvSpPr>
-          <p:cNvPr id="33" name="Shape 31"/>
-          <p:cNvSpPr/>
-          <p:nvPr/>
-        </p:nvSpPr>
-        <p:spPr>
-          <a:xfrm>
-            <a:off x="365760" y="4096512"/>
-            <a:ext cx="1371600" cy="804672"/>
+              <a:t>e</a:t>
+            </a:r>
+            <a:endParaRPr lang="en-US" sz="900" dirty="0"/>
+          </a:p>
+        </p:txBody>
+      </p:sp>
+      <p:sp>
+        <p:nvSpPr>
+          <p:cNvPr id="35" name="Shape 33"/>
+          <p:cNvSpPr/>
+          <p:nvPr/>
+        </p:nvSpPr>
+        <p:spPr>
+          <a:xfrm>
+            <a:off x="3639312" y="4169664"/>
+            <a:ext cx="685800" cy="384048"/>
           </a:xfrm>
           <a:prstGeom prst="rect">
             <a:avLst>
-              <a:gd name="adj" fmla="val 6818"/>
+              <a:gd name="adj" fmla="val 9524"/>
             </a:avLst>
           </a:prstGeom>
           <a:solidFill>
-            <a:srgbClr val="E2E8F0"/>
-          </a:solidFill>
-          <a:ln w="12700">
-            <a:solidFill>
-              <a:srgbClr val="E2E8F0"/>
-            </a:solidFill>
-            <a:prstDash val="solid"/>
-          </a:ln>
-        </p:spPr>
-      </p:sp>
-      <p:sp>
-        <p:nvSpPr>
-          <p:cNvPr id="34" name="Text 32"/>
-          <p:cNvSpPr/>
-          <p:nvPr/>
-        </p:nvSpPr>
-        <p:spPr>
-          <a:xfrm>
-            <a:off x="365760" y="4096512"/>
-            <a:ext cx="1371600" cy="804672"/>
+            <a:srgbClr val="FFFFFF"/>
+          </a:solidFill>
+          <a:ln w="12700">
+            <a:solidFill>
+              <a:srgbClr val="DB2777"/>
+            </a:solidFill>
+            <a:prstDash val="solid"/>
+          </a:ln>
+        </p:spPr>
+      </p:sp>
+      <p:sp>
+        <p:nvSpPr>
+          <p:cNvPr id="36" name="Text 34"/>
+          <p:cNvSpPr/>
+          <p:nvPr/>
+        </p:nvSpPr>
+        <p:spPr>
+          <a:xfrm>
+            <a:off x="3639312" y="4169664"/>
+            <a:ext cx="685800" cy="384048"/>
           </a:xfrm>
           <a:prstGeom prst="rect">
             <a:avLst/>
@@ -21690,56 +21987,29 @@
               <a:buNone/>
             </a:pPr>
             <a:r>
-              <a:rPr lang="en-US" sz="1100" b="1" dirty="0">
-                <a:solidFill>
-                  <a:srgbClr val="475569"/>
+              <a:rPr lang="en-US" sz="900" b="1" dirty="0">
+                <a:solidFill>
+                  <a:srgbClr val="9D174D"/>
                 </a:solidFill>
                 <a:latin typeface="Trebuchet MS" pitchFamily="34" charset="0"/>
                 <a:ea typeface="Trebuchet MS" pitchFamily="34" charset="-122"/>
                 <a:cs typeface="Trebuchet MS" pitchFamily="34" charset="-120"/>
               </a:rPr>
-              <a:t>Phonemes</a:t>
-            </a:r>
-            <a:endParaRPr lang="en-US" sz="1100" dirty="0"/>
-          </a:p>
-        </p:txBody>
-      </p:sp>
-      <p:sp>
-        <p:nvSpPr>
-          <p:cNvPr id="35" name="Shape 33"/>
-          <p:cNvSpPr/>
-          <p:nvPr/>
-        </p:nvSpPr>
-        <p:spPr>
-          <a:xfrm>
-            <a:off x="1874520" y="4096512"/>
-            <a:ext cx="6903720" cy="804672"/>
-          </a:xfrm>
-          <a:prstGeom prst="rect">
-            <a:avLst>
-              <a:gd name="adj" fmla="val 6818"/>
-            </a:avLst>
-          </a:prstGeom>
-          <a:solidFill>
-            <a:srgbClr val="FCE7F3"/>
-          </a:solidFill>
-          <a:ln w="12700">
-            <a:solidFill>
-              <a:srgbClr val="DB2777"/>
-            </a:solidFill>
-            <a:prstDash val="solid"/>
-          </a:ln>
-        </p:spPr>
-      </p:sp>
-      <p:sp>
-        <p:nvSpPr>
-          <p:cNvPr id="36" name="Shape 34"/>
-          <p:cNvSpPr/>
-          <p:nvPr/>
-        </p:nvSpPr>
-        <p:spPr>
-          <a:xfrm>
-            <a:off x="2254649" y="4169664"/>
+              <a:t>n</a:t>
+            </a:r>
+            <a:endParaRPr lang="en-US" sz="900" dirty="0"/>
+          </a:p>
+        </p:txBody>
+      </p:sp>
+      <p:sp>
+        <p:nvSpPr>
+          <p:cNvPr id="37" name="Shape 35"/>
+          <p:cNvSpPr/>
+          <p:nvPr/>
+        </p:nvSpPr>
+        <p:spPr>
+          <a:xfrm>
+            <a:off x="4850892" y="4169664"/>
             <a:ext cx="685800" cy="384048"/>
           </a:xfrm>
           <a:prstGeom prst="rect">
@@ -21760,13 +22030,13 @@
       </p:sp>
       <p:sp>
         <p:nvSpPr>
-          <p:cNvPr id="37" name="Text 35"/>
-          <p:cNvSpPr/>
-          <p:nvPr/>
-        </p:nvSpPr>
-        <p:spPr>
-          <a:xfrm>
-            <a:off x="2254649" y="4169664"/>
+          <p:cNvPr id="38" name="Text 36"/>
+          <p:cNvSpPr/>
+          <p:nvPr/>
+        </p:nvSpPr>
+        <p:spPr>
+          <a:xfrm>
+            <a:off x="4850892" y="4169664"/>
             <a:ext cx="685800" cy="384048"/>
           </a:xfrm>
           <a:prstGeom prst="rect">
@@ -21791,7 +22061,7 @@
                 <a:ea typeface="Trebuchet MS" pitchFamily="34" charset="-122"/>
                 <a:cs typeface="Trebuchet MS" pitchFamily="34" charset="-120"/>
               </a:rPr>
-              <a:t>e</a:t>
+              <a:t>f</a:t>
             </a:r>
             <a:endParaRPr lang="en-US" sz="900" dirty="0"/>
           </a:p>
@@ -21799,13 +22069,13 @@
       </p:sp>
       <p:sp>
         <p:nvSpPr>
-          <p:cNvPr id="38" name="Shape 36"/>
-          <p:cNvSpPr/>
-          <p:nvPr/>
-        </p:nvSpPr>
-        <p:spPr>
-          <a:xfrm>
-            <a:off x="3293146" y="4169664"/>
+          <p:cNvPr id="39" name="Shape 37"/>
+          <p:cNvSpPr/>
+          <p:nvPr/>
+        </p:nvSpPr>
+        <p:spPr>
+          <a:xfrm>
+            <a:off x="6062472" y="4169664"/>
             <a:ext cx="685800" cy="384048"/>
           </a:xfrm>
           <a:prstGeom prst="rect">
@@ -21826,13 +22096,13 @@
       </p:sp>
       <p:sp>
         <p:nvSpPr>
-          <p:cNvPr id="39" name="Text 37"/>
-          <p:cNvSpPr/>
-          <p:nvPr/>
-        </p:nvSpPr>
-        <p:spPr>
-          <a:xfrm>
-            <a:off x="3293146" y="4169664"/>
+          <p:cNvPr id="40" name="Text 38"/>
+          <p:cNvSpPr/>
+          <p:nvPr/>
+        </p:nvSpPr>
+        <p:spPr>
+          <a:xfrm>
+            <a:off x="6062472" y="4169664"/>
             <a:ext cx="685800" cy="384048"/>
           </a:xfrm>
           <a:prstGeom prst="rect">
@@ -21857,7 +22127,7 @@
                 <a:ea typeface="Trebuchet MS" pitchFamily="34" charset="-122"/>
                 <a:cs typeface="Trebuchet MS" pitchFamily="34" charset="-120"/>
               </a:rPr>
-              <a:t>n</a:t>
+              <a:t>or</a:t>
             </a:r>
             <a:endParaRPr lang="en-US" sz="900" dirty="0"/>
           </a:p>
@@ -21865,13 +22135,13 @@
       </p:sp>
       <p:sp>
         <p:nvSpPr>
-          <p:cNvPr id="40" name="Shape 38"/>
-          <p:cNvSpPr/>
-          <p:nvPr/>
-        </p:nvSpPr>
-        <p:spPr>
-          <a:xfrm>
-            <a:off x="4331643" y="4169664"/>
+          <p:cNvPr id="41" name="Shape 39"/>
+          <p:cNvSpPr/>
+          <p:nvPr/>
+        </p:nvSpPr>
+        <p:spPr>
+          <a:xfrm>
+            <a:off x="7274052" y="4169664"/>
             <a:ext cx="685800" cy="384048"/>
           </a:xfrm>
           <a:prstGeom prst="rect">
@@ -21892,13 +22162,13 @@
       </p:sp>
       <p:sp>
         <p:nvSpPr>
-          <p:cNvPr id="41" name="Text 39"/>
-          <p:cNvSpPr/>
-          <p:nvPr/>
-        </p:nvSpPr>
-        <p:spPr>
-          <a:xfrm>
-            <a:off x="4331643" y="4169664"/>
+          <p:cNvPr id="42" name="Text 40"/>
+          <p:cNvSpPr/>
+          <p:nvPr/>
+        </p:nvSpPr>
+        <p:spPr>
+          <a:xfrm>
+            <a:off x="7274052" y="4169664"/>
             <a:ext cx="685800" cy="384048"/>
           </a:xfrm>
           <a:prstGeom prst="rect">
@@ -21923,7 +22193,7 @@
                 <a:ea typeface="Trebuchet MS" pitchFamily="34" charset="-122"/>
                 <a:cs typeface="Trebuchet MS" pitchFamily="34" charset="-120"/>
               </a:rPr>
-              <a:t>c</a:t>
+              <a:t>ce</a:t>
             </a:r>
             <a:endParaRPr lang="en-US" sz="900" dirty="0"/>
           </a:p>
@@ -21931,13 +22201,13 @@
       </p:sp>
       <p:sp>
         <p:nvSpPr>
-          <p:cNvPr id="42" name="Text 40"/>
-          <p:cNvSpPr/>
-          <p:nvPr/>
-        </p:nvSpPr>
-        <p:spPr>
-          <a:xfrm>
-            <a:off x="4331643" y="4572000"/>
+          <p:cNvPr id="43" name="Text 41"/>
+          <p:cNvSpPr/>
+          <p:nvPr/>
+        </p:nvSpPr>
+        <p:spPr>
+          <a:xfrm>
+            <a:off x="7274052" y="4572000"/>
             <a:ext cx="685800" cy="219456"/>
           </a:xfrm>
           <a:prstGeom prst="rect">
@@ -21962,283 +22232,7 @@
                 <a:ea typeface="Calibri" pitchFamily="34" charset="-122"/>
                 <a:cs typeface="Calibri" pitchFamily="34" charset="-120"/>
               </a:rPr>
-              <a:t>/k/</a:t>
-            </a:r>
-            <a:endParaRPr lang="en-US" sz="750" dirty="0"/>
-          </a:p>
-        </p:txBody>
-      </p:sp>
-      <p:sp>
-        <p:nvSpPr>
-          <p:cNvPr id="43" name="Shape 41"/>
-          <p:cNvSpPr/>
-          <p:nvPr/>
-        </p:nvSpPr>
-        <p:spPr>
-          <a:xfrm>
-            <a:off x="5370141" y="4169664"/>
-            <a:ext cx="685800" cy="384048"/>
-          </a:xfrm>
-          <a:prstGeom prst="rect">
-            <a:avLst>
-              <a:gd name="adj" fmla="val 9524"/>
-            </a:avLst>
-          </a:prstGeom>
-          <a:solidFill>
-            <a:srgbClr val="FFFFFF"/>
-          </a:solidFill>
-          <a:ln w="12700">
-            <a:solidFill>
-              <a:srgbClr val="DB2777"/>
-            </a:solidFill>
-            <a:prstDash val="solid"/>
-          </a:ln>
-        </p:spPr>
-      </p:sp>
-      <p:sp>
-        <p:nvSpPr>
-          <p:cNvPr id="44" name="Text 42"/>
-          <p:cNvSpPr/>
-          <p:nvPr/>
-        </p:nvSpPr>
-        <p:spPr>
-          <a:xfrm>
-            <a:off x="5370141" y="4169664"/>
-            <a:ext cx="685800" cy="384048"/>
-          </a:xfrm>
-          <a:prstGeom prst="rect">
-            <a:avLst/>
-          </a:prstGeom>
-          <a:noFill/>
-          <a:ln/>
-        </p:spPr>
-        <p:txBody>
-          <a:bodyPr wrap="square" lIns="0" tIns="0" rIns="0" bIns="0" rtlCol="0" anchor="ctr"/>
-          <a:lstStyle/>
-          <a:p>
-            <a:pPr algn="ctr" indent="0" marL="0">
-              <a:buNone/>
-            </a:pPr>
-            <a:r>
-              <a:rPr lang="en-US" sz="900" b="1" dirty="0">
-                <a:solidFill>
-                  <a:srgbClr val="9D174D"/>
-                </a:solidFill>
-                <a:latin typeface="Trebuchet MS" pitchFamily="34" charset="0"/>
-                <a:ea typeface="Trebuchet MS" pitchFamily="34" charset="-122"/>
-                <a:cs typeface="Trebuchet MS" pitchFamily="34" charset="-120"/>
-              </a:rPr>
-              <a:t>our</a:t>
-            </a:r>
-            <a:endParaRPr lang="en-US" sz="900" dirty="0"/>
-          </a:p>
-        </p:txBody>
-      </p:sp>
-      <p:sp>
-        <p:nvSpPr>
-          <p:cNvPr id="45" name="Text 43"/>
-          <p:cNvSpPr/>
-          <p:nvPr/>
-        </p:nvSpPr>
-        <p:spPr>
-          <a:xfrm>
-            <a:off x="5370141" y="4572000"/>
-            <a:ext cx="685800" cy="219456"/>
-          </a:xfrm>
-          <a:prstGeom prst="rect">
-            <a:avLst/>
-          </a:prstGeom>
-          <a:noFill/>
-          <a:ln/>
-        </p:spPr>
-        <p:txBody>
-          <a:bodyPr wrap="square" lIns="0" tIns="0" rIns="0" bIns="0" rtlCol="0" anchor="t"/>
-          <a:lstStyle/>
-          <a:p>
-            <a:pPr algn="ctr" indent="0" marL="0">
-              <a:buNone/>
-            </a:pPr>
-            <a:r>
-              <a:rPr lang="en-US" sz="750" i="1" dirty="0">
-                <a:solidFill>
-                  <a:srgbClr val="94A3B8"/>
-                </a:solidFill>
-                <a:latin typeface="Calibri" pitchFamily="34" charset="0"/>
-                <a:ea typeface="Calibri" pitchFamily="34" charset="-122"/>
-                <a:cs typeface="Calibri" pitchFamily="34" charset="-120"/>
-              </a:rPr>
-              <a:t>/er/</a:t>
-            </a:r>
-            <a:endParaRPr lang="en-US" sz="750" dirty="0"/>
-          </a:p>
-        </p:txBody>
-      </p:sp>
-      <p:sp>
-        <p:nvSpPr>
-          <p:cNvPr id="46" name="Shape 44"/>
-          <p:cNvSpPr/>
-          <p:nvPr/>
-        </p:nvSpPr>
-        <p:spPr>
-          <a:xfrm>
-            <a:off x="6408638" y="4169664"/>
-            <a:ext cx="685800" cy="384048"/>
-          </a:xfrm>
-          <a:prstGeom prst="rect">
-            <a:avLst>
-              <a:gd name="adj" fmla="val 9524"/>
-            </a:avLst>
-          </a:prstGeom>
-          <a:solidFill>
-            <a:srgbClr val="FFFFFF"/>
-          </a:solidFill>
-          <a:ln w="12700">
-            <a:solidFill>
-              <a:srgbClr val="DB2777"/>
-            </a:solidFill>
-            <a:prstDash val="solid"/>
-          </a:ln>
-        </p:spPr>
-      </p:sp>
-      <p:sp>
-        <p:nvSpPr>
-          <p:cNvPr id="47" name="Text 45"/>
-          <p:cNvSpPr/>
-          <p:nvPr/>
-        </p:nvSpPr>
-        <p:spPr>
-          <a:xfrm>
-            <a:off x="6408638" y="4169664"/>
-            <a:ext cx="685800" cy="384048"/>
-          </a:xfrm>
-          <a:prstGeom prst="rect">
-            <a:avLst/>
-          </a:prstGeom>
-          <a:noFill/>
-          <a:ln/>
-        </p:spPr>
-        <p:txBody>
-          <a:bodyPr wrap="square" lIns="0" tIns="0" rIns="0" bIns="0" rtlCol="0" anchor="ctr"/>
-          <a:lstStyle/>
-          <a:p>
-            <a:pPr algn="ctr" indent="0" marL="0">
-              <a:buNone/>
-            </a:pPr>
-            <a:r>
-              <a:rPr lang="en-US" sz="900" b="1" dirty="0">
-                <a:solidFill>
-                  <a:srgbClr val="9D174D"/>
-                </a:solidFill>
-                <a:latin typeface="Trebuchet MS" pitchFamily="34" charset="0"/>
-                <a:ea typeface="Trebuchet MS" pitchFamily="34" charset="-122"/>
-                <a:cs typeface="Trebuchet MS" pitchFamily="34" charset="-120"/>
-              </a:rPr>
-              <a:t>a</a:t>
-            </a:r>
-            <a:endParaRPr lang="en-US" sz="900" dirty="0"/>
-          </a:p>
-        </p:txBody>
-      </p:sp>
-      <p:sp>
-        <p:nvSpPr>
-          <p:cNvPr id="48" name="Shape 46"/>
-          <p:cNvSpPr/>
-          <p:nvPr/>
-        </p:nvSpPr>
-        <p:spPr>
-          <a:xfrm>
-            <a:off x="7447135" y="4169664"/>
-            <a:ext cx="685800" cy="384048"/>
-          </a:xfrm>
-          <a:prstGeom prst="rect">
-            <a:avLst>
-              <a:gd name="adj" fmla="val 9524"/>
-            </a:avLst>
-          </a:prstGeom>
-          <a:solidFill>
-            <a:srgbClr val="FFFFFF"/>
-          </a:solidFill>
-          <a:ln w="12700">
-            <a:solidFill>
-              <a:srgbClr val="DB2777"/>
-            </a:solidFill>
-            <a:prstDash val="solid"/>
-          </a:ln>
-        </p:spPr>
-      </p:sp>
-      <p:sp>
-        <p:nvSpPr>
-          <p:cNvPr id="49" name="Text 47"/>
-          <p:cNvSpPr/>
-          <p:nvPr/>
-        </p:nvSpPr>
-        <p:spPr>
-          <a:xfrm>
-            <a:off x="7447135" y="4169664"/>
-            <a:ext cx="685800" cy="384048"/>
-          </a:xfrm>
-          <a:prstGeom prst="rect">
-            <a:avLst/>
-          </a:prstGeom>
-          <a:noFill/>
-          <a:ln/>
-        </p:spPr>
-        <p:txBody>
-          <a:bodyPr wrap="square" lIns="0" tIns="0" rIns="0" bIns="0" rtlCol="0" anchor="ctr"/>
-          <a:lstStyle/>
-          <a:p>
-            <a:pPr algn="ctr" indent="0" marL="0">
-              <a:buNone/>
-            </a:pPr>
-            <a:r>
-              <a:rPr lang="en-US" sz="900" b="1" dirty="0">
-                <a:solidFill>
-                  <a:srgbClr val="9D174D"/>
-                </a:solidFill>
-                <a:latin typeface="Trebuchet MS" pitchFamily="34" charset="0"/>
-                <a:ea typeface="Trebuchet MS" pitchFamily="34" charset="-122"/>
-                <a:cs typeface="Trebuchet MS" pitchFamily="34" charset="-120"/>
-              </a:rPr>
-              <a:t>ge</a:t>
-            </a:r>
-            <a:endParaRPr lang="en-US" sz="900" dirty="0"/>
-          </a:p>
-        </p:txBody>
-      </p:sp>
-      <p:sp>
-        <p:nvSpPr>
-          <p:cNvPr id="50" name="Text 48"/>
-          <p:cNvSpPr/>
-          <p:nvPr/>
-        </p:nvSpPr>
-        <p:spPr>
-          <a:xfrm>
-            <a:off x="7447135" y="4572000"/>
-            <a:ext cx="685800" cy="219456"/>
-          </a:xfrm>
-          <a:prstGeom prst="rect">
-            <a:avLst/>
-          </a:prstGeom>
-          <a:noFill/>
-          <a:ln/>
-        </p:spPr>
-        <p:txBody>
-          <a:bodyPr wrap="square" lIns="0" tIns="0" rIns="0" bIns="0" rtlCol="0" anchor="t"/>
-          <a:lstStyle/>
-          <a:p>
-            <a:pPr algn="ctr" indent="0" marL="0">
-              <a:buNone/>
-            </a:pPr>
-            <a:r>
-              <a:rPr lang="en-US" sz="750" i="1" dirty="0">
-                <a:solidFill>
-                  <a:srgbClr val="94A3B8"/>
-                </a:solidFill>
-                <a:latin typeface="Calibri" pitchFamily="34" charset="0"/>
-                <a:ea typeface="Calibri" pitchFamily="34" charset="-122"/>
-                <a:cs typeface="Calibri" pitchFamily="34" charset="-120"/>
-              </a:rPr>
-              <a:t>/j/</a:t>
+              <a:t>/s/</a:t>
             </a:r>
             <a:endParaRPr lang="en-US" sz="750" dirty="0"/>
           </a:p>
@@ -22530,7 +22524,7 @@
                 <a:ea typeface="Calibri" pitchFamily="34" charset="-122"/>
                 <a:cs typeface="Calibri" pitchFamily="34" charset="-120"/>
               </a:rPr>
-              <a:t>Word Labs  •  wordlabs.app  •  Prefix: 'en-' = to make or put into</a:t>
+              <a:t>Word Labs  •  wordlabs.app  •  Prefix: 'en-' = to make, put into</a:t>
             </a:r>
             <a:endParaRPr lang="en-US" sz="800" dirty="0"/>
           </a:p>
@@ -22669,7 +22663,7 @@
                 <a:ea typeface="Trebuchet MS" pitchFamily="34" charset="-122"/>
                 <a:cs typeface="Trebuchet MS" pitchFamily="34" charset="-120"/>
               </a:rPr>
-              <a:t>enlarge</a:t>
+              <a:t>ensure</a:t>
             </a:r>
             <a:endParaRPr lang="en-US" sz="2800" dirty="0"/>
           </a:p>
@@ -23357,7 +23351,7 @@
                 <a:ea typeface="Calibri" pitchFamily="34" charset="-122"/>
                 <a:cs typeface="Calibri" pitchFamily="34" charset="-120"/>
               </a:rPr>
-              <a:t>Word Labs  •  wordlabs.app  •  Prefix: 'en-' = to make or put into</a:t>
+              <a:t>Word Labs  •  wordlabs.app  •  Prefix: 'en-' = to make, put into</a:t>
             </a:r>
             <a:endParaRPr lang="en-US" sz="800" dirty="0"/>
           </a:p>
@@ -23496,7 +23490,7 @@
                 <a:ea typeface="Trebuchet MS" pitchFamily="34" charset="-122"/>
                 <a:cs typeface="Trebuchet MS" pitchFamily="34" charset="-120"/>
               </a:rPr>
-              <a:t>enlarge</a:t>
+              <a:t>ensure</a:t>
             </a:r>
             <a:endParaRPr lang="en-US" sz="2800" dirty="0"/>
           </a:p>
@@ -23674,7 +23668,7 @@
                 <a:ea typeface="Calibri" pitchFamily="34" charset="-122"/>
                 <a:cs typeface="Calibri" pitchFamily="34" charset="-120"/>
               </a:rPr>
-              <a:t>to make or put into</a:t>
+              <a:t>to make, put into</a:t>
             </a:r>
             <a:endParaRPr lang="en-US" sz="850" dirty="0"/>
           </a:p>
@@ -23747,7 +23741,7 @@
                 <a:ea typeface="Trebuchet MS" pitchFamily="34" charset="-122"/>
                 <a:cs typeface="Trebuchet MS" pitchFamily="34" charset="-120"/>
               </a:rPr>
-              <a:t>large</a:t>
+              <a:t>sure</a:t>
             </a:r>
             <a:endParaRPr lang="en-US" sz="1300" dirty="0"/>
           </a:p>
@@ -23786,7 +23780,7 @@
                 <a:ea typeface="Calibri" pitchFamily="34" charset="-122"/>
                 <a:cs typeface="Calibri" pitchFamily="34" charset="-120"/>
               </a:rPr>
-              <a:t>big in size</a:t>
+              <a:t>certain, definite</a:t>
             </a:r>
             <a:endParaRPr lang="en-US" sz="850" dirty="0"/>
           </a:p>
@@ -24342,7 +24336,7 @@
                 <a:ea typeface="Calibri" pitchFamily="34" charset="-122"/>
                 <a:cs typeface="Calibri" pitchFamily="34" charset="-120"/>
               </a:rPr>
-              <a:t>Word Labs  •  wordlabs.app  •  Prefix: 'en-' = to make or put into</a:t>
+              <a:t>Word Labs  •  wordlabs.app  •  Prefix: 'en-' = to make, put into</a:t>
             </a:r>
             <a:endParaRPr lang="en-US" sz="800" dirty="0"/>
           </a:p>
@@ -24415,7 +24409,7 @@
                 <a:ea typeface="Trebuchet MS" pitchFamily="34" charset="-122"/>
                 <a:cs typeface="Trebuchet MS" pitchFamily="34" charset="-120"/>
               </a:rPr>
-              <a:t>We are learning that the prefix 'en-' means 'to make or put into'.</a:t>
+              <a:t>We are learning that the prefix 'en-' means 'to make, put into'.</a:t>
             </a:r>
             <a:endParaRPr lang="en-US" sz="2000" dirty="0"/>
           </a:p>
@@ -25061,7 +25055,7 @@
                 <a:ea typeface="Calibri" pitchFamily="34" charset="-122"/>
                 <a:cs typeface="Calibri" pitchFamily="34" charset="-120"/>
               </a:rPr>
-              <a:t>Word Labs  •  wordlabs.app  •  Prefix: 'en-' = to make or put into</a:t>
+              <a:t>Word Labs  •  wordlabs.app  •  Prefix: 'en-' = to make, put into</a:t>
             </a:r>
             <a:endParaRPr lang="en-US" sz="800" dirty="0"/>
           </a:p>
@@ -25200,7 +25194,7 @@
                 <a:ea typeface="Trebuchet MS" pitchFamily="34" charset="-122"/>
                 <a:cs typeface="Trebuchet MS" pitchFamily="34" charset="-120"/>
               </a:rPr>
-              <a:t>enlarge</a:t>
+              <a:t>ensure</a:t>
             </a:r>
             <a:endParaRPr lang="en-US" sz="2800" dirty="0"/>
           </a:p>
@@ -25378,7 +25372,7 @@
                 <a:ea typeface="Calibri" pitchFamily="34" charset="-122"/>
                 <a:cs typeface="Calibri" pitchFamily="34" charset="-120"/>
               </a:rPr>
-              <a:t>to make or put into</a:t>
+              <a:t>to make, put into</a:t>
             </a:r>
             <a:endParaRPr lang="en-US" sz="850" dirty="0"/>
           </a:p>
@@ -25451,7 +25445,7 @@
                 <a:ea typeface="Trebuchet MS" pitchFamily="34" charset="-122"/>
                 <a:cs typeface="Trebuchet MS" pitchFamily="34" charset="-120"/>
               </a:rPr>
-              <a:t>large</a:t>
+              <a:t>sure</a:t>
             </a:r>
             <a:endParaRPr lang="en-US" sz="1300" dirty="0"/>
           </a:p>
@@ -25490,7 +25484,7 @@
                 <a:ea typeface="Calibri" pitchFamily="34" charset="-122"/>
                 <a:cs typeface="Calibri" pitchFamily="34" charset="-120"/>
               </a:rPr>
-              <a:t>big in size</a:t>
+              <a:t>certain, definite</a:t>
             </a:r>
             <a:endParaRPr lang="en-US" sz="850" dirty="0"/>
           </a:p>
@@ -25754,7 +25748,7 @@
                 <a:ea typeface="Trebuchet MS" pitchFamily="34" charset="-122"/>
                 <a:cs typeface="Trebuchet MS" pitchFamily="34" charset="-120"/>
               </a:rPr>
-              <a:t>large</a:t>
+              <a:t>sure</a:t>
             </a:r>
             <a:endParaRPr lang="en-US" sz="1400" dirty="0"/>
           </a:p>
@@ -26178,7 +26172,7 @@
                 <a:ea typeface="Calibri" pitchFamily="34" charset="-122"/>
                 <a:cs typeface="Calibri" pitchFamily="34" charset="-120"/>
               </a:rPr>
-              <a:t>Word Labs  •  wordlabs.app  •  Prefix: 'en-' = to make or put into</a:t>
+              <a:t>Word Labs  •  wordlabs.app  •  Prefix: 'en-' = to make, put into</a:t>
             </a:r>
             <a:endParaRPr lang="en-US" sz="800" dirty="0"/>
           </a:p>
@@ -26317,7 +26311,7 @@
                 <a:ea typeface="Trebuchet MS" pitchFamily="34" charset="-122"/>
                 <a:cs typeface="Trebuchet MS" pitchFamily="34" charset="-120"/>
               </a:rPr>
-              <a:t>enlarge</a:t>
+              <a:t>ensure</a:t>
             </a:r>
             <a:endParaRPr lang="en-US" sz="2800" dirty="0"/>
           </a:p>
@@ -26495,7 +26489,7 @@
                 <a:ea typeface="Calibri" pitchFamily="34" charset="-122"/>
                 <a:cs typeface="Calibri" pitchFamily="34" charset="-120"/>
               </a:rPr>
-              <a:t>to make or put into</a:t>
+              <a:t>to make, put into</a:t>
             </a:r>
             <a:endParaRPr lang="en-US" sz="850" dirty="0"/>
           </a:p>
@@ -26568,7 +26562,7 @@
                 <a:ea typeface="Trebuchet MS" pitchFamily="34" charset="-122"/>
                 <a:cs typeface="Trebuchet MS" pitchFamily="34" charset="-120"/>
               </a:rPr>
-              <a:t>large</a:t>
+              <a:t>sure</a:t>
             </a:r>
             <a:endParaRPr lang="en-US" sz="1300" dirty="0"/>
           </a:p>
@@ -26607,7 +26601,7 @@
                 <a:ea typeface="Calibri" pitchFamily="34" charset="-122"/>
                 <a:cs typeface="Calibri" pitchFamily="34" charset="-120"/>
               </a:rPr>
-              <a:t>big in size</a:t>
+              <a:t>certain, definite</a:t>
             </a:r>
             <a:endParaRPr lang="en-US" sz="850" dirty="0"/>
           </a:p>
@@ -26871,7 +26865,7 @@
                 <a:ea typeface="Trebuchet MS" pitchFamily="34" charset="-122"/>
                 <a:cs typeface="Trebuchet MS" pitchFamily="34" charset="-120"/>
               </a:rPr>
-              <a:t>large</a:t>
+              <a:t>sure</a:t>
             </a:r>
             <a:endParaRPr lang="en-US" sz="1400" dirty="0"/>
           </a:p>
@@ -26978,7 +26972,7 @@
         </p:nvSpPr>
         <p:spPr>
           <a:xfrm>
-            <a:off x="2427732" y="4169664"/>
+            <a:off x="2670048" y="4169664"/>
             <a:ext cx="685800" cy="384048"/>
           </a:xfrm>
           <a:prstGeom prst="rect">
@@ -27005,7 +26999,7 @@
         </p:nvSpPr>
         <p:spPr>
           <a:xfrm>
-            <a:off x="2427732" y="4169664"/>
+            <a:off x="2670048" y="4169664"/>
             <a:ext cx="685800" cy="384048"/>
           </a:xfrm>
           <a:prstGeom prst="rect">
@@ -27044,7 +27038,7 @@
         </p:nvSpPr>
         <p:spPr>
           <a:xfrm>
-            <a:off x="3639312" y="4169664"/>
+            <a:off x="4123944" y="4169664"/>
             <a:ext cx="685800" cy="384048"/>
           </a:xfrm>
           <a:prstGeom prst="rect">
@@ -27071,7 +27065,7 @@
         </p:nvSpPr>
         <p:spPr>
           <a:xfrm>
-            <a:off x="3639312" y="4169664"/>
+            <a:off x="4123944" y="4169664"/>
             <a:ext cx="685800" cy="384048"/>
           </a:xfrm>
           <a:prstGeom prst="rect">
@@ -27110,7 +27104,7 @@
         </p:nvSpPr>
         <p:spPr>
           <a:xfrm>
-            <a:off x="4850892" y="4169664"/>
+            <a:off x="5577840" y="4169664"/>
             <a:ext cx="685800" cy="384048"/>
           </a:xfrm>
           <a:prstGeom prst="rect">
@@ -27137,7 +27131,7 @@
         </p:nvSpPr>
         <p:spPr>
           <a:xfrm>
-            <a:off x="4850892" y="4169664"/>
+            <a:off x="5577840" y="4169664"/>
             <a:ext cx="685800" cy="384048"/>
           </a:xfrm>
           <a:prstGeom prst="rect">
@@ -27162,7 +27156,7 @@
                 <a:ea typeface="Trebuchet MS" pitchFamily="34" charset="-122"/>
                 <a:cs typeface="Trebuchet MS" pitchFamily="34" charset="-120"/>
               </a:rPr>
-              <a:t>l</a:t>
+              <a:t>s</a:t>
             </a:r>
             <a:endParaRPr lang="en-US" sz="900" dirty="0"/>
           </a:p>
@@ -27170,13 +27164,52 @@
       </p:sp>
       <p:sp>
         <p:nvSpPr>
-          <p:cNvPr id="39" name="Shape 37"/>
-          <p:cNvSpPr/>
-          <p:nvPr/>
-        </p:nvSpPr>
-        <p:spPr>
-          <a:xfrm>
-            <a:off x="6062472" y="4169664"/>
+          <p:cNvPr id="39" name="Text 37"/>
+          <p:cNvSpPr/>
+          <p:nvPr/>
+        </p:nvSpPr>
+        <p:spPr>
+          <a:xfrm>
+            <a:off x="5577840" y="4572000"/>
+            <a:ext cx="685800" cy="219456"/>
+          </a:xfrm>
+          <a:prstGeom prst="rect">
+            <a:avLst/>
+          </a:prstGeom>
+          <a:noFill/>
+          <a:ln/>
+        </p:spPr>
+        <p:txBody>
+          <a:bodyPr wrap="square" lIns="0" tIns="0" rIns="0" bIns="0" rtlCol="0" anchor="t"/>
+          <a:lstStyle/>
+          <a:p>
+            <a:pPr algn="ctr" indent="0" marL="0">
+              <a:buNone/>
+            </a:pPr>
+            <a:r>
+              <a:rPr lang="en-US" sz="750" i="1" dirty="0">
+                <a:solidFill>
+                  <a:srgbClr val="94A3B8"/>
+                </a:solidFill>
+                <a:latin typeface="Calibri" pitchFamily="34" charset="0"/>
+                <a:ea typeface="Calibri" pitchFamily="34" charset="-122"/>
+                <a:cs typeface="Calibri" pitchFamily="34" charset="-120"/>
+              </a:rPr>
+              <a:t>/sh/</a:t>
+            </a:r>
+            <a:endParaRPr lang="en-US" sz="750" dirty="0"/>
+          </a:p>
+        </p:txBody>
+      </p:sp>
+      <p:sp>
+        <p:nvSpPr>
+          <p:cNvPr id="40" name="Shape 38"/>
+          <p:cNvSpPr/>
+          <p:nvPr/>
+        </p:nvSpPr>
+        <p:spPr>
+          <a:xfrm>
+            <a:off x="7031736" y="4169664"/>
             <a:ext cx="685800" cy="384048"/>
           </a:xfrm>
           <a:prstGeom prst="rect">
@@ -27197,13 +27230,13 @@
       </p:sp>
       <p:sp>
         <p:nvSpPr>
-          <p:cNvPr id="40" name="Text 38"/>
-          <p:cNvSpPr/>
-          <p:nvPr/>
-        </p:nvSpPr>
-        <p:spPr>
-          <a:xfrm>
-            <a:off x="6062472" y="4169664"/>
+          <p:cNvPr id="41" name="Text 39"/>
+          <p:cNvSpPr/>
+          <p:nvPr/>
+        </p:nvSpPr>
+        <p:spPr>
+          <a:xfrm>
+            <a:off x="7031736" y="4169664"/>
             <a:ext cx="685800" cy="384048"/>
           </a:xfrm>
           <a:prstGeom prst="rect">
@@ -27228,7 +27261,7 @@
                 <a:ea typeface="Trebuchet MS" pitchFamily="34" charset="-122"/>
                 <a:cs typeface="Trebuchet MS" pitchFamily="34" charset="-120"/>
               </a:rPr>
-              <a:t>ar</a:t>
+              <a:t>ure</a:t>
             </a:r>
             <a:endParaRPr lang="en-US" sz="900" dirty="0"/>
           </a:p>
@@ -27236,79 +27269,13 @@
       </p:sp>
       <p:sp>
         <p:nvSpPr>
-          <p:cNvPr id="41" name="Shape 39"/>
-          <p:cNvSpPr/>
-          <p:nvPr/>
-        </p:nvSpPr>
-        <p:spPr>
-          <a:xfrm>
-            <a:off x="7274052" y="4169664"/>
-            <a:ext cx="685800" cy="384048"/>
-          </a:xfrm>
-          <a:prstGeom prst="rect">
-            <a:avLst>
-              <a:gd name="adj" fmla="val 9524"/>
-            </a:avLst>
-          </a:prstGeom>
-          <a:solidFill>
-            <a:srgbClr val="FFFFFF"/>
-          </a:solidFill>
-          <a:ln w="12700">
-            <a:solidFill>
-              <a:srgbClr val="DB2777"/>
-            </a:solidFill>
-            <a:prstDash val="solid"/>
-          </a:ln>
-        </p:spPr>
-      </p:sp>
-      <p:sp>
-        <p:nvSpPr>
           <p:cNvPr id="42" name="Text 40"/>
           <p:cNvSpPr/>
           <p:nvPr/>
         </p:nvSpPr>
         <p:spPr>
           <a:xfrm>
-            <a:off x="7274052" y="4169664"/>
-            <a:ext cx="685800" cy="384048"/>
-          </a:xfrm>
-          <a:prstGeom prst="rect">
-            <a:avLst/>
-          </a:prstGeom>
-          <a:noFill/>
-          <a:ln/>
-        </p:spPr>
-        <p:txBody>
-          <a:bodyPr wrap="square" lIns="0" tIns="0" rIns="0" bIns="0" rtlCol="0" anchor="ctr"/>
-          <a:lstStyle/>
-          <a:p>
-            <a:pPr algn="ctr" indent="0" marL="0">
-              <a:buNone/>
-            </a:pPr>
-            <a:r>
-              <a:rPr lang="en-US" sz="900" b="1" dirty="0">
-                <a:solidFill>
-                  <a:srgbClr val="9D174D"/>
-                </a:solidFill>
-                <a:latin typeface="Trebuchet MS" pitchFamily="34" charset="0"/>
-                <a:ea typeface="Trebuchet MS" pitchFamily="34" charset="-122"/>
-                <a:cs typeface="Trebuchet MS" pitchFamily="34" charset="-120"/>
-              </a:rPr>
-              <a:t>ge</a:t>
-            </a:r>
-            <a:endParaRPr lang="en-US" sz="900" dirty="0"/>
-          </a:p>
-        </p:txBody>
-      </p:sp>
-      <p:sp>
-        <p:nvSpPr>
-          <p:cNvPr id="43" name="Text 41"/>
-          <p:cNvSpPr/>
-          <p:nvPr/>
-        </p:nvSpPr>
-        <p:spPr>
-          <a:xfrm>
-            <a:off x="7274052" y="4572000"/>
+            <a:off x="7031736" y="4572000"/>
             <a:ext cx="685800" cy="219456"/>
           </a:xfrm>
           <a:prstGeom prst="rect">
@@ -27333,7 +27300,7 @@
                 <a:ea typeface="Calibri" pitchFamily="34" charset="-122"/>
                 <a:cs typeface="Calibri" pitchFamily="34" charset="-120"/>
               </a:rPr>
-              <a:t>/j/</a:t>
+              <a:t>/er/</a:t>
             </a:r>
             <a:endParaRPr lang="en-US" sz="750" dirty="0"/>
           </a:p>
@@ -27625,7 +27592,7 @@
                 <a:ea typeface="Calibri" pitchFamily="34" charset="-122"/>
                 <a:cs typeface="Calibri" pitchFamily="34" charset="-120"/>
               </a:rPr>
-              <a:t>Word Labs  •  wordlabs.app  •  Prefix: 'en-' = to make or put into</a:t>
+              <a:t>Word Labs  •  wordlabs.app  •  Prefix: 'en-' = to make, put into</a:t>
             </a:r>
             <a:endParaRPr lang="en-US" sz="800" dirty="0"/>
           </a:p>
@@ -28452,7 +28419,7 @@
                 <a:ea typeface="Calibri" pitchFamily="34" charset="-122"/>
                 <a:cs typeface="Calibri" pitchFamily="34" charset="-120"/>
               </a:rPr>
-              <a:t>Word Labs  •  wordlabs.app  •  Prefix: 'en-' = to make or put into</a:t>
+              <a:t>Word Labs  •  wordlabs.app  •  Prefix: 'en-' = to make, put into</a:t>
             </a:r>
             <a:endParaRPr lang="en-US" sz="800" dirty="0"/>
           </a:p>
@@ -28769,7 +28736,7 @@
                 <a:ea typeface="Calibri" pitchFamily="34" charset="-122"/>
                 <a:cs typeface="Calibri" pitchFamily="34" charset="-120"/>
               </a:rPr>
-              <a:t>to make or put into</a:t>
+              <a:t>to make, put into</a:t>
             </a:r>
             <a:endParaRPr lang="en-US" sz="850" dirty="0"/>
           </a:p>
@@ -28881,7 +28848,7 @@
                 <a:ea typeface="Calibri" pitchFamily="34" charset="-122"/>
                 <a:cs typeface="Calibri" pitchFamily="34" charset="-120"/>
               </a:rPr>
-              <a:t>full of value or goodness</a:t>
+              <a:t>having great value or quality</a:t>
             </a:r>
             <a:endParaRPr lang="en-US" sz="850" dirty="0"/>
           </a:p>
@@ -29437,7 +29404,7 @@
                 <a:ea typeface="Calibri" pitchFamily="34" charset="-122"/>
                 <a:cs typeface="Calibri" pitchFamily="34" charset="-120"/>
               </a:rPr>
-              <a:t>Word Labs  •  wordlabs.app  •  Prefix: 'en-' = to make or put into</a:t>
+              <a:t>Word Labs  •  wordlabs.app  •  Prefix: 'en-' = to make, put into</a:t>
             </a:r>
             <a:endParaRPr lang="en-US" sz="800" dirty="0"/>
           </a:p>
@@ -29754,7 +29721,7 @@
                 <a:ea typeface="Calibri" pitchFamily="34" charset="-122"/>
                 <a:cs typeface="Calibri" pitchFamily="34" charset="-120"/>
               </a:rPr>
-              <a:t>to make or put into</a:t>
+              <a:t>to make, put into</a:t>
             </a:r>
             <a:endParaRPr lang="en-US" sz="850" dirty="0"/>
           </a:p>
@@ -29866,7 +29833,7 @@
                 <a:ea typeface="Calibri" pitchFamily="34" charset="-122"/>
                 <a:cs typeface="Calibri" pitchFamily="34" charset="-120"/>
               </a:rPr>
-              <a:t>full of value or goodness</a:t>
+              <a:t>having great value or quality</a:t>
             </a:r>
             <a:endParaRPr lang="en-US" sz="850" dirty="0"/>
           </a:p>
@@ -30554,7 +30521,7 @@
                 <a:ea typeface="Calibri" pitchFamily="34" charset="-122"/>
                 <a:cs typeface="Calibri" pitchFamily="34" charset="-120"/>
               </a:rPr>
-              <a:t>Word Labs  •  wordlabs.app  •  Prefix: 'en-' = to make or put into</a:t>
+              <a:t>Word Labs  •  wordlabs.app  •  Prefix: 'en-' = to make, put into</a:t>
             </a:r>
             <a:endParaRPr lang="en-US" sz="800" dirty="0"/>
           </a:p>
@@ -30871,7 +30838,7 @@
                 <a:ea typeface="Calibri" pitchFamily="34" charset="-122"/>
                 <a:cs typeface="Calibri" pitchFamily="34" charset="-120"/>
               </a:rPr>
-              <a:t>to make or put into</a:t>
+              <a:t>to make, put into</a:t>
             </a:r>
             <a:endParaRPr lang="en-US" sz="850" dirty="0"/>
           </a:p>
@@ -30983,7 +30950,7 @@
                 <a:ea typeface="Calibri" pitchFamily="34" charset="-122"/>
                 <a:cs typeface="Calibri" pitchFamily="34" charset="-120"/>
               </a:rPr>
-              <a:t>full of value or goodness</a:t>
+              <a:t>having great value or quality</a:t>
             </a:r>
             <a:endParaRPr lang="en-US" sz="850" dirty="0"/>
           </a:p>
@@ -31962,7 +31929,7 @@
                 <a:ea typeface="Calibri" pitchFamily="34" charset="-122"/>
                 <a:cs typeface="Calibri" pitchFamily="34" charset="-120"/>
               </a:rPr>
-              <a:t>Word Labs  •  wordlabs.app  •  Prefix: 'en-' = to make or put into</a:t>
+              <a:t>Word Labs  •  wordlabs.app  •  Prefix: 'en-' = to make, put into</a:t>
             </a:r>
             <a:endParaRPr lang="en-US" sz="800" dirty="0"/>
           </a:p>
@@ -33131,7 +33098,7 @@
                 <a:ea typeface="Calibri" pitchFamily="34" charset="-122"/>
                 <a:cs typeface="Calibri" pitchFamily="34" charset="-120"/>
               </a:rPr>
-              <a:t>Word Labs  •  wordlabs.app  •  Prefix: 'en-' = to make or put into</a:t>
+              <a:t>Word Labs  •  wordlabs.app  •  Prefix: 'en-' = to make, put into</a:t>
             </a:r>
             <a:endParaRPr lang="en-US" sz="800" dirty="0"/>
           </a:p>
@@ -33802,7 +33769,7 @@
                 <a:ea typeface="Trebuchet MS" pitchFamily="34" charset="-122"/>
                 <a:cs typeface="Trebuchet MS" pitchFamily="34" charset="-120"/>
               </a:rPr>
-              <a:t>force</a:t>
+              <a:t>courage</a:t>
             </a:r>
             <a:endParaRPr lang="en-US" sz="1300" dirty="0"/>
           </a:p>
@@ -33955,7 +33922,7 @@
                 <a:ea typeface="Trebuchet MS" pitchFamily="34" charset="-122"/>
                 <a:cs typeface="Trebuchet MS" pitchFamily="34" charset="-120"/>
               </a:rPr>
-              <a:t>courage</a:t>
+              <a:t>rich</a:t>
             </a:r>
             <a:endParaRPr lang="en-US" sz="1300" dirty="0"/>
           </a:p>
@@ -34108,7 +34075,7 @@
                 <a:ea typeface="Trebuchet MS" pitchFamily="34" charset="-122"/>
                 <a:cs typeface="Trebuchet MS" pitchFamily="34" charset="-120"/>
               </a:rPr>
-              <a:t>rich</a:t>
+              <a:t>force</a:t>
             </a:r>
             <a:endParaRPr lang="en-US" sz="1300" dirty="0"/>
           </a:p>
@@ -34409,7 +34376,7 @@
                 <a:ea typeface="Trebuchet MS" pitchFamily="34" charset="-122"/>
                 <a:cs typeface="Trebuchet MS" pitchFamily="34" charset="-120"/>
               </a:rPr>
-              <a:t>enforce</a:t>
+              <a:t>encourage</a:t>
             </a:r>
             <a:endParaRPr lang="en-US" sz="1200" dirty="0"/>
           </a:p>
@@ -34475,7 +34442,7 @@
                 <a:ea typeface="Trebuchet MS" pitchFamily="34" charset="-122"/>
                 <a:cs typeface="Trebuchet MS" pitchFamily="34" charset="-120"/>
               </a:rPr>
-              <a:t>encourage</a:t>
+              <a:t>enrich</a:t>
             </a:r>
             <a:endParaRPr lang="en-US" sz="1200" dirty="0"/>
           </a:p>
@@ -34541,7 +34508,7 @@
                 <a:ea typeface="Trebuchet MS" pitchFamily="34" charset="-122"/>
                 <a:cs typeface="Trebuchet MS" pitchFamily="34" charset="-120"/>
               </a:rPr>
-              <a:t>enrich</a:t>
+              <a:t>enforce</a:t>
             </a:r>
             <a:endParaRPr lang="en-US" sz="1200" dirty="0"/>
           </a:p>
@@ -34739,7 +34706,7 @@
                 <a:ea typeface="Trebuchet MS" pitchFamily="34" charset="-122"/>
                 <a:cs typeface="Trebuchet MS" pitchFamily="34" charset="-120"/>
               </a:rPr>
-              <a:t>engage</a:t>
+              <a:t>ensure</a:t>
             </a:r>
             <a:endParaRPr lang="en-US" sz="1200" dirty="0"/>
           </a:p>
@@ -35031,7 +34998,7 @@
                 <a:ea typeface="Calibri" pitchFamily="34" charset="-122"/>
                 <a:cs typeface="Calibri" pitchFamily="34" charset="-120"/>
               </a:rPr>
-              <a:t>Word Labs  •  wordlabs.app  •  Prefix: 'en-' = to make or put into</a:t>
+              <a:t>Word Labs  •  wordlabs.app  •  Prefix: 'en-' = to make, put into</a:t>
             </a:r>
             <a:endParaRPr lang="en-US" sz="800" dirty="0"/>
           </a:p>
@@ -35195,7 +35162,7 @@
                 <a:ea typeface="Calibri" pitchFamily="34" charset="-122"/>
                 <a:cs typeface="Calibri" pitchFamily="34" charset="-120"/>
               </a:rPr>
-              <a:t>A meaningful word part added to the beginning of a root to change its meaning. The prefix 'en-' means 'to make or put into'.</a:t>
+              <a:t>A meaningful word part added to the beginning of a root to change its meaning. The prefix 'en-' means 'to make, put into'.</a:t>
             </a:r>
             <a:endParaRPr lang="en-US" sz="1350" dirty="0"/>
           </a:p>
@@ -35815,7 +35782,7 @@
                 <a:ea typeface="Calibri" pitchFamily="34" charset="-122"/>
                 <a:cs typeface="Calibri" pitchFamily="34" charset="-120"/>
               </a:rPr>
-              <a:t>Word Labs  •  wordlabs.app  •  Prefix: 'en-' = to make or put into</a:t>
+              <a:t>Word Labs  •  wordlabs.app  •  Prefix: 'en-' = to make, put into</a:t>
             </a:r>
             <a:endParaRPr lang="en-US" sz="800" dirty="0"/>
           </a:p>
@@ -35927,7 +35894,7 @@
                 <a:ea typeface="Calibri" pitchFamily="34" charset="-122"/>
                 <a:cs typeface="Calibri" pitchFamily="34" charset="-120"/>
               </a:rPr>
-              <a:t>1.  The prefix 'en-' can mean 'to make' or 'to put into'.</a:t>
+              <a:t>1.  The prefix 'en-' always makes a word mean the opposite of its base word.</a:t>
             </a:r>
             <a:endParaRPr lang="en-US" sz="1300" dirty="0"/>
           </a:p>
@@ -35950,11 +35917,11 @@
             </a:avLst>
           </a:prstGeom>
           <a:solidFill>
-            <a:srgbClr val="DCFCE7"/>
-          </a:solidFill>
-          <a:ln w="12700">
-            <a:solidFill>
-              <a:srgbClr val="16A34A"/>
+            <a:srgbClr val="FEE2E2"/>
+          </a:solidFill>
+          <a:ln w="12700">
+            <a:solidFill>
+              <a:srgbClr val="DC2626"/>
             </a:solidFill>
             <a:prstDash val="solid"/>
           </a:ln>
@@ -35987,13 +35954,13 @@
             <a:r>
               <a:rPr lang="en-US" sz="1100" b="1" dirty="0">
                 <a:solidFill>
-                  <a:srgbClr val="16A34A"/>
+                  <a:srgbClr val="DC2626"/>
                 </a:solidFill>
                 <a:latin typeface="Trebuchet MS" pitchFamily="34" charset="0"/>
                 <a:ea typeface="Trebuchet MS" pitchFamily="34" charset="-122"/>
                 <a:cs typeface="Trebuchet MS" pitchFamily="34" charset="-120"/>
               </a:rPr>
-              <a:t>TRUE</a:t>
+              <a:t>FALSE</a:t>
             </a:r>
             <a:endParaRPr lang="en-US" sz="1100" dirty="0"/>
           </a:p>
@@ -36066,7 +36033,7 @@
                 <a:ea typeface="Calibri" pitchFamily="34" charset="-122"/>
                 <a:cs typeface="Calibri" pitchFamily="34" charset="-120"/>
               </a:rPr>
-              <a:t>2.  The prefix 'en-' comes from a Greek word meaning 'against'.</a:t>
+              <a:t>2.  The word 'enlarge' contains the prefix 'en-' and means to make something bigger.</a:t>
             </a:r>
             <a:endParaRPr lang="en-US" sz="1300" dirty="0"/>
           </a:p>
@@ -36089,11 +36056,11 @@
             </a:avLst>
           </a:prstGeom>
           <a:solidFill>
-            <a:srgbClr val="FEE2E2"/>
-          </a:solidFill>
-          <a:ln w="12700">
-            <a:solidFill>
-              <a:srgbClr val="DC2626"/>
+            <a:srgbClr val="DCFCE7"/>
+          </a:solidFill>
+          <a:ln w="12700">
+            <a:solidFill>
+              <a:srgbClr val="16A34A"/>
             </a:solidFill>
             <a:prstDash val="solid"/>
           </a:ln>
@@ -36126,13 +36093,13 @@
             <a:r>
               <a:rPr lang="en-US" sz="1100" b="1" dirty="0">
                 <a:solidFill>
-                  <a:srgbClr val="DC2626"/>
+                  <a:srgbClr val="16A34A"/>
                 </a:solidFill>
                 <a:latin typeface="Trebuchet MS" pitchFamily="34" charset="0"/>
                 <a:ea typeface="Trebuchet MS" pitchFamily="34" charset="-122"/>
                 <a:cs typeface="Trebuchet MS" pitchFamily="34" charset="-120"/>
               </a:rPr>
-              <a:t>FALSE</a:t>
+              <a:t>TRUE</a:t>
             </a:r>
             <a:endParaRPr lang="en-US" sz="1100" dirty="0"/>
           </a:p>
@@ -36205,7 +36172,7 @@
                 <a:ea typeface="Calibri" pitchFamily="34" charset="-122"/>
                 <a:cs typeface="Calibri" pitchFamily="34" charset="-120"/>
               </a:rPr>
-              <a:t>3.  The word 'encourage' starts with the prefix 'en-'.</a:t>
+              <a:t>3.  The prefix 'en-' is only ever used at the end of a word.</a:t>
             </a:r>
             <a:endParaRPr lang="en-US" sz="1300" dirty="0"/>
           </a:p>
@@ -36228,11 +36195,11 @@
             </a:avLst>
           </a:prstGeom>
           <a:solidFill>
-            <a:srgbClr val="DCFCE7"/>
-          </a:solidFill>
-          <a:ln w="12700">
-            <a:solidFill>
-              <a:srgbClr val="16A34A"/>
+            <a:srgbClr val="FEE2E2"/>
+          </a:solidFill>
+          <a:ln w="12700">
+            <a:solidFill>
+              <a:srgbClr val="DC2626"/>
             </a:solidFill>
             <a:prstDash val="solid"/>
           </a:ln>
@@ -36265,13 +36232,13 @@
             <a:r>
               <a:rPr lang="en-US" sz="1100" b="1" dirty="0">
                 <a:solidFill>
-                  <a:srgbClr val="16A34A"/>
+                  <a:srgbClr val="DC2626"/>
                 </a:solidFill>
                 <a:latin typeface="Trebuchet MS" pitchFamily="34" charset="0"/>
                 <a:ea typeface="Trebuchet MS" pitchFamily="34" charset="-122"/>
                 <a:cs typeface="Trebuchet MS" pitchFamily="34" charset="-120"/>
               </a:rPr>
-              <a:t>TRUE</a:t>
+              <a:t>FALSE</a:t>
             </a:r>
             <a:endParaRPr lang="en-US" sz="1100" dirty="0"/>
           </a:p>
@@ -36344,7 +36311,7 @@
                 <a:ea typeface="Calibri" pitchFamily="34" charset="-122"/>
                 <a:cs typeface="Calibri" pitchFamily="34" charset="-120"/>
               </a:rPr>
-              <a:t>4.  Adding 'en-' to a base word often turns it into a verb.</a:t>
+              <a:t>4.  The prefix 'en-' comes from Latin.</a:t>
             </a:r>
             <a:endParaRPr lang="en-US" sz="1300" dirty="0"/>
           </a:p>
@@ -36483,7 +36450,7 @@
                 <a:ea typeface="Calibri" pitchFamily="34" charset="-122"/>
                 <a:cs typeface="Calibri" pitchFamily="34" charset="-120"/>
               </a:rPr>
-              <a:t>5.  The prefix 'en-' always makes words mean the opposite of the base word.</a:t>
+              <a:t>5.  The prefix 'en-' can mean 'to make something' or 'to put into a state'.</a:t>
             </a:r>
             <a:endParaRPr lang="en-US" sz="1300" dirty="0"/>
           </a:p>
@@ -36506,11 +36473,11 @@
             </a:avLst>
           </a:prstGeom>
           <a:solidFill>
-            <a:srgbClr val="FEE2E2"/>
-          </a:solidFill>
-          <a:ln w="12700">
-            <a:solidFill>
-              <a:srgbClr val="DC2626"/>
+            <a:srgbClr val="DCFCE7"/>
+          </a:solidFill>
+          <a:ln w="12700">
+            <a:solidFill>
+              <a:srgbClr val="16A34A"/>
             </a:solidFill>
             <a:prstDash val="solid"/>
           </a:ln>
@@ -36543,13 +36510,13 @@
             <a:r>
               <a:rPr lang="en-US" sz="1100" b="1" dirty="0">
                 <a:solidFill>
-                  <a:srgbClr val="DC2626"/>
+                  <a:srgbClr val="16A34A"/>
                 </a:solidFill>
                 <a:latin typeface="Trebuchet MS" pitchFamily="34" charset="0"/>
                 <a:ea typeface="Trebuchet MS" pitchFamily="34" charset="-122"/>
                 <a:cs typeface="Trebuchet MS" pitchFamily="34" charset="-120"/>
               </a:rPr>
-              <a:t>FALSE</a:t>
+              <a:t>TRUE</a:t>
             </a:r>
             <a:endParaRPr lang="en-US" sz="1100" dirty="0"/>
           </a:p>
@@ -36841,7 +36808,7 @@
                 <a:ea typeface="Calibri" pitchFamily="34" charset="-122"/>
                 <a:cs typeface="Calibri" pitchFamily="34" charset="-120"/>
               </a:rPr>
-              <a:t>Word Labs  •  wordlabs.app  •  Prefix: 'en-' = to make or put into</a:t>
+              <a:t>Word Labs  •  wordlabs.app  •  Prefix: 'en-' = to make, put into</a:t>
             </a:r>
             <a:endParaRPr lang="en-US" sz="800" dirty="0"/>
           </a:p>
@@ -36978,7 +36945,7 @@
                 <a:ea typeface="Trebuchet MS" pitchFamily="34" charset="-122"/>
                 <a:cs typeface="Trebuchet MS" pitchFamily="34" charset="-120"/>
               </a:rPr>
-              <a:t>to make or put into</a:t>
+              <a:t>to make, put into</a:t>
             </a:r>
             <a:endParaRPr lang="en-US" sz="2000" dirty="0"/>
           </a:p>
@@ -37254,7 +37221,7 @@
                 <a:ea typeface="Trebuchet MS" pitchFamily="34" charset="-122"/>
                 <a:cs typeface="Trebuchet MS" pitchFamily="34" charset="-120"/>
               </a:rPr>
-              <a:t>enforce</a:t>
+              <a:t>encourage</a:t>
             </a:r>
             <a:endParaRPr lang="en-US" sz="1300" dirty="0"/>
           </a:p>
@@ -37320,7 +37287,7 @@
                 <a:ea typeface="Trebuchet MS" pitchFamily="34" charset="-122"/>
                 <a:cs typeface="Trebuchet MS" pitchFamily="34" charset="-120"/>
               </a:rPr>
-              <a:t>encourage</a:t>
+              <a:t>enrich</a:t>
             </a:r>
             <a:endParaRPr lang="en-US" sz="1300" dirty="0"/>
           </a:p>
@@ -37386,7 +37353,7 @@
                 <a:ea typeface="Trebuchet MS" pitchFamily="34" charset="-122"/>
                 <a:cs typeface="Trebuchet MS" pitchFamily="34" charset="-120"/>
               </a:rPr>
-              <a:t>enrich</a:t>
+              <a:t>enforce</a:t>
             </a:r>
             <a:endParaRPr lang="en-US" sz="1300" dirty="0"/>
           </a:p>
@@ -37810,7 +37777,7 @@
                 <a:ea typeface="Calibri" pitchFamily="34" charset="-122"/>
                 <a:cs typeface="Calibri" pitchFamily="34" charset="-120"/>
               </a:rPr>
-              <a:t>Word Labs  •  wordlabs.app  •  Prefix: 'en-' = to make or put into</a:t>
+              <a:t>Word Labs  •  wordlabs.app  •  Prefix: 'en-' = to make, put into</a:t>
             </a:r>
             <a:endParaRPr lang="en-US" sz="800" dirty="0"/>
           </a:p>
@@ -38481,7 +38448,7 @@
                 <a:ea typeface="Trebuchet MS" pitchFamily="34" charset="-122"/>
                 <a:cs typeface="Trebuchet MS" pitchFamily="34" charset="-120"/>
               </a:rPr>
-              <a:t>force</a:t>
+              <a:t>courage</a:t>
             </a:r>
             <a:endParaRPr lang="en-US" sz="1300" dirty="0"/>
           </a:p>
@@ -38634,7 +38601,7 @@
                 <a:ea typeface="Trebuchet MS" pitchFamily="34" charset="-122"/>
                 <a:cs typeface="Trebuchet MS" pitchFamily="34" charset="-120"/>
               </a:rPr>
-              <a:t>courage</a:t>
+              <a:t>rich</a:t>
             </a:r>
             <a:endParaRPr lang="en-US" sz="1300" dirty="0"/>
           </a:p>
@@ -38787,7 +38754,7 @@
                 <a:ea typeface="Trebuchet MS" pitchFamily="34" charset="-122"/>
                 <a:cs typeface="Trebuchet MS" pitchFamily="34" charset="-120"/>
               </a:rPr>
-              <a:t>rich</a:t>
+              <a:t>force</a:t>
             </a:r>
             <a:endParaRPr lang="en-US" sz="1300" dirty="0"/>
           </a:p>
@@ -39584,7 +39551,7 @@
                 <a:ea typeface="Calibri" pitchFamily="34" charset="-122"/>
                 <a:cs typeface="Calibri" pitchFamily="34" charset="-120"/>
               </a:rPr>
-              <a:t>Word Labs  •  wordlabs.app  •  Prefix: 'en-' = to make or put into</a:t>
+              <a:t>Word Labs  •  wordlabs.app  •  Prefix: 'en-' = to make, put into</a:t>
             </a:r>
             <a:endParaRPr lang="en-US" sz="800" dirty="0"/>
           </a:p>
@@ -39762,7 +39729,7 @@
                 <a:ea typeface="Calibri" pitchFamily="34" charset="-122"/>
                 <a:cs typeface="Calibri" pitchFamily="34" charset="-120"/>
               </a:rPr>
-              <a:t>To give someone confidence to try or keep going.</a:t>
+              <a:t>To improve something by adding good things to it.</a:t>
             </a:r>
             <a:endParaRPr lang="en-US" sz="1200" dirty="0"/>
           </a:p>
@@ -39901,7 +39868,7 @@
                 <a:ea typeface="Calibri" pitchFamily="34" charset="-122"/>
                 <a:cs typeface="Calibri" pitchFamily="34" charset="-120"/>
               </a:rPr>
-              <a:t>To get happiness or pleasure from something.</a:t>
+              <a:t>To get pleasure or happiness from something.</a:t>
             </a:r>
             <a:endParaRPr lang="en-US" sz="1200" dirty="0"/>
           </a:p>
@@ -39974,7 +39941,7 @@
                 <a:ea typeface="Trebuchet MS" pitchFamily="34" charset="-122"/>
                 <a:cs typeface="Trebuchet MS" pitchFamily="34" charset="-120"/>
               </a:rPr>
-              <a:t>enforce</a:t>
+              <a:t>encourage</a:t>
             </a:r>
             <a:endParaRPr lang="en-US" sz="1200" dirty="0"/>
           </a:p>
@@ -40040,7 +40007,7 @@
                 <a:ea typeface="Calibri" pitchFamily="34" charset="-122"/>
                 <a:cs typeface="Calibri" pitchFamily="34" charset="-120"/>
               </a:rPr>
-              <a:t>To put someone or something in a risky or harmful situation.</a:t>
+              <a:t>To put someone or something at risk of being hurt.</a:t>
             </a:r>
             <a:endParaRPr lang="en-US" sz="1200" dirty="0"/>
           </a:p>
@@ -40113,7 +40080,7 @@
                 <a:ea typeface="Trebuchet MS" pitchFamily="34" charset="-122"/>
                 <a:cs typeface="Trebuchet MS" pitchFamily="34" charset="-120"/>
               </a:rPr>
-              <a:t>encourage</a:t>
+              <a:t>enrich</a:t>
             </a:r>
             <a:endParaRPr lang="en-US" sz="1200" dirty="0"/>
           </a:p>
@@ -40179,7 +40146,7 @@
                 <a:ea typeface="Calibri" pitchFamily="34" charset="-122"/>
                 <a:cs typeface="Calibri" pitchFamily="34" charset="-120"/>
               </a:rPr>
-              <a:t>To make sure a rule or law is followed.</a:t>
+              <a:t>To give someone confidence to do something.</a:t>
             </a:r>
             <a:endParaRPr lang="en-US" sz="1200" dirty="0"/>
           </a:p>
@@ -40252,7 +40219,7 @@
                 <a:ea typeface="Trebuchet MS" pitchFamily="34" charset="-122"/>
                 <a:cs typeface="Trebuchet MS" pitchFamily="34" charset="-120"/>
               </a:rPr>
-              <a:t>enrich</a:t>
+              <a:t>enforce</a:t>
             </a:r>
             <a:endParaRPr lang="en-US" sz="1200" dirty="0"/>
           </a:p>
@@ -40318,7 +40285,7 @@
                 <a:ea typeface="Calibri" pitchFamily="34" charset="-122"/>
                 <a:cs typeface="Calibri" pitchFamily="34" charset="-120"/>
               </a:rPr>
-              <a:t>To put something inside or surround it completely.</a:t>
+              <a:t>To surround something or put it inside something else.</a:t>
             </a:r>
             <a:endParaRPr lang="en-US" sz="1200" dirty="0"/>
           </a:p>
@@ -40457,7 +40424,7 @@
                 <a:ea typeface="Calibri" pitchFamily="34" charset="-122"/>
                 <a:cs typeface="Calibri" pitchFamily="34" charset="-120"/>
               </a:rPr>
-              <a:t>To make something better or more valuable.</a:t>
+              <a:t>To make sure a rule or law is followed.</a:t>
             </a:r>
             <a:endParaRPr lang="en-US" sz="1200" dirty="0"/>
           </a:p>
@@ -40888,7 +40855,7 @@
                 <a:ea typeface="Calibri" pitchFamily="34" charset="-122"/>
                 <a:cs typeface="Calibri" pitchFamily="34" charset="-120"/>
               </a:rPr>
-              <a:t>Word Labs  •  wordlabs.app  •  Prefix: 'en-' = to make or put into</a:t>
+              <a:t>Word Labs  •  wordlabs.app  •  Prefix: 'en-' = to make, put into</a:t>
             </a:r>
             <a:endParaRPr lang="en-US" sz="800" dirty="0"/>
           </a:p>
@@ -41091,7 +41058,7 @@
                 <a:ea typeface="Calibri" pitchFamily="34" charset="-122"/>
                 <a:cs typeface="Calibri" pitchFamily="34" charset="-120"/>
               </a:rPr>
-              <a:t>We should always encourage our friends when they are finding something difficult.</a:t>
+              <a:t>We should encourage our friends when they are trying something new.</a:t>
             </a:r>
             <a:endParaRPr lang="en-US" sz="1500" dirty="0"/>
           </a:p>
@@ -41255,7 +41222,7 @@
                 <a:ea typeface="Calibri" pitchFamily="34" charset="-122"/>
                 <a:cs typeface="Calibri" pitchFamily="34" charset="-120"/>
               </a:rPr>
-              <a:t>The rangers worked hard to protect and enrich the habitats of native animals.</a:t>
+              <a:t>The scientist wanted to ensure the experiment was done safely.</a:t>
             </a:r>
             <a:endParaRPr lang="en-US" sz="1500" dirty="0"/>
           </a:p>
@@ -41419,7 +41386,7 @@
                 <a:ea typeface="Calibri" pitchFamily="34" charset="-122"/>
                 <a:cs typeface="Calibri" pitchFamily="34" charset="-120"/>
               </a:rPr>
-              <a:t>The teacher asked us to enlarge the diagram so it was easier to see.</a:t>
+              <a:t>The fence was built to enclose the animals in the paddock.</a:t>
             </a:r>
             <a:endParaRPr lang="en-US" sz="1500" dirty="0"/>
           </a:p>

--- a/output/wordlabs-en-prefix-3day.pptx
+++ b/output/wordlabs-en-prefix-3day.pptx
@@ -4240,7 +4240,7 @@
                 <a:ea typeface="Calibri" pitchFamily="34" charset="-122"/>
                 <a:cs typeface="Calibri" pitchFamily="34" charset="-120"/>
               </a:rPr>
-              <a:t>"to make, put into"</a:t>
+              <a:t>"cause to; make"</a:t>
             </a:r>
             <a:endParaRPr lang="en-US" sz="2200" dirty="0"/>
           </a:p>
@@ -4279,7 +4279,7 @@
                 <a:ea typeface="Calibri" pitchFamily="34" charset="-122"/>
                 <a:cs typeface="Calibri" pitchFamily="34" charset="-120"/>
               </a:rPr>
-              <a:t>Origin: Latin: in</a:t>
+              <a:t>Origin: Prefix</a:t>
             </a:r>
             <a:endParaRPr lang="en-US" sz="1300" dirty="0"/>
           </a:p>
@@ -5288,7 +5288,7 @@
                 <a:ea typeface="Calibri" pitchFamily="34" charset="-122"/>
                 <a:cs typeface="Calibri" pitchFamily="34" charset="-120"/>
               </a:rPr>
-              <a:t>Word Labs  •  wordlabs.app  •  Prefix: 'en-' = to make, put into</a:t>
+              <a:t>Word Labs  •  wordlabs.app  •  Prefix: 'en-' = cause to; make</a:t>
             </a:r>
             <a:endParaRPr lang="en-US" sz="800" dirty="0"/>
           </a:p>
@@ -5622,7 +5622,7 @@
                 <a:ea typeface="Trebuchet MS" pitchFamily="34" charset="-122"/>
                 <a:cs typeface="Trebuchet MS" pitchFamily="34" charset="-120"/>
               </a:rPr>
-              <a:t>1</a:t>
+              <a:t>0</a:t>
             </a:r>
             <a:pPr algn="ctr" indent="0" marL="0">
               <a:buNone/>
@@ -5928,7 +5928,7 @@
                 <a:ea typeface="Calibri" pitchFamily="34" charset="-122"/>
                 <a:cs typeface="Calibri" pitchFamily="34" charset="-120"/>
               </a:rPr>
-              <a:t>Word Labs  •  wordlabs.app  •  Prefix: 'en-' = to make, put into</a:t>
+              <a:t>Word Labs  •  wordlabs.app  •  Prefix: 'en-' = cause to; make</a:t>
             </a:r>
             <a:endParaRPr lang="en-US" sz="800" dirty="0"/>
           </a:p>
@@ -6040,7 +6040,7 @@
                 <a:ea typeface="Calibri" pitchFamily="34" charset="-122"/>
                 <a:cs typeface="Calibri" pitchFamily="34" charset="-120"/>
               </a:rPr>
-              <a:t>The teacher tried to </a:t>
+              <a:t>The chickens live in an </a:t>
             </a:r>
             <a:pPr algn="l" indent="0" marL="0">
               <a:buNone/>
@@ -6057,7 +6057,7 @@
                 <a:ea typeface="Calibri" pitchFamily="34" charset="-122"/>
                 <a:cs typeface="Calibri" pitchFamily="34" charset="-120"/>
               </a:rPr>
-              <a:t>encourage</a:t>
+              <a:t>enclosed</a:t>
             </a:r>
             <a:pPr algn="l" indent="0" marL="0">
               <a:buNone/>
@@ -6071,7 +6071,7 @@
                 <a:ea typeface="Calibri" pitchFamily="34" charset="-122"/>
                 <a:cs typeface="Calibri" pitchFamily="34" charset="-120"/>
               </a:rPr>
-              <a:t> her students and </a:t>
+              <a:t> pen in the garden. Her name was </a:t>
             </a:r>
             <a:pPr algn="l" indent="0" marL="0">
               <a:buNone/>
@@ -6088,7 +6088,7 @@
                 <a:ea typeface="Calibri" pitchFamily="34" charset="-122"/>
                 <a:cs typeface="Calibri" pitchFamily="34" charset="-120"/>
               </a:rPr>
-              <a:t>enjoyed</a:t>
+              <a:t>engraved</a:t>
             </a:r>
             <a:pPr algn="l" indent="0" marL="0">
               <a:buNone/>
@@ -6102,7 +6102,7 @@
                 <a:ea typeface="Calibri" pitchFamily="34" charset="-122"/>
                 <a:cs typeface="Calibri" pitchFamily="34" charset="-120"/>
               </a:rPr>
-              <a:t> watching them succeed.</a:t>
+              <a:t> on the trophy.</a:t>
             </a:r>
             <a:endParaRPr lang="en-US" sz="1800" dirty="0"/>
           </a:p>
@@ -6257,7 +6257,7 @@
                 <a:ea typeface="Trebuchet MS" pitchFamily="34" charset="-122"/>
                 <a:cs typeface="Trebuchet MS" pitchFamily="34" charset="-120"/>
               </a:rPr>
-              <a:t>encourage</a:t>
+              <a:t>enclosed</a:t>
             </a:r>
             <a:endParaRPr lang="en-US" sz="1400" dirty="0"/>
           </a:p>
@@ -6385,7 +6385,7 @@
                 <a:ea typeface="Trebuchet MS" pitchFamily="34" charset="-122"/>
                 <a:cs typeface="Trebuchet MS" pitchFamily="34" charset="-120"/>
               </a:rPr>
-              <a:t>enjoyed</a:t>
+              <a:t>engraved</a:t>
             </a:r>
             <a:endParaRPr lang="en-US" sz="1400" dirty="0"/>
           </a:p>
@@ -6716,7 +6716,7 @@
                 <a:ea typeface="Calibri" pitchFamily="34" charset="-122"/>
                 <a:cs typeface="Calibri" pitchFamily="34" charset="-120"/>
               </a:rPr>
-              <a:t>Word Labs  •  wordlabs.app  •  Prefix: 'en-' = to make, put into</a:t>
+              <a:t>Word Labs  •  wordlabs.app  •  Prefix: 'en-' = cause to; make</a:t>
             </a:r>
             <a:endParaRPr lang="en-US" sz="800" dirty="0"/>
           </a:p>
@@ -6855,7 +6855,7 @@
                 <a:ea typeface="Trebuchet MS" pitchFamily="34" charset="-122"/>
                 <a:cs typeface="Trebuchet MS" pitchFamily="34" charset="-120"/>
               </a:rPr>
-              <a:t>encourage</a:t>
+              <a:t>enclosed</a:t>
             </a:r>
             <a:endParaRPr lang="en-US" sz="2800" dirty="0"/>
           </a:p>
@@ -7543,7 +7543,7 @@
                 <a:ea typeface="Calibri" pitchFamily="34" charset="-122"/>
                 <a:cs typeface="Calibri" pitchFamily="34" charset="-120"/>
               </a:rPr>
-              <a:t>Word Labs  •  wordlabs.app  •  Prefix: 'en-' = to make, put into</a:t>
+              <a:t>Word Labs  •  wordlabs.app  •  Prefix: 'en-' = cause to; make</a:t>
             </a:r>
             <a:endParaRPr lang="en-US" sz="800" dirty="0"/>
           </a:p>
@@ -7682,7 +7682,7 @@
                 <a:ea typeface="Trebuchet MS" pitchFamily="34" charset="-122"/>
                 <a:cs typeface="Trebuchet MS" pitchFamily="34" charset="-120"/>
               </a:rPr>
-              <a:t>encourage</a:t>
+              <a:t>enclosed</a:t>
             </a:r>
             <a:endParaRPr lang="en-US" sz="2800" dirty="0"/>
           </a:p>
@@ -7762,7 +7762,7 @@
         </p:nvSpPr>
         <p:spPr>
           <a:xfrm>
-            <a:off x="2938272" y="2258568"/>
+            <a:off x="2221992" y="2258568"/>
             <a:ext cx="1828800" cy="292608"/>
           </a:xfrm>
           <a:prstGeom prst="rect">
@@ -7796,7 +7796,7 @@
         </p:nvSpPr>
         <p:spPr>
           <a:xfrm>
-            <a:off x="2938272" y="2258568"/>
+            <a:off x="2221992" y="2258568"/>
             <a:ext cx="1828800" cy="292608"/>
           </a:xfrm>
           <a:prstGeom prst="rect">
@@ -7835,7 +7835,7 @@
         </p:nvSpPr>
         <p:spPr>
           <a:xfrm>
-            <a:off x="2938272" y="2569464"/>
+            <a:off x="2221992" y="2569464"/>
             <a:ext cx="1828800" cy="201168"/>
           </a:xfrm>
           <a:prstGeom prst="rect">
@@ -7860,7 +7860,7 @@
                 <a:ea typeface="Calibri" pitchFamily="34" charset="-122"/>
                 <a:cs typeface="Calibri" pitchFamily="34" charset="-120"/>
               </a:rPr>
-              <a:t>to make, put into</a:t>
+              <a:t>made of; to make</a:t>
             </a:r>
             <a:endParaRPr lang="en-US" sz="850" dirty="0"/>
           </a:p>
@@ -7874,7 +7874,7 @@
         </p:nvSpPr>
         <p:spPr>
           <a:xfrm>
-            <a:off x="5803392" y="2258568"/>
+            <a:off x="4370832" y="2258568"/>
             <a:ext cx="1828800" cy="292608"/>
           </a:xfrm>
           <a:prstGeom prst="rect">
@@ -7908,7 +7908,7 @@
         </p:nvSpPr>
         <p:spPr>
           <a:xfrm>
-            <a:off x="5803392" y="2258568"/>
+            <a:off x="4370832" y="2258568"/>
             <a:ext cx="1828800" cy="292608"/>
           </a:xfrm>
           <a:prstGeom prst="rect">
@@ -7933,7 +7933,7 @@
                 <a:ea typeface="Trebuchet MS" pitchFamily="34" charset="-122"/>
                 <a:cs typeface="Trebuchet MS" pitchFamily="34" charset="-120"/>
               </a:rPr>
-              <a:t>courage</a:t>
+              <a:t>clos</a:t>
             </a:r>
             <a:endParaRPr lang="en-US" sz="1300" dirty="0"/>
           </a:p>
@@ -7947,7 +7947,7 @@
         </p:nvSpPr>
         <p:spPr>
           <a:xfrm>
-            <a:off x="5803392" y="2569464"/>
+            <a:off x="4370832" y="2569464"/>
             <a:ext cx="1828800" cy="201168"/>
           </a:xfrm>
           <a:prstGeom prst="rect">
@@ -7972,7 +7972,7 @@
                 <a:ea typeface="Calibri" pitchFamily="34" charset="-122"/>
                 <a:cs typeface="Calibri" pitchFamily="34" charset="-120"/>
               </a:rPr>
-              <a:t>bravery, confidence</a:t>
+              <a:t>close</a:t>
             </a:r>
             <a:endParaRPr lang="en-US" sz="850" dirty="0"/>
           </a:p>
@@ -7981,6 +7981,118 @@
       <p:sp>
         <p:nvSpPr>
           <p:cNvPr id="22" name="Shape 20"/>
+          <p:cNvSpPr/>
+          <p:nvPr/>
+        </p:nvSpPr>
+        <p:spPr>
+          <a:xfrm>
+            <a:off x="6519672" y="2258568"/>
+            <a:ext cx="1828800" cy="292608"/>
+          </a:xfrm>
+          <a:prstGeom prst="rect">
+            <a:avLst>
+              <a:gd name="adj" fmla="val 25000"/>
+            </a:avLst>
+          </a:prstGeom>
+          <a:solidFill>
+            <a:srgbClr val="FCE7F3"/>
+          </a:solidFill>
+          <a:ln w="19050">
+            <a:solidFill>
+              <a:srgbClr val="DB2777"/>
+            </a:solidFill>
+            <a:prstDash val="solid"/>
+          </a:ln>
+          <a:effectLst>
+            <a:outerShdw sx="100000" sy="100000" kx="0" ky="0" algn="bl" rotWithShape="0" blurRad="101600" dist="38100" dir="8100000">
+              <a:srgbClr val="000000">
+                <a:alpha val="12000"/>
+              </a:srgbClr>
+            </a:outerShdw>
+          </a:effectLst>
+        </p:spPr>
+      </p:sp>
+      <p:sp>
+        <p:nvSpPr>
+          <p:cNvPr id="23" name="Text 21"/>
+          <p:cNvSpPr/>
+          <p:nvPr/>
+        </p:nvSpPr>
+        <p:spPr>
+          <a:xfrm>
+            <a:off x="6519672" y="2258568"/>
+            <a:ext cx="1828800" cy="292608"/>
+          </a:xfrm>
+          <a:prstGeom prst="rect">
+            <a:avLst/>
+          </a:prstGeom>
+          <a:noFill/>
+          <a:ln/>
+        </p:spPr>
+        <p:txBody>
+          <a:bodyPr wrap="square" lIns="0" tIns="0" rIns="0" bIns="0" rtlCol="0" anchor="ctr"/>
+          <a:lstStyle/>
+          <a:p>
+            <a:pPr algn="ctr" indent="0" marL="0">
+              <a:buNone/>
+            </a:pPr>
+            <a:r>
+              <a:rPr lang="en-US" sz="1300" b="1" dirty="0">
+                <a:solidFill>
+                  <a:srgbClr val="9D174D"/>
+                </a:solidFill>
+                <a:latin typeface="Trebuchet MS" pitchFamily="34" charset="0"/>
+                <a:ea typeface="Trebuchet MS" pitchFamily="34" charset="-122"/>
+                <a:cs typeface="Trebuchet MS" pitchFamily="34" charset="-120"/>
+              </a:rPr>
+              <a:t>ed</a:t>
+            </a:r>
+            <a:endParaRPr lang="en-US" sz="1300" dirty="0"/>
+          </a:p>
+        </p:txBody>
+      </p:sp>
+      <p:sp>
+        <p:nvSpPr>
+          <p:cNvPr id="24" name="Text 22"/>
+          <p:cNvSpPr/>
+          <p:nvPr/>
+        </p:nvSpPr>
+        <p:spPr>
+          <a:xfrm>
+            <a:off x="6519672" y="2569464"/>
+            <a:ext cx="1828800" cy="201168"/>
+          </a:xfrm>
+          <a:prstGeom prst="rect">
+            <a:avLst/>
+          </a:prstGeom>
+          <a:noFill/>
+          <a:ln/>
+        </p:spPr>
+        <p:txBody>
+          <a:bodyPr wrap="square" lIns="0" tIns="0" rIns="0" bIns="0" rtlCol="0" anchor="t"/>
+          <a:lstStyle/>
+          <a:p>
+            <a:pPr algn="ctr" indent="0" marL="0">
+              <a:buNone/>
+            </a:pPr>
+            <a:r>
+              <a:rPr lang="en-US" sz="850" dirty="0">
+                <a:solidFill>
+                  <a:srgbClr val="475569"/>
+                </a:solidFill>
+                <a:latin typeface="Calibri" pitchFamily="34" charset="0"/>
+                <a:ea typeface="Calibri" pitchFamily="34" charset="-122"/>
+                <a:cs typeface="Calibri" pitchFamily="34" charset="-120"/>
+              </a:rPr>
+              <a:t>past tense</a:t>
+            </a:r>
+            <a:endParaRPr lang="en-US" sz="850" dirty="0"/>
+          </a:p>
+        </p:txBody>
+      </p:sp>
+      <p:sp>
+        <p:nvSpPr>
+          <p:cNvPr id="25" name="Shape 23"/>
           <p:cNvSpPr/>
           <p:nvPr/>
         </p:nvSpPr>
@@ -8007,7 +8119,7 @@
       </p:sp>
       <p:sp>
         <p:nvSpPr>
-          <p:cNvPr id="23" name="Text 21"/>
+          <p:cNvPr id="26" name="Text 24"/>
           <p:cNvSpPr/>
           <p:nvPr/>
         </p:nvSpPr>
@@ -8046,7 +8158,7 @@
       </p:sp>
       <p:sp>
         <p:nvSpPr>
-          <p:cNvPr id="24" name="Shape 22"/>
+          <p:cNvPr id="27" name="Shape 25"/>
           <p:cNvSpPr/>
           <p:nvPr/>
         </p:nvSpPr>
@@ -8073,7 +8185,7 @@
       </p:sp>
       <p:sp>
         <p:nvSpPr>
-          <p:cNvPr id="25" name="Text 23"/>
+          <p:cNvPr id="28" name="Text 26"/>
           <p:cNvSpPr/>
           <p:nvPr/>
         </p:nvSpPr>
@@ -8112,7 +8224,7 @@
       </p:sp>
       <p:sp>
         <p:nvSpPr>
-          <p:cNvPr id="26" name="Shape 24"/>
+          <p:cNvPr id="29" name="Shape 27"/>
           <p:cNvSpPr/>
           <p:nvPr/>
         </p:nvSpPr>
@@ -8139,7 +8251,7 @@
       </p:sp>
       <p:sp>
         <p:nvSpPr>
-          <p:cNvPr id="27" name="Text 25"/>
+          <p:cNvPr id="30" name="Text 28"/>
           <p:cNvSpPr/>
           <p:nvPr/>
         </p:nvSpPr>
@@ -8178,7 +8290,7 @@
       </p:sp>
       <p:sp>
         <p:nvSpPr>
-          <p:cNvPr id="28" name="Shape 26"/>
+          <p:cNvPr id="31" name="Shape 29"/>
           <p:cNvSpPr/>
           <p:nvPr/>
         </p:nvSpPr>
@@ -8205,7 +8317,7 @@
       </p:sp>
       <p:sp>
         <p:nvSpPr>
-          <p:cNvPr id="29" name="Text 27"/>
+          <p:cNvPr id="32" name="Text 30"/>
           <p:cNvSpPr/>
           <p:nvPr/>
         </p:nvSpPr>
@@ -8528,7 +8640,7 @@
                 <a:ea typeface="Calibri" pitchFamily="34" charset="-122"/>
                 <a:cs typeface="Calibri" pitchFamily="34" charset="-120"/>
               </a:rPr>
-              <a:t>Word Labs  •  wordlabs.app  •  Prefix: 'en-' = to make, put into</a:t>
+              <a:t>Word Labs  •  wordlabs.app  •  Prefix: 'en-' = cause to; make</a:t>
             </a:r>
             <a:endParaRPr lang="en-US" sz="800" dirty="0"/>
           </a:p>
@@ -8667,7 +8779,7 @@
                 <a:ea typeface="Trebuchet MS" pitchFamily="34" charset="-122"/>
                 <a:cs typeface="Trebuchet MS" pitchFamily="34" charset="-120"/>
               </a:rPr>
-              <a:t>encourage</a:t>
+              <a:t>enclosed</a:t>
             </a:r>
             <a:endParaRPr lang="en-US" sz="2800" dirty="0"/>
           </a:p>
@@ -8747,7 +8859,7 @@
         </p:nvSpPr>
         <p:spPr>
           <a:xfrm>
-            <a:off x="2938272" y="2258568"/>
+            <a:off x="2221992" y="2258568"/>
             <a:ext cx="1828800" cy="292608"/>
           </a:xfrm>
           <a:prstGeom prst="rect">
@@ -8781,7 +8893,7 @@
         </p:nvSpPr>
         <p:spPr>
           <a:xfrm>
-            <a:off x="2938272" y="2258568"/>
+            <a:off x="2221992" y="2258568"/>
             <a:ext cx="1828800" cy="292608"/>
           </a:xfrm>
           <a:prstGeom prst="rect">
@@ -8820,7 +8932,7 @@
         </p:nvSpPr>
         <p:spPr>
           <a:xfrm>
-            <a:off x="2938272" y="2569464"/>
+            <a:off x="2221992" y="2569464"/>
             <a:ext cx="1828800" cy="201168"/>
           </a:xfrm>
           <a:prstGeom prst="rect">
@@ -8845,7 +8957,7 @@
                 <a:ea typeface="Calibri" pitchFamily="34" charset="-122"/>
                 <a:cs typeface="Calibri" pitchFamily="34" charset="-120"/>
               </a:rPr>
-              <a:t>to make, put into</a:t>
+              <a:t>made of; to make</a:t>
             </a:r>
             <a:endParaRPr lang="en-US" sz="850" dirty="0"/>
           </a:p>
@@ -8859,7 +8971,7 @@
         </p:nvSpPr>
         <p:spPr>
           <a:xfrm>
-            <a:off x="5803392" y="2258568"/>
+            <a:off x="4370832" y="2258568"/>
             <a:ext cx="1828800" cy="292608"/>
           </a:xfrm>
           <a:prstGeom prst="rect">
@@ -8893,7 +9005,7 @@
         </p:nvSpPr>
         <p:spPr>
           <a:xfrm>
-            <a:off x="5803392" y="2258568"/>
+            <a:off x="4370832" y="2258568"/>
             <a:ext cx="1828800" cy="292608"/>
           </a:xfrm>
           <a:prstGeom prst="rect">
@@ -8918,7 +9030,7 @@
                 <a:ea typeface="Trebuchet MS" pitchFamily="34" charset="-122"/>
                 <a:cs typeface="Trebuchet MS" pitchFamily="34" charset="-120"/>
               </a:rPr>
-              <a:t>courage</a:t>
+              <a:t>clos</a:t>
             </a:r>
             <a:endParaRPr lang="en-US" sz="1300" dirty="0"/>
           </a:p>
@@ -8932,7 +9044,7 @@
         </p:nvSpPr>
         <p:spPr>
           <a:xfrm>
-            <a:off x="5803392" y="2569464"/>
+            <a:off x="4370832" y="2569464"/>
             <a:ext cx="1828800" cy="201168"/>
           </a:xfrm>
           <a:prstGeom prst="rect">
@@ -8957,7 +9069,7 @@
                 <a:ea typeface="Calibri" pitchFamily="34" charset="-122"/>
                 <a:cs typeface="Calibri" pitchFamily="34" charset="-120"/>
               </a:rPr>
-              <a:t>bravery, confidence</a:t>
+              <a:t>close</a:t>
             </a:r>
             <a:endParaRPr lang="en-US" sz="850" dirty="0"/>
           </a:p>
@@ -8966,6 +9078,118 @@
       <p:sp>
         <p:nvSpPr>
           <p:cNvPr id="22" name="Shape 20"/>
+          <p:cNvSpPr/>
+          <p:nvPr/>
+        </p:nvSpPr>
+        <p:spPr>
+          <a:xfrm>
+            <a:off x="6519672" y="2258568"/>
+            <a:ext cx="1828800" cy="292608"/>
+          </a:xfrm>
+          <a:prstGeom prst="rect">
+            <a:avLst>
+              <a:gd name="adj" fmla="val 25000"/>
+            </a:avLst>
+          </a:prstGeom>
+          <a:solidFill>
+            <a:srgbClr val="FCE7F3"/>
+          </a:solidFill>
+          <a:ln w="19050">
+            <a:solidFill>
+              <a:srgbClr val="DB2777"/>
+            </a:solidFill>
+            <a:prstDash val="solid"/>
+          </a:ln>
+          <a:effectLst>
+            <a:outerShdw sx="100000" sy="100000" kx="0" ky="0" algn="bl" rotWithShape="0" blurRad="101600" dist="38100" dir="8100000">
+              <a:srgbClr val="000000">
+                <a:alpha val="12000"/>
+              </a:srgbClr>
+            </a:outerShdw>
+          </a:effectLst>
+        </p:spPr>
+      </p:sp>
+      <p:sp>
+        <p:nvSpPr>
+          <p:cNvPr id="23" name="Text 21"/>
+          <p:cNvSpPr/>
+          <p:nvPr/>
+        </p:nvSpPr>
+        <p:spPr>
+          <a:xfrm>
+            <a:off x="6519672" y="2258568"/>
+            <a:ext cx="1828800" cy="292608"/>
+          </a:xfrm>
+          <a:prstGeom prst="rect">
+            <a:avLst/>
+          </a:prstGeom>
+          <a:noFill/>
+          <a:ln/>
+        </p:spPr>
+        <p:txBody>
+          <a:bodyPr wrap="square" lIns="0" tIns="0" rIns="0" bIns="0" rtlCol="0" anchor="ctr"/>
+          <a:lstStyle/>
+          <a:p>
+            <a:pPr algn="ctr" indent="0" marL="0">
+              <a:buNone/>
+            </a:pPr>
+            <a:r>
+              <a:rPr lang="en-US" sz="1300" b="1" dirty="0">
+                <a:solidFill>
+                  <a:srgbClr val="9D174D"/>
+                </a:solidFill>
+                <a:latin typeface="Trebuchet MS" pitchFamily="34" charset="0"/>
+                <a:ea typeface="Trebuchet MS" pitchFamily="34" charset="-122"/>
+                <a:cs typeface="Trebuchet MS" pitchFamily="34" charset="-120"/>
+              </a:rPr>
+              <a:t>ed</a:t>
+            </a:r>
+            <a:endParaRPr lang="en-US" sz="1300" dirty="0"/>
+          </a:p>
+        </p:txBody>
+      </p:sp>
+      <p:sp>
+        <p:nvSpPr>
+          <p:cNvPr id="24" name="Text 22"/>
+          <p:cNvSpPr/>
+          <p:nvPr/>
+        </p:nvSpPr>
+        <p:spPr>
+          <a:xfrm>
+            <a:off x="6519672" y="2569464"/>
+            <a:ext cx="1828800" cy="201168"/>
+          </a:xfrm>
+          <a:prstGeom prst="rect">
+            <a:avLst/>
+          </a:prstGeom>
+          <a:noFill/>
+          <a:ln/>
+        </p:spPr>
+        <p:txBody>
+          <a:bodyPr wrap="square" lIns="0" tIns="0" rIns="0" bIns="0" rtlCol="0" anchor="t"/>
+          <a:lstStyle/>
+          <a:p>
+            <a:pPr algn="ctr" indent="0" marL="0">
+              <a:buNone/>
+            </a:pPr>
+            <a:r>
+              <a:rPr lang="en-US" sz="850" dirty="0">
+                <a:solidFill>
+                  <a:srgbClr val="475569"/>
+                </a:solidFill>
+                <a:latin typeface="Calibri" pitchFamily="34" charset="0"/>
+                <a:ea typeface="Calibri" pitchFamily="34" charset="-122"/>
+                <a:cs typeface="Calibri" pitchFamily="34" charset="-120"/>
+              </a:rPr>
+              <a:t>past tense</a:t>
+            </a:r>
+            <a:endParaRPr lang="en-US" sz="850" dirty="0"/>
+          </a:p>
+        </p:txBody>
+      </p:sp>
+      <p:sp>
+        <p:nvSpPr>
+          <p:cNvPr id="25" name="Shape 23"/>
           <p:cNvSpPr/>
           <p:nvPr/>
         </p:nvSpPr>
@@ -8992,7 +9216,7 @@
       </p:sp>
       <p:sp>
         <p:nvSpPr>
-          <p:cNvPr id="23" name="Text 21"/>
+          <p:cNvPr id="26" name="Text 24"/>
           <p:cNvSpPr/>
           <p:nvPr/>
         </p:nvSpPr>
@@ -9031,7 +9255,7 @@
       </p:sp>
       <p:sp>
         <p:nvSpPr>
-          <p:cNvPr id="24" name="Shape 22"/>
+          <p:cNvPr id="27" name="Shape 25"/>
           <p:cNvSpPr/>
           <p:nvPr/>
         </p:nvSpPr>
@@ -9058,13 +9282,13 @@
       </p:sp>
       <p:sp>
         <p:nvSpPr>
-          <p:cNvPr id="25" name="Shape 23"/>
-          <p:cNvSpPr/>
-          <p:nvPr/>
-        </p:nvSpPr>
-        <p:spPr>
-          <a:xfrm>
-            <a:off x="2313432" y="3364992"/>
+          <p:cNvPr id="28" name="Shape 26"/>
+          <p:cNvSpPr/>
+          <p:nvPr/>
+        </p:nvSpPr>
+        <p:spPr>
+          <a:xfrm>
+            <a:off x="2999232" y="3364992"/>
             <a:ext cx="1645920" cy="475488"/>
           </a:xfrm>
           <a:prstGeom prst="rect">
@@ -9085,13 +9309,13 @@
       </p:sp>
       <p:sp>
         <p:nvSpPr>
-          <p:cNvPr id="26" name="Text 24"/>
-          <p:cNvSpPr/>
-          <p:nvPr/>
-        </p:nvSpPr>
-        <p:spPr>
-          <a:xfrm>
-            <a:off x="2313432" y="3364992"/>
+          <p:cNvPr id="29" name="Text 27"/>
+          <p:cNvSpPr/>
+          <p:nvPr/>
+        </p:nvSpPr>
+        <p:spPr>
+          <a:xfrm>
+            <a:off x="2999232" y="3364992"/>
             <a:ext cx="1645920" cy="475488"/>
           </a:xfrm>
           <a:prstGeom prst="rect">
@@ -9124,14 +9348,14 @@
       </p:sp>
       <p:sp>
         <p:nvSpPr>
-          <p:cNvPr id="27" name="Text 25"/>
-          <p:cNvSpPr/>
-          <p:nvPr/>
-        </p:nvSpPr>
-        <p:spPr>
-          <a:xfrm>
-            <a:off x="3959352" y="3364992"/>
-            <a:ext cx="411480" cy="475488"/>
+          <p:cNvPr id="30" name="Text 28"/>
+          <p:cNvSpPr/>
+          <p:nvPr/>
+        </p:nvSpPr>
+        <p:spPr>
+          <a:xfrm>
+            <a:off x="4645152" y="3364992"/>
+            <a:ext cx="1097280" cy="475488"/>
           </a:xfrm>
           <a:prstGeom prst="rect">
             <a:avLst/>
@@ -9163,13 +9387,13 @@
       </p:sp>
       <p:sp>
         <p:nvSpPr>
-          <p:cNvPr id="28" name="Shape 26"/>
-          <p:cNvSpPr/>
-          <p:nvPr/>
-        </p:nvSpPr>
-        <p:spPr>
-          <a:xfrm>
-            <a:off x="4370832" y="3364992"/>
+          <p:cNvPr id="31" name="Shape 29"/>
+          <p:cNvSpPr/>
+          <p:nvPr/>
+        </p:nvSpPr>
+        <p:spPr>
+          <a:xfrm>
+            <a:off x="5742432" y="3364992"/>
             <a:ext cx="1645920" cy="475488"/>
           </a:xfrm>
           <a:prstGeom prst="rect">
@@ -9190,13 +9414,13 @@
       </p:sp>
       <p:sp>
         <p:nvSpPr>
-          <p:cNvPr id="29" name="Text 27"/>
-          <p:cNvSpPr/>
-          <p:nvPr/>
-        </p:nvSpPr>
-        <p:spPr>
-          <a:xfrm>
-            <a:off x="4370832" y="3364992"/>
+          <p:cNvPr id="32" name="Text 30"/>
+          <p:cNvSpPr/>
+          <p:nvPr/>
+        </p:nvSpPr>
+        <p:spPr>
+          <a:xfrm>
+            <a:off x="5742432" y="3364992"/>
             <a:ext cx="1645920" cy="475488"/>
           </a:xfrm>
           <a:prstGeom prst="rect">
@@ -9221,112 +9445,7 @@
                 <a:ea typeface="Trebuchet MS" pitchFamily="34" charset="-122"/>
                 <a:cs typeface="Trebuchet MS" pitchFamily="34" charset="-120"/>
               </a:rPr>
-              <a:t>cour</a:t>
-            </a:r>
-            <a:endParaRPr lang="en-US" sz="1400" dirty="0"/>
-          </a:p>
-        </p:txBody>
-      </p:sp>
-      <p:sp>
-        <p:nvSpPr>
-          <p:cNvPr id="30" name="Text 28"/>
-          <p:cNvSpPr/>
-          <p:nvPr/>
-        </p:nvSpPr>
-        <p:spPr>
-          <a:xfrm>
-            <a:off x="6016752" y="3364992"/>
-            <a:ext cx="411480" cy="475488"/>
-          </a:xfrm>
-          <a:prstGeom prst="rect">
-            <a:avLst/>
-          </a:prstGeom>
-          <a:noFill/>
-          <a:ln/>
-        </p:spPr>
-        <p:txBody>
-          <a:bodyPr wrap="square" lIns="0" tIns="0" rIns="0" bIns="0" rtlCol="0" anchor="ctr"/>
-          <a:lstStyle/>
-          <a:p>
-            <a:pPr algn="ctr" indent="0" marL="0">
-              <a:buNone/>
-            </a:pPr>
-            <a:r>
-              <a:rPr lang="en-US" sz="1600" b="1" dirty="0">
-                <a:solidFill>
-                  <a:srgbClr val="0D9488"/>
-                </a:solidFill>
-                <a:latin typeface="Trebuchet MS" pitchFamily="34" charset="0"/>
-                <a:ea typeface="Trebuchet MS" pitchFamily="34" charset="-122"/>
-                <a:cs typeface="Trebuchet MS" pitchFamily="34" charset="-120"/>
-              </a:rPr>
-              <a:t>·</a:t>
-            </a:r>
-            <a:endParaRPr lang="en-US" sz="1600" dirty="0"/>
-          </a:p>
-        </p:txBody>
-      </p:sp>
-      <p:sp>
-        <p:nvSpPr>
-          <p:cNvPr id="31" name="Shape 29"/>
-          <p:cNvSpPr/>
-          <p:nvPr/>
-        </p:nvSpPr>
-        <p:spPr>
-          <a:xfrm>
-            <a:off x="6428232" y="3364992"/>
-            <a:ext cx="1645920" cy="475488"/>
-          </a:xfrm>
-          <a:prstGeom prst="rect">
-            <a:avLst>
-              <a:gd name="adj" fmla="val 9615"/>
-            </a:avLst>
-          </a:prstGeom>
-          <a:solidFill>
-            <a:srgbClr val="FFFFFF"/>
-          </a:solidFill>
-          <a:ln w="12700">
-            <a:solidFill>
-              <a:srgbClr val="0D9488"/>
-            </a:solidFill>
-            <a:prstDash val="solid"/>
-          </a:ln>
-        </p:spPr>
-      </p:sp>
-      <p:sp>
-        <p:nvSpPr>
-          <p:cNvPr id="32" name="Text 30"/>
-          <p:cNvSpPr/>
-          <p:nvPr/>
-        </p:nvSpPr>
-        <p:spPr>
-          <a:xfrm>
-            <a:off x="6428232" y="3364992"/>
-            <a:ext cx="1645920" cy="475488"/>
-          </a:xfrm>
-          <a:prstGeom prst="rect">
-            <a:avLst/>
-          </a:prstGeom>
-          <a:noFill/>
-          <a:ln/>
-        </p:spPr>
-        <p:txBody>
-          <a:bodyPr wrap="square" lIns="0" tIns="0" rIns="0" bIns="0" rtlCol="0" anchor="ctr"/>
-          <a:lstStyle/>
-          <a:p>
-            <a:pPr algn="ctr" indent="0" marL="0">
-              <a:buNone/>
-            </a:pPr>
-            <a:r>
-              <a:rPr lang="en-US" sz="1400" b="1" dirty="0">
-                <a:solidFill>
-                  <a:srgbClr val="0D9488"/>
-                </a:solidFill>
-                <a:latin typeface="Trebuchet MS" pitchFamily="34" charset="0"/>
-                <a:ea typeface="Trebuchet MS" pitchFamily="34" charset="-122"/>
-                <a:cs typeface="Trebuchet MS" pitchFamily="34" charset="-120"/>
-              </a:rPr>
-              <a:t>age</a:t>
+              <a:t>closed</a:t>
             </a:r>
             <a:endParaRPr lang="en-US" sz="1400" dirty="0"/>
           </a:p>
@@ -9750,7 +9869,7 @@
                 <a:ea typeface="Calibri" pitchFamily="34" charset="-122"/>
                 <a:cs typeface="Calibri" pitchFamily="34" charset="-120"/>
               </a:rPr>
-              <a:t>Word Labs  •  wordlabs.app  •  Prefix: 'en-' = to make, put into</a:t>
+              <a:t>Word Labs  •  wordlabs.app  •  Prefix: 'en-' = cause to; make</a:t>
             </a:r>
             <a:endParaRPr lang="en-US" sz="800" dirty="0"/>
           </a:p>
@@ -9889,7 +10008,7 @@
                 <a:ea typeface="Trebuchet MS" pitchFamily="34" charset="-122"/>
                 <a:cs typeface="Trebuchet MS" pitchFamily="34" charset="-120"/>
               </a:rPr>
-              <a:t>encourage</a:t>
+              <a:t>enclosed</a:t>
             </a:r>
             <a:endParaRPr lang="en-US" sz="2800" dirty="0"/>
           </a:p>
@@ -9969,7 +10088,7 @@
         </p:nvSpPr>
         <p:spPr>
           <a:xfrm>
-            <a:off x="2938272" y="2258568"/>
+            <a:off x="2221992" y="2258568"/>
             <a:ext cx="1828800" cy="292608"/>
           </a:xfrm>
           <a:prstGeom prst="rect">
@@ -10003,7 +10122,7 @@
         </p:nvSpPr>
         <p:spPr>
           <a:xfrm>
-            <a:off x="2938272" y="2258568"/>
+            <a:off x="2221992" y="2258568"/>
             <a:ext cx="1828800" cy="292608"/>
           </a:xfrm>
           <a:prstGeom prst="rect">
@@ -10042,7 +10161,7 @@
         </p:nvSpPr>
         <p:spPr>
           <a:xfrm>
-            <a:off x="2938272" y="2569464"/>
+            <a:off x="2221992" y="2569464"/>
             <a:ext cx="1828800" cy="201168"/>
           </a:xfrm>
           <a:prstGeom prst="rect">
@@ -10067,7 +10186,7 @@
                 <a:ea typeface="Calibri" pitchFamily="34" charset="-122"/>
                 <a:cs typeface="Calibri" pitchFamily="34" charset="-120"/>
               </a:rPr>
-              <a:t>to make, put into</a:t>
+              <a:t>made of; to make</a:t>
             </a:r>
             <a:endParaRPr lang="en-US" sz="850" dirty="0"/>
           </a:p>
@@ -10081,7 +10200,7 @@
         </p:nvSpPr>
         <p:spPr>
           <a:xfrm>
-            <a:off x="5803392" y="2258568"/>
+            <a:off x="4370832" y="2258568"/>
             <a:ext cx="1828800" cy="292608"/>
           </a:xfrm>
           <a:prstGeom prst="rect">
@@ -10115,7 +10234,7 @@
         </p:nvSpPr>
         <p:spPr>
           <a:xfrm>
-            <a:off x="5803392" y="2258568"/>
+            <a:off x="4370832" y="2258568"/>
             <a:ext cx="1828800" cy="292608"/>
           </a:xfrm>
           <a:prstGeom prst="rect">
@@ -10140,7 +10259,7 @@
                 <a:ea typeface="Trebuchet MS" pitchFamily="34" charset="-122"/>
                 <a:cs typeface="Trebuchet MS" pitchFamily="34" charset="-120"/>
               </a:rPr>
-              <a:t>courage</a:t>
+              <a:t>clos</a:t>
             </a:r>
             <a:endParaRPr lang="en-US" sz="1300" dirty="0"/>
           </a:p>
@@ -10154,7 +10273,7 @@
         </p:nvSpPr>
         <p:spPr>
           <a:xfrm>
-            <a:off x="5803392" y="2569464"/>
+            <a:off x="4370832" y="2569464"/>
             <a:ext cx="1828800" cy="201168"/>
           </a:xfrm>
           <a:prstGeom prst="rect">
@@ -10179,7 +10298,7 @@
                 <a:ea typeface="Calibri" pitchFamily="34" charset="-122"/>
                 <a:cs typeface="Calibri" pitchFamily="34" charset="-120"/>
               </a:rPr>
-              <a:t>bravery, confidence</a:t>
+              <a:t>close</a:t>
             </a:r>
             <a:endParaRPr lang="en-US" sz="850" dirty="0"/>
           </a:p>
@@ -10188,6 +10307,118 @@
       <p:sp>
         <p:nvSpPr>
           <p:cNvPr id="22" name="Shape 20"/>
+          <p:cNvSpPr/>
+          <p:nvPr/>
+        </p:nvSpPr>
+        <p:spPr>
+          <a:xfrm>
+            <a:off x="6519672" y="2258568"/>
+            <a:ext cx="1828800" cy="292608"/>
+          </a:xfrm>
+          <a:prstGeom prst="rect">
+            <a:avLst>
+              <a:gd name="adj" fmla="val 25000"/>
+            </a:avLst>
+          </a:prstGeom>
+          <a:solidFill>
+            <a:srgbClr val="FCE7F3"/>
+          </a:solidFill>
+          <a:ln w="19050">
+            <a:solidFill>
+              <a:srgbClr val="DB2777"/>
+            </a:solidFill>
+            <a:prstDash val="solid"/>
+          </a:ln>
+          <a:effectLst>
+            <a:outerShdw sx="100000" sy="100000" kx="0" ky="0" algn="bl" rotWithShape="0" blurRad="101600" dist="38100" dir="8100000">
+              <a:srgbClr val="000000">
+                <a:alpha val="12000"/>
+              </a:srgbClr>
+            </a:outerShdw>
+          </a:effectLst>
+        </p:spPr>
+      </p:sp>
+      <p:sp>
+        <p:nvSpPr>
+          <p:cNvPr id="23" name="Text 21"/>
+          <p:cNvSpPr/>
+          <p:nvPr/>
+        </p:nvSpPr>
+        <p:spPr>
+          <a:xfrm>
+            <a:off x="6519672" y="2258568"/>
+            <a:ext cx="1828800" cy="292608"/>
+          </a:xfrm>
+          <a:prstGeom prst="rect">
+            <a:avLst/>
+          </a:prstGeom>
+          <a:noFill/>
+          <a:ln/>
+        </p:spPr>
+        <p:txBody>
+          <a:bodyPr wrap="square" lIns="0" tIns="0" rIns="0" bIns="0" rtlCol="0" anchor="ctr"/>
+          <a:lstStyle/>
+          <a:p>
+            <a:pPr algn="ctr" indent="0" marL="0">
+              <a:buNone/>
+            </a:pPr>
+            <a:r>
+              <a:rPr lang="en-US" sz="1300" b="1" dirty="0">
+                <a:solidFill>
+                  <a:srgbClr val="9D174D"/>
+                </a:solidFill>
+                <a:latin typeface="Trebuchet MS" pitchFamily="34" charset="0"/>
+                <a:ea typeface="Trebuchet MS" pitchFamily="34" charset="-122"/>
+                <a:cs typeface="Trebuchet MS" pitchFamily="34" charset="-120"/>
+              </a:rPr>
+              <a:t>ed</a:t>
+            </a:r>
+            <a:endParaRPr lang="en-US" sz="1300" dirty="0"/>
+          </a:p>
+        </p:txBody>
+      </p:sp>
+      <p:sp>
+        <p:nvSpPr>
+          <p:cNvPr id="24" name="Text 22"/>
+          <p:cNvSpPr/>
+          <p:nvPr/>
+        </p:nvSpPr>
+        <p:spPr>
+          <a:xfrm>
+            <a:off x="6519672" y="2569464"/>
+            <a:ext cx="1828800" cy="201168"/>
+          </a:xfrm>
+          <a:prstGeom prst="rect">
+            <a:avLst/>
+          </a:prstGeom>
+          <a:noFill/>
+          <a:ln/>
+        </p:spPr>
+        <p:txBody>
+          <a:bodyPr wrap="square" lIns="0" tIns="0" rIns="0" bIns="0" rtlCol="0" anchor="t"/>
+          <a:lstStyle/>
+          <a:p>
+            <a:pPr algn="ctr" indent="0" marL="0">
+              <a:buNone/>
+            </a:pPr>
+            <a:r>
+              <a:rPr lang="en-US" sz="850" dirty="0">
+                <a:solidFill>
+                  <a:srgbClr val="475569"/>
+                </a:solidFill>
+                <a:latin typeface="Calibri" pitchFamily="34" charset="0"/>
+                <a:ea typeface="Calibri" pitchFamily="34" charset="-122"/>
+                <a:cs typeface="Calibri" pitchFamily="34" charset="-120"/>
+              </a:rPr>
+              <a:t>past tense</a:t>
+            </a:r>
+            <a:endParaRPr lang="en-US" sz="850" dirty="0"/>
+          </a:p>
+        </p:txBody>
+      </p:sp>
+      <p:sp>
+        <p:nvSpPr>
+          <p:cNvPr id="25" name="Shape 23"/>
           <p:cNvSpPr/>
           <p:nvPr/>
         </p:nvSpPr>
@@ -10214,7 +10445,7 @@
       </p:sp>
       <p:sp>
         <p:nvSpPr>
-          <p:cNvPr id="23" name="Text 21"/>
+          <p:cNvPr id="26" name="Text 24"/>
           <p:cNvSpPr/>
           <p:nvPr/>
         </p:nvSpPr>
@@ -10253,7 +10484,7 @@
       </p:sp>
       <p:sp>
         <p:nvSpPr>
-          <p:cNvPr id="24" name="Shape 22"/>
+          <p:cNvPr id="27" name="Shape 25"/>
           <p:cNvSpPr/>
           <p:nvPr/>
         </p:nvSpPr>
@@ -10280,13 +10511,13 @@
       </p:sp>
       <p:sp>
         <p:nvSpPr>
-          <p:cNvPr id="25" name="Shape 23"/>
-          <p:cNvSpPr/>
-          <p:nvPr/>
-        </p:nvSpPr>
-        <p:spPr>
-          <a:xfrm>
-            <a:off x="2313432" y="3364992"/>
+          <p:cNvPr id="28" name="Shape 26"/>
+          <p:cNvSpPr/>
+          <p:nvPr/>
+        </p:nvSpPr>
+        <p:spPr>
+          <a:xfrm>
+            <a:off x="2999232" y="3364992"/>
             <a:ext cx="1645920" cy="475488"/>
           </a:xfrm>
           <a:prstGeom prst="rect">
@@ -10307,13 +10538,13 @@
       </p:sp>
       <p:sp>
         <p:nvSpPr>
-          <p:cNvPr id="26" name="Text 24"/>
-          <p:cNvSpPr/>
-          <p:nvPr/>
-        </p:nvSpPr>
-        <p:spPr>
-          <a:xfrm>
-            <a:off x="2313432" y="3364992"/>
+          <p:cNvPr id="29" name="Text 27"/>
+          <p:cNvSpPr/>
+          <p:nvPr/>
+        </p:nvSpPr>
+        <p:spPr>
+          <a:xfrm>
+            <a:off x="2999232" y="3364992"/>
             <a:ext cx="1645920" cy="475488"/>
           </a:xfrm>
           <a:prstGeom prst="rect">
@@ -10346,14 +10577,14 @@
       </p:sp>
       <p:sp>
         <p:nvSpPr>
-          <p:cNvPr id="27" name="Text 25"/>
-          <p:cNvSpPr/>
-          <p:nvPr/>
-        </p:nvSpPr>
-        <p:spPr>
-          <a:xfrm>
-            <a:off x="3959352" y="3364992"/>
-            <a:ext cx="411480" cy="475488"/>
+          <p:cNvPr id="30" name="Text 28"/>
+          <p:cNvSpPr/>
+          <p:nvPr/>
+        </p:nvSpPr>
+        <p:spPr>
+          <a:xfrm>
+            <a:off x="4645152" y="3364992"/>
+            <a:ext cx="1097280" cy="475488"/>
           </a:xfrm>
           <a:prstGeom prst="rect">
             <a:avLst/>
@@ -10385,13 +10616,13 @@
       </p:sp>
       <p:sp>
         <p:nvSpPr>
-          <p:cNvPr id="28" name="Shape 26"/>
-          <p:cNvSpPr/>
-          <p:nvPr/>
-        </p:nvSpPr>
-        <p:spPr>
-          <a:xfrm>
-            <a:off x="4370832" y="3364992"/>
+          <p:cNvPr id="31" name="Shape 29"/>
+          <p:cNvSpPr/>
+          <p:nvPr/>
+        </p:nvSpPr>
+        <p:spPr>
+          <a:xfrm>
+            <a:off x="5742432" y="3364992"/>
             <a:ext cx="1645920" cy="475488"/>
           </a:xfrm>
           <a:prstGeom prst="rect">
@@ -10412,13 +10643,13 @@
       </p:sp>
       <p:sp>
         <p:nvSpPr>
-          <p:cNvPr id="29" name="Text 27"/>
-          <p:cNvSpPr/>
-          <p:nvPr/>
-        </p:nvSpPr>
-        <p:spPr>
-          <a:xfrm>
-            <a:off x="4370832" y="3364992"/>
+          <p:cNvPr id="32" name="Text 30"/>
+          <p:cNvSpPr/>
+          <p:nvPr/>
+        </p:nvSpPr>
+        <p:spPr>
+          <a:xfrm>
+            <a:off x="5742432" y="3364992"/>
             <a:ext cx="1645920" cy="475488"/>
           </a:xfrm>
           <a:prstGeom prst="rect">
@@ -10443,7 +10674,7 @@
                 <a:ea typeface="Trebuchet MS" pitchFamily="34" charset="-122"/>
                 <a:cs typeface="Trebuchet MS" pitchFamily="34" charset="-120"/>
               </a:rPr>
-              <a:t>cour</a:t>
+              <a:t>closed</a:t>
             </a:r>
             <a:endParaRPr lang="en-US" sz="1400" dirty="0"/>
           </a:p>
@@ -10451,193 +10682,247 @@
       </p:sp>
       <p:sp>
         <p:nvSpPr>
-          <p:cNvPr id="30" name="Text 28"/>
-          <p:cNvSpPr/>
-          <p:nvPr/>
-        </p:nvSpPr>
-        <p:spPr>
-          <a:xfrm>
-            <a:off x="6016752" y="3364992"/>
-            <a:ext cx="411480" cy="475488"/>
-          </a:xfrm>
-          <a:prstGeom prst="rect">
-            <a:avLst/>
-          </a:prstGeom>
-          <a:noFill/>
-          <a:ln/>
-        </p:spPr>
-        <p:txBody>
-          <a:bodyPr wrap="square" lIns="0" tIns="0" rIns="0" bIns="0" rtlCol="0" anchor="ctr"/>
-          <a:lstStyle/>
-          <a:p>
-            <a:pPr algn="ctr" indent="0" marL="0">
-              <a:buNone/>
-            </a:pPr>
-            <a:r>
-              <a:rPr lang="en-US" sz="1600" b="1" dirty="0">
-                <a:solidFill>
-                  <a:srgbClr val="0D9488"/>
+          <p:cNvPr id="33" name="Shape 31"/>
+          <p:cNvSpPr/>
+          <p:nvPr/>
+        </p:nvSpPr>
+        <p:spPr>
+          <a:xfrm>
+            <a:off x="365760" y="4096512"/>
+            <a:ext cx="1371600" cy="804672"/>
+          </a:xfrm>
+          <a:prstGeom prst="rect">
+            <a:avLst>
+              <a:gd name="adj" fmla="val 6818"/>
+            </a:avLst>
+          </a:prstGeom>
+          <a:solidFill>
+            <a:srgbClr val="E2E8F0"/>
+          </a:solidFill>
+          <a:ln w="12700">
+            <a:solidFill>
+              <a:srgbClr val="E2E8F0"/>
+            </a:solidFill>
+            <a:prstDash val="solid"/>
+          </a:ln>
+        </p:spPr>
+      </p:sp>
+      <p:sp>
+        <p:nvSpPr>
+          <p:cNvPr id="34" name="Text 32"/>
+          <p:cNvSpPr/>
+          <p:nvPr/>
+        </p:nvSpPr>
+        <p:spPr>
+          <a:xfrm>
+            <a:off x="365760" y="4096512"/>
+            <a:ext cx="1371600" cy="804672"/>
+          </a:xfrm>
+          <a:prstGeom prst="rect">
+            <a:avLst/>
+          </a:prstGeom>
+          <a:noFill/>
+          <a:ln/>
+        </p:spPr>
+        <p:txBody>
+          <a:bodyPr wrap="square" lIns="0" tIns="0" rIns="0" bIns="0" rtlCol="0" anchor="ctr"/>
+          <a:lstStyle/>
+          <a:p>
+            <a:pPr algn="ctr" indent="0" marL="0">
+              <a:buNone/>
+            </a:pPr>
+            <a:r>
+              <a:rPr lang="en-US" sz="1100" b="1" dirty="0">
+                <a:solidFill>
+                  <a:srgbClr val="475569"/>
                 </a:solidFill>
                 <a:latin typeface="Trebuchet MS" pitchFamily="34" charset="0"/>
                 <a:ea typeface="Trebuchet MS" pitchFamily="34" charset="-122"/>
                 <a:cs typeface="Trebuchet MS" pitchFamily="34" charset="-120"/>
               </a:rPr>
-              <a:t>·</a:t>
-            </a:r>
-            <a:endParaRPr lang="en-US" sz="1600" dirty="0"/>
-          </a:p>
-        </p:txBody>
-      </p:sp>
-      <p:sp>
-        <p:nvSpPr>
-          <p:cNvPr id="31" name="Shape 29"/>
-          <p:cNvSpPr/>
-          <p:nvPr/>
-        </p:nvSpPr>
-        <p:spPr>
-          <a:xfrm>
-            <a:off x="6428232" y="3364992"/>
-            <a:ext cx="1645920" cy="475488"/>
+              <a:t>Phonemes</a:t>
+            </a:r>
+            <a:endParaRPr lang="en-US" sz="1100" dirty="0"/>
+          </a:p>
+        </p:txBody>
+      </p:sp>
+      <p:sp>
+        <p:nvSpPr>
+          <p:cNvPr id="35" name="Shape 33"/>
+          <p:cNvSpPr/>
+          <p:nvPr/>
+        </p:nvSpPr>
+        <p:spPr>
+          <a:xfrm>
+            <a:off x="1874520" y="4096512"/>
+            <a:ext cx="6903720" cy="658368"/>
           </a:xfrm>
           <a:prstGeom prst="rect">
             <a:avLst>
-              <a:gd name="adj" fmla="val 9615"/>
+              <a:gd name="adj" fmla="val 8333"/>
             </a:avLst>
           </a:prstGeom>
           <a:solidFill>
+            <a:srgbClr val="FCE7F3"/>
+          </a:solidFill>
+          <a:ln w="12700">
+            <a:solidFill>
+              <a:srgbClr val="DB2777"/>
+            </a:solidFill>
+            <a:prstDash val="solid"/>
+          </a:ln>
+        </p:spPr>
+      </p:sp>
+      <p:sp>
+        <p:nvSpPr>
+          <p:cNvPr id="36" name="Shape 34"/>
+          <p:cNvSpPr/>
+          <p:nvPr/>
+        </p:nvSpPr>
+        <p:spPr>
+          <a:xfrm>
+            <a:off x="2124837" y="4169664"/>
+            <a:ext cx="685800" cy="475488"/>
+          </a:xfrm>
+          <a:prstGeom prst="rect">
+            <a:avLst>
+              <a:gd name="adj" fmla="val 7692"/>
+            </a:avLst>
+          </a:prstGeom>
+          <a:solidFill>
             <a:srgbClr val="FFFFFF"/>
           </a:solidFill>
           <a:ln w="12700">
             <a:solidFill>
-              <a:srgbClr val="0D9488"/>
-            </a:solidFill>
-            <a:prstDash val="solid"/>
-          </a:ln>
-        </p:spPr>
-      </p:sp>
-      <p:sp>
-        <p:nvSpPr>
-          <p:cNvPr id="32" name="Text 30"/>
-          <p:cNvSpPr/>
-          <p:nvPr/>
-        </p:nvSpPr>
-        <p:spPr>
-          <a:xfrm>
-            <a:off x="6428232" y="3364992"/>
-            <a:ext cx="1645920" cy="475488"/>
-          </a:xfrm>
-          <a:prstGeom prst="rect">
-            <a:avLst/>
-          </a:prstGeom>
-          <a:noFill/>
-          <a:ln/>
-        </p:spPr>
-        <p:txBody>
-          <a:bodyPr wrap="square" lIns="0" tIns="0" rIns="0" bIns="0" rtlCol="0" anchor="ctr"/>
-          <a:lstStyle/>
-          <a:p>
-            <a:pPr algn="ctr" indent="0" marL="0">
-              <a:buNone/>
-            </a:pPr>
-            <a:r>
-              <a:rPr lang="en-US" sz="1400" b="1" dirty="0">
-                <a:solidFill>
-                  <a:srgbClr val="0D9488"/>
+              <a:srgbClr val="DB2777"/>
+            </a:solidFill>
+            <a:prstDash val="solid"/>
+          </a:ln>
+        </p:spPr>
+      </p:sp>
+      <p:sp>
+        <p:nvSpPr>
+          <p:cNvPr id="37" name="Text 35"/>
+          <p:cNvSpPr/>
+          <p:nvPr/>
+        </p:nvSpPr>
+        <p:spPr>
+          <a:xfrm>
+            <a:off x="2124837" y="4169664"/>
+            <a:ext cx="685800" cy="475488"/>
+          </a:xfrm>
+          <a:prstGeom prst="rect">
+            <a:avLst/>
+          </a:prstGeom>
+          <a:noFill/>
+          <a:ln/>
+        </p:spPr>
+        <p:txBody>
+          <a:bodyPr wrap="square" lIns="0" tIns="0" rIns="0" bIns="0" rtlCol="0" anchor="ctr"/>
+          <a:lstStyle/>
+          <a:p>
+            <a:pPr algn="ctr" indent="0" marL="0">
+              <a:buNone/>
+            </a:pPr>
+            <a:r>
+              <a:rPr lang="en-US" sz="900" b="1" dirty="0">
+                <a:solidFill>
+                  <a:srgbClr val="9D174D"/>
                 </a:solidFill>
                 <a:latin typeface="Trebuchet MS" pitchFamily="34" charset="0"/>
                 <a:ea typeface="Trebuchet MS" pitchFamily="34" charset="-122"/>
                 <a:cs typeface="Trebuchet MS" pitchFamily="34" charset="-120"/>
               </a:rPr>
-              <a:t>age</a:t>
-            </a:r>
-            <a:endParaRPr lang="en-US" sz="1400" dirty="0"/>
-          </a:p>
-        </p:txBody>
-      </p:sp>
-      <p:sp>
-        <p:nvSpPr>
-          <p:cNvPr id="33" name="Shape 31"/>
-          <p:cNvSpPr/>
-          <p:nvPr/>
-        </p:nvSpPr>
-        <p:spPr>
-          <a:xfrm>
-            <a:off x="365760" y="4096512"/>
-            <a:ext cx="1371600" cy="804672"/>
+              <a:t>e</a:t>
+            </a:r>
+            <a:endParaRPr lang="en-US" sz="900" dirty="0"/>
+          </a:p>
+        </p:txBody>
+      </p:sp>
+      <p:sp>
+        <p:nvSpPr>
+          <p:cNvPr id="38" name="Shape 36"/>
+          <p:cNvSpPr/>
+          <p:nvPr/>
+        </p:nvSpPr>
+        <p:spPr>
+          <a:xfrm>
+            <a:off x="3033522" y="4169664"/>
+            <a:ext cx="685800" cy="475488"/>
           </a:xfrm>
           <a:prstGeom prst="rect">
             <a:avLst>
-              <a:gd name="adj" fmla="val 6818"/>
+              <a:gd name="adj" fmla="val 7692"/>
             </a:avLst>
           </a:prstGeom>
           <a:solidFill>
-            <a:srgbClr val="E2E8F0"/>
-          </a:solidFill>
-          <a:ln w="12700">
-            <a:solidFill>
-              <a:srgbClr val="E2E8F0"/>
-            </a:solidFill>
-            <a:prstDash val="solid"/>
-          </a:ln>
-        </p:spPr>
-      </p:sp>
-      <p:sp>
-        <p:nvSpPr>
-          <p:cNvPr id="34" name="Text 32"/>
-          <p:cNvSpPr/>
-          <p:nvPr/>
-        </p:nvSpPr>
-        <p:spPr>
-          <a:xfrm>
-            <a:off x="365760" y="4096512"/>
-            <a:ext cx="1371600" cy="804672"/>
-          </a:xfrm>
-          <a:prstGeom prst="rect">
-            <a:avLst/>
-          </a:prstGeom>
-          <a:noFill/>
-          <a:ln/>
-        </p:spPr>
-        <p:txBody>
-          <a:bodyPr wrap="square" lIns="0" tIns="0" rIns="0" bIns="0" rtlCol="0" anchor="ctr"/>
-          <a:lstStyle/>
-          <a:p>
-            <a:pPr algn="ctr" indent="0" marL="0">
-              <a:buNone/>
-            </a:pPr>
-            <a:r>
-              <a:rPr lang="en-US" sz="1100" b="1" dirty="0">
-                <a:solidFill>
-                  <a:srgbClr val="475569"/>
+            <a:srgbClr val="FFFFFF"/>
+          </a:solidFill>
+          <a:ln w="12700">
+            <a:solidFill>
+              <a:srgbClr val="DB2777"/>
+            </a:solidFill>
+            <a:prstDash val="solid"/>
+          </a:ln>
+        </p:spPr>
+      </p:sp>
+      <p:sp>
+        <p:nvSpPr>
+          <p:cNvPr id="39" name="Text 37"/>
+          <p:cNvSpPr/>
+          <p:nvPr/>
+        </p:nvSpPr>
+        <p:spPr>
+          <a:xfrm>
+            <a:off x="3033522" y="4169664"/>
+            <a:ext cx="685800" cy="475488"/>
+          </a:xfrm>
+          <a:prstGeom prst="rect">
+            <a:avLst/>
+          </a:prstGeom>
+          <a:noFill/>
+          <a:ln/>
+        </p:spPr>
+        <p:txBody>
+          <a:bodyPr wrap="square" lIns="0" tIns="0" rIns="0" bIns="0" rtlCol="0" anchor="ctr"/>
+          <a:lstStyle/>
+          <a:p>
+            <a:pPr algn="ctr" indent="0" marL="0">
+              <a:buNone/>
+            </a:pPr>
+            <a:r>
+              <a:rPr lang="en-US" sz="900" b="1" dirty="0">
+                <a:solidFill>
+                  <a:srgbClr val="9D174D"/>
                 </a:solidFill>
                 <a:latin typeface="Trebuchet MS" pitchFamily="34" charset="0"/>
                 <a:ea typeface="Trebuchet MS" pitchFamily="34" charset="-122"/>
                 <a:cs typeface="Trebuchet MS" pitchFamily="34" charset="-120"/>
               </a:rPr>
-              <a:t>Phonemes</a:t>
-            </a:r>
-            <a:endParaRPr lang="en-US" sz="1100" dirty="0"/>
-          </a:p>
-        </p:txBody>
-      </p:sp>
-      <p:sp>
-        <p:nvSpPr>
-          <p:cNvPr id="35" name="Shape 33"/>
-          <p:cNvSpPr/>
-          <p:nvPr/>
-        </p:nvSpPr>
-        <p:spPr>
-          <a:xfrm>
-            <a:off x="1874520" y="4096512"/>
-            <a:ext cx="6903720" cy="804672"/>
+              <a:t>n</a:t>
+            </a:r>
+            <a:endParaRPr lang="en-US" sz="900" dirty="0"/>
+          </a:p>
+        </p:txBody>
+      </p:sp>
+      <p:sp>
+        <p:nvSpPr>
+          <p:cNvPr id="40" name="Shape 38"/>
+          <p:cNvSpPr/>
+          <p:nvPr/>
+        </p:nvSpPr>
+        <p:spPr>
+          <a:xfrm>
+            <a:off x="3942207" y="4169664"/>
+            <a:ext cx="685800" cy="475488"/>
           </a:xfrm>
           <a:prstGeom prst="rect">
             <a:avLst>
-              <a:gd name="adj" fmla="val 6818"/>
+              <a:gd name="adj" fmla="val 7692"/>
             </a:avLst>
           </a:prstGeom>
           <a:solidFill>
-            <a:srgbClr val="FCE7F3"/>
+            <a:srgbClr val="FFFFFF"/>
           </a:solidFill>
           <a:ln w="12700">
             <a:solidFill>
@@ -10649,41 +10934,14 @@
       </p:sp>
       <p:sp>
         <p:nvSpPr>
-          <p:cNvPr id="36" name="Shape 34"/>
-          <p:cNvSpPr/>
-          <p:nvPr/>
-        </p:nvSpPr>
-        <p:spPr>
-          <a:xfrm>
-            <a:off x="2427732" y="4169664"/>
-            <a:ext cx="685800" cy="384048"/>
-          </a:xfrm>
-          <a:prstGeom prst="rect">
-            <a:avLst>
-              <a:gd name="adj" fmla="val 9524"/>
-            </a:avLst>
-          </a:prstGeom>
-          <a:solidFill>
-            <a:srgbClr val="FFFFFF"/>
-          </a:solidFill>
-          <a:ln w="12700">
-            <a:solidFill>
-              <a:srgbClr val="DB2777"/>
-            </a:solidFill>
-            <a:prstDash val="solid"/>
-          </a:ln>
-        </p:spPr>
-      </p:sp>
-      <p:sp>
-        <p:nvSpPr>
-          <p:cNvPr id="37" name="Text 35"/>
-          <p:cNvSpPr/>
-          <p:nvPr/>
-        </p:nvSpPr>
-        <p:spPr>
-          <a:xfrm>
-            <a:off x="2427732" y="4169664"/>
-            <a:ext cx="685800" cy="384048"/>
+          <p:cNvPr id="41" name="Text 39"/>
+          <p:cNvSpPr/>
+          <p:nvPr/>
+        </p:nvSpPr>
+        <p:spPr>
+          <a:xfrm>
+            <a:off x="3942207" y="4169664"/>
+            <a:ext cx="685800" cy="475488"/>
           </a:xfrm>
           <a:prstGeom prst="rect">
             <a:avLst/>
@@ -10707,7 +10965,7 @@
                 <a:ea typeface="Trebuchet MS" pitchFamily="34" charset="-122"/>
                 <a:cs typeface="Trebuchet MS" pitchFamily="34" charset="-120"/>
               </a:rPr>
-              <a:t>e</a:t>
+              <a:t>c</a:t>
             </a:r>
             <a:endParaRPr lang="en-US" sz="900" dirty="0"/>
           </a:p>
@@ -10715,18 +10973,18 @@
       </p:sp>
       <p:sp>
         <p:nvSpPr>
-          <p:cNvPr id="38" name="Shape 36"/>
-          <p:cNvSpPr/>
-          <p:nvPr/>
-        </p:nvSpPr>
-        <p:spPr>
-          <a:xfrm>
-            <a:off x="3639312" y="4169664"/>
-            <a:ext cx="685800" cy="384048"/>
+          <p:cNvPr id="42" name="Shape 40"/>
+          <p:cNvSpPr/>
+          <p:nvPr/>
+        </p:nvSpPr>
+        <p:spPr>
+          <a:xfrm>
+            <a:off x="4850892" y="4169664"/>
+            <a:ext cx="685800" cy="475488"/>
           </a:xfrm>
           <a:prstGeom prst="rect">
             <a:avLst>
-              <a:gd name="adj" fmla="val 9524"/>
+              <a:gd name="adj" fmla="val 7692"/>
             </a:avLst>
           </a:prstGeom>
           <a:solidFill>
@@ -10742,14 +11000,14 @@
       </p:sp>
       <p:sp>
         <p:nvSpPr>
-          <p:cNvPr id="39" name="Text 37"/>
-          <p:cNvSpPr/>
-          <p:nvPr/>
-        </p:nvSpPr>
-        <p:spPr>
-          <a:xfrm>
-            <a:off x="3639312" y="4169664"/>
-            <a:ext cx="685800" cy="384048"/>
+          <p:cNvPr id="43" name="Text 41"/>
+          <p:cNvSpPr/>
+          <p:nvPr/>
+        </p:nvSpPr>
+        <p:spPr>
+          <a:xfrm>
+            <a:off x="4850892" y="4169664"/>
+            <a:ext cx="685800" cy="475488"/>
           </a:xfrm>
           <a:prstGeom prst="rect">
             <a:avLst/>
@@ -10773,7 +11031,7 @@
                 <a:ea typeface="Trebuchet MS" pitchFamily="34" charset="-122"/>
                 <a:cs typeface="Trebuchet MS" pitchFamily="34" charset="-120"/>
               </a:rPr>
-              <a:t>n</a:t>
+              <a:t>l</a:t>
             </a:r>
             <a:endParaRPr lang="en-US" sz="900" dirty="0"/>
           </a:p>
@@ -10781,18 +11039,18 @@
       </p:sp>
       <p:sp>
         <p:nvSpPr>
-          <p:cNvPr id="40" name="Shape 38"/>
-          <p:cNvSpPr/>
-          <p:nvPr/>
-        </p:nvSpPr>
-        <p:spPr>
-          <a:xfrm>
-            <a:off x="4850892" y="4169664"/>
-            <a:ext cx="685800" cy="384048"/>
+          <p:cNvPr id="44" name="Shape 42"/>
+          <p:cNvSpPr/>
+          <p:nvPr/>
+        </p:nvSpPr>
+        <p:spPr>
+          <a:xfrm>
+            <a:off x="5759577" y="4169664"/>
+            <a:ext cx="685800" cy="475488"/>
           </a:xfrm>
           <a:prstGeom prst="rect">
             <a:avLst>
-              <a:gd name="adj" fmla="val 9524"/>
+              <a:gd name="adj" fmla="val 7692"/>
             </a:avLst>
           </a:prstGeom>
           <a:solidFill>
@@ -10808,14 +11066,14 @@
       </p:sp>
       <p:sp>
         <p:nvSpPr>
-          <p:cNvPr id="41" name="Text 39"/>
-          <p:cNvSpPr/>
-          <p:nvPr/>
-        </p:nvSpPr>
-        <p:spPr>
-          <a:xfrm>
-            <a:off x="4850892" y="4169664"/>
-            <a:ext cx="685800" cy="384048"/>
+          <p:cNvPr id="45" name="Text 43"/>
+          <p:cNvSpPr/>
+          <p:nvPr/>
+        </p:nvSpPr>
+        <p:spPr>
+          <a:xfrm>
+            <a:off x="5759577" y="4169664"/>
+            <a:ext cx="685800" cy="475488"/>
           </a:xfrm>
           <a:prstGeom prst="rect">
             <a:avLst/>
@@ -10839,7 +11097,7 @@
                 <a:ea typeface="Trebuchet MS" pitchFamily="34" charset="-122"/>
                 <a:cs typeface="Trebuchet MS" pitchFamily="34" charset="-120"/>
               </a:rPr>
-              <a:t>c</a:t>
+              <a:t>o_e</a:t>
             </a:r>
             <a:endParaRPr lang="en-US" sz="900" dirty="0"/>
           </a:p>
@@ -10847,18 +11105,18 @@
       </p:sp>
       <p:sp>
         <p:nvSpPr>
-          <p:cNvPr id="42" name="Shape 40"/>
-          <p:cNvSpPr/>
-          <p:nvPr/>
-        </p:nvSpPr>
-        <p:spPr>
-          <a:xfrm>
-            <a:off x="6062472" y="4169664"/>
-            <a:ext cx="685800" cy="384048"/>
+          <p:cNvPr id="46" name="Shape 44"/>
+          <p:cNvSpPr/>
+          <p:nvPr/>
+        </p:nvSpPr>
+        <p:spPr>
+          <a:xfrm>
+            <a:off x="6668262" y="4169664"/>
+            <a:ext cx="685800" cy="475488"/>
           </a:xfrm>
           <a:prstGeom prst="rect">
             <a:avLst>
-              <a:gd name="adj" fmla="val 9524"/>
+              <a:gd name="adj" fmla="val 7692"/>
             </a:avLst>
           </a:prstGeom>
           <a:solidFill>
@@ -10874,14 +11132,14 @@
       </p:sp>
       <p:sp>
         <p:nvSpPr>
-          <p:cNvPr id="43" name="Text 41"/>
-          <p:cNvSpPr/>
-          <p:nvPr/>
-        </p:nvSpPr>
-        <p:spPr>
-          <a:xfrm>
-            <a:off x="6062472" y="4169664"/>
-            <a:ext cx="685800" cy="384048"/>
+          <p:cNvPr id="47" name="Text 45"/>
+          <p:cNvSpPr/>
+          <p:nvPr/>
+        </p:nvSpPr>
+        <p:spPr>
+          <a:xfrm>
+            <a:off x="6668262" y="4169664"/>
+            <a:ext cx="685800" cy="475488"/>
           </a:xfrm>
           <a:prstGeom prst="rect">
             <a:avLst/>
@@ -10905,7 +11163,7 @@
                 <a:ea typeface="Trebuchet MS" pitchFamily="34" charset="-122"/>
                 <a:cs typeface="Trebuchet MS" pitchFamily="34" charset="-120"/>
               </a:rPr>
-              <a:t>our</a:t>
+              <a:t>s</a:t>
             </a:r>
             <a:endParaRPr lang="en-US" sz="900" dirty="0"/>
           </a:p>
@@ -10913,57 +11171,18 @@
       </p:sp>
       <p:sp>
         <p:nvSpPr>
-          <p:cNvPr id="44" name="Text 42"/>
-          <p:cNvSpPr/>
-          <p:nvPr/>
-        </p:nvSpPr>
-        <p:spPr>
-          <a:xfrm>
-            <a:off x="6062472" y="4572000"/>
-            <a:ext cx="685800" cy="219456"/>
-          </a:xfrm>
-          <a:prstGeom prst="rect">
-            <a:avLst/>
-          </a:prstGeom>
-          <a:noFill/>
-          <a:ln/>
-        </p:spPr>
-        <p:txBody>
-          <a:bodyPr wrap="square" lIns="0" tIns="0" rIns="0" bIns="0" rtlCol="0" anchor="t"/>
-          <a:lstStyle/>
-          <a:p>
-            <a:pPr algn="ctr" indent="0" marL="0">
-              <a:buNone/>
-            </a:pPr>
-            <a:r>
-              <a:rPr lang="en-US" sz="750" i="1" dirty="0">
-                <a:solidFill>
-                  <a:srgbClr val="94A3B8"/>
-                </a:solidFill>
-                <a:latin typeface="Calibri" pitchFamily="34" charset="0"/>
-                <a:ea typeface="Calibri" pitchFamily="34" charset="-122"/>
-                <a:cs typeface="Calibri" pitchFamily="34" charset="-120"/>
-              </a:rPr>
-              <a:t>/er/</a:t>
-            </a:r>
-            <a:endParaRPr lang="en-US" sz="750" dirty="0"/>
-          </a:p>
-        </p:txBody>
-      </p:sp>
-      <p:sp>
-        <p:nvSpPr>
-          <p:cNvPr id="45" name="Shape 43"/>
-          <p:cNvSpPr/>
-          <p:nvPr/>
-        </p:nvSpPr>
-        <p:spPr>
-          <a:xfrm>
-            <a:off x="7274052" y="4169664"/>
-            <a:ext cx="685800" cy="384048"/>
+          <p:cNvPr id="48" name="Shape 46"/>
+          <p:cNvSpPr/>
+          <p:nvPr/>
+        </p:nvSpPr>
+        <p:spPr>
+          <a:xfrm>
+            <a:off x="7576947" y="4169664"/>
+            <a:ext cx="685800" cy="475488"/>
           </a:xfrm>
           <a:prstGeom prst="rect">
             <a:avLst>
-              <a:gd name="adj" fmla="val 9524"/>
+              <a:gd name="adj" fmla="val 7692"/>
             </a:avLst>
           </a:prstGeom>
           <a:solidFill>
@@ -10979,14 +11198,14 @@
       </p:sp>
       <p:sp>
         <p:nvSpPr>
-          <p:cNvPr id="46" name="Text 44"/>
-          <p:cNvSpPr/>
-          <p:nvPr/>
-        </p:nvSpPr>
-        <p:spPr>
-          <a:xfrm>
-            <a:off x="7274052" y="4169664"/>
-            <a:ext cx="685800" cy="384048"/>
+          <p:cNvPr id="49" name="Text 47"/>
+          <p:cNvSpPr/>
+          <p:nvPr/>
+        </p:nvSpPr>
+        <p:spPr>
+          <a:xfrm>
+            <a:off x="7576947" y="4169664"/>
+            <a:ext cx="685800" cy="475488"/>
           </a:xfrm>
           <a:prstGeom prst="rect">
             <a:avLst/>
@@ -11010,48 +11229,9 @@
                 <a:ea typeface="Trebuchet MS" pitchFamily="34" charset="-122"/>
                 <a:cs typeface="Trebuchet MS" pitchFamily="34" charset="-120"/>
               </a:rPr>
-              <a:t>age</a:t>
+              <a:t>d</a:t>
             </a:r>
             <a:endParaRPr lang="en-US" sz="900" dirty="0"/>
-          </a:p>
-        </p:txBody>
-      </p:sp>
-      <p:sp>
-        <p:nvSpPr>
-          <p:cNvPr id="47" name="Text 45"/>
-          <p:cNvSpPr/>
-          <p:nvPr/>
-        </p:nvSpPr>
-        <p:spPr>
-          <a:xfrm>
-            <a:off x="7274052" y="4572000"/>
-            <a:ext cx="685800" cy="219456"/>
-          </a:xfrm>
-          <a:prstGeom prst="rect">
-            <a:avLst/>
-          </a:prstGeom>
-          <a:noFill/>
-          <a:ln/>
-        </p:spPr>
-        <p:txBody>
-          <a:bodyPr wrap="square" lIns="0" tIns="0" rIns="0" bIns="0" rtlCol="0" anchor="t"/>
-          <a:lstStyle/>
-          <a:p>
-            <a:pPr algn="ctr" indent="0" marL="0">
-              <a:buNone/>
-            </a:pPr>
-            <a:r>
-              <a:rPr lang="en-US" sz="750" i="1" dirty="0">
-                <a:solidFill>
-                  <a:srgbClr val="94A3B8"/>
-                </a:solidFill>
-                <a:latin typeface="Calibri" pitchFamily="34" charset="0"/>
-                <a:ea typeface="Calibri" pitchFamily="34" charset="-122"/>
-                <a:cs typeface="Calibri" pitchFamily="34" charset="-120"/>
-              </a:rPr>
-              <a:t>/ij/</a:t>
-            </a:r>
-            <a:endParaRPr lang="en-US" sz="750" dirty="0"/>
           </a:p>
         </p:txBody>
       </p:sp>
@@ -11341,7 +11521,7 @@
                 <a:ea typeface="Calibri" pitchFamily="34" charset="-122"/>
                 <a:cs typeface="Calibri" pitchFamily="34" charset="-120"/>
               </a:rPr>
-              <a:t>Word Labs  •  wordlabs.app  •  Prefix: 'en-' = to make, put into</a:t>
+              <a:t>Word Labs  •  wordlabs.app  •  Prefix: 'en-' = cause to; make</a:t>
             </a:r>
             <a:endParaRPr lang="en-US" sz="800" dirty="0"/>
           </a:p>
@@ -11480,7 +11660,7 @@
                 <a:ea typeface="Trebuchet MS" pitchFamily="34" charset="-122"/>
                 <a:cs typeface="Trebuchet MS" pitchFamily="34" charset="-120"/>
               </a:rPr>
-              <a:t>enjoyed</a:t>
+              <a:t>engraved</a:t>
             </a:r>
             <a:endParaRPr lang="en-US" sz="2800" dirty="0"/>
           </a:p>
@@ -12168,7 +12348,7 @@
                 <a:ea typeface="Calibri" pitchFamily="34" charset="-122"/>
                 <a:cs typeface="Calibri" pitchFamily="34" charset="-120"/>
               </a:rPr>
-              <a:t>Word Labs  •  wordlabs.app  •  Prefix: 'en-' = to make, put into</a:t>
+              <a:t>Word Labs  •  wordlabs.app  •  Prefix: 'en-' = cause to; make</a:t>
             </a:r>
             <a:endParaRPr lang="en-US" sz="800" dirty="0"/>
           </a:p>
@@ -12307,7 +12487,7 @@
                 <a:ea typeface="Trebuchet MS" pitchFamily="34" charset="-122"/>
                 <a:cs typeface="Trebuchet MS" pitchFamily="34" charset="-120"/>
               </a:rPr>
-              <a:t>enjoyed</a:t>
+              <a:t>engraved</a:t>
             </a:r>
             <a:endParaRPr lang="en-US" sz="2800" dirty="0"/>
           </a:p>
@@ -12485,7 +12665,7 @@
                 <a:ea typeface="Calibri" pitchFamily="34" charset="-122"/>
                 <a:cs typeface="Calibri" pitchFamily="34" charset="-120"/>
               </a:rPr>
-              <a:t>to make, put into</a:t>
+              <a:t>made of; to make</a:t>
             </a:r>
             <a:endParaRPr lang="en-US" sz="850" dirty="0"/>
           </a:p>
@@ -12558,7 +12738,7 @@
                 <a:ea typeface="Trebuchet MS" pitchFamily="34" charset="-122"/>
                 <a:cs typeface="Trebuchet MS" pitchFamily="34" charset="-120"/>
               </a:rPr>
-              <a:t>joy</a:t>
+              <a:t>grav</a:t>
             </a:r>
             <a:endParaRPr lang="en-US" sz="1300" dirty="0"/>
           </a:p>
@@ -12597,7 +12777,7 @@
                 <a:ea typeface="Calibri" pitchFamily="34" charset="-122"/>
                 <a:cs typeface="Calibri" pitchFamily="34" charset="-120"/>
               </a:rPr>
-              <a:t>happiness, pleasure</a:t>
+              <a:t>heavy; serious</a:t>
             </a:r>
             <a:endParaRPr lang="en-US" sz="850" dirty="0"/>
           </a:p>
@@ -13265,7 +13445,7 @@
                 <a:ea typeface="Calibri" pitchFamily="34" charset="-122"/>
                 <a:cs typeface="Calibri" pitchFamily="34" charset="-120"/>
               </a:rPr>
-              <a:t>Word Labs  •  wordlabs.app  •  Prefix: 'en-' = to make, put into</a:t>
+              <a:t>Word Labs  •  wordlabs.app  •  Prefix: 'en-' = cause to; make</a:t>
             </a:r>
             <a:endParaRPr lang="en-US" sz="800" dirty="0"/>
           </a:p>
@@ -13404,7 +13584,7 @@
                 <a:ea typeface="Trebuchet MS" pitchFamily="34" charset="-122"/>
                 <a:cs typeface="Trebuchet MS" pitchFamily="34" charset="-120"/>
               </a:rPr>
-              <a:t>enjoyed</a:t>
+              <a:t>engraved</a:t>
             </a:r>
             <a:endParaRPr lang="en-US" sz="2800" dirty="0"/>
           </a:p>
@@ -13582,7 +13762,7 @@
                 <a:ea typeface="Calibri" pitchFamily="34" charset="-122"/>
                 <a:cs typeface="Calibri" pitchFamily="34" charset="-120"/>
               </a:rPr>
-              <a:t>to make, put into</a:t>
+              <a:t>made of; to make</a:t>
             </a:r>
             <a:endParaRPr lang="en-US" sz="850" dirty="0"/>
           </a:p>
@@ -13655,7 +13835,7 @@
                 <a:ea typeface="Trebuchet MS" pitchFamily="34" charset="-122"/>
                 <a:cs typeface="Trebuchet MS" pitchFamily="34" charset="-120"/>
               </a:rPr>
-              <a:t>joy</a:t>
+              <a:t>grav</a:t>
             </a:r>
             <a:endParaRPr lang="en-US" sz="1300" dirty="0"/>
           </a:p>
@@ -13694,7 +13874,7 @@
                 <a:ea typeface="Calibri" pitchFamily="34" charset="-122"/>
                 <a:cs typeface="Calibri" pitchFamily="34" charset="-120"/>
               </a:rPr>
-              <a:t>happiness, pleasure</a:t>
+              <a:t>heavy; serious</a:t>
             </a:r>
             <a:endParaRPr lang="en-US" sz="850" dirty="0"/>
           </a:p>
@@ -14070,7 +14250,7 @@
                 <a:ea typeface="Trebuchet MS" pitchFamily="34" charset="-122"/>
                 <a:cs typeface="Trebuchet MS" pitchFamily="34" charset="-120"/>
               </a:rPr>
-              <a:t>joyed</a:t>
+              <a:t>graved</a:t>
             </a:r>
             <a:endParaRPr lang="en-US" sz="1400" dirty="0"/>
           </a:p>
@@ -14403,7 +14583,7 @@
                 <a:ea typeface="Calibri" pitchFamily="34" charset="-122"/>
                 <a:cs typeface="Calibri" pitchFamily="34" charset="-120"/>
               </a:rPr>
-              <a:t>Prefix 'en-' — to make, put into</a:t>
+              <a:t>Prefix 'en-' — cause to; make</a:t>
             </a:r>
             <a:endParaRPr lang="en-US" sz="1600" dirty="0"/>
           </a:p>
@@ -14759,7 +14939,7 @@
                 <a:ea typeface="Calibri" pitchFamily="34" charset="-122"/>
                 <a:cs typeface="Calibri" pitchFamily="34" charset="-120"/>
               </a:rPr>
-              <a:t>Word Labs  •  wordlabs.app  •  Prefix: 'en-' = to make, put into</a:t>
+              <a:t>Word Labs  •  wordlabs.app  •  Prefix: 'en-' = cause to; make</a:t>
             </a:r>
             <a:endParaRPr lang="en-US" sz="800" dirty="0"/>
           </a:p>
@@ -14898,7 +15078,7 @@
                 <a:ea typeface="Trebuchet MS" pitchFamily="34" charset="-122"/>
                 <a:cs typeface="Trebuchet MS" pitchFamily="34" charset="-120"/>
               </a:rPr>
-              <a:t>enjoyed</a:t>
+              <a:t>engraved</a:t>
             </a:r>
             <a:endParaRPr lang="en-US" sz="2800" dirty="0"/>
           </a:p>
@@ -15076,7 +15256,7 @@
                 <a:ea typeface="Calibri" pitchFamily="34" charset="-122"/>
                 <a:cs typeface="Calibri" pitchFamily="34" charset="-120"/>
               </a:rPr>
-              <a:t>to make, put into</a:t>
+              <a:t>made of; to make</a:t>
             </a:r>
             <a:endParaRPr lang="en-US" sz="850" dirty="0"/>
           </a:p>
@@ -15149,7 +15329,7 @@
                 <a:ea typeface="Trebuchet MS" pitchFamily="34" charset="-122"/>
                 <a:cs typeface="Trebuchet MS" pitchFamily="34" charset="-120"/>
               </a:rPr>
-              <a:t>joy</a:t>
+              <a:t>grav</a:t>
             </a:r>
             <a:endParaRPr lang="en-US" sz="1300" dirty="0"/>
           </a:p>
@@ -15188,7 +15368,7 @@
                 <a:ea typeface="Calibri" pitchFamily="34" charset="-122"/>
                 <a:cs typeface="Calibri" pitchFamily="34" charset="-120"/>
               </a:rPr>
-              <a:t>happiness, pleasure</a:t>
+              <a:t>heavy; serious</a:t>
             </a:r>
             <a:endParaRPr lang="en-US" sz="850" dirty="0"/>
           </a:p>
@@ -15564,7 +15744,7 @@
                 <a:ea typeface="Trebuchet MS" pitchFamily="34" charset="-122"/>
                 <a:cs typeface="Trebuchet MS" pitchFamily="34" charset="-120"/>
               </a:rPr>
-              <a:t>joyed</a:t>
+              <a:t>graved</a:t>
             </a:r>
             <a:endParaRPr lang="en-US" sz="1400" dirty="0"/>
           </a:p>
@@ -15671,7 +15851,7 @@
         </p:nvSpPr>
         <p:spPr>
           <a:xfrm>
-            <a:off x="2427732" y="4169664"/>
+            <a:off x="2124837" y="4169664"/>
             <a:ext cx="685800" cy="475488"/>
           </a:xfrm>
           <a:prstGeom prst="rect">
@@ -15698,7 +15878,7 @@
         </p:nvSpPr>
         <p:spPr>
           <a:xfrm>
-            <a:off x="2427732" y="4169664"/>
+            <a:off x="2124837" y="4169664"/>
             <a:ext cx="685800" cy="475488"/>
           </a:xfrm>
           <a:prstGeom prst="rect">
@@ -15737,7 +15917,7 @@
         </p:nvSpPr>
         <p:spPr>
           <a:xfrm>
-            <a:off x="3639312" y="4169664"/>
+            <a:off x="3033522" y="4169664"/>
             <a:ext cx="685800" cy="475488"/>
           </a:xfrm>
           <a:prstGeom prst="rect">
@@ -15764,7 +15944,7 @@
         </p:nvSpPr>
         <p:spPr>
           <a:xfrm>
-            <a:off x="3639312" y="4169664"/>
+            <a:off x="3033522" y="4169664"/>
             <a:ext cx="685800" cy="475488"/>
           </a:xfrm>
           <a:prstGeom prst="rect">
@@ -15803,7 +15983,7 @@
         </p:nvSpPr>
         <p:spPr>
           <a:xfrm>
-            <a:off x="4850892" y="4169664"/>
+            <a:off x="3942207" y="4169664"/>
             <a:ext cx="685800" cy="475488"/>
           </a:xfrm>
           <a:prstGeom prst="rect">
@@ -15830,7 +16010,7 @@
         </p:nvSpPr>
         <p:spPr>
           <a:xfrm>
-            <a:off x="4850892" y="4169664"/>
+            <a:off x="3942207" y="4169664"/>
             <a:ext cx="685800" cy="475488"/>
           </a:xfrm>
           <a:prstGeom prst="rect">
@@ -15855,7 +16035,7 @@
                 <a:ea typeface="Trebuchet MS" pitchFamily="34" charset="-122"/>
                 <a:cs typeface="Trebuchet MS" pitchFamily="34" charset="-120"/>
               </a:rPr>
-              <a:t>j</a:t>
+              <a:t>g</a:t>
             </a:r>
             <a:endParaRPr lang="en-US" sz="900" dirty="0"/>
           </a:p>
@@ -15869,7 +16049,7 @@
         </p:nvSpPr>
         <p:spPr>
           <a:xfrm>
-            <a:off x="6062472" y="4169664"/>
+            <a:off x="4850892" y="4169664"/>
             <a:ext cx="685800" cy="475488"/>
           </a:xfrm>
           <a:prstGeom prst="rect">
@@ -15896,7 +16076,7 @@
         </p:nvSpPr>
         <p:spPr>
           <a:xfrm>
-            <a:off x="6062472" y="4169664"/>
+            <a:off x="4850892" y="4169664"/>
             <a:ext cx="685800" cy="475488"/>
           </a:xfrm>
           <a:prstGeom prst="rect">
@@ -15921,7 +16101,7 @@
                 <a:ea typeface="Trebuchet MS" pitchFamily="34" charset="-122"/>
                 <a:cs typeface="Trebuchet MS" pitchFamily="34" charset="-120"/>
               </a:rPr>
-              <a:t>oy</a:t>
+              <a:t>r</a:t>
             </a:r>
             <a:endParaRPr lang="en-US" sz="900" dirty="0"/>
           </a:p>
@@ -15935,7 +16115,7 @@
         </p:nvSpPr>
         <p:spPr>
           <a:xfrm>
-            <a:off x="7274052" y="4169664"/>
+            <a:off x="5759577" y="4169664"/>
             <a:ext cx="685800" cy="475488"/>
           </a:xfrm>
           <a:prstGeom prst="rect">
@@ -15962,7 +16142,7 @@
         </p:nvSpPr>
         <p:spPr>
           <a:xfrm>
-            <a:off x="7274052" y="4169664"/>
+            <a:off x="5759577" y="4169664"/>
             <a:ext cx="685800" cy="475488"/>
           </a:xfrm>
           <a:prstGeom prst="rect">
@@ -15987,7 +16167,139 @@
                 <a:ea typeface="Trebuchet MS" pitchFamily="34" charset="-122"/>
                 <a:cs typeface="Trebuchet MS" pitchFamily="34" charset="-120"/>
               </a:rPr>
-              <a:t>ed</a:t>
+              <a:t>a_e</a:t>
+            </a:r>
+            <a:endParaRPr lang="en-US" sz="900" dirty="0"/>
+          </a:p>
+        </p:txBody>
+      </p:sp>
+      <p:sp>
+        <p:nvSpPr>
+          <p:cNvPr id="46" name="Shape 44"/>
+          <p:cNvSpPr/>
+          <p:nvPr/>
+        </p:nvSpPr>
+        <p:spPr>
+          <a:xfrm>
+            <a:off x="6668262" y="4169664"/>
+            <a:ext cx="685800" cy="475488"/>
+          </a:xfrm>
+          <a:prstGeom prst="rect">
+            <a:avLst>
+              <a:gd name="adj" fmla="val 7692"/>
+            </a:avLst>
+          </a:prstGeom>
+          <a:solidFill>
+            <a:srgbClr val="FFFFFF"/>
+          </a:solidFill>
+          <a:ln w="12700">
+            <a:solidFill>
+              <a:srgbClr val="DB2777"/>
+            </a:solidFill>
+            <a:prstDash val="solid"/>
+          </a:ln>
+        </p:spPr>
+      </p:sp>
+      <p:sp>
+        <p:nvSpPr>
+          <p:cNvPr id="47" name="Text 45"/>
+          <p:cNvSpPr/>
+          <p:nvPr/>
+        </p:nvSpPr>
+        <p:spPr>
+          <a:xfrm>
+            <a:off x="6668262" y="4169664"/>
+            <a:ext cx="685800" cy="475488"/>
+          </a:xfrm>
+          <a:prstGeom prst="rect">
+            <a:avLst/>
+          </a:prstGeom>
+          <a:noFill/>
+          <a:ln/>
+        </p:spPr>
+        <p:txBody>
+          <a:bodyPr wrap="square" lIns="0" tIns="0" rIns="0" bIns="0" rtlCol="0" anchor="ctr"/>
+          <a:lstStyle/>
+          <a:p>
+            <a:pPr algn="ctr" indent="0" marL="0">
+              <a:buNone/>
+            </a:pPr>
+            <a:r>
+              <a:rPr lang="en-US" sz="900" b="1" dirty="0">
+                <a:solidFill>
+                  <a:srgbClr val="9D174D"/>
+                </a:solidFill>
+                <a:latin typeface="Trebuchet MS" pitchFamily="34" charset="0"/>
+                <a:ea typeface="Trebuchet MS" pitchFamily="34" charset="-122"/>
+                <a:cs typeface="Trebuchet MS" pitchFamily="34" charset="-120"/>
+              </a:rPr>
+              <a:t>v</a:t>
+            </a:r>
+            <a:endParaRPr lang="en-US" sz="900" dirty="0"/>
+          </a:p>
+        </p:txBody>
+      </p:sp>
+      <p:sp>
+        <p:nvSpPr>
+          <p:cNvPr id="48" name="Shape 46"/>
+          <p:cNvSpPr/>
+          <p:nvPr/>
+        </p:nvSpPr>
+        <p:spPr>
+          <a:xfrm>
+            <a:off x="7576947" y="4169664"/>
+            <a:ext cx="685800" cy="475488"/>
+          </a:xfrm>
+          <a:prstGeom prst="rect">
+            <a:avLst>
+              <a:gd name="adj" fmla="val 7692"/>
+            </a:avLst>
+          </a:prstGeom>
+          <a:solidFill>
+            <a:srgbClr val="FFFFFF"/>
+          </a:solidFill>
+          <a:ln w="12700">
+            <a:solidFill>
+              <a:srgbClr val="DB2777"/>
+            </a:solidFill>
+            <a:prstDash val="solid"/>
+          </a:ln>
+        </p:spPr>
+      </p:sp>
+      <p:sp>
+        <p:nvSpPr>
+          <p:cNvPr id="49" name="Text 47"/>
+          <p:cNvSpPr/>
+          <p:nvPr/>
+        </p:nvSpPr>
+        <p:spPr>
+          <a:xfrm>
+            <a:off x="7576947" y="4169664"/>
+            <a:ext cx="685800" cy="475488"/>
+          </a:xfrm>
+          <a:prstGeom prst="rect">
+            <a:avLst/>
+          </a:prstGeom>
+          <a:noFill/>
+          <a:ln/>
+        </p:spPr>
+        <p:txBody>
+          <a:bodyPr wrap="square" lIns="0" tIns="0" rIns="0" bIns="0" rtlCol="0" anchor="ctr"/>
+          <a:lstStyle/>
+          <a:p>
+            <a:pPr algn="ctr" indent="0" marL="0">
+              <a:buNone/>
+            </a:pPr>
+            <a:r>
+              <a:rPr lang="en-US" sz="900" b="1" dirty="0">
+                <a:solidFill>
+                  <a:srgbClr val="9D174D"/>
+                </a:solidFill>
+                <a:latin typeface="Trebuchet MS" pitchFamily="34" charset="0"/>
+                <a:ea typeface="Trebuchet MS" pitchFamily="34" charset="-122"/>
+                <a:cs typeface="Trebuchet MS" pitchFamily="34" charset="-120"/>
+              </a:rPr>
+              <a:t>d</a:t>
             </a:r>
             <a:endParaRPr lang="en-US" sz="900" dirty="0"/>
           </a:p>
@@ -16561,7 +16873,7 @@
                 <a:ea typeface="Calibri" pitchFamily="34" charset="-122"/>
                 <a:cs typeface="Calibri" pitchFamily="34" charset="-120"/>
               </a:rPr>
-              <a:t>Word Labs  •  wordlabs.app  •  Prefix: 'en-' = to make, put into</a:t>
+              <a:t>Word Labs  •  wordlabs.app  •  Prefix: 'en-' = cause to; make</a:t>
             </a:r>
             <a:endParaRPr lang="en-US" sz="800" dirty="0"/>
           </a:p>
@@ -16895,7 +17207,7 @@
                 <a:ea typeface="Trebuchet MS" pitchFamily="34" charset="-122"/>
                 <a:cs typeface="Trebuchet MS" pitchFamily="34" charset="-120"/>
               </a:rPr>
-              <a:t>2</a:t>
+              <a:t>0</a:t>
             </a:r>
             <a:pPr algn="ctr" indent="0" marL="0">
               <a:buNone/>
@@ -16909,7 +17221,7 @@
                 <a:ea typeface="Trebuchet MS" pitchFamily="34" charset="-122"/>
                 <a:cs typeface="Trebuchet MS" pitchFamily="34" charset="-120"/>
               </a:rPr>
-              <a:t>  punctuation marks</a:t>
+              <a:t>  punctuation mark</a:t>
             </a:r>
             <a:endParaRPr lang="en-US" sz="2800" dirty="0"/>
           </a:p>
@@ -17201,7 +17513,7 @@
                 <a:ea typeface="Calibri" pitchFamily="34" charset="-122"/>
                 <a:cs typeface="Calibri" pitchFamily="34" charset="-120"/>
               </a:rPr>
-              <a:t>Word Labs  •  wordlabs.app  •  Prefix: 'en-' = to make, put into</a:t>
+              <a:t>Word Labs  •  wordlabs.app  •  Prefix: 'en-' = cause to; make</a:t>
             </a:r>
             <a:endParaRPr lang="en-US" sz="800" dirty="0"/>
           </a:p>
@@ -17313,7 +17625,7 @@
                 <a:ea typeface="Calibri" pitchFamily="34" charset="-122"/>
                 <a:cs typeface="Calibri" pitchFamily="34" charset="-120"/>
               </a:rPr>
-              <a:t>We must </a:t>
+              <a:t>The lions have a large </a:t>
             </a:r>
             <a:pPr algn="l" indent="0" marL="0">
               <a:buNone/>
@@ -17330,7 +17642,7 @@
                 <a:ea typeface="Calibri" pitchFamily="34" charset="-122"/>
                 <a:cs typeface="Calibri" pitchFamily="34" charset="-120"/>
               </a:rPr>
-              <a:t>enforce</a:t>
+              <a:t>enclosure</a:t>
             </a:r>
             <a:pPr algn="l" indent="0" marL="0">
               <a:buNone/>
@@ -17344,7 +17656,7 @@
                 <a:ea typeface="Calibri" pitchFamily="34" charset="-122"/>
                 <a:cs typeface="Calibri" pitchFamily="34" charset="-120"/>
               </a:rPr>
-              <a:t> the rules to </a:t>
+              <a:t> at the zoo. The old </a:t>
             </a:r>
             <a:pPr algn="l" indent="0" marL="0">
               <a:buNone/>
@@ -17361,7 +17673,7 @@
                 <a:ea typeface="Calibri" pitchFamily="34" charset="-122"/>
                 <a:cs typeface="Calibri" pitchFamily="34" charset="-120"/>
               </a:rPr>
-              <a:t>ensure</a:t>
+              <a:t>engraving</a:t>
             </a:r>
             <a:pPr algn="l" indent="0" marL="0">
               <a:buNone/>
@@ -17375,7 +17687,7 @@
                 <a:ea typeface="Calibri" pitchFamily="34" charset="-122"/>
                 <a:cs typeface="Calibri" pitchFamily="34" charset="-120"/>
               </a:rPr>
-              <a:t> the safety of all, and to </a:t>
+              <a:t> on the coin showed a lion's head. The zoo built new </a:t>
             </a:r>
             <a:pPr algn="l" indent="0" marL="0">
               <a:buNone/>
@@ -17392,7 +17704,7 @@
                 <a:ea typeface="Calibri" pitchFamily="34" charset="-122"/>
                 <a:cs typeface="Calibri" pitchFamily="34" charset="-120"/>
               </a:rPr>
-              <a:t>enrich</a:t>
+              <a:t>enclosures</a:t>
             </a:r>
             <a:pPr algn="l" indent="0" marL="0">
               <a:buNone/>
@@ -17406,7 +17718,7 @@
                 <a:ea typeface="Calibri" pitchFamily="34" charset="-122"/>
                 <a:cs typeface="Calibri" pitchFamily="34" charset="-120"/>
               </a:rPr>
-              <a:t> everyone's experience.</a:t>
+              <a:t> for the giraffes.</a:t>
             </a:r>
             <a:endParaRPr lang="en-US" sz="1800" dirty="0"/>
           </a:p>
@@ -17561,7 +17873,7 @@
                 <a:ea typeface="Trebuchet MS" pitchFamily="34" charset="-122"/>
                 <a:cs typeface="Trebuchet MS" pitchFamily="34" charset="-120"/>
               </a:rPr>
-              <a:t>enforce</a:t>
+              <a:t>enclosure</a:t>
             </a:r>
             <a:endParaRPr lang="en-US" sz="1400" dirty="0"/>
           </a:p>
@@ -17689,7 +18001,7 @@
                 <a:ea typeface="Trebuchet MS" pitchFamily="34" charset="-122"/>
                 <a:cs typeface="Trebuchet MS" pitchFamily="34" charset="-120"/>
               </a:rPr>
-              <a:t>ensure</a:t>
+              <a:t>engraving</a:t>
             </a:r>
             <a:endParaRPr lang="en-US" sz="1400" dirty="0"/>
           </a:p>
@@ -17817,7 +18129,7 @@
                 <a:ea typeface="Trebuchet MS" pitchFamily="34" charset="-122"/>
                 <a:cs typeface="Trebuchet MS" pitchFamily="34" charset="-120"/>
               </a:rPr>
-              <a:t>enrich</a:t>
+              <a:t>enclosures</a:t>
             </a:r>
             <a:endParaRPr lang="en-US" sz="1400" dirty="0"/>
           </a:p>
@@ -18148,7 +18460,7 @@
                 <a:ea typeface="Calibri" pitchFamily="34" charset="-122"/>
                 <a:cs typeface="Calibri" pitchFamily="34" charset="-120"/>
               </a:rPr>
-              <a:t>Word Labs  •  wordlabs.app  •  Prefix: 'en-' = to make, put into</a:t>
+              <a:t>Word Labs  •  wordlabs.app  •  Prefix: 'en-' = cause to; make</a:t>
             </a:r>
             <a:endParaRPr lang="en-US" sz="800" dirty="0"/>
           </a:p>
@@ -18287,7 +18599,7 @@
                 <a:ea typeface="Trebuchet MS" pitchFamily="34" charset="-122"/>
                 <a:cs typeface="Trebuchet MS" pitchFamily="34" charset="-120"/>
               </a:rPr>
-              <a:t>enforce</a:t>
+              <a:t>enclosure</a:t>
             </a:r>
             <a:endParaRPr lang="en-US" sz="2800" dirty="0"/>
           </a:p>
@@ -18975,7 +19287,7 @@
                 <a:ea typeface="Calibri" pitchFamily="34" charset="-122"/>
                 <a:cs typeface="Calibri" pitchFamily="34" charset="-120"/>
               </a:rPr>
-              <a:t>Word Labs  •  wordlabs.app  •  Prefix: 'en-' = to make, put into</a:t>
+              <a:t>Word Labs  •  wordlabs.app  •  Prefix: 'en-' = cause to; make</a:t>
             </a:r>
             <a:endParaRPr lang="en-US" sz="800" dirty="0"/>
           </a:p>
@@ -19114,7 +19426,7 @@
                 <a:ea typeface="Trebuchet MS" pitchFamily="34" charset="-122"/>
                 <a:cs typeface="Trebuchet MS" pitchFamily="34" charset="-120"/>
               </a:rPr>
-              <a:t>enforce</a:t>
+              <a:t>enclosure</a:t>
             </a:r>
             <a:endParaRPr lang="en-US" sz="2800" dirty="0"/>
           </a:p>
@@ -19194,7 +19506,7 @@
         </p:nvSpPr>
         <p:spPr>
           <a:xfrm>
-            <a:off x="2938272" y="2258568"/>
+            <a:off x="2221992" y="2258568"/>
             <a:ext cx="1828800" cy="292608"/>
           </a:xfrm>
           <a:prstGeom prst="rect">
@@ -19228,7 +19540,7 @@
         </p:nvSpPr>
         <p:spPr>
           <a:xfrm>
-            <a:off x="2938272" y="2258568"/>
+            <a:off x="2221992" y="2258568"/>
             <a:ext cx="1828800" cy="292608"/>
           </a:xfrm>
           <a:prstGeom prst="rect">
@@ -19267,7 +19579,7 @@
         </p:nvSpPr>
         <p:spPr>
           <a:xfrm>
-            <a:off x="2938272" y="2569464"/>
+            <a:off x="2221992" y="2569464"/>
             <a:ext cx="1828800" cy="201168"/>
           </a:xfrm>
           <a:prstGeom prst="rect">
@@ -19292,7 +19604,7 @@
                 <a:ea typeface="Calibri" pitchFamily="34" charset="-122"/>
                 <a:cs typeface="Calibri" pitchFamily="34" charset="-120"/>
               </a:rPr>
-              <a:t>to make, put into</a:t>
+              <a:t>made of; to make</a:t>
             </a:r>
             <a:endParaRPr lang="en-US" sz="850" dirty="0"/>
           </a:p>
@@ -19306,7 +19618,7 @@
         </p:nvSpPr>
         <p:spPr>
           <a:xfrm>
-            <a:off x="5803392" y="2258568"/>
+            <a:off x="4370832" y="2258568"/>
             <a:ext cx="1828800" cy="292608"/>
           </a:xfrm>
           <a:prstGeom prst="rect">
@@ -19340,7 +19652,7 @@
         </p:nvSpPr>
         <p:spPr>
           <a:xfrm>
-            <a:off x="5803392" y="2258568"/>
+            <a:off x="4370832" y="2258568"/>
             <a:ext cx="1828800" cy="292608"/>
           </a:xfrm>
           <a:prstGeom prst="rect">
@@ -19365,7 +19677,7 @@
                 <a:ea typeface="Trebuchet MS" pitchFamily="34" charset="-122"/>
                 <a:cs typeface="Trebuchet MS" pitchFamily="34" charset="-120"/>
               </a:rPr>
-              <a:t>force</a:t>
+              <a:t>clos</a:t>
             </a:r>
             <a:endParaRPr lang="en-US" sz="1300" dirty="0"/>
           </a:p>
@@ -19379,7 +19691,7 @@
         </p:nvSpPr>
         <p:spPr>
           <a:xfrm>
-            <a:off x="5803392" y="2569464"/>
+            <a:off x="4370832" y="2569464"/>
             <a:ext cx="1828800" cy="201168"/>
           </a:xfrm>
           <a:prstGeom prst="rect">
@@ -19404,7 +19716,7 @@
                 <a:ea typeface="Calibri" pitchFamily="34" charset="-122"/>
                 <a:cs typeface="Calibri" pitchFamily="34" charset="-120"/>
               </a:rPr>
-              <a:t>strength, power</a:t>
+              <a:t>close</a:t>
             </a:r>
             <a:endParaRPr lang="en-US" sz="850" dirty="0"/>
           </a:p>
@@ -19413,6 +19725,118 @@
       <p:sp>
         <p:nvSpPr>
           <p:cNvPr id="22" name="Shape 20"/>
+          <p:cNvSpPr/>
+          <p:nvPr/>
+        </p:nvSpPr>
+        <p:spPr>
+          <a:xfrm>
+            <a:off x="6519672" y="2258568"/>
+            <a:ext cx="1828800" cy="292608"/>
+          </a:xfrm>
+          <a:prstGeom prst="rect">
+            <a:avLst>
+              <a:gd name="adj" fmla="val 25000"/>
+            </a:avLst>
+          </a:prstGeom>
+          <a:solidFill>
+            <a:srgbClr val="FCE7F3"/>
+          </a:solidFill>
+          <a:ln w="19050">
+            <a:solidFill>
+              <a:srgbClr val="DB2777"/>
+            </a:solidFill>
+            <a:prstDash val="solid"/>
+          </a:ln>
+          <a:effectLst>
+            <a:outerShdw sx="100000" sy="100000" kx="0" ky="0" algn="bl" rotWithShape="0" blurRad="101600" dist="38100" dir="8100000">
+              <a:srgbClr val="000000">
+                <a:alpha val="12000"/>
+              </a:srgbClr>
+            </a:outerShdw>
+          </a:effectLst>
+        </p:spPr>
+      </p:sp>
+      <p:sp>
+        <p:nvSpPr>
+          <p:cNvPr id="23" name="Text 21"/>
+          <p:cNvSpPr/>
+          <p:nvPr/>
+        </p:nvSpPr>
+        <p:spPr>
+          <a:xfrm>
+            <a:off x="6519672" y="2258568"/>
+            <a:ext cx="1828800" cy="292608"/>
+          </a:xfrm>
+          <a:prstGeom prst="rect">
+            <a:avLst/>
+          </a:prstGeom>
+          <a:noFill/>
+          <a:ln/>
+        </p:spPr>
+        <p:txBody>
+          <a:bodyPr wrap="square" lIns="0" tIns="0" rIns="0" bIns="0" rtlCol="0" anchor="ctr"/>
+          <a:lstStyle/>
+          <a:p>
+            <a:pPr algn="ctr" indent="0" marL="0">
+              <a:buNone/>
+            </a:pPr>
+            <a:r>
+              <a:rPr lang="en-US" sz="1300" b="1" dirty="0">
+                <a:solidFill>
+                  <a:srgbClr val="9D174D"/>
+                </a:solidFill>
+                <a:latin typeface="Trebuchet MS" pitchFamily="34" charset="0"/>
+                <a:ea typeface="Trebuchet MS" pitchFamily="34" charset="-122"/>
+                <a:cs typeface="Trebuchet MS" pitchFamily="34" charset="-120"/>
+              </a:rPr>
+              <a:t>ure</a:t>
+            </a:r>
+            <a:endParaRPr lang="en-US" sz="1300" dirty="0"/>
+          </a:p>
+        </p:txBody>
+      </p:sp>
+      <p:sp>
+        <p:nvSpPr>
+          <p:cNvPr id="24" name="Text 22"/>
+          <p:cNvSpPr/>
+          <p:nvPr/>
+        </p:nvSpPr>
+        <p:spPr>
+          <a:xfrm>
+            <a:off x="6519672" y="2569464"/>
+            <a:ext cx="1828800" cy="201168"/>
+          </a:xfrm>
+          <a:prstGeom prst="rect">
+            <a:avLst/>
+          </a:prstGeom>
+          <a:noFill/>
+          <a:ln/>
+        </p:spPr>
+        <p:txBody>
+          <a:bodyPr wrap="square" lIns="0" tIns="0" rIns="0" bIns="0" rtlCol="0" anchor="t"/>
+          <a:lstStyle/>
+          <a:p>
+            <a:pPr algn="ctr" indent="0" marL="0">
+              <a:buNone/>
+            </a:pPr>
+            <a:r>
+              <a:rPr lang="en-US" sz="850" dirty="0">
+                <a:solidFill>
+                  <a:srgbClr val="475569"/>
+                </a:solidFill>
+                <a:latin typeface="Calibri" pitchFamily="34" charset="0"/>
+                <a:ea typeface="Calibri" pitchFamily="34" charset="-122"/>
+                <a:cs typeface="Calibri" pitchFamily="34" charset="-120"/>
+              </a:rPr>
+              <a:t>result of</a:t>
+            </a:r>
+            <a:endParaRPr lang="en-US" sz="850" dirty="0"/>
+          </a:p>
+        </p:txBody>
+      </p:sp>
+      <p:sp>
+        <p:nvSpPr>
+          <p:cNvPr id="25" name="Shape 23"/>
           <p:cNvSpPr/>
           <p:nvPr/>
         </p:nvSpPr>
@@ -19439,7 +19863,7 @@
       </p:sp>
       <p:sp>
         <p:nvSpPr>
-          <p:cNvPr id="23" name="Text 21"/>
+          <p:cNvPr id="26" name="Text 24"/>
           <p:cNvSpPr/>
           <p:nvPr/>
         </p:nvSpPr>
@@ -19478,7 +19902,7 @@
       </p:sp>
       <p:sp>
         <p:nvSpPr>
-          <p:cNvPr id="24" name="Shape 22"/>
+          <p:cNvPr id="27" name="Shape 25"/>
           <p:cNvSpPr/>
           <p:nvPr/>
         </p:nvSpPr>
@@ -19505,7 +19929,7 @@
       </p:sp>
       <p:sp>
         <p:nvSpPr>
-          <p:cNvPr id="25" name="Text 23"/>
+          <p:cNvPr id="28" name="Text 26"/>
           <p:cNvSpPr/>
           <p:nvPr/>
         </p:nvSpPr>
@@ -19544,7 +19968,7 @@
       </p:sp>
       <p:sp>
         <p:nvSpPr>
-          <p:cNvPr id="26" name="Shape 24"/>
+          <p:cNvPr id="29" name="Shape 27"/>
           <p:cNvSpPr/>
           <p:nvPr/>
         </p:nvSpPr>
@@ -19571,7 +19995,7 @@
       </p:sp>
       <p:sp>
         <p:nvSpPr>
-          <p:cNvPr id="27" name="Text 25"/>
+          <p:cNvPr id="30" name="Text 28"/>
           <p:cNvSpPr/>
           <p:nvPr/>
         </p:nvSpPr>
@@ -19610,7 +20034,7 @@
       </p:sp>
       <p:sp>
         <p:nvSpPr>
-          <p:cNvPr id="28" name="Shape 26"/>
+          <p:cNvPr id="31" name="Shape 29"/>
           <p:cNvSpPr/>
           <p:nvPr/>
         </p:nvSpPr>
@@ -19637,7 +20061,7 @@
       </p:sp>
       <p:sp>
         <p:nvSpPr>
-          <p:cNvPr id="29" name="Text 27"/>
+          <p:cNvPr id="32" name="Text 30"/>
           <p:cNvSpPr/>
           <p:nvPr/>
         </p:nvSpPr>
@@ -19960,7 +20384,7 @@
                 <a:ea typeface="Calibri" pitchFamily="34" charset="-122"/>
                 <a:cs typeface="Calibri" pitchFamily="34" charset="-120"/>
               </a:rPr>
-              <a:t>Word Labs  •  wordlabs.app  •  Prefix: 'en-' = to make, put into</a:t>
+              <a:t>Word Labs  •  wordlabs.app  •  Prefix: 'en-' = cause to; make</a:t>
             </a:r>
             <a:endParaRPr lang="en-US" sz="800" dirty="0"/>
           </a:p>
@@ -20099,7 +20523,7 @@
                 <a:ea typeface="Trebuchet MS" pitchFamily="34" charset="-122"/>
                 <a:cs typeface="Trebuchet MS" pitchFamily="34" charset="-120"/>
               </a:rPr>
-              <a:t>enforce</a:t>
+              <a:t>enclosure</a:t>
             </a:r>
             <a:endParaRPr lang="en-US" sz="2800" dirty="0"/>
           </a:p>
@@ -20179,7 +20603,7 @@
         </p:nvSpPr>
         <p:spPr>
           <a:xfrm>
-            <a:off x="2938272" y="2258568"/>
+            <a:off x="2221992" y="2258568"/>
             <a:ext cx="1828800" cy="292608"/>
           </a:xfrm>
           <a:prstGeom prst="rect">
@@ -20213,7 +20637,7 @@
         </p:nvSpPr>
         <p:spPr>
           <a:xfrm>
-            <a:off x="2938272" y="2258568"/>
+            <a:off x="2221992" y="2258568"/>
             <a:ext cx="1828800" cy="292608"/>
           </a:xfrm>
           <a:prstGeom prst="rect">
@@ -20252,7 +20676,7 @@
         </p:nvSpPr>
         <p:spPr>
           <a:xfrm>
-            <a:off x="2938272" y="2569464"/>
+            <a:off x="2221992" y="2569464"/>
             <a:ext cx="1828800" cy="201168"/>
           </a:xfrm>
           <a:prstGeom prst="rect">
@@ -20277,7 +20701,7 @@
                 <a:ea typeface="Calibri" pitchFamily="34" charset="-122"/>
                 <a:cs typeface="Calibri" pitchFamily="34" charset="-120"/>
               </a:rPr>
-              <a:t>to make, put into</a:t>
+              <a:t>made of; to make</a:t>
             </a:r>
             <a:endParaRPr lang="en-US" sz="850" dirty="0"/>
           </a:p>
@@ -20291,7 +20715,7 @@
         </p:nvSpPr>
         <p:spPr>
           <a:xfrm>
-            <a:off x="5803392" y="2258568"/>
+            <a:off x="4370832" y="2258568"/>
             <a:ext cx="1828800" cy="292608"/>
           </a:xfrm>
           <a:prstGeom prst="rect">
@@ -20325,7 +20749,7 @@
         </p:nvSpPr>
         <p:spPr>
           <a:xfrm>
-            <a:off x="5803392" y="2258568"/>
+            <a:off x="4370832" y="2258568"/>
             <a:ext cx="1828800" cy="292608"/>
           </a:xfrm>
           <a:prstGeom prst="rect">
@@ -20350,7 +20774,7 @@
                 <a:ea typeface="Trebuchet MS" pitchFamily="34" charset="-122"/>
                 <a:cs typeface="Trebuchet MS" pitchFamily="34" charset="-120"/>
               </a:rPr>
-              <a:t>force</a:t>
+              <a:t>clos</a:t>
             </a:r>
             <a:endParaRPr lang="en-US" sz="1300" dirty="0"/>
           </a:p>
@@ -20364,7 +20788,7 @@
         </p:nvSpPr>
         <p:spPr>
           <a:xfrm>
-            <a:off x="5803392" y="2569464"/>
+            <a:off x="4370832" y="2569464"/>
             <a:ext cx="1828800" cy="201168"/>
           </a:xfrm>
           <a:prstGeom prst="rect">
@@ -20389,7 +20813,7 @@
                 <a:ea typeface="Calibri" pitchFamily="34" charset="-122"/>
                 <a:cs typeface="Calibri" pitchFamily="34" charset="-120"/>
               </a:rPr>
-              <a:t>strength, power</a:t>
+              <a:t>close</a:t>
             </a:r>
             <a:endParaRPr lang="en-US" sz="850" dirty="0"/>
           </a:p>
@@ -20398,6 +20822,118 @@
       <p:sp>
         <p:nvSpPr>
           <p:cNvPr id="22" name="Shape 20"/>
+          <p:cNvSpPr/>
+          <p:nvPr/>
+        </p:nvSpPr>
+        <p:spPr>
+          <a:xfrm>
+            <a:off x="6519672" y="2258568"/>
+            <a:ext cx="1828800" cy="292608"/>
+          </a:xfrm>
+          <a:prstGeom prst="rect">
+            <a:avLst>
+              <a:gd name="adj" fmla="val 25000"/>
+            </a:avLst>
+          </a:prstGeom>
+          <a:solidFill>
+            <a:srgbClr val="FCE7F3"/>
+          </a:solidFill>
+          <a:ln w="19050">
+            <a:solidFill>
+              <a:srgbClr val="DB2777"/>
+            </a:solidFill>
+            <a:prstDash val="solid"/>
+          </a:ln>
+          <a:effectLst>
+            <a:outerShdw sx="100000" sy="100000" kx="0" ky="0" algn="bl" rotWithShape="0" blurRad="101600" dist="38100" dir="8100000">
+              <a:srgbClr val="000000">
+                <a:alpha val="12000"/>
+              </a:srgbClr>
+            </a:outerShdw>
+          </a:effectLst>
+        </p:spPr>
+      </p:sp>
+      <p:sp>
+        <p:nvSpPr>
+          <p:cNvPr id="23" name="Text 21"/>
+          <p:cNvSpPr/>
+          <p:nvPr/>
+        </p:nvSpPr>
+        <p:spPr>
+          <a:xfrm>
+            <a:off x="6519672" y="2258568"/>
+            <a:ext cx="1828800" cy="292608"/>
+          </a:xfrm>
+          <a:prstGeom prst="rect">
+            <a:avLst/>
+          </a:prstGeom>
+          <a:noFill/>
+          <a:ln/>
+        </p:spPr>
+        <p:txBody>
+          <a:bodyPr wrap="square" lIns="0" tIns="0" rIns="0" bIns="0" rtlCol="0" anchor="ctr"/>
+          <a:lstStyle/>
+          <a:p>
+            <a:pPr algn="ctr" indent="0" marL="0">
+              <a:buNone/>
+            </a:pPr>
+            <a:r>
+              <a:rPr lang="en-US" sz="1300" b="1" dirty="0">
+                <a:solidFill>
+                  <a:srgbClr val="9D174D"/>
+                </a:solidFill>
+                <a:latin typeface="Trebuchet MS" pitchFamily="34" charset="0"/>
+                <a:ea typeface="Trebuchet MS" pitchFamily="34" charset="-122"/>
+                <a:cs typeface="Trebuchet MS" pitchFamily="34" charset="-120"/>
+              </a:rPr>
+              <a:t>ure</a:t>
+            </a:r>
+            <a:endParaRPr lang="en-US" sz="1300" dirty="0"/>
+          </a:p>
+        </p:txBody>
+      </p:sp>
+      <p:sp>
+        <p:nvSpPr>
+          <p:cNvPr id="24" name="Text 22"/>
+          <p:cNvSpPr/>
+          <p:nvPr/>
+        </p:nvSpPr>
+        <p:spPr>
+          <a:xfrm>
+            <a:off x="6519672" y="2569464"/>
+            <a:ext cx="1828800" cy="201168"/>
+          </a:xfrm>
+          <a:prstGeom prst="rect">
+            <a:avLst/>
+          </a:prstGeom>
+          <a:noFill/>
+          <a:ln/>
+        </p:spPr>
+        <p:txBody>
+          <a:bodyPr wrap="square" lIns="0" tIns="0" rIns="0" bIns="0" rtlCol="0" anchor="t"/>
+          <a:lstStyle/>
+          <a:p>
+            <a:pPr algn="ctr" indent="0" marL="0">
+              <a:buNone/>
+            </a:pPr>
+            <a:r>
+              <a:rPr lang="en-US" sz="850" dirty="0">
+                <a:solidFill>
+                  <a:srgbClr val="475569"/>
+                </a:solidFill>
+                <a:latin typeface="Calibri" pitchFamily="34" charset="0"/>
+                <a:ea typeface="Calibri" pitchFamily="34" charset="-122"/>
+                <a:cs typeface="Calibri" pitchFamily="34" charset="-120"/>
+              </a:rPr>
+              <a:t>result of</a:t>
+            </a:r>
+            <a:endParaRPr lang="en-US" sz="850" dirty="0"/>
+          </a:p>
+        </p:txBody>
+      </p:sp>
+      <p:sp>
+        <p:nvSpPr>
+          <p:cNvPr id="25" name="Shape 23"/>
           <p:cNvSpPr/>
           <p:nvPr/>
         </p:nvSpPr>
@@ -20424,7 +20960,7 @@
       </p:sp>
       <p:sp>
         <p:nvSpPr>
-          <p:cNvPr id="23" name="Text 21"/>
+          <p:cNvPr id="26" name="Text 24"/>
           <p:cNvSpPr/>
           <p:nvPr/>
         </p:nvSpPr>
@@ -20463,7 +20999,7 @@
       </p:sp>
       <p:sp>
         <p:nvSpPr>
-          <p:cNvPr id="24" name="Shape 22"/>
+          <p:cNvPr id="27" name="Shape 25"/>
           <p:cNvSpPr/>
           <p:nvPr/>
         </p:nvSpPr>
@@ -20490,13 +21026,13 @@
       </p:sp>
       <p:sp>
         <p:nvSpPr>
-          <p:cNvPr id="25" name="Shape 23"/>
-          <p:cNvSpPr/>
-          <p:nvPr/>
-        </p:nvSpPr>
-        <p:spPr>
-          <a:xfrm>
-            <a:off x="2999232" y="3364992"/>
+          <p:cNvPr id="28" name="Shape 26"/>
+          <p:cNvSpPr/>
+          <p:nvPr/>
+        </p:nvSpPr>
+        <p:spPr>
+          <a:xfrm>
+            <a:off x="2313432" y="3364992"/>
             <a:ext cx="1645920" cy="475488"/>
           </a:xfrm>
           <a:prstGeom prst="rect">
@@ -20517,13 +21053,13 @@
       </p:sp>
       <p:sp>
         <p:nvSpPr>
-          <p:cNvPr id="26" name="Text 24"/>
-          <p:cNvSpPr/>
-          <p:nvPr/>
-        </p:nvSpPr>
-        <p:spPr>
-          <a:xfrm>
-            <a:off x="2999232" y="3364992"/>
+          <p:cNvPr id="29" name="Text 27"/>
+          <p:cNvSpPr/>
+          <p:nvPr/>
+        </p:nvSpPr>
+        <p:spPr>
+          <a:xfrm>
+            <a:off x="2313432" y="3364992"/>
             <a:ext cx="1645920" cy="475488"/>
           </a:xfrm>
           <a:prstGeom prst="rect">
@@ -20556,14 +21092,14 @@
       </p:sp>
       <p:sp>
         <p:nvSpPr>
-          <p:cNvPr id="27" name="Text 25"/>
-          <p:cNvSpPr/>
-          <p:nvPr/>
-        </p:nvSpPr>
-        <p:spPr>
-          <a:xfrm>
-            <a:off x="4645152" y="3364992"/>
-            <a:ext cx="1097280" cy="475488"/>
+          <p:cNvPr id="30" name="Text 28"/>
+          <p:cNvSpPr/>
+          <p:nvPr/>
+        </p:nvSpPr>
+        <p:spPr>
+          <a:xfrm>
+            <a:off x="3959352" y="3364992"/>
+            <a:ext cx="411480" cy="475488"/>
           </a:xfrm>
           <a:prstGeom prst="rect">
             <a:avLst/>
@@ -20595,13 +21131,13 @@
       </p:sp>
       <p:sp>
         <p:nvSpPr>
-          <p:cNvPr id="28" name="Shape 26"/>
-          <p:cNvSpPr/>
-          <p:nvPr/>
-        </p:nvSpPr>
-        <p:spPr>
-          <a:xfrm>
-            <a:off x="5742432" y="3364992"/>
+          <p:cNvPr id="31" name="Shape 29"/>
+          <p:cNvSpPr/>
+          <p:nvPr/>
+        </p:nvSpPr>
+        <p:spPr>
+          <a:xfrm>
+            <a:off x="4370832" y="3364992"/>
             <a:ext cx="1645920" cy="475488"/>
           </a:xfrm>
           <a:prstGeom prst="rect">
@@ -20622,13 +21158,13 @@
       </p:sp>
       <p:sp>
         <p:nvSpPr>
-          <p:cNvPr id="29" name="Text 27"/>
-          <p:cNvSpPr/>
-          <p:nvPr/>
-        </p:nvSpPr>
-        <p:spPr>
-          <a:xfrm>
-            <a:off x="5742432" y="3364992"/>
+          <p:cNvPr id="32" name="Text 30"/>
+          <p:cNvSpPr/>
+          <p:nvPr/>
+        </p:nvSpPr>
+        <p:spPr>
+          <a:xfrm>
+            <a:off x="4370832" y="3364992"/>
             <a:ext cx="1645920" cy="475488"/>
           </a:xfrm>
           <a:prstGeom prst="rect">
@@ -20653,7 +21189,7 @@
                 <a:ea typeface="Trebuchet MS" pitchFamily="34" charset="-122"/>
                 <a:cs typeface="Trebuchet MS" pitchFamily="34" charset="-120"/>
               </a:rPr>
-              <a:t>force</a:t>
+              <a:t>clo</a:t>
             </a:r>
             <a:endParaRPr lang="en-US" sz="1400" dirty="0"/>
           </a:p>
@@ -20661,7 +21197,112 @@
       </p:sp>
       <p:sp>
         <p:nvSpPr>
-          <p:cNvPr id="30" name="Shape 28"/>
+          <p:cNvPr id="33" name="Text 31"/>
+          <p:cNvSpPr/>
+          <p:nvPr/>
+        </p:nvSpPr>
+        <p:spPr>
+          <a:xfrm>
+            <a:off x="6016752" y="3364992"/>
+            <a:ext cx="411480" cy="475488"/>
+          </a:xfrm>
+          <a:prstGeom prst="rect">
+            <a:avLst/>
+          </a:prstGeom>
+          <a:noFill/>
+          <a:ln/>
+        </p:spPr>
+        <p:txBody>
+          <a:bodyPr wrap="square" lIns="0" tIns="0" rIns="0" bIns="0" rtlCol="0" anchor="ctr"/>
+          <a:lstStyle/>
+          <a:p>
+            <a:pPr algn="ctr" indent="0" marL="0">
+              <a:buNone/>
+            </a:pPr>
+            <a:r>
+              <a:rPr lang="en-US" sz="1600" b="1" dirty="0">
+                <a:solidFill>
+                  <a:srgbClr val="0D9488"/>
+                </a:solidFill>
+                <a:latin typeface="Trebuchet MS" pitchFamily="34" charset="0"/>
+                <a:ea typeface="Trebuchet MS" pitchFamily="34" charset="-122"/>
+                <a:cs typeface="Trebuchet MS" pitchFamily="34" charset="-120"/>
+              </a:rPr>
+              <a:t>·</a:t>
+            </a:r>
+            <a:endParaRPr lang="en-US" sz="1600" dirty="0"/>
+          </a:p>
+        </p:txBody>
+      </p:sp>
+      <p:sp>
+        <p:nvSpPr>
+          <p:cNvPr id="34" name="Shape 32"/>
+          <p:cNvSpPr/>
+          <p:nvPr/>
+        </p:nvSpPr>
+        <p:spPr>
+          <a:xfrm>
+            <a:off x="6428232" y="3364992"/>
+            <a:ext cx="1645920" cy="475488"/>
+          </a:xfrm>
+          <a:prstGeom prst="rect">
+            <a:avLst>
+              <a:gd name="adj" fmla="val 9615"/>
+            </a:avLst>
+          </a:prstGeom>
+          <a:solidFill>
+            <a:srgbClr val="FFFFFF"/>
+          </a:solidFill>
+          <a:ln w="12700">
+            <a:solidFill>
+              <a:srgbClr val="0D9488"/>
+            </a:solidFill>
+            <a:prstDash val="solid"/>
+          </a:ln>
+        </p:spPr>
+      </p:sp>
+      <p:sp>
+        <p:nvSpPr>
+          <p:cNvPr id="35" name="Text 33"/>
+          <p:cNvSpPr/>
+          <p:nvPr/>
+        </p:nvSpPr>
+        <p:spPr>
+          <a:xfrm>
+            <a:off x="6428232" y="3364992"/>
+            <a:ext cx="1645920" cy="475488"/>
+          </a:xfrm>
+          <a:prstGeom prst="rect">
+            <a:avLst/>
+          </a:prstGeom>
+          <a:noFill/>
+          <a:ln/>
+        </p:spPr>
+        <p:txBody>
+          <a:bodyPr wrap="square" lIns="0" tIns="0" rIns="0" bIns="0" rtlCol="0" anchor="ctr"/>
+          <a:lstStyle/>
+          <a:p>
+            <a:pPr algn="ctr" indent="0" marL="0">
+              <a:buNone/>
+            </a:pPr>
+            <a:r>
+              <a:rPr lang="en-US" sz="1400" b="1" dirty="0">
+                <a:solidFill>
+                  <a:srgbClr val="0D9488"/>
+                </a:solidFill>
+                <a:latin typeface="Trebuchet MS" pitchFamily="34" charset="0"/>
+                <a:ea typeface="Trebuchet MS" pitchFamily="34" charset="-122"/>
+                <a:cs typeface="Trebuchet MS" pitchFamily="34" charset="-120"/>
+              </a:rPr>
+              <a:t>sure</a:t>
+            </a:r>
+            <a:endParaRPr lang="en-US" sz="1400" dirty="0"/>
+          </a:p>
+        </p:txBody>
+      </p:sp>
+      <p:sp>
+        <p:nvSpPr>
+          <p:cNvPr id="36" name="Shape 34"/>
           <p:cNvSpPr/>
           <p:nvPr/>
         </p:nvSpPr>
@@ -20688,7 +21329,7 @@
       </p:sp>
       <p:sp>
         <p:nvSpPr>
-          <p:cNvPr id="31" name="Text 29"/>
+          <p:cNvPr id="37" name="Text 35"/>
           <p:cNvSpPr/>
           <p:nvPr/>
         </p:nvSpPr>
@@ -20727,7 +21368,7 @@
       </p:sp>
       <p:sp>
         <p:nvSpPr>
-          <p:cNvPr id="32" name="Shape 30"/>
+          <p:cNvPr id="38" name="Shape 36"/>
           <p:cNvSpPr/>
           <p:nvPr/>
         </p:nvSpPr>
@@ -20754,7 +21395,7 @@
       </p:sp>
       <p:sp>
         <p:nvSpPr>
-          <p:cNvPr id="33" name="Text 31"/>
+          <p:cNvPr id="39" name="Text 37"/>
           <p:cNvSpPr/>
           <p:nvPr/>
         </p:nvSpPr>
@@ -21077,7 +21718,7 @@
                 <a:ea typeface="Calibri" pitchFamily="34" charset="-122"/>
                 <a:cs typeface="Calibri" pitchFamily="34" charset="-120"/>
               </a:rPr>
-              <a:t>Word Labs  •  wordlabs.app  •  Prefix: 'en-' = to make, put into</a:t>
+              <a:t>Word Labs  •  wordlabs.app  •  Prefix: 'en-' = cause to; make</a:t>
             </a:r>
             <a:endParaRPr lang="en-US" sz="800" dirty="0"/>
           </a:p>
@@ -21216,7 +21857,7 @@
                 <a:ea typeface="Trebuchet MS" pitchFamily="34" charset="-122"/>
                 <a:cs typeface="Trebuchet MS" pitchFamily="34" charset="-120"/>
               </a:rPr>
-              <a:t>enforce</a:t>
+              <a:t>enclosure</a:t>
             </a:r>
             <a:endParaRPr lang="en-US" sz="2800" dirty="0"/>
           </a:p>
@@ -21296,7 +21937,7 @@
         </p:nvSpPr>
         <p:spPr>
           <a:xfrm>
-            <a:off x="2938272" y="2258568"/>
+            <a:off x="2221992" y="2258568"/>
             <a:ext cx="1828800" cy="292608"/>
           </a:xfrm>
           <a:prstGeom prst="rect">
@@ -21330,7 +21971,7 @@
         </p:nvSpPr>
         <p:spPr>
           <a:xfrm>
-            <a:off x="2938272" y="2258568"/>
+            <a:off x="2221992" y="2258568"/>
             <a:ext cx="1828800" cy="292608"/>
           </a:xfrm>
           <a:prstGeom prst="rect">
@@ -21369,7 +22010,7 @@
         </p:nvSpPr>
         <p:spPr>
           <a:xfrm>
-            <a:off x="2938272" y="2569464"/>
+            <a:off x="2221992" y="2569464"/>
             <a:ext cx="1828800" cy="201168"/>
           </a:xfrm>
           <a:prstGeom prst="rect">
@@ -21394,7 +22035,7 @@
                 <a:ea typeface="Calibri" pitchFamily="34" charset="-122"/>
                 <a:cs typeface="Calibri" pitchFamily="34" charset="-120"/>
               </a:rPr>
-              <a:t>to make, put into</a:t>
+              <a:t>made of; to make</a:t>
             </a:r>
             <a:endParaRPr lang="en-US" sz="850" dirty="0"/>
           </a:p>
@@ -21408,7 +22049,7 @@
         </p:nvSpPr>
         <p:spPr>
           <a:xfrm>
-            <a:off x="5803392" y="2258568"/>
+            <a:off x="4370832" y="2258568"/>
             <a:ext cx="1828800" cy="292608"/>
           </a:xfrm>
           <a:prstGeom prst="rect">
@@ -21442,7 +22083,7 @@
         </p:nvSpPr>
         <p:spPr>
           <a:xfrm>
-            <a:off x="5803392" y="2258568"/>
+            <a:off x="4370832" y="2258568"/>
             <a:ext cx="1828800" cy="292608"/>
           </a:xfrm>
           <a:prstGeom prst="rect">
@@ -21467,7 +22108,7 @@
                 <a:ea typeface="Trebuchet MS" pitchFamily="34" charset="-122"/>
                 <a:cs typeface="Trebuchet MS" pitchFamily="34" charset="-120"/>
               </a:rPr>
-              <a:t>force</a:t>
+              <a:t>clos</a:t>
             </a:r>
             <a:endParaRPr lang="en-US" sz="1300" dirty="0"/>
           </a:p>
@@ -21481,7 +22122,7 @@
         </p:nvSpPr>
         <p:spPr>
           <a:xfrm>
-            <a:off x="5803392" y="2569464"/>
+            <a:off x="4370832" y="2569464"/>
             <a:ext cx="1828800" cy="201168"/>
           </a:xfrm>
           <a:prstGeom prst="rect">
@@ -21506,7 +22147,7 @@
                 <a:ea typeface="Calibri" pitchFamily="34" charset="-122"/>
                 <a:cs typeface="Calibri" pitchFamily="34" charset="-120"/>
               </a:rPr>
-              <a:t>strength, power</a:t>
+              <a:t>close</a:t>
             </a:r>
             <a:endParaRPr lang="en-US" sz="850" dirty="0"/>
           </a:p>
@@ -21515,6 +22156,118 @@
       <p:sp>
         <p:nvSpPr>
           <p:cNvPr id="22" name="Shape 20"/>
+          <p:cNvSpPr/>
+          <p:nvPr/>
+        </p:nvSpPr>
+        <p:spPr>
+          <a:xfrm>
+            <a:off x="6519672" y="2258568"/>
+            <a:ext cx="1828800" cy="292608"/>
+          </a:xfrm>
+          <a:prstGeom prst="rect">
+            <a:avLst>
+              <a:gd name="adj" fmla="val 25000"/>
+            </a:avLst>
+          </a:prstGeom>
+          <a:solidFill>
+            <a:srgbClr val="FCE7F3"/>
+          </a:solidFill>
+          <a:ln w="19050">
+            <a:solidFill>
+              <a:srgbClr val="DB2777"/>
+            </a:solidFill>
+            <a:prstDash val="solid"/>
+          </a:ln>
+          <a:effectLst>
+            <a:outerShdw sx="100000" sy="100000" kx="0" ky="0" algn="bl" rotWithShape="0" blurRad="101600" dist="38100" dir="8100000">
+              <a:srgbClr val="000000">
+                <a:alpha val="12000"/>
+              </a:srgbClr>
+            </a:outerShdw>
+          </a:effectLst>
+        </p:spPr>
+      </p:sp>
+      <p:sp>
+        <p:nvSpPr>
+          <p:cNvPr id="23" name="Text 21"/>
+          <p:cNvSpPr/>
+          <p:nvPr/>
+        </p:nvSpPr>
+        <p:spPr>
+          <a:xfrm>
+            <a:off x="6519672" y="2258568"/>
+            <a:ext cx="1828800" cy="292608"/>
+          </a:xfrm>
+          <a:prstGeom prst="rect">
+            <a:avLst/>
+          </a:prstGeom>
+          <a:noFill/>
+          <a:ln/>
+        </p:spPr>
+        <p:txBody>
+          <a:bodyPr wrap="square" lIns="0" tIns="0" rIns="0" bIns="0" rtlCol="0" anchor="ctr"/>
+          <a:lstStyle/>
+          <a:p>
+            <a:pPr algn="ctr" indent="0" marL="0">
+              <a:buNone/>
+            </a:pPr>
+            <a:r>
+              <a:rPr lang="en-US" sz="1300" b="1" dirty="0">
+                <a:solidFill>
+                  <a:srgbClr val="9D174D"/>
+                </a:solidFill>
+                <a:latin typeface="Trebuchet MS" pitchFamily="34" charset="0"/>
+                <a:ea typeface="Trebuchet MS" pitchFamily="34" charset="-122"/>
+                <a:cs typeface="Trebuchet MS" pitchFamily="34" charset="-120"/>
+              </a:rPr>
+              <a:t>ure</a:t>
+            </a:r>
+            <a:endParaRPr lang="en-US" sz="1300" dirty="0"/>
+          </a:p>
+        </p:txBody>
+      </p:sp>
+      <p:sp>
+        <p:nvSpPr>
+          <p:cNvPr id="24" name="Text 22"/>
+          <p:cNvSpPr/>
+          <p:nvPr/>
+        </p:nvSpPr>
+        <p:spPr>
+          <a:xfrm>
+            <a:off x="6519672" y="2569464"/>
+            <a:ext cx="1828800" cy="201168"/>
+          </a:xfrm>
+          <a:prstGeom prst="rect">
+            <a:avLst/>
+          </a:prstGeom>
+          <a:noFill/>
+          <a:ln/>
+        </p:spPr>
+        <p:txBody>
+          <a:bodyPr wrap="square" lIns="0" tIns="0" rIns="0" bIns="0" rtlCol="0" anchor="t"/>
+          <a:lstStyle/>
+          <a:p>
+            <a:pPr algn="ctr" indent="0" marL="0">
+              <a:buNone/>
+            </a:pPr>
+            <a:r>
+              <a:rPr lang="en-US" sz="850" dirty="0">
+                <a:solidFill>
+                  <a:srgbClr val="475569"/>
+                </a:solidFill>
+                <a:latin typeface="Calibri" pitchFamily="34" charset="0"/>
+                <a:ea typeface="Calibri" pitchFamily="34" charset="-122"/>
+                <a:cs typeface="Calibri" pitchFamily="34" charset="-120"/>
+              </a:rPr>
+              <a:t>result of</a:t>
+            </a:r>
+            <a:endParaRPr lang="en-US" sz="850" dirty="0"/>
+          </a:p>
+        </p:txBody>
+      </p:sp>
+      <p:sp>
+        <p:nvSpPr>
+          <p:cNvPr id="25" name="Shape 23"/>
           <p:cNvSpPr/>
           <p:nvPr/>
         </p:nvSpPr>
@@ -21541,7 +22294,7 @@
       </p:sp>
       <p:sp>
         <p:nvSpPr>
-          <p:cNvPr id="23" name="Text 21"/>
+          <p:cNvPr id="26" name="Text 24"/>
           <p:cNvSpPr/>
           <p:nvPr/>
         </p:nvSpPr>
@@ -21580,7 +22333,7 @@
       </p:sp>
       <p:sp>
         <p:nvSpPr>
-          <p:cNvPr id="24" name="Shape 22"/>
+          <p:cNvPr id="27" name="Shape 25"/>
           <p:cNvSpPr/>
           <p:nvPr/>
         </p:nvSpPr>
@@ -21607,13 +22360,13 @@
       </p:sp>
       <p:sp>
         <p:nvSpPr>
-          <p:cNvPr id="25" name="Shape 23"/>
-          <p:cNvSpPr/>
-          <p:nvPr/>
-        </p:nvSpPr>
-        <p:spPr>
-          <a:xfrm>
-            <a:off x="2999232" y="3364992"/>
+          <p:cNvPr id="28" name="Shape 26"/>
+          <p:cNvSpPr/>
+          <p:nvPr/>
+        </p:nvSpPr>
+        <p:spPr>
+          <a:xfrm>
+            <a:off x="2313432" y="3364992"/>
             <a:ext cx="1645920" cy="475488"/>
           </a:xfrm>
           <a:prstGeom prst="rect">
@@ -21634,13 +22387,13 @@
       </p:sp>
       <p:sp>
         <p:nvSpPr>
-          <p:cNvPr id="26" name="Text 24"/>
-          <p:cNvSpPr/>
-          <p:nvPr/>
-        </p:nvSpPr>
-        <p:spPr>
-          <a:xfrm>
-            <a:off x="2999232" y="3364992"/>
+          <p:cNvPr id="29" name="Text 27"/>
+          <p:cNvSpPr/>
+          <p:nvPr/>
+        </p:nvSpPr>
+        <p:spPr>
+          <a:xfrm>
+            <a:off x="2313432" y="3364992"/>
             <a:ext cx="1645920" cy="475488"/>
           </a:xfrm>
           <a:prstGeom prst="rect">
@@ -21673,14 +22426,14 @@
       </p:sp>
       <p:sp>
         <p:nvSpPr>
-          <p:cNvPr id="27" name="Text 25"/>
-          <p:cNvSpPr/>
-          <p:nvPr/>
-        </p:nvSpPr>
-        <p:spPr>
-          <a:xfrm>
-            <a:off x="4645152" y="3364992"/>
-            <a:ext cx="1097280" cy="475488"/>
+          <p:cNvPr id="30" name="Text 28"/>
+          <p:cNvSpPr/>
+          <p:nvPr/>
+        </p:nvSpPr>
+        <p:spPr>
+          <a:xfrm>
+            <a:off x="3959352" y="3364992"/>
+            <a:ext cx="411480" cy="475488"/>
           </a:xfrm>
           <a:prstGeom prst="rect">
             <a:avLst/>
@@ -21712,13 +22465,13 @@
       </p:sp>
       <p:sp>
         <p:nvSpPr>
-          <p:cNvPr id="28" name="Shape 26"/>
-          <p:cNvSpPr/>
-          <p:nvPr/>
-        </p:nvSpPr>
-        <p:spPr>
-          <a:xfrm>
-            <a:off x="5742432" y="3364992"/>
+          <p:cNvPr id="31" name="Shape 29"/>
+          <p:cNvSpPr/>
+          <p:nvPr/>
+        </p:nvSpPr>
+        <p:spPr>
+          <a:xfrm>
+            <a:off x="4370832" y="3364992"/>
             <a:ext cx="1645920" cy="475488"/>
           </a:xfrm>
           <a:prstGeom prst="rect">
@@ -21739,13 +22492,13 @@
       </p:sp>
       <p:sp>
         <p:nvSpPr>
-          <p:cNvPr id="29" name="Text 27"/>
-          <p:cNvSpPr/>
-          <p:nvPr/>
-        </p:nvSpPr>
-        <p:spPr>
-          <a:xfrm>
-            <a:off x="5742432" y="3364992"/>
+          <p:cNvPr id="32" name="Text 30"/>
+          <p:cNvSpPr/>
+          <p:nvPr/>
+        </p:nvSpPr>
+        <p:spPr>
+          <a:xfrm>
+            <a:off x="4370832" y="3364992"/>
             <a:ext cx="1645920" cy="475488"/>
           </a:xfrm>
           <a:prstGeom prst="rect">
@@ -21770,7 +22523,7 @@
                 <a:ea typeface="Trebuchet MS" pitchFamily="34" charset="-122"/>
                 <a:cs typeface="Trebuchet MS" pitchFamily="34" charset="-120"/>
               </a:rPr>
-              <a:t>force</a:t>
+              <a:t>clo</a:t>
             </a:r>
             <a:endParaRPr lang="en-US" sz="1400" dirty="0"/>
           </a:p>
@@ -21778,7 +22531,112 @@
       </p:sp>
       <p:sp>
         <p:nvSpPr>
-          <p:cNvPr id="30" name="Shape 28"/>
+          <p:cNvPr id="33" name="Text 31"/>
+          <p:cNvSpPr/>
+          <p:nvPr/>
+        </p:nvSpPr>
+        <p:spPr>
+          <a:xfrm>
+            <a:off x="6016752" y="3364992"/>
+            <a:ext cx="411480" cy="475488"/>
+          </a:xfrm>
+          <a:prstGeom prst="rect">
+            <a:avLst/>
+          </a:prstGeom>
+          <a:noFill/>
+          <a:ln/>
+        </p:spPr>
+        <p:txBody>
+          <a:bodyPr wrap="square" lIns="0" tIns="0" rIns="0" bIns="0" rtlCol="0" anchor="ctr"/>
+          <a:lstStyle/>
+          <a:p>
+            <a:pPr algn="ctr" indent="0" marL="0">
+              <a:buNone/>
+            </a:pPr>
+            <a:r>
+              <a:rPr lang="en-US" sz="1600" b="1" dirty="0">
+                <a:solidFill>
+                  <a:srgbClr val="0D9488"/>
+                </a:solidFill>
+                <a:latin typeface="Trebuchet MS" pitchFamily="34" charset="0"/>
+                <a:ea typeface="Trebuchet MS" pitchFamily="34" charset="-122"/>
+                <a:cs typeface="Trebuchet MS" pitchFamily="34" charset="-120"/>
+              </a:rPr>
+              <a:t>·</a:t>
+            </a:r>
+            <a:endParaRPr lang="en-US" sz="1600" dirty="0"/>
+          </a:p>
+        </p:txBody>
+      </p:sp>
+      <p:sp>
+        <p:nvSpPr>
+          <p:cNvPr id="34" name="Shape 32"/>
+          <p:cNvSpPr/>
+          <p:nvPr/>
+        </p:nvSpPr>
+        <p:spPr>
+          <a:xfrm>
+            <a:off x="6428232" y="3364992"/>
+            <a:ext cx="1645920" cy="475488"/>
+          </a:xfrm>
+          <a:prstGeom prst="rect">
+            <a:avLst>
+              <a:gd name="adj" fmla="val 9615"/>
+            </a:avLst>
+          </a:prstGeom>
+          <a:solidFill>
+            <a:srgbClr val="FFFFFF"/>
+          </a:solidFill>
+          <a:ln w="12700">
+            <a:solidFill>
+              <a:srgbClr val="0D9488"/>
+            </a:solidFill>
+            <a:prstDash val="solid"/>
+          </a:ln>
+        </p:spPr>
+      </p:sp>
+      <p:sp>
+        <p:nvSpPr>
+          <p:cNvPr id="35" name="Text 33"/>
+          <p:cNvSpPr/>
+          <p:nvPr/>
+        </p:nvSpPr>
+        <p:spPr>
+          <a:xfrm>
+            <a:off x="6428232" y="3364992"/>
+            <a:ext cx="1645920" cy="475488"/>
+          </a:xfrm>
+          <a:prstGeom prst="rect">
+            <a:avLst/>
+          </a:prstGeom>
+          <a:noFill/>
+          <a:ln/>
+        </p:spPr>
+        <p:txBody>
+          <a:bodyPr wrap="square" lIns="0" tIns="0" rIns="0" bIns="0" rtlCol="0" anchor="ctr"/>
+          <a:lstStyle/>
+          <a:p>
+            <a:pPr algn="ctr" indent="0" marL="0">
+              <a:buNone/>
+            </a:pPr>
+            <a:r>
+              <a:rPr lang="en-US" sz="1400" b="1" dirty="0">
+                <a:solidFill>
+                  <a:srgbClr val="0D9488"/>
+                </a:solidFill>
+                <a:latin typeface="Trebuchet MS" pitchFamily="34" charset="0"/>
+                <a:ea typeface="Trebuchet MS" pitchFamily="34" charset="-122"/>
+                <a:cs typeface="Trebuchet MS" pitchFamily="34" charset="-120"/>
+              </a:rPr>
+              <a:t>sure</a:t>
+            </a:r>
+            <a:endParaRPr lang="en-US" sz="1400" dirty="0"/>
+          </a:p>
+        </p:txBody>
+      </p:sp>
+      <p:sp>
+        <p:nvSpPr>
+          <p:cNvPr id="36" name="Shape 34"/>
           <p:cNvSpPr/>
           <p:nvPr/>
         </p:nvSpPr>
@@ -21805,7 +22663,7 @@
       </p:sp>
       <p:sp>
         <p:nvSpPr>
-          <p:cNvPr id="31" name="Text 29"/>
+          <p:cNvPr id="37" name="Text 35"/>
           <p:cNvSpPr/>
           <p:nvPr/>
         </p:nvSpPr>
@@ -21844,18 +22702,18 @@
       </p:sp>
       <p:sp>
         <p:nvSpPr>
-          <p:cNvPr id="32" name="Shape 30"/>
+          <p:cNvPr id="38" name="Shape 36"/>
           <p:cNvSpPr/>
           <p:nvPr/>
         </p:nvSpPr>
         <p:spPr>
           <a:xfrm>
             <a:off x="1874520" y="4096512"/>
-            <a:ext cx="6903720" cy="804672"/>
+            <a:ext cx="6903720" cy="658368"/>
           </a:xfrm>
           <a:prstGeom prst="rect">
             <a:avLst>
-              <a:gd name="adj" fmla="val 6818"/>
+              <a:gd name="adj" fmla="val 8333"/>
             </a:avLst>
           </a:prstGeom>
           <a:solidFill>
@@ -21871,18 +22729,18 @@
       </p:sp>
       <p:sp>
         <p:nvSpPr>
-          <p:cNvPr id="33" name="Shape 31"/>
-          <p:cNvSpPr/>
-          <p:nvPr/>
-        </p:nvSpPr>
-        <p:spPr>
-          <a:xfrm>
-            <a:off x="2427732" y="4169664"/>
-            <a:ext cx="685800" cy="384048"/>
+          <p:cNvPr id="39" name="Shape 37"/>
+          <p:cNvSpPr/>
+          <p:nvPr/>
+        </p:nvSpPr>
+        <p:spPr>
+          <a:xfrm>
+            <a:off x="2124837" y="4169664"/>
+            <a:ext cx="685800" cy="475488"/>
           </a:xfrm>
           <a:prstGeom prst="rect">
             <a:avLst>
-              <a:gd name="adj" fmla="val 9524"/>
+              <a:gd name="adj" fmla="val 7692"/>
             </a:avLst>
           </a:prstGeom>
           <a:solidFill>
@@ -21898,14 +22756,14 @@
       </p:sp>
       <p:sp>
         <p:nvSpPr>
-          <p:cNvPr id="34" name="Text 32"/>
-          <p:cNvSpPr/>
-          <p:nvPr/>
-        </p:nvSpPr>
-        <p:spPr>
-          <a:xfrm>
-            <a:off x="2427732" y="4169664"/>
-            <a:ext cx="685800" cy="384048"/>
+          <p:cNvPr id="40" name="Text 38"/>
+          <p:cNvSpPr/>
+          <p:nvPr/>
+        </p:nvSpPr>
+        <p:spPr>
+          <a:xfrm>
+            <a:off x="2124837" y="4169664"/>
+            <a:ext cx="685800" cy="475488"/>
           </a:xfrm>
           <a:prstGeom prst="rect">
             <a:avLst/>
@@ -21937,18 +22795,18 @@
       </p:sp>
       <p:sp>
         <p:nvSpPr>
-          <p:cNvPr id="35" name="Shape 33"/>
-          <p:cNvSpPr/>
-          <p:nvPr/>
-        </p:nvSpPr>
-        <p:spPr>
-          <a:xfrm>
-            <a:off x="3639312" y="4169664"/>
-            <a:ext cx="685800" cy="384048"/>
+          <p:cNvPr id="41" name="Shape 39"/>
+          <p:cNvSpPr/>
+          <p:nvPr/>
+        </p:nvSpPr>
+        <p:spPr>
+          <a:xfrm>
+            <a:off x="3033522" y="4169664"/>
+            <a:ext cx="685800" cy="475488"/>
           </a:xfrm>
           <a:prstGeom prst="rect">
             <a:avLst>
-              <a:gd name="adj" fmla="val 9524"/>
+              <a:gd name="adj" fmla="val 7692"/>
             </a:avLst>
           </a:prstGeom>
           <a:solidFill>
@@ -21964,14 +22822,14 @@
       </p:sp>
       <p:sp>
         <p:nvSpPr>
-          <p:cNvPr id="36" name="Text 34"/>
-          <p:cNvSpPr/>
-          <p:nvPr/>
-        </p:nvSpPr>
-        <p:spPr>
-          <a:xfrm>
-            <a:off x="3639312" y="4169664"/>
-            <a:ext cx="685800" cy="384048"/>
+          <p:cNvPr id="42" name="Text 40"/>
+          <p:cNvSpPr/>
+          <p:nvPr/>
+        </p:nvSpPr>
+        <p:spPr>
+          <a:xfrm>
+            <a:off x="3033522" y="4169664"/>
+            <a:ext cx="685800" cy="475488"/>
           </a:xfrm>
           <a:prstGeom prst="rect">
             <a:avLst/>
@@ -22003,18 +22861,18 @@
       </p:sp>
       <p:sp>
         <p:nvSpPr>
-          <p:cNvPr id="37" name="Shape 35"/>
-          <p:cNvSpPr/>
-          <p:nvPr/>
-        </p:nvSpPr>
-        <p:spPr>
-          <a:xfrm>
-            <a:off x="4850892" y="4169664"/>
-            <a:ext cx="685800" cy="384048"/>
+          <p:cNvPr id="43" name="Shape 41"/>
+          <p:cNvSpPr/>
+          <p:nvPr/>
+        </p:nvSpPr>
+        <p:spPr>
+          <a:xfrm>
+            <a:off x="3942207" y="4169664"/>
+            <a:ext cx="685800" cy="475488"/>
           </a:xfrm>
           <a:prstGeom prst="rect">
             <a:avLst>
-              <a:gd name="adj" fmla="val 9524"/>
+              <a:gd name="adj" fmla="val 7692"/>
             </a:avLst>
           </a:prstGeom>
           <a:solidFill>
@@ -22030,14 +22888,14 @@
       </p:sp>
       <p:sp>
         <p:nvSpPr>
-          <p:cNvPr id="38" name="Text 36"/>
-          <p:cNvSpPr/>
-          <p:nvPr/>
-        </p:nvSpPr>
-        <p:spPr>
-          <a:xfrm>
-            <a:off x="4850892" y="4169664"/>
-            <a:ext cx="685800" cy="384048"/>
+          <p:cNvPr id="44" name="Text 42"/>
+          <p:cNvSpPr/>
+          <p:nvPr/>
+        </p:nvSpPr>
+        <p:spPr>
+          <a:xfrm>
+            <a:off x="3942207" y="4169664"/>
+            <a:ext cx="685800" cy="475488"/>
           </a:xfrm>
           <a:prstGeom prst="rect">
             <a:avLst/>
@@ -22061,7 +22919,7 @@
                 <a:ea typeface="Trebuchet MS" pitchFamily="34" charset="-122"/>
                 <a:cs typeface="Trebuchet MS" pitchFamily="34" charset="-120"/>
               </a:rPr>
-              <a:t>f</a:t>
+              <a:t>c</a:t>
             </a:r>
             <a:endParaRPr lang="en-US" sz="900" dirty="0"/>
           </a:p>
@@ -22069,18 +22927,18 @@
       </p:sp>
       <p:sp>
         <p:nvSpPr>
-          <p:cNvPr id="39" name="Shape 37"/>
-          <p:cNvSpPr/>
-          <p:nvPr/>
-        </p:nvSpPr>
-        <p:spPr>
-          <a:xfrm>
-            <a:off x="6062472" y="4169664"/>
-            <a:ext cx="685800" cy="384048"/>
+          <p:cNvPr id="45" name="Shape 43"/>
+          <p:cNvSpPr/>
+          <p:nvPr/>
+        </p:nvSpPr>
+        <p:spPr>
+          <a:xfrm>
+            <a:off x="4850892" y="4169664"/>
+            <a:ext cx="685800" cy="475488"/>
           </a:xfrm>
           <a:prstGeom prst="rect">
             <a:avLst>
-              <a:gd name="adj" fmla="val 9524"/>
+              <a:gd name="adj" fmla="val 7692"/>
             </a:avLst>
           </a:prstGeom>
           <a:solidFill>
@@ -22096,14 +22954,14 @@
       </p:sp>
       <p:sp>
         <p:nvSpPr>
-          <p:cNvPr id="40" name="Text 38"/>
-          <p:cNvSpPr/>
-          <p:nvPr/>
-        </p:nvSpPr>
-        <p:spPr>
-          <a:xfrm>
-            <a:off x="6062472" y="4169664"/>
-            <a:ext cx="685800" cy="384048"/>
+          <p:cNvPr id="46" name="Text 44"/>
+          <p:cNvSpPr/>
+          <p:nvPr/>
+        </p:nvSpPr>
+        <p:spPr>
+          <a:xfrm>
+            <a:off x="4850892" y="4169664"/>
+            <a:ext cx="685800" cy="475488"/>
           </a:xfrm>
           <a:prstGeom prst="rect">
             <a:avLst/>
@@ -22127,7 +22985,7 @@
                 <a:ea typeface="Trebuchet MS" pitchFamily="34" charset="-122"/>
                 <a:cs typeface="Trebuchet MS" pitchFamily="34" charset="-120"/>
               </a:rPr>
-              <a:t>or</a:t>
+              <a:t>l</a:t>
             </a:r>
             <a:endParaRPr lang="en-US" sz="900" dirty="0"/>
           </a:p>
@@ -22135,18 +22993,18 @@
       </p:sp>
       <p:sp>
         <p:nvSpPr>
-          <p:cNvPr id="41" name="Shape 39"/>
-          <p:cNvSpPr/>
-          <p:nvPr/>
-        </p:nvSpPr>
-        <p:spPr>
-          <a:xfrm>
-            <a:off x="7274052" y="4169664"/>
-            <a:ext cx="685800" cy="384048"/>
+          <p:cNvPr id="47" name="Shape 45"/>
+          <p:cNvSpPr/>
+          <p:nvPr/>
+        </p:nvSpPr>
+        <p:spPr>
+          <a:xfrm>
+            <a:off x="5759577" y="4169664"/>
+            <a:ext cx="685800" cy="475488"/>
           </a:xfrm>
           <a:prstGeom prst="rect">
             <a:avLst>
-              <a:gd name="adj" fmla="val 9524"/>
+              <a:gd name="adj" fmla="val 7692"/>
             </a:avLst>
           </a:prstGeom>
           <a:solidFill>
@@ -22162,14 +23020,14 @@
       </p:sp>
       <p:sp>
         <p:nvSpPr>
-          <p:cNvPr id="42" name="Text 40"/>
-          <p:cNvSpPr/>
-          <p:nvPr/>
-        </p:nvSpPr>
-        <p:spPr>
-          <a:xfrm>
-            <a:off x="7274052" y="4169664"/>
-            <a:ext cx="685800" cy="384048"/>
+          <p:cNvPr id="48" name="Text 46"/>
+          <p:cNvSpPr/>
+          <p:nvPr/>
+        </p:nvSpPr>
+        <p:spPr>
+          <a:xfrm>
+            <a:off x="5759577" y="4169664"/>
+            <a:ext cx="685800" cy="475488"/>
           </a:xfrm>
           <a:prstGeom prst="rect">
             <a:avLst/>
@@ -22193,7 +23051,7 @@
                 <a:ea typeface="Trebuchet MS" pitchFamily="34" charset="-122"/>
                 <a:cs typeface="Trebuchet MS" pitchFamily="34" charset="-120"/>
               </a:rPr>
-              <a:t>ce</a:t>
+              <a:t>o</a:t>
             </a:r>
             <a:endParaRPr lang="en-US" sz="900" dirty="0"/>
           </a:p>
@@ -22201,40 +23059,133 @@
       </p:sp>
       <p:sp>
         <p:nvSpPr>
-          <p:cNvPr id="43" name="Text 41"/>
-          <p:cNvSpPr/>
-          <p:nvPr/>
-        </p:nvSpPr>
-        <p:spPr>
-          <a:xfrm>
-            <a:off x="7274052" y="4572000"/>
-            <a:ext cx="685800" cy="219456"/>
-          </a:xfrm>
-          <a:prstGeom prst="rect">
-            <a:avLst/>
-          </a:prstGeom>
-          <a:noFill/>
-          <a:ln/>
-        </p:spPr>
-        <p:txBody>
-          <a:bodyPr wrap="square" lIns="0" tIns="0" rIns="0" bIns="0" rtlCol="0" anchor="t"/>
-          <a:lstStyle/>
-          <a:p>
-            <a:pPr algn="ctr" indent="0" marL="0">
-              <a:buNone/>
-            </a:pPr>
-            <a:r>
-              <a:rPr lang="en-US" sz="750" i="1" dirty="0">
-                <a:solidFill>
-                  <a:srgbClr val="94A3B8"/>
-                </a:solidFill>
-                <a:latin typeface="Calibri" pitchFamily="34" charset="0"/>
-                <a:ea typeface="Calibri" pitchFamily="34" charset="-122"/>
-                <a:cs typeface="Calibri" pitchFamily="34" charset="-120"/>
-              </a:rPr>
-              <a:t>/s/</a:t>
-            </a:r>
-            <a:endParaRPr lang="en-US" sz="750" dirty="0"/>
+          <p:cNvPr id="49" name="Shape 47"/>
+          <p:cNvSpPr/>
+          <p:nvPr/>
+        </p:nvSpPr>
+        <p:spPr>
+          <a:xfrm>
+            <a:off x="6668262" y="4169664"/>
+            <a:ext cx="685800" cy="475488"/>
+          </a:xfrm>
+          <a:prstGeom prst="rect">
+            <a:avLst>
+              <a:gd name="adj" fmla="val 7692"/>
+            </a:avLst>
+          </a:prstGeom>
+          <a:solidFill>
+            <a:srgbClr val="FFFFFF"/>
+          </a:solidFill>
+          <a:ln w="12700">
+            <a:solidFill>
+              <a:srgbClr val="DB2777"/>
+            </a:solidFill>
+            <a:prstDash val="solid"/>
+          </a:ln>
+        </p:spPr>
+      </p:sp>
+      <p:sp>
+        <p:nvSpPr>
+          <p:cNvPr id="50" name="Text 48"/>
+          <p:cNvSpPr/>
+          <p:nvPr/>
+        </p:nvSpPr>
+        <p:spPr>
+          <a:xfrm>
+            <a:off x="6668262" y="4169664"/>
+            <a:ext cx="685800" cy="475488"/>
+          </a:xfrm>
+          <a:prstGeom prst="rect">
+            <a:avLst/>
+          </a:prstGeom>
+          <a:noFill/>
+          <a:ln/>
+        </p:spPr>
+        <p:txBody>
+          <a:bodyPr wrap="square" lIns="0" tIns="0" rIns="0" bIns="0" rtlCol="0" anchor="ctr"/>
+          <a:lstStyle/>
+          <a:p>
+            <a:pPr algn="ctr" indent="0" marL="0">
+              <a:buNone/>
+            </a:pPr>
+            <a:r>
+              <a:rPr lang="en-US" sz="900" b="1" dirty="0">
+                <a:solidFill>
+                  <a:srgbClr val="9D174D"/>
+                </a:solidFill>
+                <a:latin typeface="Trebuchet MS" pitchFamily="34" charset="0"/>
+                <a:ea typeface="Trebuchet MS" pitchFamily="34" charset="-122"/>
+                <a:cs typeface="Trebuchet MS" pitchFamily="34" charset="-120"/>
+              </a:rPr>
+              <a:t>s</a:t>
+            </a:r>
+            <a:endParaRPr lang="en-US" sz="900" dirty="0"/>
+          </a:p>
+        </p:txBody>
+      </p:sp>
+      <p:sp>
+        <p:nvSpPr>
+          <p:cNvPr id="51" name="Shape 49"/>
+          <p:cNvSpPr/>
+          <p:nvPr/>
+        </p:nvSpPr>
+        <p:spPr>
+          <a:xfrm>
+            <a:off x="7576947" y="4169664"/>
+            <a:ext cx="685800" cy="475488"/>
+          </a:xfrm>
+          <a:prstGeom prst="rect">
+            <a:avLst>
+              <a:gd name="adj" fmla="val 7692"/>
+            </a:avLst>
+          </a:prstGeom>
+          <a:solidFill>
+            <a:srgbClr val="FFFFFF"/>
+          </a:solidFill>
+          <a:ln w="12700">
+            <a:solidFill>
+              <a:srgbClr val="DB2777"/>
+            </a:solidFill>
+            <a:prstDash val="solid"/>
+          </a:ln>
+        </p:spPr>
+      </p:sp>
+      <p:sp>
+        <p:nvSpPr>
+          <p:cNvPr id="52" name="Text 50"/>
+          <p:cNvSpPr/>
+          <p:nvPr/>
+        </p:nvSpPr>
+        <p:spPr>
+          <a:xfrm>
+            <a:off x="7576947" y="4169664"/>
+            <a:ext cx="685800" cy="475488"/>
+          </a:xfrm>
+          <a:prstGeom prst="rect">
+            <a:avLst/>
+          </a:prstGeom>
+          <a:noFill/>
+          <a:ln/>
+        </p:spPr>
+        <p:txBody>
+          <a:bodyPr wrap="square" lIns="0" tIns="0" rIns="0" bIns="0" rtlCol="0" anchor="ctr"/>
+          <a:lstStyle/>
+          <a:p>
+            <a:pPr algn="ctr" indent="0" marL="0">
+              <a:buNone/>
+            </a:pPr>
+            <a:r>
+              <a:rPr lang="en-US" sz="900" b="1" dirty="0">
+                <a:solidFill>
+                  <a:srgbClr val="9D174D"/>
+                </a:solidFill>
+                <a:latin typeface="Trebuchet MS" pitchFamily="34" charset="0"/>
+                <a:ea typeface="Trebuchet MS" pitchFamily="34" charset="-122"/>
+                <a:cs typeface="Trebuchet MS" pitchFamily="34" charset="-120"/>
+              </a:rPr>
+              <a:t>ure</a:t>
+            </a:r>
+            <a:endParaRPr lang="en-US" sz="900" dirty="0"/>
           </a:p>
         </p:txBody>
       </p:sp>
@@ -22524,7 +23475,7 @@
                 <a:ea typeface="Calibri" pitchFamily="34" charset="-122"/>
                 <a:cs typeface="Calibri" pitchFamily="34" charset="-120"/>
               </a:rPr>
-              <a:t>Word Labs  •  wordlabs.app  •  Prefix: 'en-' = to make, put into</a:t>
+              <a:t>Word Labs  •  wordlabs.app  •  Prefix: 'en-' = cause to; make</a:t>
             </a:r>
             <a:endParaRPr lang="en-US" sz="800" dirty="0"/>
           </a:p>
@@ -22663,7 +23614,7 @@
                 <a:ea typeface="Trebuchet MS" pitchFamily="34" charset="-122"/>
                 <a:cs typeface="Trebuchet MS" pitchFamily="34" charset="-120"/>
               </a:rPr>
-              <a:t>ensure</a:t>
+              <a:t>engraving</a:t>
             </a:r>
             <a:endParaRPr lang="en-US" sz="2800" dirty="0"/>
           </a:p>
@@ -23351,7 +24302,7 @@
                 <a:ea typeface="Calibri" pitchFamily="34" charset="-122"/>
                 <a:cs typeface="Calibri" pitchFamily="34" charset="-120"/>
               </a:rPr>
-              <a:t>Word Labs  •  wordlabs.app  •  Prefix: 'en-' = to make, put into</a:t>
+              <a:t>Word Labs  •  wordlabs.app  •  Prefix: 'en-' = cause to; make</a:t>
             </a:r>
             <a:endParaRPr lang="en-US" sz="800" dirty="0"/>
           </a:p>
@@ -23490,7 +24441,7 @@
                 <a:ea typeface="Trebuchet MS" pitchFamily="34" charset="-122"/>
                 <a:cs typeface="Trebuchet MS" pitchFamily="34" charset="-120"/>
               </a:rPr>
-              <a:t>ensure</a:t>
+              <a:t>engraving</a:t>
             </a:r>
             <a:endParaRPr lang="en-US" sz="2800" dirty="0"/>
           </a:p>
@@ -23570,7 +24521,7 @@
         </p:nvSpPr>
         <p:spPr>
           <a:xfrm>
-            <a:off x="2938272" y="2258568"/>
+            <a:off x="2221992" y="2258568"/>
             <a:ext cx="1828800" cy="292608"/>
           </a:xfrm>
           <a:prstGeom prst="rect">
@@ -23604,7 +24555,7 @@
         </p:nvSpPr>
         <p:spPr>
           <a:xfrm>
-            <a:off x="2938272" y="2258568"/>
+            <a:off x="2221992" y="2258568"/>
             <a:ext cx="1828800" cy="292608"/>
           </a:xfrm>
           <a:prstGeom prst="rect">
@@ -23643,7 +24594,7 @@
         </p:nvSpPr>
         <p:spPr>
           <a:xfrm>
-            <a:off x="2938272" y="2569464"/>
+            <a:off x="2221992" y="2569464"/>
             <a:ext cx="1828800" cy="201168"/>
           </a:xfrm>
           <a:prstGeom prst="rect">
@@ -23668,7 +24619,7 @@
                 <a:ea typeface="Calibri" pitchFamily="34" charset="-122"/>
                 <a:cs typeface="Calibri" pitchFamily="34" charset="-120"/>
               </a:rPr>
-              <a:t>to make, put into</a:t>
+              <a:t>made of; to make</a:t>
             </a:r>
             <a:endParaRPr lang="en-US" sz="850" dirty="0"/>
           </a:p>
@@ -23682,7 +24633,7 @@
         </p:nvSpPr>
         <p:spPr>
           <a:xfrm>
-            <a:off x="5803392" y="2258568"/>
+            <a:off x="4370832" y="2258568"/>
             <a:ext cx="1828800" cy="292608"/>
           </a:xfrm>
           <a:prstGeom prst="rect">
@@ -23716,7 +24667,7 @@
         </p:nvSpPr>
         <p:spPr>
           <a:xfrm>
-            <a:off x="5803392" y="2258568"/>
+            <a:off x="4370832" y="2258568"/>
             <a:ext cx="1828800" cy="292608"/>
           </a:xfrm>
           <a:prstGeom prst="rect">
@@ -23741,7 +24692,7 @@
                 <a:ea typeface="Trebuchet MS" pitchFamily="34" charset="-122"/>
                 <a:cs typeface="Trebuchet MS" pitchFamily="34" charset="-120"/>
               </a:rPr>
-              <a:t>sure</a:t>
+              <a:t>grav</a:t>
             </a:r>
             <a:endParaRPr lang="en-US" sz="1300" dirty="0"/>
           </a:p>
@@ -23755,7 +24706,7 @@
         </p:nvSpPr>
         <p:spPr>
           <a:xfrm>
-            <a:off x="5803392" y="2569464"/>
+            <a:off x="4370832" y="2569464"/>
             <a:ext cx="1828800" cy="201168"/>
           </a:xfrm>
           <a:prstGeom prst="rect">
@@ -23780,7 +24731,7 @@
                 <a:ea typeface="Calibri" pitchFamily="34" charset="-122"/>
                 <a:cs typeface="Calibri" pitchFamily="34" charset="-120"/>
               </a:rPr>
-              <a:t>certain, definite</a:t>
+              <a:t>heavy; serious</a:t>
             </a:r>
             <a:endParaRPr lang="en-US" sz="850" dirty="0"/>
           </a:p>
@@ -23789,6 +24740,118 @@
       <p:sp>
         <p:nvSpPr>
           <p:cNvPr id="22" name="Shape 20"/>
+          <p:cNvSpPr/>
+          <p:nvPr/>
+        </p:nvSpPr>
+        <p:spPr>
+          <a:xfrm>
+            <a:off x="6519672" y="2258568"/>
+            <a:ext cx="1828800" cy="292608"/>
+          </a:xfrm>
+          <a:prstGeom prst="rect">
+            <a:avLst>
+              <a:gd name="adj" fmla="val 25000"/>
+            </a:avLst>
+          </a:prstGeom>
+          <a:solidFill>
+            <a:srgbClr val="FCE7F3"/>
+          </a:solidFill>
+          <a:ln w="19050">
+            <a:solidFill>
+              <a:srgbClr val="DB2777"/>
+            </a:solidFill>
+            <a:prstDash val="solid"/>
+          </a:ln>
+          <a:effectLst>
+            <a:outerShdw sx="100000" sy="100000" kx="0" ky="0" algn="bl" rotWithShape="0" blurRad="101600" dist="38100" dir="8100000">
+              <a:srgbClr val="000000">
+                <a:alpha val="12000"/>
+              </a:srgbClr>
+            </a:outerShdw>
+          </a:effectLst>
+        </p:spPr>
+      </p:sp>
+      <p:sp>
+        <p:nvSpPr>
+          <p:cNvPr id="23" name="Text 21"/>
+          <p:cNvSpPr/>
+          <p:nvPr/>
+        </p:nvSpPr>
+        <p:spPr>
+          <a:xfrm>
+            <a:off x="6519672" y="2258568"/>
+            <a:ext cx="1828800" cy="292608"/>
+          </a:xfrm>
+          <a:prstGeom prst="rect">
+            <a:avLst/>
+          </a:prstGeom>
+          <a:noFill/>
+          <a:ln/>
+        </p:spPr>
+        <p:txBody>
+          <a:bodyPr wrap="square" lIns="0" tIns="0" rIns="0" bIns="0" rtlCol="0" anchor="ctr"/>
+          <a:lstStyle/>
+          <a:p>
+            <a:pPr algn="ctr" indent="0" marL="0">
+              <a:buNone/>
+            </a:pPr>
+            <a:r>
+              <a:rPr lang="en-US" sz="1300" b="1" dirty="0">
+                <a:solidFill>
+                  <a:srgbClr val="9D174D"/>
+                </a:solidFill>
+                <a:latin typeface="Trebuchet MS" pitchFamily="34" charset="0"/>
+                <a:ea typeface="Trebuchet MS" pitchFamily="34" charset="-122"/>
+                <a:cs typeface="Trebuchet MS" pitchFamily="34" charset="-120"/>
+              </a:rPr>
+              <a:t>ing</a:t>
+            </a:r>
+            <a:endParaRPr lang="en-US" sz="1300" dirty="0"/>
+          </a:p>
+        </p:txBody>
+      </p:sp>
+      <p:sp>
+        <p:nvSpPr>
+          <p:cNvPr id="24" name="Text 22"/>
+          <p:cNvSpPr/>
+          <p:nvPr/>
+        </p:nvSpPr>
+        <p:spPr>
+          <a:xfrm>
+            <a:off x="6519672" y="2569464"/>
+            <a:ext cx="1828800" cy="201168"/>
+          </a:xfrm>
+          <a:prstGeom prst="rect">
+            <a:avLst/>
+          </a:prstGeom>
+          <a:noFill/>
+          <a:ln/>
+        </p:spPr>
+        <p:txBody>
+          <a:bodyPr wrap="square" lIns="0" tIns="0" rIns="0" bIns="0" rtlCol="0" anchor="t"/>
+          <a:lstStyle/>
+          <a:p>
+            <a:pPr algn="ctr" indent="0" marL="0">
+              <a:buNone/>
+            </a:pPr>
+            <a:r>
+              <a:rPr lang="en-US" sz="850" dirty="0">
+                <a:solidFill>
+                  <a:srgbClr val="475569"/>
+                </a:solidFill>
+                <a:latin typeface="Calibri" pitchFamily="34" charset="0"/>
+                <a:ea typeface="Calibri" pitchFamily="34" charset="-122"/>
+                <a:cs typeface="Calibri" pitchFamily="34" charset="-120"/>
+              </a:rPr>
+              <a:t>happening now</a:t>
+            </a:r>
+            <a:endParaRPr lang="en-US" sz="850" dirty="0"/>
+          </a:p>
+        </p:txBody>
+      </p:sp>
+      <p:sp>
+        <p:nvSpPr>
+          <p:cNvPr id="25" name="Shape 23"/>
           <p:cNvSpPr/>
           <p:nvPr/>
         </p:nvSpPr>
@@ -23815,7 +24878,7 @@
       </p:sp>
       <p:sp>
         <p:nvSpPr>
-          <p:cNvPr id="23" name="Text 21"/>
+          <p:cNvPr id="26" name="Text 24"/>
           <p:cNvSpPr/>
           <p:nvPr/>
         </p:nvSpPr>
@@ -23854,7 +24917,7 @@
       </p:sp>
       <p:sp>
         <p:nvSpPr>
-          <p:cNvPr id="24" name="Shape 22"/>
+          <p:cNvPr id="27" name="Shape 25"/>
           <p:cNvSpPr/>
           <p:nvPr/>
         </p:nvSpPr>
@@ -23881,7 +24944,7 @@
       </p:sp>
       <p:sp>
         <p:nvSpPr>
-          <p:cNvPr id="25" name="Text 23"/>
+          <p:cNvPr id="28" name="Text 26"/>
           <p:cNvSpPr/>
           <p:nvPr/>
         </p:nvSpPr>
@@ -23920,7 +24983,7 @@
       </p:sp>
       <p:sp>
         <p:nvSpPr>
-          <p:cNvPr id="26" name="Shape 24"/>
+          <p:cNvPr id="29" name="Shape 27"/>
           <p:cNvSpPr/>
           <p:nvPr/>
         </p:nvSpPr>
@@ -23947,7 +25010,7 @@
       </p:sp>
       <p:sp>
         <p:nvSpPr>
-          <p:cNvPr id="27" name="Text 25"/>
+          <p:cNvPr id="30" name="Text 28"/>
           <p:cNvSpPr/>
           <p:nvPr/>
         </p:nvSpPr>
@@ -23986,7 +25049,7 @@
       </p:sp>
       <p:sp>
         <p:nvSpPr>
-          <p:cNvPr id="28" name="Shape 26"/>
+          <p:cNvPr id="31" name="Shape 29"/>
           <p:cNvSpPr/>
           <p:nvPr/>
         </p:nvSpPr>
@@ -24013,7 +25076,7 @@
       </p:sp>
       <p:sp>
         <p:nvSpPr>
-          <p:cNvPr id="29" name="Text 27"/>
+          <p:cNvPr id="32" name="Text 30"/>
           <p:cNvSpPr/>
           <p:nvPr/>
         </p:nvSpPr>
@@ -24336,7 +25399,7 @@
                 <a:ea typeface="Calibri" pitchFamily="34" charset="-122"/>
                 <a:cs typeface="Calibri" pitchFamily="34" charset="-120"/>
               </a:rPr>
-              <a:t>Word Labs  •  wordlabs.app  •  Prefix: 'en-' = to make, put into</a:t>
+              <a:t>Word Labs  •  wordlabs.app  •  Prefix: 'en-' = cause to; make</a:t>
             </a:r>
             <a:endParaRPr lang="en-US" sz="800" dirty="0"/>
           </a:p>
@@ -24409,7 +25472,7 @@
                 <a:ea typeface="Trebuchet MS" pitchFamily="34" charset="-122"/>
                 <a:cs typeface="Trebuchet MS" pitchFamily="34" charset="-120"/>
               </a:rPr>
-              <a:t>We are learning that the prefix 'en-' means 'to make, put into'.</a:t>
+              <a:t>We are learning that the prefix 'en-' means 'cause to; make'.</a:t>
             </a:r>
             <a:endParaRPr lang="en-US" sz="2000" dirty="0"/>
           </a:p>
@@ -25055,7 +26118,7 @@
                 <a:ea typeface="Calibri" pitchFamily="34" charset="-122"/>
                 <a:cs typeface="Calibri" pitchFamily="34" charset="-120"/>
               </a:rPr>
-              <a:t>Word Labs  •  wordlabs.app  •  Prefix: 'en-' = to make, put into</a:t>
+              <a:t>Word Labs  •  wordlabs.app  •  Prefix: 'en-' = cause to; make</a:t>
             </a:r>
             <a:endParaRPr lang="en-US" sz="800" dirty="0"/>
           </a:p>
@@ -25194,7 +26257,7 @@
                 <a:ea typeface="Trebuchet MS" pitchFamily="34" charset="-122"/>
                 <a:cs typeface="Trebuchet MS" pitchFamily="34" charset="-120"/>
               </a:rPr>
-              <a:t>ensure</a:t>
+              <a:t>engraving</a:t>
             </a:r>
             <a:endParaRPr lang="en-US" sz="2800" dirty="0"/>
           </a:p>
@@ -25274,7 +26337,7 @@
         </p:nvSpPr>
         <p:spPr>
           <a:xfrm>
-            <a:off x="2938272" y="2258568"/>
+            <a:off x="2221992" y="2258568"/>
             <a:ext cx="1828800" cy="292608"/>
           </a:xfrm>
           <a:prstGeom prst="rect">
@@ -25308,7 +26371,7 @@
         </p:nvSpPr>
         <p:spPr>
           <a:xfrm>
-            <a:off x="2938272" y="2258568"/>
+            <a:off x="2221992" y="2258568"/>
             <a:ext cx="1828800" cy="292608"/>
           </a:xfrm>
           <a:prstGeom prst="rect">
@@ -25347,7 +26410,7 @@
         </p:nvSpPr>
         <p:spPr>
           <a:xfrm>
-            <a:off x="2938272" y="2569464"/>
+            <a:off x="2221992" y="2569464"/>
             <a:ext cx="1828800" cy="201168"/>
           </a:xfrm>
           <a:prstGeom prst="rect">
@@ -25372,7 +26435,7 @@
                 <a:ea typeface="Calibri" pitchFamily="34" charset="-122"/>
                 <a:cs typeface="Calibri" pitchFamily="34" charset="-120"/>
               </a:rPr>
-              <a:t>to make, put into</a:t>
+              <a:t>made of; to make</a:t>
             </a:r>
             <a:endParaRPr lang="en-US" sz="850" dirty="0"/>
           </a:p>
@@ -25386,7 +26449,7 @@
         </p:nvSpPr>
         <p:spPr>
           <a:xfrm>
-            <a:off x="5803392" y="2258568"/>
+            <a:off x="4370832" y="2258568"/>
             <a:ext cx="1828800" cy="292608"/>
           </a:xfrm>
           <a:prstGeom prst="rect">
@@ -25420,7 +26483,7 @@
         </p:nvSpPr>
         <p:spPr>
           <a:xfrm>
-            <a:off x="5803392" y="2258568"/>
+            <a:off x="4370832" y="2258568"/>
             <a:ext cx="1828800" cy="292608"/>
           </a:xfrm>
           <a:prstGeom prst="rect">
@@ -25445,7 +26508,7 @@
                 <a:ea typeface="Trebuchet MS" pitchFamily="34" charset="-122"/>
                 <a:cs typeface="Trebuchet MS" pitchFamily="34" charset="-120"/>
               </a:rPr>
-              <a:t>sure</a:t>
+              <a:t>grav</a:t>
             </a:r>
             <a:endParaRPr lang="en-US" sz="1300" dirty="0"/>
           </a:p>
@@ -25459,7 +26522,7 @@
         </p:nvSpPr>
         <p:spPr>
           <a:xfrm>
-            <a:off x="5803392" y="2569464"/>
+            <a:off x="4370832" y="2569464"/>
             <a:ext cx="1828800" cy="201168"/>
           </a:xfrm>
           <a:prstGeom prst="rect">
@@ -25484,7 +26547,7 @@
                 <a:ea typeface="Calibri" pitchFamily="34" charset="-122"/>
                 <a:cs typeface="Calibri" pitchFamily="34" charset="-120"/>
               </a:rPr>
-              <a:t>certain, definite</a:t>
+              <a:t>heavy; serious</a:t>
             </a:r>
             <a:endParaRPr lang="en-US" sz="850" dirty="0"/>
           </a:p>
@@ -25493,6 +26556,118 @@
       <p:sp>
         <p:nvSpPr>
           <p:cNvPr id="22" name="Shape 20"/>
+          <p:cNvSpPr/>
+          <p:nvPr/>
+        </p:nvSpPr>
+        <p:spPr>
+          <a:xfrm>
+            <a:off x="6519672" y="2258568"/>
+            <a:ext cx="1828800" cy="292608"/>
+          </a:xfrm>
+          <a:prstGeom prst="rect">
+            <a:avLst>
+              <a:gd name="adj" fmla="val 25000"/>
+            </a:avLst>
+          </a:prstGeom>
+          <a:solidFill>
+            <a:srgbClr val="FCE7F3"/>
+          </a:solidFill>
+          <a:ln w="19050">
+            <a:solidFill>
+              <a:srgbClr val="DB2777"/>
+            </a:solidFill>
+            <a:prstDash val="solid"/>
+          </a:ln>
+          <a:effectLst>
+            <a:outerShdw sx="100000" sy="100000" kx="0" ky="0" algn="bl" rotWithShape="0" blurRad="101600" dist="38100" dir="8100000">
+              <a:srgbClr val="000000">
+                <a:alpha val="12000"/>
+              </a:srgbClr>
+            </a:outerShdw>
+          </a:effectLst>
+        </p:spPr>
+      </p:sp>
+      <p:sp>
+        <p:nvSpPr>
+          <p:cNvPr id="23" name="Text 21"/>
+          <p:cNvSpPr/>
+          <p:nvPr/>
+        </p:nvSpPr>
+        <p:spPr>
+          <a:xfrm>
+            <a:off x="6519672" y="2258568"/>
+            <a:ext cx="1828800" cy="292608"/>
+          </a:xfrm>
+          <a:prstGeom prst="rect">
+            <a:avLst/>
+          </a:prstGeom>
+          <a:noFill/>
+          <a:ln/>
+        </p:spPr>
+        <p:txBody>
+          <a:bodyPr wrap="square" lIns="0" tIns="0" rIns="0" bIns="0" rtlCol="0" anchor="ctr"/>
+          <a:lstStyle/>
+          <a:p>
+            <a:pPr algn="ctr" indent="0" marL="0">
+              <a:buNone/>
+            </a:pPr>
+            <a:r>
+              <a:rPr lang="en-US" sz="1300" b="1" dirty="0">
+                <a:solidFill>
+                  <a:srgbClr val="9D174D"/>
+                </a:solidFill>
+                <a:latin typeface="Trebuchet MS" pitchFamily="34" charset="0"/>
+                <a:ea typeface="Trebuchet MS" pitchFamily="34" charset="-122"/>
+                <a:cs typeface="Trebuchet MS" pitchFamily="34" charset="-120"/>
+              </a:rPr>
+              <a:t>ing</a:t>
+            </a:r>
+            <a:endParaRPr lang="en-US" sz="1300" dirty="0"/>
+          </a:p>
+        </p:txBody>
+      </p:sp>
+      <p:sp>
+        <p:nvSpPr>
+          <p:cNvPr id="24" name="Text 22"/>
+          <p:cNvSpPr/>
+          <p:nvPr/>
+        </p:nvSpPr>
+        <p:spPr>
+          <a:xfrm>
+            <a:off x="6519672" y="2569464"/>
+            <a:ext cx="1828800" cy="201168"/>
+          </a:xfrm>
+          <a:prstGeom prst="rect">
+            <a:avLst/>
+          </a:prstGeom>
+          <a:noFill/>
+          <a:ln/>
+        </p:spPr>
+        <p:txBody>
+          <a:bodyPr wrap="square" lIns="0" tIns="0" rIns="0" bIns="0" rtlCol="0" anchor="t"/>
+          <a:lstStyle/>
+          <a:p>
+            <a:pPr algn="ctr" indent="0" marL="0">
+              <a:buNone/>
+            </a:pPr>
+            <a:r>
+              <a:rPr lang="en-US" sz="850" dirty="0">
+                <a:solidFill>
+                  <a:srgbClr val="475569"/>
+                </a:solidFill>
+                <a:latin typeface="Calibri" pitchFamily="34" charset="0"/>
+                <a:ea typeface="Calibri" pitchFamily="34" charset="-122"/>
+                <a:cs typeface="Calibri" pitchFamily="34" charset="-120"/>
+              </a:rPr>
+              <a:t>happening now</a:t>
+            </a:r>
+            <a:endParaRPr lang="en-US" sz="850" dirty="0"/>
+          </a:p>
+        </p:txBody>
+      </p:sp>
+      <p:sp>
+        <p:nvSpPr>
+          <p:cNvPr id="25" name="Shape 23"/>
           <p:cNvSpPr/>
           <p:nvPr/>
         </p:nvSpPr>
@@ -25519,7 +26694,7 @@
       </p:sp>
       <p:sp>
         <p:nvSpPr>
-          <p:cNvPr id="23" name="Text 21"/>
+          <p:cNvPr id="26" name="Text 24"/>
           <p:cNvSpPr/>
           <p:nvPr/>
         </p:nvSpPr>
@@ -25558,7 +26733,7 @@
       </p:sp>
       <p:sp>
         <p:nvSpPr>
-          <p:cNvPr id="24" name="Shape 22"/>
+          <p:cNvPr id="27" name="Shape 25"/>
           <p:cNvSpPr/>
           <p:nvPr/>
         </p:nvSpPr>
@@ -25585,13 +26760,13 @@
       </p:sp>
       <p:sp>
         <p:nvSpPr>
-          <p:cNvPr id="25" name="Shape 23"/>
-          <p:cNvSpPr/>
-          <p:nvPr/>
-        </p:nvSpPr>
-        <p:spPr>
-          <a:xfrm>
-            <a:off x="2999232" y="3364992"/>
+          <p:cNvPr id="28" name="Shape 26"/>
+          <p:cNvSpPr/>
+          <p:nvPr/>
+        </p:nvSpPr>
+        <p:spPr>
+          <a:xfrm>
+            <a:off x="2313432" y="3364992"/>
             <a:ext cx="1645920" cy="475488"/>
           </a:xfrm>
           <a:prstGeom prst="rect">
@@ -25612,13 +26787,13 @@
       </p:sp>
       <p:sp>
         <p:nvSpPr>
-          <p:cNvPr id="26" name="Text 24"/>
-          <p:cNvSpPr/>
-          <p:nvPr/>
-        </p:nvSpPr>
-        <p:spPr>
-          <a:xfrm>
-            <a:off x="2999232" y="3364992"/>
+          <p:cNvPr id="29" name="Text 27"/>
+          <p:cNvSpPr/>
+          <p:nvPr/>
+        </p:nvSpPr>
+        <p:spPr>
+          <a:xfrm>
+            <a:off x="2313432" y="3364992"/>
             <a:ext cx="1645920" cy="475488"/>
           </a:xfrm>
           <a:prstGeom prst="rect">
@@ -25651,14 +26826,14 @@
       </p:sp>
       <p:sp>
         <p:nvSpPr>
-          <p:cNvPr id="27" name="Text 25"/>
-          <p:cNvSpPr/>
-          <p:nvPr/>
-        </p:nvSpPr>
-        <p:spPr>
-          <a:xfrm>
-            <a:off x="4645152" y="3364992"/>
-            <a:ext cx="1097280" cy="475488"/>
+          <p:cNvPr id="30" name="Text 28"/>
+          <p:cNvSpPr/>
+          <p:nvPr/>
+        </p:nvSpPr>
+        <p:spPr>
+          <a:xfrm>
+            <a:off x="3959352" y="3364992"/>
+            <a:ext cx="411480" cy="475488"/>
           </a:xfrm>
           <a:prstGeom prst="rect">
             <a:avLst/>
@@ -25690,13 +26865,13 @@
       </p:sp>
       <p:sp>
         <p:nvSpPr>
-          <p:cNvPr id="28" name="Shape 26"/>
-          <p:cNvSpPr/>
-          <p:nvPr/>
-        </p:nvSpPr>
-        <p:spPr>
-          <a:xfrm>
-            <a:off x="5742432" y="3364992"/>
+          <p:cNvPr id="31" name="Shape 29"/>
+          <p:cNvSpPr/>
+          <p:nvPr/>
+        </p:nvSpPr>
+        <p:spPr>
+          <a:xfrm>
+            <a:off x="4370832" y="3364992"/>
             <a:ext cx="1645920" cy="475488"/>
           </a:xfrm>
           <a:prstGeom prst="rect">
@@ -25717,13 +26892,13 @@
       </p:sp>
       <p:sp>
         <p:nvSpPr>
-          <p:cNvPr id="29" name="Text 27"/>
-          <p:cNvSpPr/>
-          <p:nvPr/>
-        </p:nvSpPr>
-        <p:spPr>
-          <a:xfrm>
-            <a:off x="5742432" y="3364992"/>
+          <p:cNvPr id="32" name="Text 30"/>
+          <p:cNvSpPr/>
+          <p:nvPr/>
+        </p:nvSpPr>
+        <p:spPr>
+          <a:xfrm>
+            <a:off x="4370832" y="3364992"/>
             <a:ext cx="1645920" cy="475488"/>
           </a:xfrm>
           <a:prstGeom prst="rect">
@@ -25748,7 +26923,7 @@
                 <a:ea typeface="Trebuchet MS" pitchFamily="34" charset="-122"/>
                 <a:cs typeface="Trebuchet MS" pitchFamily="34" charset="-120"/>
               </a:rPr>
-              <a:t>sure</a:t>
+              <a:t>grav</a:t>
             </a:r>
             <a:endParaRPr lang="en-US" sz="1400" dirty="0"/>
           </a:p>
@@ -25756,7 +26931,112 @@
       </p:sp>
       <p:sp>
         <p:nvSpPr>
-          <p:cNvPr id="30" name="Shape 28"/>
+          <p:cNvPr id="33" name="Text 31"/>
+          <p:cNvSpPr/>
+          <p:nvPr/>
+        </p:nvSpPr>
+        <p:spPr>
+          <a:xfrm>
+            <a:off x="6016752" y="3364992"/>
+            <a:ext cx="411480" cy="475488"/>
+          </a:xfrm>
+          <a:prstGeom prst="rect">
+            <a:avLst/>
+          </a:prstGeom>
+          <a:noFill/>
+          <a:ln/>
+        </p:spPr>
+        <p:txBody>
+          <a:bodyPr wrap="square" lIns="0" tIns="0" rIns="0" bIns="0" rtlCol="0" anchor="ctr"/>
+          <a:lstStyle/>
+          <a:p>
+            <a:pPr algn="ctr" indent="0" marL="0">
+              <a:buNone/>
+            </a:pPr>
+            <a:r>
+              <a:rPr lang="en-US" sz="1600" b="1" dirty="0">
+                <a:solidFill>
+                  <a:srgbClr val="0D9488"/>
+                </a:solidFill>
+                <a:latin typeface="Trebuchet MS" pitchFamily="34" charset="0"/>
+                <a:ea typeface="Trebuchet MS" pitchFamily="34" charset="-122"/>
+                <a:cs typeface="Trebuchet MS" pitchFamily="34" charset="-120"/>
+              </a:rPr>
+              <a:t>·</a:t>
+            </a:r>
+            <a:endParaRPr lang="en-US" sz="1600" dirty="0"/>
+          </a:p>
+        </p:txBody>
+      </p:sp>
+      <p:sp>
+        <p:nvSpPr>
+          <p:cNvPr id="34" name="Shape 32"/>
+          <p:cNvSpPr/>
+          <p:nvPr/>
+        </p:nvSpPr>
+        <p:spPr>
+          <a:xfrm>
+            <a:off x="6428232" y="3364992"/>
+            <a:ext cx="1645920" cy="475488"/>
+          </a:xfrm>
+          <a:prstGeom prst="rect">
+            <a:avLst>
+              <a:gd name="adj" fmla="val 9615"/>
+            </a:avLst>
+          </a:prstGeom>
+          <a:solidFill>
+            <a:srgbClr val="FFFFFF"/>
+          </a:solidFill>
+          <a:ln w="12700">
+            <a:solidFill>
+              <a:srgbClr val="0D9488"/>
+            </a:solidFill>
+            <a:prstDash val="solid"/>
+          </a:ln>
+        </p:spPr>
+      </p:sp>
+      <p:sp>
+        <p:nvSpPr>
+          <p:cNvPr id="35" name="Text 33"/>
+          <p:cNvSpPr/>
+          <p:nvPr/>
+        </p:nvSpPr>
+        <p:spPr>
+          <a:xfrm>
+            <a:off x="6428232" y="3364992"/>
+            <a:ext cx="1645920" cy="475488"/>
+          </a:xfrm>
+          <a:prstGeom prst="rect">
+            <a:avLst/>
+          </a:prstGeom>
+          <a:noFill/>
+          <a:ln/>
+        </p:spPr>
+        <p:txBody>
+          <a:bodyPr wrap="square" lIns="0" tIns="0" rIns="0" bIns="0" rtlCol="0" anchor="ctr"/>
+          <a:lstStyle/>
+          <a:p>
+            <a:pPr algn="ctr" indent="0" marL="0">
+              <a:buNone/>
+            </a:pPr>
+            <a:r>
+              <a:rPr lang="en-US" sz="1400" b="1" dirty="0">
+                <a:solidFill>
+                  <a:srgbClr val="0D9488"/>
+                </a:solidFill>
+                <a:latin typeface="Trebuchet MS" pitchFamily="34" charset="0"/>
+                <a:ea typeface="Trebuchet MS" pitchFamily="34" charset="-122"/>
+                <a:cs typeface="Trebuchet MS" pitchFamily="34" charset="-120"/>
+              </a:rPr>
+              <a:t>ing</a:t>
+            </a:r>
+            <a:endParaRPr lang="en-US" sz="1400" dirty="0"/>
+          </a:p>
+        </p:txBody>
+      </p:sp>
+      <p:sp>
+        <p:nvSpPr>
+          <p:cNvPr id="36" name="Shape 34"/>
           <p:cNvSpPr/>
           <p:nvPr/>
         </p:nvSpPr>
@@ -25783,7 +27063,7 @@
       </p:sp>
       <p:sp>
         <p:nvSpPr>
-          <p:cNvPr id="31" name="Text 29"/>
+          <p:cNvPr id="37" name="Text 35"/>
           <p:cNvSpPr/>
           <p:nvPr/>
         </p:nvSpPr>
@@ -25822,7 +27102,7 @@
       </p:sp>
       <p:sp>
         <p:nvSpPr>
-          <p:cNvPr id="32" name="Shape 30"/>
+          <p:cNvPr id="38" name="Shape 36"/>
           <p:cNvSpPr/>
           <p:nvPr/>
         </p:nvSpPr>
@@ -25849,7 +27129,7 @@
       </p:sp>
       <p:sp>
         <p:nvSpPr>
-          <p:cNvPr id="33" name="Text 31"/>
+          <p:cNvPr id="39" name="Text 37"/>
           <p:cNvSpPr/>
           <p:nvPr/>
         </p:nvSpPr>
@@ -26172,7 +27452,7 @@
                 <a:ea typeface="Calibri" pitchFamily="34" charset="-122"/>
                 <a:cs typeface="Calibri" pitchFamily="34" charset="-120"/>
               </a:rPr>
-              <a:t>Word Labs  •  wordlabs.app  •  Prefix: 'en-' = to make, put into</a:t>
+              <a:t>Word Labs  •  wordlabs.app  •  Prefix: 'en-' = cause to; make</a:t>
             </a:r>
             <a:endParaRPr lang="en-US" sz="800" dirty="0"/>
           </a:p>
@@ -26311,7 +27591,7 @@
                 <a:ea typeface="Trebuchet MS" pitchFamily="34" charset="-122"/>
                 <a:cs typeface="Trebuchet MS" pitchFamily="34" charset="-120"/>
               </a:rPr>
-              <a:t>ensure</a:t>
+              <a:t>engraving</a:t>
             </a:r>
             <a:endParaRPr lang="en-US" sz="2800" dirty="0"/>
           </a:p>
@@ -26391,7 +27671,7 @@
         </p:nvSpPr>
         <p:spPr>
           <a:xfrm>
-            <a:off x="2938272" y="2258568"/>
+            <a:off x="2221992" y="2258568"/>
             <a:ext cx="1828800" cy="292608"/>
           </a:xfrm>
           <a:prstGeom prst="rect">
@@ -26425,7 +27705,7 @@
         </p:nvSpPr>
         <p:spPr>
           <a:xfrm>
-            <a:off x="2938272" y="2258568"/>
+            <a:off x="2221992" y="2258568"/>
             <a:ext cx="1828800" cy="292608"/>
           </a:xfrm>
           <a:prstGeom prst="rect">
@@ -26464,7 +27744,7 @@
         </p:nvSpPr>
         <p:spPr>
           <a:xfrm>
-            <a:off x="2938272" y="2569464"/>
+            <a:off x="2221992" y="2569464"/>
             <a:ext cx="1828800" cy="201168"/>
           </a:xfrm>
           <a:prstGeom prst="rect">
@@ -26489,7 +27769,7 @@
                 <a:ea typeface="Calibri" pitchFamily="34" charset="-122"/>
                 <a:cs typeface="Calibri" pitchFamily="34" charset="-120"/>
               </a:rPr>
-              <a:t>to make, put into</a:t>
+              <a:t>made of; to make</a:t>
             </a:r>
             <a:endParaRPr lang="en-US" sz="850" dirty="0"/>
           </a:p>
@@ -26503,7 +27783,7 @@
         </p:nvSpPr>
         <p:spPr>
           <a:xfrm>
-            <a:off x="5803392" y="2258568"/>
+            <a:off x="4370832" y="2258568"/>
             <a:ext cx="1828800" cy="292608"/>
           </a:xfrm>
           <a:prstGeom prst="rect">
@@ -26537,7 +27817,7 @@
         </p:nvSpPr>
         <p:spPr>
           <a:xfrm>
-            <a:off x="5803392" y="2258568"/>
+            <a:off x="4370832" y="2258568"/>
             <a:ext cx="1828800" cy="292608"/>
           </a:xfrm>
           <a:prstGeom prst="rect">
@@ -26562,7 +27842,7 @@
                 <a:ea typeface="Trebuchet MS" pitchFamily="34" charset="-122"/>
                 <a:cs typeface="Trebuchet MS" pitchFamily="34" charset="-120"/>
               </a:rPr>
-              <a:t>sure</a:t>
+              <a:t>grav</a:t>
             </a:r>
             <a:endParaRPr lang="en-US" sz="1300" dirty="0"/>
           </a:p>
@@ -26576,7 +27856,7 @@
         </p:nvSpPr>
         <p:spPr>
           <a:xfrm>
-            <a:off x="5803392" y="2569464"/>
+            <a:off x="4370832" y="2569464"/>
             <a:ext cx="1828800" cy="201168"/>
           </a:xfrm>
           <a:prstGeom prst="rect">
@@ -26601,7 +27881,7 @@
                 <a:ea typeface="Calibri" pitchFamily="34" charset="-122"/>
                 <a:cs typeface="Calibri" pitchFamily="34" charset="-120"/>
               </a:rPr>
-              <a:t>certain, definite</a:t>
+              <a:t>heavy; serious</a:t>
             </a:r>
             <a:endParaRPr lang="en-US" sz="850" dirty="0"/>
           </a:p>
@@ -26610,6 +27890,118 @@
       <p:sp>
         <p:nvSpPr>
           <p:cNvPr id="22" name="Shape 20"/>
+          <p:cNvSpPr/>
+          <p:nvPr/>
+        </p:nvSpPr>
+        <p:spPr>
+          <a:xfrm>
+            <a:off x="6519672" y="2258568"/>
+            <a:ext cx="1828800" cy="292608"/>
+          </a:xfrm>
+          <a:prstGeom prst="rect">
+            <a:avLst>
+              <a:gd name="adj" fmla="val 25000"/>
+            </a:avLst>
+          </a:prstGeom>
+          <a:solidFill>
+            <a:srgbClr val="FCE7F3"/>
+          </a:solidFill>
+          <a:ln w="19050">
+            <a:solidFill>
+              <a:srgbClr val="DB2777"/>
+            </a:solidFill>
+            <a:prstDash val="solid"/>
+          </a:ln>
+          <a:effectLst>
+            <a:outerShdw sx="100000" sy="100000" kx="0" ky="0" algn="bl" rotWithShape="0" blurRad="101600" dist="38100" dir="8100000">
+              <a:srgbClr val="000000">
+                <a:alpha val="12000"/>
+              </a:srgbClr>
+            </a:outerShdw>
+          </a:effectLst>
+        </p:spPr>
+      </p:sp>
+      <p:sp>
+        <p:nvSpPr>
+          <p:cNvPr id="23" name="Text 21"/>
+          <p:cNvSpPr/>
+          <p:nvPr/>
+        </p:nvSpPr>
+        <p:spPr>
+          <a:xfrm>
+            <a:off x="6519672" y="2258568"/>
+            <a:ext cx="1828800" cy="292608"/>
+          </a:xfrm>
+          <a:prstGeom prst="rect">
+            <a:avLst/>
+          </a:prstGeom>
+          <a:noFill/>
+          <a:ln/>
+        </p:spPr>
+        <p:txBody>
+          <a:bodyPr wrap="square" lIns="0" tIns="0" rIns="0" bIns="0" rtlCol="0" anchor="ctr"/>
+          <a:lstStyle/>
+          <a:p>
+            <a:pPr algn="ctr" indent="0" marL="0">
+              <a:buNone/>
+            </a:pPr>
+            <a:r>
+              <a:rPr lang="en-US" sz="1300" b="1" dirty="0">
+                <a:solidFill>
+                  <a:srgbClr val="9D174D"/>
+                </a:solidFill>
+                <a:latin typeface="Trebuchet MS" pitchFamily="34" charset="0"/>
+                <a:ea typeface="Trebuchet MS" pitchFamily="34" charset="-122"/>
+                <a:cs typeface="Trebuchet MS" pitchFamily="34" charset="-120"/>
+              </a:rPr>
+              <a:t>ing</a:t>
+            </a:r>
+            <a:endParaRPr lang="en-US" sz="1300" dirty="0"/>
+          </a:p>
+        </p:txBody>
+      </p:sp>
+      <p:sp>
+        <p:nvSpPr>
+          <p:cNvPr id="24" name="Text 22"/>
+          <p:cNvSpPr/>
+          <p:nvPr/>
+        </p:nvSpPr>
+        <p:spPr>
+          <a:xfrm>
+            <a:off x="6519672" y="2569464"/>
+            <a:ext cx="1828800" cy="201168"/>
+          </a:xfrm>
+          <a:prstGeom prst="rect">
+            <a:avLst/>
+          </a:prstGeom>
+          <a:noFill/>
+          <a:ln/>
+        </p:spPr>
+        <p:txBody>
+          <a:bodyPr wrap="square" lIns="0" tIns="0" rIns="0" bIns="0" rtlCol="0" anchor="t"/>
+          <a:lstStyle/>
+          <a:p>
+            <a:pPr algn="ctr" indent="0" marL="0">
+              <a:buNone/>
+            </a:pPr>
+            <a:r>
+              <a:rPr lang="en-US" sz="850" dirty="0">
+                <a:solidFill>
+                  <a:srgbClr val="475569"/>
+                </a:solidFill>
+                <a:latin typeface="Calibri" pitchFamily="34" charset="0"/>
+                <a:ea typeface="Calibri" pitchFamily="34" charset="-122"/>
+                <a:cs typeface="Calibri" pitchFamily="34" charset="-120"/>
+              </a:rPr>
+              <a:t>happening now</a:t>
+            </a:r>
+            <a:endParaRPr lang="en-US" sz="850" dirty="0"/>
+          </a:p>
+        </p:txBody>
+      </p:sp>
+      <p:sp>
+        <p:nvSpPr>
+          <p:cNvPr id="25" name="Shape 23"/>
           <p:cNvSpPr/>
           <p:nvPr/>
         </p:nvSpPr>
@@ -26636,7 +28028,7 @@
       </p:sp>
       <p:sp>
         <p:nvSpPr>
-          <p:cNvPr id="23" name="Text 21"/>
+          <p:cNvPr id="26" name="Text 24"/>
           <p:cNvSpPr/>
           <p:nvPr/>
         </p:nvSpPr>
@@ -26675,7 +28067,7 @@
       </p:sp>
       <p:sp>
         <p:nvSpPr>
-          <p:cNvPr id="24" name="Shape 22"/>
+          <p:cNvPr id="27" name="Shape 25"/>
           <p:cNvSpPr/>
           <p:nvPr/>
         </p:nvSpPr>
@@ -26702,13 +28094,13 @@
       </p:sp>
       <p:sp>
         <p:nvSpPr>
-          <p:cNvPr id="25" name="Shape 23"/>
-          <p:cNvSpPr/>
-          <p:nvPr/>
-        </p:nvSpPr>
-        <p:spPr>
-          <a:xfrm>
-            <a:off x="2999232" y="3364992"/>
+          <p:cNvPr id="28" name="Shape 26"/>
+          <p:cNvSpPr/>
+          <p:nvPr/>
+        </p:nvSpPr>
+        <p:spPr>
+          <a:xfrm>
+            <a:off x="2313432" y="3364992"/>
             <a:ext cx="1645920" cy="475488"/>
           </a:xfrm>
           <a:prstGeom prst="rect">
@@ -26729,13 +28121,13 @@
       </p:sp>
       <p:sp>
         <p:nvSpPr>
-          <p:cNvPr id="26" name="Text 24"/>
-          <p:cNvSpPr/>
-          <p:nvPr/>
-        </p:nvSpPr>
-        <p:spPr>
-          <a:xfrm>
-            <a:off x="2999232" y="3364992"/>
+          <p:cNvPr id="29" name="Text 27"/>
+          <p:cNvSpPr/>
+          <p:nvPr/>
+        </p:nvSpPr>
+        <p:spPr>
+          <a:xfrm>
+            <a:off x="2313432" y="3364992"/>
             <a:ext cx="1645920" cy="475488"/>
           </a:xfrm>
           <a:prstGeom prst="rect">
@@ -26768,14 +28160,14 @@
       </p:sp>
       <p:sp>
         <p:nvSpPr>
-          <p:cNvPr id="27" name="Text 25"/>
-          <p:cNvSpPr/>
-          <p:nvPr/>
-        </p:nvSpPr>
-        <p:spPr>
-          <a:xfrm>
-            <a:off x="4645152" y="3364992"/>
-            <a:ext cx="1097280" cy="475488"/>
+          <p:cNvPr id="30" name="Text 28"/>
+          <p:cNvSpPr/>
+          <p:nvPr/>
+        </p:nvSpPr>
+        <p:spPr>
+          <a:xfrm>
+            <a:off x="3959352" y="3364992"/>
+            <a:ext cx="411480" cy="475488"/>
           </a:xfrm>
           <a:prstGeom prst="rect">
             <a:avLst/>
@@ -26807,13 +28199,13 @@
       </p:sp>
       <p:sp>
         <p:nvSpPr>
-          <p:cNvPr id="28" name="Shape 26"/>
-          <p:cNvSpPr/>
-          <p:nvPr/>
-        </p:nvSpPr>
-        <p:spPr>
-          <a:xfrm>
-            <a:off x="5742432" y="3364992"/>
+          <p:cNvPr id="31" name="Shape 29"/>
+          <p:cNvSpPr/>
+          <p:nvPr/>
+        </p:nvSpPr>
+        <p:spPr>
+          <a:xfrm>
+            <a:off x="4370832" y="3364992"/>
             <a:ext cx="1645920" cy="475488"/>
           </a:xfrm>
           <a:prstGeom prst="rect">
@@ -26834,13 +28226,13 @@
       </p:sp>
       <p:sp>
         <p:nvSpPr>
-          <p:cNvPr id="29" name="Text 27"/>
-          <p:cNvSpPr/>
-          <p:nvPr/>
-        </p:nvSpPr>
-        <p:spPr>
-          <a:xfrm>
-            <a:off x="5742432" y="3364992"/>
+          <p:cNvPr id="32" name="Text 30"/>
+          <p:cNvSpPr/>
+          <p:nvPr/>
+        </p:nvSpPr>
+        <p:spPr>
+          <a:xfrm>
+            <a:off x="4370832" y="3364992"/>
             <a:ext cx="1645920" cy="475488"/>
           </a:xfrm>
           <a:prstGeom prst="rect">
@@ -26865,7 +28257,7 @@
                 <a:ea typeface="Trebuchet MS" pitchFamily="34" charset="-122"/>
                 <a:cs typeface="Trebuchet MS" pitchFamily="34" charset="-120"/>
               </a:rPr>
-              <a:t>sure</a:t>
+              <a:t>grav</a:t>
             </a:r>
             <a:endParaRPr lang="en-US" sz="1400" dirty="0"/>
           </a:p>
@@ -26873,7 +28265,112 @@
       </p:sp>
       <p:sp>
         <p:nvSpPr>
-          <p:cNvPr id="30" name="Shape 28"/>
+          <p:cNvPr id="33" name="Text 31"/>
+          <p:cNvSpPr/>
+          <p:nvPr/>
+        </p:nvSpPr>
+        <p:spPr>
+          <a:xfrm>
+            <a:off x="6016752" y="3364992"/>
+            <a:ext cx="411480" cy="475488"/>
+          </a:xfrm>
+          <a:prstGeom prst="rect">
+            <a:avLst/>
+          </a:prstGeom>
+          <a:noFill/>
+          <a:ln/>
+        </p:spPr>
+        <p:txBody>
+          <a:bodyPr wrap="square" lIns="0" tIns="0" rIns="0" bIns="0" rtlCol="0" anchor="ctr"/>
+          <a:lstStyle/>
+          <a:p>
+            <a:pPr algn="ctr" indent="0" marL="0">
+              <a:buNone/>
+            </a:pPr>
+            <a:r>
+              <a:rPr lang="en-US" sz="1600" b="1" dirty="0">
+                <a:solidFill>
+                  <a:srgbClr val="0D9488"/>
+                </a:solidFill>
+                <a:latin typeface="Trebuchet MS" pitchFamily="34" charset="0"/>
+                <a:ea typeface="Trebuchet MS" pitchFamily="34" charset="-122"/>
+                <a:cs typeface="Trebuchet MS" pitchFamily="34" charset="-120"/>
+              </a:rPr>
+              <a:t>·</a:t>
+            </a:r>
+            <a:endParaRPr lang="en-US" sz="1600" dirty="0"/>
+          </a:p>
+        </p:txBody>
+      </p:sp>
+      <p:sp>
+        <p:nvSpPr>
+          <p:cNvPr id="34" name="Shape 32"/>
+          <p:cNvSpPr/>
+          <p:nvPr/>
+        </p:nvSpPr>
+        <p:spPr>
+          <a:xfrm>
+            <a:off x="6428232" y="3364992"/>
+            <a:ext cx="1645920" cy="475488"/>
+          </a:xfrm>
+          <a:prstGeom prst="rect">
+            <a:avLst>
+              <a:gd name="adj" fmla="val 9615"/>
+            </a:avLst>
+          </a:prstGeom>
+          <a:solidFill>
+            <a:srgbClr val="FFFFFF"/>
+          </a:solidFill>
+          <a:ln w="12700">
+            <a:solidFill>
+              <a:srgbClr val="0D9488"/>
+            </a:solidFill>
+            <a:prstDash val="solid"/>
+          </a:ln>
+        </p:spPr>
+      </p:sp>
+      <p:sp>
+        <p:nvSpPr>
+          <p:cNvPr id="35" name="Text 33"/>
+          <p:cNvSpPr/>
+          <p:nvPr/>
+        </p:nvSpPr>
+        <p:spPr>
+          <a:xfrm>
+            <a:off x="6428232" y="3364992"/>
+            <a:ext cx="1645920" cy="475488"/>
+          </a:xfrm>
+          <a:prstGeom prst="rect">
+            <a:avLst/>
+          </a:prstGeom>
+          <a:noFill/>
+          <a:ln/>
+        </p:spPr>
+        <p:txBody>
+          <a:bodyPr wrap="square" lIns="0" tIns="0" rIns="0" bIns="0" rtlCol="0" anchor="ctr"/>
+          <a:lstStyle/>
+          <a:p>
+            <a:pPr algn="ctr" indent="0" marL="0">
+              <a:buNone/>
+            </a:pPr>
+            <a:r>
+              <a:rPr lang="en-US" sz="1400" b="1" dirty="0">
+                <a:solidFill>
+                  <a:srgbClr val="0D9488"/>
+                </a:solidFill>
+                <a:latin typeface="Trebuchet MS" pitchFamily="34" charset="0"/>
+                <a:ea typeface="Trebuchet MS" pitchFamily="34" charset="-122"/>
+                <a:cs typeface="Trebuchet MS" pitchFamily="34" charset="-120"/>
+              </a:rPr>
+              <a:t>ing</a:t>
+            </a:r>
+            <a:endParaRPr lang="en-US" sz="1400" dirty="0"/>
+          </a:p>
+        </p:txBody>
+      </p:sp>
+      <p:sp>
+        <p:nvSpPr>
+          <p:cNvPr id="36" name="Shape 34"/>
           <p:cNvSpPr/>
           <p:nvPr/>
         </p:nvSpPr>
@@ -26900,7 +28397,7 @@
       </p:sp>
       <p:sp>
         <p:nvSpPr>
-          <p:cNvPr id="31" name="Text 29"/>
+          <p:cNvPr id="37" name="Text 35"/>
           <p:cNvSpPr/>
           <p:nvPr/>
         </p:nvSpPr>
@@ -26939,18 +28436,18 @@
       </p:sp>
       <p:sp>
         <p:nvSpPr>
-          <p:cNvPr id="32" name="Shape 30"/>
+          <p:cNvPr id="38" name="Shape 36"/>
           <p:cNvSpPr/>
           <p:nvPr/>
         </p:nvSpPr>
         <p:spPr>
           <a:xfrm>
             <a:off x="1874520" y="4096512"/>
-            <a:ext cx="6903720" cy="804672"/>
+            <a:ext cx="6903720" cy="658368"/>
           </a:xfrm>
           <a:prstGeom prst="rect">
             <a:avLst>
-              <a:gd name="adj" fmla="val 6818"/>
+              <a:gd name="adj" fmla="val 8333"/>
             </a:avLst>
           </a:prstGeom>
           <a:solidFill>
@@ -26966,18 +28463,18 @@
       </p:sp>
       <p:sp>
         <p:nvSpPr>
-          <p:cNvPr id="33" name="Shape 31"/>
-          <p:cNvSpPr/>
-          <p:nvPr/>
-        </p:nvSpPr>
-        <p:spPr>
-          <a:xfrm>
-            <a:off x="2670048" y="4169664"/>
-            <a:ext cx="685800" cy="384048"/>
+          <p:cNvPr id="39" name="Shape 37"/>
+          <p:cNvSpPr/>
+          <p:nvPr/>
+        </p:nvSpPr>
+        <p:spPr>
+          <a:xfrm>
+            <a:off x="2023872" y="4169664"/>
+            <a:ext cx="685800" cy="475488"/>
           </a:xfrm>
           <a:prstGeom prst="rect">
             <a:avLst>
-              <a:gd name="adj" fmla="val 9524"/>
+              <a:gd name="adj" fmla="val 7692"/>
             </a:avLst>
           </a:prstGeom>
           <a:solidFill>
@@ -26993,14 +28490,14 @@
       </p:sp>
       <p:sp>
         <p:nvSpPr>
-          <p:cNvPr id="34" name="Text 32"/>
-          <p:cNvSpPr/>
-          <p:nvPr/>
-        </p:nvSpPr>
-        <p:spPr>
-          <a:xfrm>
-            <a:off x="2670048" y="4169664"/>
-            <a:ext cx="685800" cy="384048"/>
+          <p:cNvPr id="40" name="Text 38"/>
+          <p:cNvSpPr/>
+          <p:nvPr/>
+        </p:nvSpPr>
+        <p:spPr>
+          <a:xfrm>
+            <a:off x="2023872" y="4169664"/>
+            <a:ext cx="685800" cy="475488"/>
           </a:xfrm>
           <a:prstGeom prst="rect">
             <a:avLst/>
@@ -27032,18 +28529,18 @@
       </p:sp>
       <p:sp>
         <p:nvSpPr>
-          <p:cNvPr id="35" name="Shape 33"/>
-          <p:cNvSpPr/>
-          <p:nvPr/>
-        </p:nvSpPr>
-        <p:spPr>
-          <a:xfrm>
-            <a:off x="4123944" y="4169664"/>
-            <a:ext cx="685800" cy="384048"/>
+          <p:cNvPr id="41" name="Shape 39"/>
+          <p:cNvSpPr/>
+          <p:nvPr/>
+        </p:nvSpPr>
+        <p:spPr>
+          <a:xfrm>
+            <a:off x="2831592" y="4169664"/>
+            <a:ext cx="685800" cy="475488"/>
           </a:xfrm>
           <a:prstGeom prst="rect">
             <a:avLst>
-              <a:gd name="adj" fmla="val 9524"/>
+              <a:gd name="adj" fmla="val 7692"/>
             </a:avLst>
           </a:prstGeom>
           <a:solidFill>
@@ -27059,14 +28556,14 @@
       </p:sp>
       <p:sp>
         <p:nvSpPr>
-          <p:cNvPr id="36" name="Text 34"/>
-          <p:cNvSpPr/>
-          <p:nvPr/>
-        </p:nvSpPr>
-        <p:spPr>
-          <a:xfrm>
-            <a:off x="4123944" y="4169664"/>
-            <a:ext cx="685800" cy="384048"/>
+          <p:cNvPr id="42" name="Text 40"/>
+          <p:cNvSpPr/>
+          <p:nvPr/>
+        </p:nvSpPr>
+        <p:spPr>
+          <a:xfrm>
+            <a:off x="2831592" y="4169664"/>
+            <a:ext cx="685800" cy="475488"/>
           </a:xfrm>
           <a:prstGeom prst="rect">
             <a:avLst/>
@@ -27098,18 +28595,18 @@
       </p:sp>
       <p:sp>
         <p:nvSpPr>
-          <p:cNvPr id="37" name="Shape 35"/>
-          <p:cNvSpPr/>
-          <p:nvPr/>
-        </p:nvSpPr>
-        <p:spPr>
-          <a:xfrm>
-            <a:off x="5577840" y="4169664"/>
-            <a:ext cx="685800" cy="384048"/>
+          <p:cNvPr id="43" name="Shape 41"/>
+          <p:cNvSpPr/>
+          <p:nvPr/>
+        </p:nvSpPr>
+        <p:spPr>
+          <a:xfrm>
+            <a:off x="3639312" y="4169664"/>
+            <a:ext cx="685800" cy="475488"/>
           </a:xfrm>
           <a:prstGeom prst="rect">
             <a:avLst>
-              <a:gd name="adj" fmla="val 9524"/>
+              <a:gd name="adj" fmla="val 7692"/>
             </a:avLst>
           </a:prstGeom>
           <a:solidFill>
@@ -27125,14 +28622,14 @@
       </p:sp>
       <p:sp>
         <p:nvSpPr>
-          <p:cNvPr id="38" name="Text 36"/>
-          <p:cNvSpPr/>
-          <p:nvPr/>
-        </p:nvSpPr>
-        <p:spPr>
-          <a:xfrm>
-            <a:off x="5577840" y="4169664"/>
-            <a:ext cx="685800" cy="384048"/>
+          <p:cNvPr id="44" name="Text 42"/>
+          <p:cNvSpPr/>
+          <p:nvPr/>
+        </p:nvSpPr>
+        <p:spPr>
+          <a:xfrm>
+            <a:off x="3639312" y="4169664"/>
+            <a:ext cx="685800" cy="475488"/>
           </a:xfrm>
           <a:prstGeom prst="rect">
             <a:avLst/>
@@ -27156,7 +28653,7 @@
                 <a:ea typeface="Trebuchet MS" pitchFamily="34" charset="-122"/>
                 <a:cs typeface="Trebuchet MS" pitchFamily="34" charset="-120"/>
               </a:rPr>
-              <a:t>s</a:t>
+              <a:t>g</a:t>
             </a:r>
             <a:endParaRPr lang="en-US" sz="900" dirty="0"/>
           </a:p>
@@ -27164,57 +28661,18 @@
       </p:sp>
       <p:sp>
         <p:nvSpPr>
-          <p:cNvPr id="39" name="Text 37"/>
-          <p:cNvSpPr/>
-          <p:nvPr/>
-        </p:nvSpPr>
-        <p:spPr>
-          <a:xfrm>
-            <a:off x="5577840" y="4572000"/>
-            <a:ext cx="685800" cy="219456"/>
-          </a:xfrm>
-          <a:prstGeom prst="rect">
-            <a:avLst/>
-          </a:prstGeom>
-          <a:noFill/>
-          <a:ln/>
-        </p:spPr>
-        <p:txBody>
-          <a:bodyPr wrap="square" lIns="0" tIns="0" rIns="0" bIns="0" rtlCol="0" anchor="t"/>
-          <a:lstStyle/>
-          <a:p>
-            <a:pPr algn="ctr" indent="0" marL="0">
-              <a:buNone/>
-            </a:pPr>
-            <a:r>
-              <a:rPr lang="en-US" sz="750" i="1" dirty="0">
-                <a:solidFill>
-                  <a:srgbClr val="94A3B8"/>
-                </a:solidFill>
-                <a:latin typeface="Calibri" pitchFamily="34" charset="0"/>
-                <a:ea typeface="Calibri" pitchFamily="34" charset="-122"/>
-                <a:cs typeface="Calibri" pitchFamily="34" charset="-120"/>
-              </a:rPr>
-              <a:t>/sh/</a:t>
-            </a:r>
-            <a:endParaRPr lang="en-US" sz="750" dirty="0"/>
-          </a:p>
-        </p:txBody>
-      </p:sp>
-      <p:sp>
-        <p:nvSpPr>
-          <p:cNvPr id="40" name="Shape 38"/>
-          <p:cNvSpPr/>
-          <p:nvPr/>
-        </p:nvSpPr>
-        <p:spPr>
-          <a:xfrm>
-            <a:off x="7031736" y="4169664"/>
-            <a:ext cx="685800" cy="384048"/>
+          <p:cNvPr id="45" name="Shape 43"/>
+          <p:cNvSpPr/>
+          <p:nvPr/>
+        </p:nvSpPr>
+        <p:spPr>
+          <a:xfrm>
+            <a:off x="4447032" y="4169664"/>
+            <a:ext cx="685800" cy="475488"/>
           </a:xfrm>
           <a:prstGeom prst="rect">
             <a:avLst>
-              <a:gd name="adj" fmla="val 9524"/>
+              <a:gd name="adj" fmla="val 7692"/>
             </a:avLst>
           </a:prstGeom>
           <a:solidFill>
@@ -27230,14 +28688,14 @@
       </p:sp>
       <p:sp>
         <p:nvSpPr>
-          <p:cNvPr id="41" name="Text 39"/>
-          <p:cNvSpPr/>
-          <p:nvPr/>
-        </p:nvSpPr>
-        <p:spPr>
-          <a:xfrm>
-            <a:off x="7031736" y="4169664"/>
-            <a:ext cx="685800" cy="384048"/>
+          <p:cNvPr id="46" name="Text 44"/>
+          <p:cNvSpPr/>
+          <p:nvPr/>
+        </p:nvSpPr>
+        <p:spPr>
+          <a:xfrm>
+            <a:off x="4447032" y="4169664"/>
+            <a:ext cx="685800" cy="475488"/>
           </a:xfrm>
           <a:prstGeom prst="rect">
             <a:avLst/>
@@ -27261,7 +28719,7 @@
                 <a:ea typeface="Trebuchet MS" pitchFamily="34" charset="-122"/>
                 <a:cs typeface="Trebuchet MS" pitchFamily="34" charset="-120"/>
               </a:rPr>
-              <a:t>ure</a:t>
+              <a:t>r</a:t>
             </a:r>
             <a:endParaRPr lang="en-US" sz="900" dirty="0"/>
           </a:p>
@@ -27269,40 +28727,265 @@
       </p:sp>
       <p:sp>
         <p:nvSpPr>
-          <p:cNvPr id="42" name="Text 40"/>
-          <p:cNvSpPr/>
-          <p:nvPr/>
-        </p:nvSpPr>
-        <p:spPr>
-          <a:xfrm>
-            <a:off x="7031736" y="4572000"/>
-            <a:ext cx="685800" cy="219456"/>
-          </a:xfrm>
-          <a:prstGeom prst="rect">
-            <a:avLst/>
-          </a:prstGeom>
-          <a:noFill/>
-          <a:ln/>
-        </p:spPr>
-        <p:txBody>
-          <a:bodyPr wrap="square" lIns="0" tIns="0" rIns="0" bIns="0" rtlCol="0" anchor="t"/>
-          <a:lstStyle/>
-          <a:p>
-            <a:pPr algn="ctr" indent="0" marL="0">
-              <a:buNone/>
-            </a:pPr>
-            <a:r>
-              <a:rPr lang="en-US" sz="750" i="1" dirty="0">
-                <a:solidFill>
-                  <a:srgbClr val="94A3B8"/>
-                </a:solidFill>
-                <a:latin typeface="Calibri" pitchFamily="34" charset="0"/>
-                <a:ea typeface="Calibri" pitchFamily="34" charset="-122"/>
-                <a:cs typeface="Calibri" pitchFamily="34" charset="-120"/>
-              </a:rPr>
-              <a:t>/er/</a:t>
-            </a:r>
-            <a:endParaRPr lang="en-US" sz="750" dirty="0"/>
+          <p:cNvPr id="47" name="Shape 45"/>
+          <p:cNvSpPr/>
+          <p:nvPr/>
+        </p:nvSpPr>
+        <p:spPr>
+          <a:xfrm>
+            <a:off x="5254752" y="4169664"/>
+            <a:ext cx="685800" cy="475488"/>
+          </a:xfrm>
+          <a:prstGeom prst="rect">
+            <a:avLst>
+              <a:gd name="adj" fmla="val 7692"/>
+            </a:avLst>
+          </a:prstGeom>
+          <a:solidFill>
+            <a:srgbClr val="FFFFFF"/>
+          </a:solidFill>
+          <a:ln w="12700">
+            <a:solidFill>
+              <a:srgbClr val="DB2777"/>
+            </a:solidFill>
+            <a:prstDash val="solid"/>
+          </a:ln>
+        </p:spPr>
+      </p:sp>
+      <p:sp>
+        <p:nvSpPr>
+          <p:cNvPr id="48" name="Text 46"/>
+          <p:cNvSpPr/>
+          <p:nvPr/>
+        </p:nvSpPr>
+        <p:spPr>
+          <a:xfrm>
+            <a:off x="5254752" y="4169664"/>
+            <a:ext cx="685800" cy="475488"/>
+          </a:xfrm>
+          <a:prstGeom prst="rect">
+            <a:avLst/>
+          </a:prstGeom>
+          <a:noFill/>
+          <a:ln/>
+        </p:spPr>
+        <p:txBody>
+          <a:bodyPr wrap="square" lIns="0" tIns="0" rIns="0" bIns="0" rtlCol="0" anchor="ctr"/>
+          <a:lstStyle/>
+          <a:p>
+            <a:pPr algn="ctr" indent="0" marL="0">
+              <a:buNone/>
+            </a:pPr>
+            <a:r>
+              <a:rPr lang="en-US" sz="900" b="1" dirty="0">
+                <a:solidFill>
+                  <a:srgbClr val="9D174D"/>
+                </a:solidFill>
+                <a:latin typeface="Trebuchet MS" pitchFamily="34" charset="0"/>
+                <a:ea typeface="Trebuchet MS" pitchFamily="34" charset="-122"/>
+                <a:cs typeface="Trebuchet MS" pitchFamily="34" charset="-120"/>
+              </a:rPr>
+              <a:t>a</a:t>
+            </a:r>
+            <a:endParaRPr lang="en-US" sz="900" dirty="0"/>
+          </a:p>
+        </p:txBody>
+      </p:sp>
+      <p:sp>
+        <p:nvSpPr>
+          <p:cNvPr id="49" name="Shape 47"/>
+          <p:cNvSpPr/>
+          <p:nvPr/>
+        </p:nvSpPr>
+        <p:spPr>
+          <a:xfrm>
+            <a:off x="6062472" y="4169664"/>
+            <a:ext cx="685800" cy="475488"/>
+          </a:xfrm>
+          <a:prstGeom prst="rect">
+            <a:avLst>
+              <a:gd name="adj" fmla="val 7692"/>
+            </a:avLst>
+          </a:prstGeom>
+          <a:solidFill>
+            <a:srgbClr val="FFFFFF"/>
+          </a:solidFill>
+          <a:ln w="12700">
+            <a:solidFill>
+              <a:srgbClr val="DB2777"/>
+            </a:solidFill>
+            <a:prstDash val="solid"/>
+          </a:ln>
+        </p:spPr>
+      </p:sp>
+      <p:sp>
+        <p:nvSpPr>
+          <p:cNvPr id="50" name="Text 48"/>
+          <p:cNvSpPr/>
+          <p:nvPr/>
+        </p:nvSpPr>
+        <p:spPr>
+          <a:xfrm>
+            <a:off x="6062472" y="4169664"/>
+            <a:ext cx="685800" cy="475488"/>
+          </a:xfrm>
+          <a:prstGeom prst="rect">
+            <a:avLst/>
+          </a:prstGeom>
+          <a:noFill/>
+          <a:ln/>
+        </p:spPr>
+        <p:txBody>
+          <a:bodyPr wrap="square" lIns="0" tIns="0" rIns="0" bIns="0" rtlCol="0" anchor="ctr"/>
+          <a:lstStyle/>
+          <a:p>
+            <a:pPr algn="ctr" indent="0" marL="0">
+              <a:buNone/>
+            </a:pPr>
+            <a:r>
+              <a:rPr lang="en-US" sz="900" b="1" dirty="0">
+                <a:solidFill>
+                  <a:srgbClr val="9D174D"/>
+                </a:solidFill>
+                <a:latin typeface="Trebuchet MS" pitchFamily="34" charset="0"/>
+                <a:ea typeface="Trebuchet MS" pitchFamily="34" charset="-122"/>
+                <a:cs typeface="Trebuchet MS" pitchFamily="34" charset="-120"/>
+              </a:rPr>
+              <a:t>v</a:t>
+            </a:r>
+            <a:endParaRPr lang="en-US" sz="900" dirty="0"/>
+          </a:p>
+        </p:txBody>
+      </p:sp>
+      <p:sp>
+        <p:nvSpPr>
+          <p:cNvPr id="51" name="Shape 49"/>
+          <p:cNvSpPr/>
+          <p:nvPr/>
+        </p:nvSpPr>
+        <p:spPr>
+          <a:xfrm>
+            <a:off x="6870192" y="4169664"/>
+            <a:ext cx="685800" cy="475488"/>
+          </a:xfrm>
+          <a:prstGeom prst="rect">
+            <a:avLst>
+              <a:gd name="adj" fmla="val 7692"/>
+            </a:avLst>
+          </a:prstGeom>
+          <a:solidFill>
+            <a:srgbClr val="FFFFFF"/>
+          </a:solidFill>
+          <a:ln w="12700">
+            <a:solidFill>
+              <a:srgbClr val="DB2777"/>
+            </a:solidFill>
+            <a:prstDash val="solid"/>
+          </a:ln>
+        </p:spPr>
+      </p:sp>
+      <p:sp>
+        <p:nvSpPr>
+          <p:cNvPr id="52" name="Text 50"/>
+          <p:cNvSpPr/>
+          <p:nvPr/>
+        </p:nvSpPr>
+        <p:spPr>
+          <a:xfrm>
+            <a:off x="6870192" y="4169664"/>
+            <a:ext cx="685800" cy="475488"/>
+          </a:xfrm>
+          <a:prstGeom prst="rect">
+            <a:avLst/>
+          </a:prstGeom>
+          <a:noFill/>
+          <a:ln/>
+        </p:spPr>
+        <p:txBody>
+          <a:bodyPr wrap="square" lIns="0" tIns="0" rIns="0" bIns="0" rtlCol="0" anchor="ctr"/>
+          <a:lstStyle/>
+          <a:p>
+            <a:pPr algn="ctr" indent="0" marL="0">
+              <a:buNone/>
+            </a:pPr>
+            <a:r>
+              <a:rPr lang="en-US" sz="900" b="1" dirty="0">
+                <a:solidFill>
+                  <a:srgbClr val="9D174D"/>
+                </a:solidFill>
+                <a:latin typeface="Trebuchet MS" pitchFamily="34" charset="0"/>
+                <a:ea typeface="Trebuchet MS" pitchFamily="34" charset="-122"/>
+                <a:cs typeface="Trebuchet MS" pitchFamily="34" charset="-120"/>
+              </a:rPr>
+              <a:t>i</a:t>
+            </a:r>
+            <a:endParaRPr lang="en-US" sz="900" dirty="0"/>
+          </a:p>
+        </p:txBody>
+      </p:sp>
+      <p:sp>
+        <p:nvSpPr>
+          <p:cNvPr id="53" name="Shape 51"/>
+          <p:cNvSpPr/>
+          <p:nvPr/>
+        </p:nvSpPr>
+        <p:spPr>
+          <a:xfrm>
+            <a:off x="7677912" y="4169664"/>
+            <a:ext cx="685800" cy="475488"/>
+          </a:xfrm>
+          <a:prstGeom prst="rect">
+            <a:avLst>
+              <a:gd name="adj" fmla="val 7692"/>
+            </a:avLst>
+          </a:prstGeom>
+          <a:solidFill>
+            <a:srgbClr val="FFFFFF"/>
+          </a:solidFill>
+          <a:ln w="12700">
+            <a:solidFill>
+              <a:srgbClr val="DB2777"/>
+            </a:solidFill>
+            <a:prstDash val="solid"/>
+          </a:ln>
+        </p:spPr>
+      </p:sp>
+      <p:sp>
+        <p:nvSpPr>
+          <p:cNvPr id="54" name="Text 52"/>
+          <p:cNvSpPr/>
+          <p:nvPr/>
+        </p:nvSpPr>
+        <p:spPr>
+          <a:xfrm>
+            <a:off x="7677912" y="4169664"/>
+            <a:ext cx="685800" cy="475488"/>
+          </a:xfrm>
+          <a:prstGeom prst="rect">
+            <a:avLst/>
+          </a:prstGeom>
+          <a:noFill/>
+          <a:ln/>
+        </p:spPr>
+        <p:txBody>
+          <a:bodyPr wrap="square" lIns="0" tIns="0" rIns="0" bIns="0" rtlCol="0" anchor="ctr"/>
+          <a:lstStyle/>
+          <a:p>
+            <a:pPr algn="ctr" indent="0" marL="0">
+              <a:buNone/>
+            </a:pPr>
+            <a:r>
+              <a:rPr lang="en-US" sz="900" b="1" dirty="0">
+                <a:solidFill>
+                  <a:srgbClr val="9D174D"/>
+                </a:solidFill>
+                <a:latin typeface="Trebuchet MS" pitchFamily="34" charset="0"/>
+                <a:ea typeface="Trebuchet MS" pitchFamily="34" charset="-122"/>
+                <a:cs typeface="Trebuchet MS" pitchFamily="34" charset="-120"/>
+              </a:rPr>
+              <a:t>ng</a:t>
+            </a:r>
+            <a:endParaRPr lang="en-US" sz="900" dirty="0"/>
           </a:p>
         </p:txBody>
       </p:sp>
@@ -27592,7 +29275,7 @@
                 <a:ea typeface="Calibri" pitchFamily="34" charset="-122"/>
                 <a:cs typeface="Calibri" pitchFamily="34" charset="-120"/>
               </a:rPr>
-              <a:t>Word Labs  •  wordlabs.app  •  Prefix: 'en-' = to make, put into</a:t>
+              <a:t>Word Labs  •  wordlabs.app  •  Prefix: 'en-' = cause to; make</a:t>
             </a:r>
             <a:endParaRPr lang="en-US" sz="800" dirty="0"/>
           </a:p>
@@ -27731,7 +29414,7 @@
                 <a:ea typeface="Trebuchet MS" pitchFamily="34" charset="-122"/>
                 <a:cs typeface="Trebuchet MS" pitchFamily="34" charset="-120"/>
               </a:rPr>
-              <a:t>enrich</a:t>
+              <a:t>enclosures</a:t>
             </a:r>
             <a:endParaRPr lang="en-US" sz="2800" dirty="0"/>
           </a:p>
@@ -28419,7 +30102,7 @@
                 <a:ea typeface="Calibri" pitchFamily="34" charset="-122"/>
                 <a:cs typeface="Calibri" pitchFamily="34" charset="-120"/>
               </a:rPr>
-              <a:t>Word Labs  •  wordlabs.app  •  Prefix: 'en-' = to make, put into</a:t>
+              <a:t>Word Labs  •  wordlabs.app  •  Prefix: 'en-' = cause to; make</a:t>
             </a:r>
             <a:endParaRPr lang="en-US" sz="800" dirty="0"/>
           </a:p>
@@ -28558,7 +30241,7 @@
                 <a:ea typeface="Trebuchet MS" pitchFamily="34" charset="-122"/>
                 <a:cs typeface="Trebuchet MS" pitchFamily="34" charset="-120"/>
               </a:rPr>
-              <a:t>enrich</a:t>
+              <a:t>enclosures</a:t>
             </a:r>
             <a:endParaRPr lang="en-US" sz="2800" dirty="0"/>
           </a:p>
@@ -28638,8 +30321,8 @@
         </p:nvSpPr>
         <p:spPr>
           <a:xfrm>
-            <a:off x="2938272" y="2258568"/>
-            <a:ext cx="1828800" cy="292608"/>
+            <a:off x="1989734" y="2258568"/>
+            <a:ext cx="1581912" cy="292608"/>
           </a:xfrm>
           <a:prstGeom prst="rect">
             <a:avLst>
@@ -28672,8 +30355,8 @@
         </p:nvSpPr>
         <p:spPr>
           <a:xfrm>
-            <a:off x="2938272" y="2258568"/>
-            <a:ext cx="1828800" cy="292608"/>
+            <a:off x="1989734" y="2258568"/>
+            <a:ext cx="1581912" cy="292608"/>
           </a:xfrm>
           <a:prstGeom prst="rect">
             <a:avLst/>
@@ -28711,8 +30394,8 @@
         </p:nvSpPr>
         <p:spPr>
           <a:xfrm>
-            <a:off x="2938272" y="2569464"/>
-            <a:ext cx="1828800" cy="201168"/>
+            <a:off x="1989734" y="2569464"/>
+            <a:ext cx="1581912" cy="201168"/>
           </a:xfrm>
           <a:prstGeom prst="rect">
             <a:avLst/>
@@ -28736,7 +30419,7 @@
                 <a:ea typeface="Calibri" pitchFamily="34" charset="-122"/>
                 <a:cs typeface="Calibri" pitchFamily="34" charset="-120"/>
               </a:rPr>
-              <a:t>to make, put into</a:t>
+              <a:t>made of; to make</a:t>
             </a:r>
             <a:endParaRPr lang="en-US" sz="850" dirty="0"/>
           </a:p>
@@ -28750,8 +30433,8 @@
         </p:nvSpPr>
         <p:spPr>
           <a:xfrm>
-            <a:off x="5803392" y="2258568"/>
-            <a:ext cx="1828800" cy="292608"/>
+            <a:off x="3659429" y="2258568"/>
+            <a:ext cx="1581912" cy="292608"/>
           </a:xfrm>
           <a:prstGeom prst="rect">
             <a:avLst>
@@ -28784,8 +30467,8 @@
         </p:nvSpPr>
         <p:spPr>
           <a:xfrm>
-            <a:off x="5803392" y="2258568"/>
-            <a:ext cx="1828800" cy="292608"/>
+            <a:off x="3659429" y="2258568"/>
+            <a:ext cx="1581912" cy="292608"/>
           </a:xfrm>
           <a:prstGeom prst="rect">
             <a:avLst/>
@@ -28809,7 +30492,7 @@
                 <a:ea typeface="Trebuchet MS" pitchFamily="34" charset="-122"/>
                 <a:cs typeface="Trebuchet MS" pitchFamily="34" charset="-120"/>
               </a:rPr>
-              <a:t>rich</a:t>
+              <a:t>clos</a:t>
             </a:r>
             <a:endParaRPr lang="en-US" sz="1300" dirty="0"/>
           </a:p>
@@ -28823,8 +30506,8 @@
         </p:nvSpPr>
         <p:spPr>
           <a:xfrm>
-            <a:off x="5803392" y="2569464"/>
-            <a:ext cx="1828800" cy="201168"/>
+            <a:off x="3659429" y="2569464"/>
+            <a:ext cx="1581912" cy="201168"/>
           </a:xfrm>
           <a:prstGeom prst="rect">
             <a:avLst/>
@@ -28848,7 +30531,7 @@
                 <a:ea typeface="Calibri" pitchFamily="34" charset="-122"/>
                 <a:cs typeface="Calibri" pitchFamily="34" charset="-120"/>
               </a:rPr>
-              <a:t>having great value or quality</a:t>
+              <a:t>close</a:t>
             </a:r>
             <a:endParaRPr lang="en-US" sz="850" dirty="0"/>
           </a:p>
@@ -28857,6 +30540,230 @@
       <p:sp>
         <p:nvSpPr>
           <p:cNvPr id="22" name="Shape 20"/>
+          <p:cNvSpPr/>
+          <p:nvPr/>
+        </p:nvSpPr>
+        <p:spPr>
+          <a:xfrm>
+            <a:off x="5329123" y="2258568"/>
+            <a:ext cx="1581912" cy="292608"/>
+          </a:xfrm>
+          <a:prstGeom prst="rect">
+            <a:avLst>
+              <a:gd name="adj" fmla="val 25000"/>
+            </a:avLst>
+          </a:prstGeom>
+          <a:solidFill>
+            <a:srgbClr val="FCE7F3"/>
+          </a:solidFill>
+          <a:ln w="19050">
+            <a:solidFill>
+              <a:srgbClr val="DB2777"/>
+            </a:solidFill>
+            <a:prstDash val="solid"/>
+          </a:ln>
+          <a:effectLst>
+            <a:outerShdw sx="100000" sy="100000" kx="0" ky="0" algn="bl" rotWithShape="0" blurRad="101600" dist="38100" dir="8100000">
+              <a:srgbClr val="000000">
+                <a:alpha val="12000"/>
+              </a:srgbClr>
+            </a:outerShdw>
+          </a:effectLst>
+        </p:spPr>
+      </p:sp>
+      <p:sp>
+        <p:nvSpPr>
+          <p:cNvPr id="23" name="Text 21"/>
+          <p:cNvSpPr/>
+          <p:nvPr/>
+        </p:nvSpPr>
+        <p:spPr>
+          <a:xfrm>
+            <a:off x="5329123" y="2258568"/>
+            <a:ext cx="1581912" cy="292608"/>
+          </a:xfrm>
+          <a:prstGeom prst="rect">
+            <a:avLst/>
+          </a:prstGeom>
+          <a:noFill/>
+          <a:ln/>
+        </p:spPr>
+        <p:txBody>
+          <a:bodyPr wrap="square" lIns="0" tIns="0" rIns="0" bIns="0" rtlCol="0" anchor="ctr"/>
+          <a:lstStyle/>
+          <a:p>
+            <a:pPr algn="ctr" indent="0" marL="0">
+              <a:buNone/>
+            </a:pPr>
+            <a:r>
+              <a:rPr lang="en-US" sz="1300" b="1" dirty="0">
+                <a:solidFill>
+                  <a:srgbClr val="9D174D"/>
+                </a:solidFill>
+                <a:latin typeface="Trebuchet MS" pitchFamily="34" charset="0"/>
+                <a:ea typeface="Trebuchet MS" pitchFamily="34" charset="-122"/>
+                <a:cs typeface="Trebuchet MS" pitchFamily="34" charset="-120"/>
+              </a:rPr>
+              <a:t>ure</a:t>
+            </a:r>
+            <a:endParaRPr lang="en-US" sz="1300" dirty="0"/>
+          </a:p>
+        </p:txBody>
+      </p:sp>
+      <p:sp>
+        <p:nvSpPr>
+          <p:cNvPr id="24" name="Text 22"/>
+          <p:cNvSpPr/>
+          <p:nvPr/>
+        </p:nvSpPr>
+        <p:spPr>
+          <a:xfrm>
+            <a:off x="5329123" y="2569464"/>
+            <a:ext cx="1581912" cy="201168"/>
+          </a:xfrm>
+          <a:prstGeom prst="rect">
+            <a:avLst/>
+          </a:prstGeom>
+          <a:noFill/>
+          <a:ln/>
+        </p:spPr>
+        <p:txBody>
+          <a:bodyPr wrap="square" lIns="0" tIns="0" rIns="0" bIns="0" rtlCol="0" anchor="t"/>
+          <a:lstStyle/>
+          <a:p>
+            <a:pPr algn="ctr" indent="0" marL="0">
+              <a:buNone/>
+            </a:pPr>
+            <a:r>
+              <a:rPr lang="en-US" sz="850" dirty="0">
+                <a:solidFill>
+                  <a:srgbClr val="475569"/>
+                </a:solidFill>
+                <a:latin typeface="Calibri" pitchFamily="34" charset="0"/>
+                <a:ea typeface="Calibri" pitchFamily="34" charset="-122"/>
+                <a:cs typeface="Calibri" pitchFamily="34" charset="-120"/>
+              </a:rPr>
+              <a:t>result of</a:t>
+            </a:r>
+            <a:endParaRPr lang="en-US" sz="850" dirty="0"/>
+          </a:p>
+        </p:txBody>
+      </p:sp>
+      <p:sp>
+        <p:nvSpPr>
+          <p:cNvPr id="25" name="Shape 23"/>
+          <p:cNvSpPr/>
+          <p:nvPr/>
+        </p:nvSpPr>
+        <p:spPr>
+          <a:xfrm>
+            <a:off x="6998818" y="2258568"/>
+            <a:ext cx="1581912" cy="292608"/>
+          </a:xfrm>
+          <a:prstGeom prst="rect">
+            <a:avLst>
+              <a:gd name="adj" fmla="val 25000"/>
+            </a:avLst>
+          </a:prstGeom>
+          <a:solidFill>
+            <a:srgbClr val="FCE7F3"/>
+          </a:solidFill>
+          <a:ln w="19050">
+            <a:solidFill>
+              <a:srgbClr val="DB2777"/>
+            </a:solidFill>
+            <a:prstDash val="solid"/>
+          </a:ln>
+          <a:effectLst>
+            <a:outerShdw sx="100000" sy="100000" kx="0" ky="0" algn="bl" rotWithShape="0" blurRad="101600" dist="38100" dir="8100000">
+              <a:srgbClr val="000000">
+                <a:alpha val="12000"/>
+              </a:srgbClr>
+            </a:outerShdw>
+          </a:effectLst>
+        </p:spPr>
+      </p:sp>
+      <p:sp>
+        <p:nvSpPr>
+          <p:cNvPr id="26" name="Text 24"/>
+          <p:cNvSpPr/>
+          <p:nvPr/>
+        </p:nvSpPr>
+        <p:spPr>
+          <a:xfrm>
+            <a:off x="6998818" y="2258568"/>
+            <a:ext cx="1581912" cy="292608"/>
+          </a:xfrm>
+          <a:prstGeom prst="rect">
+            <a:avLst/>
+          </a:prstGeom>
+          <a:noFill/>
+          <a:ln/>
+        </p:spPr>
+        <p:txBody>
+          <a:bodyPr wrap="square" lIns="0" tIns="0" rIns="0" bIns="0" rtlCol="0" anchor="ctr"/>
+          <a:lstStyle/>
+          <a:p>
+            <a:pPr algn="ctr" indent="0" marL="0">
+              <a:buNone/>
+            </a:pPr>
+            <a:r>
+              <a:rPr lang="en-US" sz="1300" b="1" dirty="0">
+                <a:solidFill>
+                  <a:srgbClr val="9D174D"/>
+                </a:solidFill>
+                <a:latin typeface="Trebuchet MS" pitchFamily="34" charset="0"/>
+                <a:ea typeface="Trebuchet MS" pitchFamily="34" charset="-122"/>
+                <a:cs typeface="Trebuchet MS" pitchFamily="34" charset="-120"/>
+              </a:rPr>
+              <a:t>s</a:t>
+            </a:r>
+            <a:endParaRPr lang="en-US" sz="1300" dirty="0"/>
+          </a:p>
+        </p:txBody>
+      </p:sp>
+      <p:sp>
+        <p:nvSpPr>
+          <p:cNvPr id="27" name="Text 25"/>
+          <p:cNvSpPr/>
+          <p:nvPr/>
+        </p:nvSpPr>
+        <p:spPr>
+          <a:xfrm>
+            <a:off x="6998818" y="2569464"/>
+            <a:ext cx="1581912" cy="201168"/>
+          </a:xfrm>
+          <a:prstGeom prst="rect">
+            <a:avLst/>
+          </a:prstGeom>
+          <a:noFill/>
+          <a:ln/>
+        </p:spPr>
+        <p:txBody>
+          <a:bodyPr wrap="square" lIns="0" tIns="0" rIns="0" bIns="0" rtlCol="0" anchor="t"/>
+          <a:lstStyle/>
+          <a:p>
+            <a:pPr algn="ctr" indent="0" marL="0">
+              <a:buNone/>
+            </a:pPr>
+            <a:r>
+              <a:rPr lang="en-US" sz="850" dirty="0">
+                <a:solidFill>
+                  <a:srgbClr val="475569"/>
+                </a:solidFill>
+                <a:latin typeface="Calibri" pitchFamily="34" charset="0"/>
+                <a:ea typeface="Calibri" pitchFamily="34" charset="-122"/>
+                <a:cs typeface="Calibri" pitchFamily="34" charset="-120"/>
+              </a:rPr>
+              <a:t>plural or present tense</a:t>
+            </a:r>
+            <a:endParaRPr lang="en-US" sz="850" dirty="0"/>
+          </a:p>
+        </p:txBody>
+      </p:sp>
+      <p:sp>
+        <p:nvSpPr>
+          <p:cNvPr id="28" name="Shape 26"/>
           <p:cNvSpPr/>
           <p:nvPr/>
         </p:nvSpPr>
@@ -28883,7 +30790,7 @@
       </p:sp>
       <p:sp>
         <p:nvSpPr>
-          <p:cNvPr id="23" name="Text 21"/>
+          <p:cNvPr id="29" name="Text 27"/>
           <p:cNvSpPr/>
           <p:nvPr/>
         </p:nvSpPr>
@@ -28922,7 +30829,7 @@
       </p:sp>
       <p:sp>
         <p:nvSpPr>
-          <p:cNvPr id="24" name="Shape 22"/>
+          <p:cNvPr id="30" name="Shape 28"/>
           <p:cNvSpPr/>
           <p:nvPr/>
         </p:nvSpPr>
@@ -28949,7 +30856,7 @@
       </p:sp>
       <p:sp>
         <p:nvSpPr>
-          <p:cNvPr id="25" name="Text 23"/>
+          <p:cNvPr id="31" name="Text 29"/>
           <p:cNvSpPr/>
           <p:nvPr/>
         </p:nvSpPr>
@@ -28988,7 +30895,7 @@
       </p:sp>
       <p:sp>
         <p:nvSpPr>
-          <p:cNvPr id="26" name="Shape 24"/>
+          <p:cNvPr id="32" name="Shape 30"/>
           <p:cNvSpPr/>
           <p:nvPr/>
         </p:nvSpPr>
@@ -29015,7 +30922,7 @@
       </p:sp>
       <p:sp>
         <p:nvSpPr>
-          <p:cNvPr id="27" name="Text 25"/>
+          <p:cNvPr id="33" name="Text 31"/>
           <p:cNvSpPr/>
           <p:nvPr/>
         </p:nvSpPr>
@@ -29054,7 +30961,7 @@
       </p:sp>
       <p:sp>
         <p:nvSpPr>
-          <p:cNvPr id="28" name="Shape 26"/>
+          <p:cNvPr id="34" name="Shape 32"/>
           <p:cNvSpPr/>
           <p:nvPr/>
         </p:nvSpPr>
@@ -29081,7 +30988,7 @@
       </p:sp>
       <p:sp>
         <p:nvSpPr>
-          <p:cNvPr id="29" name="Text 27"/>
+          <p:cNvPr id="35" name="Text 33"/>
           <p:cNvSpPr/>
           <p:nvPr/>
         </p:nvSpPr>
@@ -29404,7 +31311,7 @@
                 <a:ea typeface="Calibri" pitchFamily="34" charset="-122"/>
                 <a:cs typeface="Calibri" pitchFamily="34" charset="-120"/>
               </a:rPr>
-              <a:t>Word Labs  •  wordlabs.app  •  Prefix: 'en-' = to make, put into</a:t>
+              <a:t>Word Labs  •  wordlabs.app  •  Prefix: 'en-' = cause to; make</a:t>
             </a:r>
             <a:endParaRPr lang="en-US" sz="800" dirty="0"/>
           </a:p>
@@ -29543,7 +31450,7 @@
                 <a:ea typeface="Trebuchet MS" pitchFamily="34" charset="-122"/>
                 <a:cs typeface="Trebuchet MS" pitchFamily="34" charset="-120"/>
               </a:rPr>
-              <a:t>enrich</a:t>
+              <a:t>enclosures</a:t>
             </a:r>
             <a:endParaRPr lang="en-US" sz="2800" dirty="0"/>
           </a:p>
@@ -29623,8 +31530,8 @@
         </p:nvSpPr>
         <p:spPr>
           <a:xfrm>
-            <a:off x="2938272" y="2258568"/>
-            <a:ext cx="1828800" cy="292608"/>
+            <a:off x="1989734" y="2258568"/>
+            <a:ext cx="1581912" cy="292608"/>
           </a:xfrm>
           <a:prstGeom prst="rect">
             <a:avLst>
@@ -29657,8 +31564,8 @@
         </p:nvSpPr>
         <p:spPr>
           <a:xfrm>
-            <a:off x="2938272" y="2258568"/>
-            <a:ext cx="1828800" cy="292608"/>
+            <a:off x="1989734" y="2258568"/>
+            <a:ext cx="1581912" cy="292608"/>
           </a:xfrm>
           <a:prstGeom prst="rect">
             <a:avLst/>
@@ -29696,8 +31603,8 @@
         </p:nvSpPr>
         <p:spPr>
           <a:xfrm>
-            <a:off x="2938272" y="2569464"/>
-            <a:ext cx="1828800" cy="201168"/>
+            <a:off x="1989734" y="2569464"/>
+            <a:ext cx="1581912" cy="201168"/>
           </a:xfrm>
           <a:prstGeom prst="rect">
             <a:avLst/>
@@ -29721,7 +31628,7 @@
                 <a:ea typeface="Calibri" pitchFamily="34" charset="-122"/>
                 <a:cs typeface="Calibri" pitchFamily="34" charset="-120"/>
               </a:rPr>
-              <a:t>to make, put into</a:t>
+              <a:t>made of; to make</a:t>
             </a:r>
             <a:endParaRPr lang="en-US" sz="850" dirty="0"/>
           </a:p>
@@ -29735,8 +31642,8 @@
         </p:nvSpPr>
         <p:spPr>
           <a:xfrm>
-            <a:off x="5803392" y="2258568"/>
-            <a:ext cx="1828800" cy="292608"/>
+            <a:off x="3659429" y="2258568"/>
+            <a:ext cx="1581912" cy="292608"/>
           </a:xfrm>
           <a:prstGeom prst="rect">
             <a:avLst>
@@ -29769,8 +31676,8 @@
         </p:nvSpPr>
         <p:spPr>
           <a:xfrm>
-            <a:off x="5803392" y="2258568"/>
-            <a:ext cx="1828800" cy="292608"/>
+            <a:off x="3659429" y="2258568"/>
+            <a:ext cx="1581912" cy="292608"/>
           </a:xfrm>
           <a:prstGeom prst="rect">
             <a:avLst/>
@@ -29794,7 +31701,7 @@
                 <a:ea typeface="Trebuchet MS" pitchFamily="34" charset="-122"/>
                 <a:cs typeface="Trebuchet MS" pitchFamily="34" charset="-120"/>
               </a:rPr>
-              <a:t>rich</a:t>
+              <a:t>clos</a:t>
             </a:r>
             <a:endParaRPr lang="en-US" sz="1300" dirty="0"/>
           </a:p>
@@ -29808,8 +31715,8 @@
         </p:nvSpPr>
         <p:spPr>
           <a:xfrm>
-            <a:off x="5803392" y="2569464"/>
-            <a:ext cx="1828800" cy="201168"/>
+            <a:off x="3659429" y="2569464"/>
+            <a:ext cx="1581912" cy="201168"/>
           </a:xfrm>
           <a:prstGeom prst="rect">
             <a:avLst/>
@@ -29833,7 +31740,7 @@
                 <a:ea typeface="Calibri" pitchFamily="34" charset="-122"/>
                 <a:cs typeface="Calibri" pitchFamily="34" charset="-120"/>
               </a:rPr>
-              <a:t>having great value or quality</a:t>
+              <a:t>close</a:t>
             </a:r>
             <a:endParaRPr lang="en-US" sz="850" dirty="0"/>
           </a:p>
@@ -29842,6 +31749,230 @@
       <p:sp>
         <p:nvSpPr>
           <p:cNvPr id="22" name="Shape 20"/>
+          <p:cNvSpPr/>
+          <p:nvPr/>
+        </p:nvSpPr>
+        <p:spPr>
+          <a:xfrm>
+            <a:off x="5329123" y="2258568"/>
+            <a:ext cx="1581912" cy="292608"/>
+          </a:xfrm>
+          <a:prstGeom prst="rect">
+            <a:avLst>
+              <a:gd name="adj" fmla="val 25000"/>
+            </a:avLst>
+          </a:prstGeom>
+          <a:solidFill>
+            <a:srgbClr val="FCE7F3"/>
+          </a:solidFill>
+          <a:ln w="19050">
+            <a:solidFill>
+              <a:srgbClr val="DB2777"/>
+            </a:solidFill>
+            <a:prstDash val="solid"/>
+          </a:ln>
+          <a:effectLst>
+            <a:outerShdw sx="100000" sy="100000" kx="0" ky="0" algn="bl" rotWithShape="0" blurRad="101600" dist="38100" dir="8100000">
+              <a:srgbClr val="000000">
+                <a:alpha val="12000"/>
+              </a:srgbClr>
+            </a:outerShdw>
+          </a:effectLst>
+        </p:spPr>
+      </p:sp>
+      <p:sp>
+        <p:nvSpPr>
+          <p:cNvPr id="23" name="Text 21"/>
+          <p:cNvSpPr/>
+          <p:nvPr/>
+        </p:nvSpPr>
+        <p:spPr>
+          <a:xfrm>
+            <a:off x="5329123" y="2258568"/>
+            <a:ext cx="1581912" cy="292608"/>
+          </a:xfrm>
+          <a:prstGeom prst="rect">
+            <a:avLst/>
+          </a:prstGeom>
+          <a:noFill/>
+          <a:ln/>
+        </p:spPr>
+        <p:txBody>
+          <a:bodyPr wrap="square" lIns="0" tIns="0" rIns="0" bIns="0" rtlCol="0" anchor="ctr"/>
+          <a:lstStyle/>
+          <a:p>
+            <a:pPr algn="ctr" indent="0" marL="0">
+              <a:buNone/>
+            </a:pPr>
+            <a:r>
+              <a:rPr lang="en-US" sz="1300" b="1" dirty="0">
+                <a:solidFill>
+                  <a:srgbClr val="9D174D"/>
+                </a:solidFill>
+                <a:latin typeface="Trebuchet MS" pitchFamily="34" charset="0"/>
+                <a:ea typeface="Trebuchet MS" pitchFamily="34" charset="-122"/>
+                <a:cs typeface="Trebuchet MS" pitchFamily="34" charset="-120"/>
+              </a:rPr>
+              <a:t>ure</a:t>
+            </a:r>
+            <a:endParaRPr lang="en-US" sz="1300" dirty="0"/>
+          </a:p>
+        </p:txBody>
+      </p:sp>
+      <p:sp>
+        <p:nvSpPr>
+          <p:cNvPr id="24" name="Text 22"/>
+          <p:cNvSpPr/>
+          <p:nvPr/>
+        </p:nvSpPr>
+        <p:spPr>
+          <a:xfrm>
+            <a:off x="5329123" y="2569464"/>
+            <a:ext cx="1581912" cy="201168"/>
+          </a:xfrm>
+          <a:prstGeom prst="rect">
+            <a:avLst/>
+          </a:prstGeom>
+          <a:noFill/>
+          <a:ln/>
+        </p:spPr>
+        <p:txBody>
+          <a:bodyPr wrap="square" lIns="0" tIns="0" rIns="0" bIns="0" rtlCol="0" anchor="t"/>
+          <a:lstStyle/>
+          <a:p>
+            <a:pPr algn="ctr" indent="0" marL="0">
+              <a:buNone/>
+            </a:pPr>
+            <a:r>
+              <a:rPr lang="en-US" sz="850" dirty="0">
+                <a:solidFill>
+                  <a:srgbClr val="475569"/>
+                </a:solidFill>
+                <a:latin typeface="Calibri" pitchFamily="34" charset="0"/>
+                <a:ea typeface="Calibri" pitchFamily="34" charset="-122"/>
+                <a:cs typeface="Calibri" pitchFamily="34" charset="-120"/>
+              </a:rPr>
+              <a:t>result of</a:t>
+            </a:r>
+            <a:endParaRPr lang="en-US" sz="850" dirty="0"/>
+          </a:p>
+        </p:txBody>
+      </p:sp>
+      <p:sp>
+        <p:nvSpPr>
+          <p:cNvPr id="25" name="Shape 23"/>
+          <p:cNvSpPr/>
+          <p:nvPr/>
+        </p:nvSpPr>
+        <p:spPr>
+          <a:xfrm>
+            <a:off x="6998818" y="2258568"/>
+            <a:ext cx="1581912" cy="292608"/>
+          </a:xfrm>
+          <a:prstGeom prst="rect">
+            <a:avLst>
+              <a:gd name="adj" fmla="val 25000"/>
+            </a:avLst>
+          </a:prstGeom>
+          <a:solidFill>
+            <a:srgbClr val="FCE7F3"/>
+          </a:solidFill>
+          <a:ln w="19050">
+            <a:solidFill>
+              <a:srgbClr val="DB2777"/>
+            </a:solidFill>
+            <a:prstDash val="solid"/>
+          </a:ln>
+          <a:effectLst>
+            <a:outerShdw sx="100000" sy="100000" kx="0" ky="0" algn="bl" rotWithShape="0" blurRad="101600" dist="38100" dir="8100000">
+              <a:srgbClr val="000000">
+                <a:alpha val="12000"/>
+              </a:srgbClr>
+            </a:outerShdw>
+          </a:effectLst>
+        </p:spPr>
+      </p:sp>
+      <p:sp>
+        <p:nvSpPr>
+          <p:cNvPr id="26" name="Text 24"/>
+          <p:cNvSpPr/>
+          <p:nvPr/>
+        </p:nvSpPr>
+        <p:spPr>
+          <a:xfrm>
+            <a:off x="6998818" y="2258568"/>
+            <a:ext cx="1581912" cy="292608"/>
+          </a:xfrm>
+          <a:prstGeom prst="rect">
+            <a:avLst/>
+          </a:prstGeom>
+          <a:noFill/>
+          <a:ln/>
+        </p:spPr>
+        <p:txBody>
+          <a:bodyPr wrap="square" lIns="0" tIns="0" rIns="0" bIns="0" rtlCol="0" anchor="ctr"/>
+          <a:lstStyle/>
+          <a:p>
+            <a:pPr algn="ctr" indent="0" marL="0">
+              <a:buNone/>
+            </a:pPr>
+            <a:r>
+              <a:rPr lang="en-US" sz="1300" b="1" dirty="0">
+                <a:solidFill>
+                  <a:srgbClr val="9D174D"/>
+                </a:solidFill>
+                <a:latin typeface="Trebuchet MS" pitchFamily="34" charset="0"/>
+                <a:ea typeface="Trebuchet MS" pitchFamily="34" charset="-122"/>
+                <a:cs typeface="Trebuchet MS" pitchFamily="34" charset="-120"/>
+              </a:rPr>
+              <a:t>s</a:t>
+            </a:r>
+            <a:endParaRPr lang="en-US" sz="1300" dirty="0"/>
+          </a:p>
+        </p:txBody>
+      </p:sp>
+      <p:sp>
+        <p:nvSpPr>
+          <p:cNvPr id="27" name="Text 25"/>
+          <p:cNvSpPr/>
+          <p:nvPr/>
+        </p:nvSpPr>
+        <p:spPr>
+          <a:xfrm>
+            <a:off x="6998818" y="2569464"/>
+            <a:ext cx="1581912" cy="201168"/>
+          </a:xfrm>
+          <a:prstGeom prst="rect">
+            <a:avLst/>
+          </a:prstGeom>
+          <a:noFill/>
+          <a:ln/>
+        </p:spPr>
+        <p:txBody>
+          <a:bodyPr wrap="square" lIns="0" tIns="0" rIns="0" bIns="0" rtlCol="0" anchor="t"/>
+          <a:lstStyle/>
+          <a:p>
+            <a:pPr algn="ctr" indent="0" marL="0">
+              <a:buNone/>
+            </a:pPr>
+            <a:r>
+              <a:rPr lang="en-US" sz="850" dirty="0">
+                <a:solidFill>
+                  <a:srgbClr val="475569"/>
+                </a:solidFill>
+                <a:latin typeface="Calibri" pitchFamily="34" charset="0"/>
+                <a:ea typeface="Calibri" pitchFamily="34" charset="-122"/>
+                <a:cs typeface="Calibri" pitchFamily="34" charset="-120"/>
+              </a:rPr>
+              <a:t>plural or present tense</a:t>
+            </a:r>
+            <a:endParaRPr lang="en-US" sz="850" dirty="0"/>
+          </a:p>
+        </p:txBody>
+      </p:sp>
+      <p:sp>
+        <p:nvSpPr>
+          <p:cNvPr id="28" name="Shape 26"/>
           <p:cNvSpPr/>
           <p:nvPr/>
         </p:nvSpPr>
@@ -29868,7 +31999,7 @@
       </p:sp>
       <p:sp>
         <p:nvSpPr>
-          <p:cNvPr id="23" name="Text 21"/>
+          <p:cNvPr id="29" name="Text 27"/>
           <p:cNvSpPr/>
           <p:nvPr/>
         </p:nvSpPr>
@@ -29907,7 +32038,7 @@
       </p:sp>
       <p:sp>
         <p:nvSpPr>
-          <p:cNvPr id="24" name="Shape 22"/>
+          <p:cNvPr id="30" name="Shape 28"/>
           <p:cNvSpPr/>
           <p:nvPr/>
         </p:nvSpPr>
@@ -29934,13 +32065,13 @@
       </p:sp>
       <p:sp>
         <p:nvSpPr>
-          <p:cNvPr id="25" name="Shape 23"/>
-          <p:cNvSpPr/>
-          <p:nvPr/>
-        </p:nvSpPr>
-        <p:spPr>
-          <a:xfrm>
-            <a:off x="2999232" y="3364992"/>
+          <p:cNvPr id="31" name="Shape 29"/>
+          <p:cNvSpPr/>
+          <p:nvPr/>
+        </p:nvSpPr>
+        <p:spPr>
+          <a:xfrm>
+            <a:off x="2313432" y="3364992"/>
             <a:ext cx="1645920" cy="475488"/>
           </a:xfrm>
           <a:prstGeom prst="rect">
@@ -29961,13 +32092,13 @@
       </p:sp>
       <p:sp>
         <p:nvSpPr>
-          <p:cNvPr id="26" name="Text 24"/>
-          <p:cNvSpPr/>
-          <p:nvPr/>
-        </p:nvSpPr>
-        <p:spPr>
-          <a:xfrm>
-            <a:off x="2999232" y="3364992"/>
+          <p:cNvPr id="32" name="Text 30"/>
+          <p:cNvSpPr/>
+          <p:nvPr/>
+        </p:nvSpPr>
+        <p:spPr>
+          <a:xfrm>
+            <a:off x="2313432" y="3364992"/>
             <a:ext cx="1645920" cy="475488"/>
           </a:xfrm>
           <a:prstGeom prst="rect">
@@ -30000,14 +32131,14 @@
       </p:sp>
       <p:sp>
         <p:nvSpPr>
-          <p:cNvPr id="27" name="Text 25"/>
-          <p:cNvSpPr/>
-          <p:nvPr/>
-        </p:nvSpPr>
-        <p:spPr>
-          <a:xfrm>
-            <a:off x="4645152" y="3364992"/>
-            <a:ext cx="1097280" cy="475488"/>
+          <p:cNvPr id="33" name="Text 31"/>
+          <p:cNvSpPr/>
+          <p:nvPr/>
+        </p:nvSpPr>
+        <p:spPr>
+          <a:xfrm>
+            <a:off x="3959352" y="3364992"/>
+            <a:ext cx="411480" cy="475488"/>
           </a:xfrm>
           <a:prstGeom prst="rect">
             <a:avLst/>
@@ -30039,13 +32170,13 @@
       </p:sp>
       <p:sp>
         <p:nvSpPr>
-          <p:cNvPr id="28" name="Shape 26"/>
-          <p:cNvSpPr/>
-          <p:nvPr/>
-        </p:nvSpPr>
-        <p:spPr>
-          <a:xfrm>
-            <a:off x="5742432" y="3364992"/>
+          <p:cNvPr id="34" name="Shape 32"/>
+          <p:cNvSpPr/>
+          <p:nvPr/>
+        </p:nvSpPr>
+        <p:spPr>
+          <a:xfrm>
+            <a:off x="4370832" y="3364992"/>
             <a:ext cx="1645920" cy="475488"/>
           </a:xfrm>
           <a:prstGeom prst="rect">
@@ -30066,13 +32197,13 @@
       </p:sp>
       <p:sp>
         <p:nvSpPr>
-          <p:cNvPr id="29" name="Text 27"/>
-          <p:cNvSpPr/>
-          <p:nvPr/>
-        </p:nvSpPr>
-        <p:spPr>
-          <a:xfrm>
-            <a:off x="5742432" y="3364992"/>
+          <p:cNvPr id="35" name="Text 33"/>
+          <p:cNvSpPr/>
+          <p:nvPr/>
+        </p:nvSpPr>
+        <p:spPr>
+          <a:xfrm>
+            <a:off x="4370832" y="3364992"/>
             <a:ext cx="1645920" cy="475488"/>
           </a:xfrm>
           <a:prstGeom prst="rect">
@@ -30097,7 +32228,7 @@
                 <a:ea typeface="Trebuchet MS" pitchFamily="34" charset="-122"/>
                 <a:cs typeface="Trebuchet MS" pitchFamily="34" charset="-120"/>
               </a:rPr>
-              <a:t>rich</a:t>
+              <a:t>clo</a:t>
             </a:r>
             <a:endParaRPr lang="en-US" sz="1400" dirty="0"/>
           </a:p>
@@ -30105,7 +32236,112 @@
       </p:sp>
       <p:sp>
         <p:nvSpPr>
-          <p:cNvPr id="30" name="Shape 28"/>
+          <p:cNvPr id="36" name="Text 34"/>
+          <p:cNvSpPr/>
+          <p:nvPr/>
+        </p:nvSpPr>
+        <p:spPr>
+          <a:xfrm>
+            <a:off x="6016752" y="3364992"/>
+            <a:ext cx="411480" cy="475488"/>
+          </a:xfrm>
+          <a:prstGeom prst="rect">
+            <a:avLst/>
+          </a:prstGeom>
+          <a:noFill/>
+          <a:ln/>
+        </p:spPr>
+        <p:txBody>
+          <a:bodyPr wrap="square" lIns="0" tIns="0" rIns="0" bIns="0" rtlCol="0" anchor="ctr"/>
+          <a:lstStyle/>
+          <a:p>
+            <a:pPr algn="ctr" indent="0" marL="0">
+              <a:buNone/>
+            </a:pPr>
+            <a:r>
+              <a:rPr lang="en-US" sz="1600" b="1" dirty="0">
+                <a:solidFill>
+                  <a:srgbClr val="0D9488"/>
+                </a:solidFill>
+                <a:latin typeface="Trebuchet MS" pitchFamily="34" charset="0"/>
+                <a:ea typeface="Trebuchet MS" pitchFamily="34" charset="-122"/>
+                <a:cs typeface="Trebuchet MS" pitchFamily="34" charset="-120"/>
+              </a:rPr>
+              <a:t>·</a:t>
+            </a:r>
+            <a:endParaRPr lang="en-US" sz="1600" dirty="0"/>
+          </a:p>
+        </p:txBody>
+      </p:sp>
+      <p:sp>
+        <p:nvSpPr>
+          <p:cNvPr id="37" name="Shape 35"/>
+          <p:cNvSpPr/>
+          <p:nvPr/>
+        </p:nvSpPr>
+        <p:spPr>
+          <a:xfrm>
+            <a:off x="6428232" y="3364992"/>
+            <a:ext cx="1645920" cy="475488"/>
+          </a:xfrm>
+          <a:prstGeom prst="rect">
+            <a:avLst>
+              <a:gd name="adj" fmla="val 9615"/>
+            </a:avLst>
+          </a:prstGeom>
+          <a:solidFill>
+            <a:srgbClr val="FFFFFF"/>
+          </a:solidFill>
+          <a:ln w="12700">
+            <a:solidFill>
+              <a:srgbClr val="0D9488"/>
+            </a:solidFill>
+            <a:prstDash val="solid"/>
+          </a:ln>
+        </p:spPr>
+      </p:sp>
+      <p:sp>
+        <p:nvSpPr>
+          <p:cNvPr id="38" name="Text 36"/>
+          <p:cNvSpPr/>
+          <p:nvPr/>
+        </p:nvSpPr>
+        <p:spPr>
+          <a:xfrm>
+            <a:off x="6428232" y="3364992"/>
+            <a:ext cx="1645920" cy="475488"/>
+          </a:xfrm>
+          <a:prstGeom prst="rect">
+            <a:avLst/>
+          </a:prstGeom>
+          <a:noFill/>
+          <a:ln/>
+        </p:spPr>
+        <p:txBody>
+          <a:bodyPr wrap="square" lIns="0" tIns="0" rIns="0" bIns="0" rtlCol="0" anchor="ctr"/>
+          <a:lstStyle/>
+          <a:p>
+            <a:pPr algn="ctr" indent="0" marL="0">
+              <a:buNone/>
+            </a:pPr>
+            <a:r>
+              <a:rPr lang="en-US" sz="1400" b="1" dirty="0">
+                <a:solidFill>
+                  <a:srgbClr val="0D9488"/>
+                </a:solidFill>
+                <a:latin typeface="Trebuchet MS" pitchFamily="34" charset="0"/>
+                <a:ea typeface="Trebuchet MS" pitchFamily="34" charset="-122"/>
+                <a:cs typeface="Trebuchet MS" pitchFamily="34" charset="-120"/>
+              </a:rPr>
+              <a:t>sures</a:t>
+            </a:r>
+            <a:endParaRPr lang="en-US" sz="1400" dirty="0"/>
+          </a:p>
+        </p:txBody>
+      </p:sp>
+      <p:sp>
+        <p:nvSpPr>
+          <p:cNvPr id="39" name="Shape 37"/>
           <p:cNvSpPr/>
           <p:nvPr/>
         </p:nvSpPr>
@@ -30132,7 +32368,7 @@
       </p:sp>
       <p:sp>
         <p:nvSpPr>
-          <p:cNvPr id="31" name="Text 29"/>
+          <p:cNvPr id="40" name="Text 38"/>
           <p:cNvSpPr/>
           <p:nvPr/>
         </p:nvSpPr>
@@ -30171,7 +32407,7 @@
       </p:sp>
       <p:sp>
         <p:nvSpPr>
-          <p:cNvPr id="32" name="Shape 30"/>
+          <p:cNvPr id="41" name="Shape 39"/>
           <p:cNvSpPr/>
           <p:nvPr/>
         </p:nvSpPr>
@@ -30198,7 +32434,7 @@
       </p:sp>
       <p:sp>
         <p:nvSpPr>
-          <p:cNvPr id="33" name="Text 31"/>
+          <p:cNvPr id="42" name="Text 40"/>
           <p:cNvSpPr/>
           <p:nvPr/>
         </p:nvSpPr>
@@ -30521,7 +32757,7 @@
                 <a:ea typeface="Calibri" pitchFamily="34" charset="-122"/>
                 <a:cs typeface="Calibri" pitchFamily="34" charset="-120"/>
               </a:rPr>
-              <a:t>Word Labs  •  wordlabs.app  •  Prefix: 'en-' = to make, put into</a:t>
+              <a:t>Word Labs  •  wordlabs.app  •  Prefix: 'en-' = cause to; make</a:t>
             </a:r>
             <a:endParaRPr lang="en-US" sz="800" dirty="0"/>
           </a:p>
@@ -30660,7 +32896,7 @@
                 <a:ea typeface="Trebuchet MS" pitchFamily="34" charset="-122"/>
                 <a:cs typeface="Trebuchet MS" pitchFamily="34" charset="-120"/>
               </a:rPr>
-              <a:t>enrich</a:t>
+              <a:t>enclosures</a:t>
             </a:r>
             <a:endParaRPr lang="en-US" sz="2800" dirty="0"/>
           </a:p>
@@ -30740,8 +32976,8 @@
         </p:nvSpPr>
         <p:spPr>
           <a:xfrm>
-            <a:off x="2938272" y="2258568"/>
-            <a:ext cx="1828800" cy="292608"/>
+            <a:off x="1989734" y="2258568"/>
+            <a:ext cx="1581912" cy="292608"/>
           </a:xfrm>
           <a:prstGeom prst="rect">
             <a:avLst>
@@ -30774,8 +33010,8 @@
         </p:nvSpPr>
         <p:spPr>
           <a:xfrm>
-            <a:off x="2938272" y="2258568"/>
-            <a:ext cx="1828800" cy="292608"/>
+            <a:off x="1989734" y="2258568"/>
+            <a:ext cx="1581912" cy="292608"/>
           </a:xfrm>
           <a:prstGeom prst="rect">
             <a:avLst/>
@@ -30813,8 +33049,8 @@
         </p:nvSpPr>
         <p:spPr>
           <a:xfrm>
-            <a:off x="2938272" y="2569464"/>
-            <a:ext cx="1828800" cy="201168"/>
+            <a:off x="1989734" y="2569464"/>
+            <a:ext cx="1581912" cy="201168"/>
           </a:xfrm>
           <a:prstGeom prst="rect">
             <a:avLst/>
@@ -30838,7 +33074,7 @@
                 <a:ea typeface="Calibri" pitchFamily="34" charset="-122"/>
                 <a:cs typeface="Calibri" pitchFamily="34" charset="-120"/>
               </a:rPr>
-              <a:t>to make, put into</a:t>
+              <a:t>made of; to make</a:t>
             </a:r>
             <a:endParaRPr lang="en-US" sz="850" dirty="0"/>
           </a:p>
@@ -30852,8 +33088,8 @@
         </p:nvSpPr>
         <p:spPr>
           <a:xfrm>
-            <a:off x="5803392" y="2258568"/>
-            <a:ext cx="1828800" cy="292608"/>
+            <a:off x="3659429" y="2258568"/>
+            <a:ext cx="1581912" cy="292608"/>
           </a:xfrm>
           <a:prstGeom prst="rect">
             <a:avLst>
@@ -30886,8 +33122,8 @@
         </p:nvSpPr>
         <p:spPr>
           <a:xfrm>
-            <a:off x="5803392" y="2258568"/>
-            <a:ext cx="1828800" cy="292608"/>
+            <a:off x="3659429" y="2258568"/>
+            <a:ext cx="1581912" cy="292608"/>
           </a:xfrm>
           <a:prstGeom prst="rect">
             <a:avLst/>
@@ -30911,7 +33147,7 @@
                 <a:ea typeface="Trebuchet MS" pitchFamily="34" charset="-122"/>
                 <a:cs typeface="Trebuchet MS" pitchFamily="34" charset="-120"/>
               </a:rPr>
-              <a:t>rich</a:t>
+              <a:t>clos</a:t>
             </a:r>
             <a:endParaRPr lang="en-US" sz="1300" dirty="0"/>
           </a:p>
@@ -30925,8 +33161,8 @@
         </p:nvSpPr>
         <p:spPr>
           <a:xfrm>
-            <a:off x="5803392" y="2569464"/>
-            <a:ext cx="1828800" cy="201168"/>
+            <a:off x="3659429" y="2569464"/>
+            <a:ext cx="1581912" cy="201168"/>
           </a:xfrm>
           <a:prstGeom prst="rect">
             <a:avLst/>
@@ -30950,7 +33186,7 @@
                 <a:ea typeface="Calibri" pitchFamily="34" charset="-122"/>
                 <a:cs typeface="Calibri" pitchFamily="34" charset="-120"/>
               </a:rPr>
-              <a:t>having great value or quality</a:t>
+              <a:t>close</a:t>
             </a:r>
             <a:endParaRPr lang="en-US" sz="850" dirty="0"/>
           </a:p>
@@ -30959,6 +33195,230 @@
       <p:sp>
         <p:nvSpPr>
           <p:cNvPr id="22" name="Shape 20"/>
+          <p:cNvSpPr/>
+          <p:nvPr/>
+        </p:nvSpPr>
+        <p:spPr>
+          <a:xfrm>
+            <a:off x="5329123" y="2258568"/>
+            <a:ext cx="1581912" cy="292608"/>
+          </a:xfrm>
+          <a:prstGeom prst="rect">
+            <a:avLst>
+              <a:gd name="adj" fmla="val 25000"/>
+            </a:avLst>
+          </a:prstGeom>
+          <a:solidFill>
+            <a:srgbClr val="FCE7F3"/>
+          </a:solidFill>
+          <a:ln w="19050">
+            <a:solidFill>
+              <a:srgbClr val="DB2777"/>
+            </a:solidFill>
+            <a:prstDash val="solid"/>
+          </a:ln>
+          <a:effectLst>
+            <a:outerShdw sx="100000" sy="100000" kx="0" ky="0" algn="bl" rotWithShape="0" blurRad="101600" dist="38100" dir="8100000">
+              <a:srgbClr val="000000">
+                <a:alpha val="12000"/>
+              </a:srgbClr>
+            </a:outerShdw>
+          </a:effectLst>
+        </p:spPr>
+      </p:sp>
+      <p:sp>
+        <p:nvSpPr>
+          <p:cNvPr id="23" name="Text 21"/>
+          <p:cNvSpPr/>
+          <p:nvPr/>
+        </p:nvSpPr>
+        <p:spPr>
+          <a:xfrm>
+            <a:off x="5329123" y="2258568"/>
+            <a:ext cx="1581912" cy="292608"/>
+          </a:xfrm>
+          <a:prstGeom prst="rect">
+            <a:avLst/>
+          </a:prstGeom>
+          <a:noFill/>
+          <a:ln/>
+        </p:spPr>
+        <p:txBody>
+          <a:bodyPr wrap="square" lIns="0" tIns="0" rIns="0" bIns="0" rtlCol="0" anchor="ctr"/>
+          <a:lstStyle/>
+          <a:p>
+            <a:pPr algn="ctr" indent="0" marL="0">
+              <a:buNone/>
+            </a:pPr>
+            <a:r>
+              <a:rPr lang="en-US" sz="1300" b="1" dirty="0">
+                <a:solidFill>
+                  <a:srgbClr val="9D174D"/>
+                </a:solidFill>
+                <a:latin typeface="Trebuchet MS" pitchFamily="34" charset="0"/>
+                <a:ea typeface="Trebuchet MS" pitchFamily="34" charset="-122"/>
+                <a:cs typeface="Trebuchet MS" pitchFamily="34" charset="-120"/>
+              </a:rPr>
+              <a:t>ure</a:t>
+            </a:r>
+            <a:endParaRPr lang="en-US" sz="1300" dirty="0"/>
+          </a:p>
+        </p:txBody>
+      </p:sp>
+      <p:sp>
+        <p:nvSpPr>
+          <p:cNvPr id="24" name="Text 22"/>
+          <p:cNvSpPr/>
+          <p:nvPr/>
+        </p:nvSpPr>
+        <p:spPr>
+          <a:xfrm>
+            <a:off x="5329123" y="2569464"/>
+            <a:ext cx="1581912" cy="201168"/>
+          </a:xfrm>
+          <a:prstGeom prst="rect">
+            <a:avLst/>
+          </a:prstGeom>
+          <a:noFill/>
+          <a:ln/>
+        </p:spPr>
+        <p:txBody>
+          <a:bodyPr wrap="square" lIns="0" tIns="0" rIns="0" bIns="0" rtlCol="0" anchor="t"/>
+          <a:lstStyle/>
+          <a:p>
+            <a:pPr algn="ctr" indent="0" marL="0">
+              <a:buNone/>
+            </a:pPr>
+            <a:r>
+              <a:rPr lang="en-US" sz="850" dirty="0">
+                <a:solidFill>
+                  <a:srgbClr val="475569"/>
+                </a:solidFill>
+                <a:latin typeface="Calibri" pitchFamily="34" charset="0"/>
+                <a:ea typeface="Calibri" pitchFamily="34" charset="-122"/>
+                <a:cs typeface="Calibri" pitchFamily="34" charset="-120"/>
+              </a:rPr>
+              <a:t>result of</a:t>
+            </a:r>
+            <a:endParaRPr lang="en-US" sz="850" dirty="0"/>
+          </a:p>
+        </p:txBody>
+      </p:sp>
+      <p:sp>
+        <p:nvSpPr>
+          <p:cNvPr id="25" name="Shape 23"/>
+          <p:cNvSpPr/>
+          <p:nvPr/>
+        </p:nvSpPr>
+        <p:spPr>
+          <a:xfrm>
+            <a:off x="6998818" y="2258568"/>
+            <a:ext cx="1581912" cy="292608"/>
+          </a:xfrm>
+          <a:prstGeom prst="rect">
+            <a:avLst>
+              <a:gd name="adj" fmla="val 25000"/>
+            </a:avLst>
+          </a:prstGeom>
+          <a:solidFill>
+            <a:srgbClr val="FCE7F3"/>
+          </a:solidFill>
+          <a:ln w="19050">
+            <a:solidFill>
+              <a:srgbClr val="DB2777"/>
+            </a:solidFill>
+            <a:prstDash val="solid"/>
+          </a:ln>
+          <a:effectLst>
+            <a:outerShdw sx="100000" sy="100000" kx="0" ky="0" algn="bl" rotWithShape="0" blurRad="101600" dist="38100" dir="8100000">
+              <a:srgbClr val="000000">
+                <a:alpha val="12000"/>
+              </a:srgbClr>
+            </a:outerShdw>
+          </a:effectLst>
+        </p:spPr>
+      </p:sp>
+      <p:sp>
+        <p:nvSpPr>
+          <p:cNvPr id="26" name="Text 24"/>
+          <p:cNvSpPr/>
+          <p:nvPr/>
+        </p:nvSpPr>
+        <p:spPr>
+          <a:xfrm>
+            <a:off x="6998818" y="2258568"/>
+            <a:ext cx="1581912" cy="292608"/>
+          </a:xfrm>
+          <a:prstGeom prst="rect">
+            <a:avLst/>
+          </a:prstGeom>
+          <a:noFill/>
+          <a:ln/>
+        </p:spPr>
+        <p:txBody>
+          <a:bodyPr wrap="square" lIns="0" tIns="0" rIns="0" bIns="0" rtlCol="0" anchor="ctr"/>
+          <a:lstStyle/>
+          <a:p>
+            <a:pPr algn="ctr" indent="0" marL="0">
+              <a:buNone/>
+            </a:pPr>
+            <a:r>
+              <a:rPr lang="en-US" sz="1300" b="1" dirty="0">
+                <a:solidFill>
+                  <a:srgbClr val="9D174D"/>
+                </a:solidFill>
+                <a:latin typeface="Trebuchet MS" pitchFamily="34" charset="0"/>
+                <a:ea typeface="Trebuchet MS" pitchFamily="34" charset="-122"/>
+                <a:cs typeface="Trebuchet MS" pitchFamily="34" charset="-120"/>
+              </a:rPr>
+              <a:t>s</a:t>
+            </a:r>
+            <a:endParaRPr lang="en-US" sz="1300" dirty="0"/>
+          </a:p>
+        </p:txBody>
+      </p:sp>
+      <p:sp>
+        <p:nvSpPr>
+          <p:cNvPr id="27" name="Text 25"/>
+          <p:cNvSpPr/>
+          <p:nvPr/>
+        </p:nvSpPr>
+        <p:spPr>
+          <a:xfrm>
+            <a:off x="6998818" y="2569464"/>
+            <a:ext cx="1581912" cy="201168"/>
+          </a:xfrm>
+          <a:prstGeom prst="rect">
+            <a:avLst/>
+          </a:prstGeom>
+          <a:noFill/>
+          <a:ln/>
+        </p:spPr>
+        <p:txBody>
+          <a:bodyPr wrap="square" lIns="0" tIns="0" rIns="0" bIns="0" rtlCol="0" anchor="t"/>
+          <a:lstStyle/>
+          <a:p>
+            <a:pPr algn="ctr" indent="0" marL="0">
+              <a:buNone/>
+            </a:pPr>
+            <a:r>
+              <a:rPr lang="en-US" sz="850" dirty="0">
+                <a:solidFill>
+                  <a:srgbClr val="475569"/>
+                </a:solidFill>
+                <a:latin typeface="Calibri" pitchFamily="34" charset="0"/>
+                <a:ea typeface="Calibri" pitchFamily="34" charset="-122"/>
+                <a:cs typeface="Calibri" pitchFamily="34" charset="-120"/>
+              </a:rPr>
+              <a:t>plural or present tense</a:t>
+            </a:r>
+            <a:endParaRPr lang="en-US" sz="850" dirty="0"/>
+          </a:p>
+        </p:txBody>
+      </p:sp>
+      <p:sp>
+        <p:nvSpPr>
+          <p:cNvPr id="28" name="Shape 26"/>
           <p:cNvSpPr/>
           <p:nvPr/>
         </p:nvSpPr>
@@ -30985,7 +33445,7 @@
       </p:sp>
       <p:sp>
         <p:nvSpPr>
-          <p:cNvPr id="23" name="Text 21"/>
+          <p:cNvPr id="29" name="Text 27"/>
           <p:cNvSpPr/>
           <p:nvPr/>
         </p:nvSpPr>
@@ -31024,7 +33484,7 @@
       </p:sp>
       <p:sp>
         <p:nvSpPr>
-          <p:cNvPr id="24" name="Shape 22"/>
+          <p:cNvPr id="30" name="Shape 28"/>
           <p:cNvSpPr/>
           <p:nvPr/>
         </p:nvSpPr>
@@ -31051,13 +33511,13 @@
       </p:sp>
       <p:sp>
         <p:nvSpPr>
-          <p:cNvPr id="25" name="Shape 23"/>
-          <p:cNvSpPr/>
-          <p:nvPr/>
-        </p:nvSpPr>
-        <p:spPr>
-          <a:xfrm>
-            <a:off x="2999232" y="3364992"/>
+          <p:cNvPr id="31" name="Shape 29"/>
+          <p:cNvSpPr/>
+          <p:nvPr/>
+        </p:nvSpPr>
+        <p:spPr>
+          <a:xfrm>
+            <a:off x="2313432" y="3364992"/>
             <a:ext cx="1645920" cy="475488"/>
           </a:xfrm>
           <a:prstGeom prst="rect">
@@ -31078,13 +33538,13 @@
       </p:sp>
       <p:sp>
         <p:nvSpPr>
-          <p:cNvPr id="26" name="Text 24"/>
-          <p:cNvSpPr/>
-          <p:nvPr/>
-        </p:nvSpPr>
-        <p:spPr>
-          <a:xfrm>
-            <a:off x="2999232" y="3364992"/>
+          <p:cNvPr id="32" name="Text 30"/>
+          <p:cNvSpPr/>
+          <p:nvPr/>
+        </p:nvSpPr>
+        <p:spPr>
+          <a:xfrm>
+            <a:off x="2313432" y="3364992"/>
             <a:ext cx="1645920" cy="475488"/>
           </a:xfrm>
           <a:prstGeom prst="rect">
@@ -31117,14 +33577,14 @@
       </p:sp>
       <p:sp>
         <p:nvSpPr>
-          <p:cNvPr id="27" name="Text 25"/>
-          <p:cNvSpPr/>
-          <p:nvPr/>
-        </p:nvSpPr>
-        <p:spPr>
-          <a:xfrm>
-            <a:off x="4645152" y="3364992"/>
-            <a:ext cx="1097280" cy="475488"/>
+          <p:cNvPr id="33" name="Text 31"/>
+          <p:cNvSpPr/>
+          <p:nvPr/>
+        </p:nvSpPr>
+        <p:spPr>
+          <a:xfrm>
+            <a:off x="3959352" y="3364992"/>
+            <a:ext cx="411480" cy="475488"/>
           </a:xfrm>
           <a:prstGeom prst="rect">
             <a:avLst/>
@@ -31156,13 +33616,13 @@
       </p:sp>
       <p:sp>
         <p:nvSpPr>
-          <p:cNvPr id="28" name="Shape 26"/>
-          <p:cNvSpPr/>
-          <p:nvPr/>
-        </p:nvSpPr>
-        <p:spPr>
-          <a:xfrm>
-            <a:off x="5742432" y="3364992"/>
+          <p:cNvPr id="34" name="Shape 32"/>
+          <p:cNvSpPr/>
+          <p:nvPr/>
+        </p:nvSpPr>
+        <p:spPr>
+          <a:xfrm>
+            <a:off x="4370832" y="3364992"/>
             <a:ext cx="1645920" cy="475488"/>
           </a:xfrm>
           <a:prstGeom prst="rect">
@@ -31183,13 +33643,13 @@
       </p:sp>
       <p:sp>
         <p:nvSpPr>
-          <p:cNvPr id="29" name="Text 27"/>
-          <p:cNvSpPr/>
-          <p:nvPr/>
-        </p:nvSpPr>
-        <p:spPr>
-          <a:xfrm>
-            <a:off x="5742432" y="3364992"/>
+          <p:cNvPr id="35" name="Text 33"/>
+          <p:cNvSpPr/>
+          <p:nvPr/>
+        </p:nvSpPr>
+        <p:spPr>
+          <a:xfrm>
+            <a:off x="4370832" y="3364992"/>
             <a:ext cx="1645920" cy="475488"/>
           </a:xfrm>
           <a:prstGeom prst="rect">
@@ -31214,7 +33674,7 @@
                 <a:ea typeface="Trebuchet MS" pitchFamily="34" charset="-122"/>
                 <a:cs typeface="Trebuchet MS" pitchFamily="34" charset="-120"/>
               </a:rPr>
-              <a:t>rich</a:t>
+              <a:t>clo</a:t>
             </a:r>
             <a:endParaRPr lang="en-US" sz="1400" dirty="0"/>
           </a:p>
@@ -31222,7 +33682,112 @@
       </p:sp>
       <p:sp>
         <p:nvSpPr>
-          <p:cNvPr id="30" name="Shape 28"/>
+          <p:cNvPr id="36" name="Text 34"/>
+          <p:cNvSpPr/>
+          <p:nvPr/>
+        </p:nvSpPr>
+        <p:spPr>
+          <a:xfrm>
+            <a:off x="6016752" y="3364992"/>
+            <a:ext cx="411480" cy="475488"/>
+          </a:xfrm>
+          <a:prstGeom prst="rect">
+            <a:avLst/>
+          </a:prstGeom>
+          <a:noFill/>
+          <a:ln/>
+        </p:spPr>
+        <p:txBody>
+          <a:bodyPr wrap="square" lIns="0" tIns="0" rIns="0" bIns="0" rtlCol="0" anchor="ctr"/>
+          <a:lstStyle/>
+          <a:p>
+            <a:pPr algn="ctr" indent="0" marL="0">
+              <a:buNone/>
+            </a:pPr>
+            <a:r>
+              <a:rPr lang="en-US" sz="1600" b="1" dirty="0">
+                <a:solidFill>
+                  <a:srgbClr val="0D9488"/>
+                </a:solidFill>
+                <a:latin typeface="Trebuchet MS" pitchFamily="34" charset="0"/>
+                <a:ea typeface="Trebuchet MS" pitchFamily="34" charset="-122"/>
+                <a:cs typeface="Trebuchet MS" pitchFamily="34" charset="-120"/>
+              </a:rPr>
+              <a:t>·</a:t>
+            </a:r>
+            <a:endParaRPr lang="en-US" sz="1600" dirty="0"/>
+          </a:p>
+        </p:txBody>
+      </p:sp>
+      <p:sp>
+        <p:nvSpPr>
+          <p:cNvPr id="37" name="Shape 35"/>
+          <p:cNvSpPr/>
+          <p:nvPr/>
+        </p:nvSpPr>
+        <p:spPr>
+          <a:xfrm>
+            <a:off x="6428232" y="3364992"/>
+            <a:ext cx="1645920" cy="475488"/>
+          </a:xfrm>
+          <a:prstGeom prst="rect">
+            <a:avLst>
+              <a:gd name="adj" fmla="val 9615"/>
+            </a:avLst>
+          </a:prstGeom>
+          <a:solidFill>
+            <a:srgbClr val="FFFFFF"/>
+          </a:solidFill>
+          <a:ln w="12700">
+            <a:solidFill>
+              <a:srgbClr val="0D9488"/>
+            </a:solidFill>
+            <a:prstDash val="solid"/>
+          </a:ln>
+        </p:spPr>
+      </p:sp>
+      <p:sp>
+        <p:nvSpPr>
+          <p:cNvPr id="38" name="Text 36"/>
+          <p:cNvSpPr/>
+          <p:nvPr/>
+        </p:nvSpPr>
+        <p:spPr>
+          <a:xfrm>
+            <a:off x="6428232" y="3364992"/>
+            <a:ext cx="1645920" cy="475488"/>
+          </a:xfrm>
+          <a:prstGeom prst="rect">
+            <a:avLst/>
+          </a:prstGeom>
+          <a:noFill/>
+          <a:ln/>
+        </p:spPr>
+        <p:txBody>
+          <a:bodyPr wrap="square" lIns="0" tIns="0" rIns="0" bIns="0" rtlCol="0" anchor="ctr"/>
+          <a:lstStyle/>
+          <a:p>
+            <a:pPr algn="ctr" indent="0" marL="0">
+              <a:buNone/>
+            </a:pPr>
+            <a:r>
+              <a:rPr lang="en-US" sz="1400" b="1" dirty="0">
+                <a:solidFill>
+                  <a:srgbClr val="0D9488"/>
+                </a:solidFill>
+                <a:latin typeface="Trebuchet MS" pitchFamily="34" charset="0"/>
+                <a:ea typeface="Trebuchet MS" pitchFamily="34" charset="-122"/>
+                <a:cs typeface="Trebuchet MS" pitchFamily="34" charset="-120"/>
+              </a:rPr>
+              <a:t>sures</a:t>
+            </a:r>
+            <a:endParaRPr lang="en-US" sz="1400" dirty="0"/>
+          </a:p>
+        </p:txBody>
+      </p:sp>
+      <p:sp>
+        <p:nvSpPr>
+          <p:cNvPr id="39" name="Shape 37"/>
           <p:cNvSpPr/>
           <p:nvPr/>
         </p:nvSpPr>
@@ -31249,7 +33814,7 @@
       </p:sp>
       <p:sp>
         <p:nvSpPr>
-          <p:cNvPr id="31" name="Text 29"/>
+          <p:cNvPr id="40" name="Text 38"/>
           <p:cNvSpPr/>
           <p:nvPr/>
         </p:nvSpPr>
@@ -31288,7 +33853,7 @@
       </p:sp>
       <p:sp>
         <p:nvSpPr>
-          <p:cNvPr id="32" name="Shape 30"/>
+          <p:cNvPr id="41" name="Shape 39"/>
           <p:cNvSpPr/>
           <p:nvPr/>
         </p:nvSpPr>
@@ -31315,13 +33880,13 @@
       </p:sp>
       <p:sp>
         <p:nvSpPr>
-          <p:cNvPr id="33" name="Shape 31"/>
-          <p:cNvSpPr/>
-          <p:nvPr/>
-        </p:nvSpPr>
-        <p:spPr>
-          <a:xfrm>
-            <a:off x="2427732" y="4169664"/>
+          <p:cNvPr id="42" name="Shape 40"/>
+          <p:cNvSpPr/>
+          <p:nvPr/>
+        </p:nvSpPr>
+        <p:spPr>
+          <a:xfrm>
+            <a:off x="2023872" y="4169664"/>
             <a:ext cx="685800" cy="475488"/>
           </a:xfrm>
           <a:prstGeom prst="rect">
@@ -31342,13 +33907,13 @@
       </p:sp>
       <p:sp>
         <p:nvSpPr>
-          <p:cNvPr id="34" name="Text 32"/>
-          <p:cNvSpPr/>
-          <p:nvPr/>
-        </p:nvSpPr>
-        <p:spPr>
-          <a:xfrm>
-            <a:off x="2427732" y="4169664"/>
+          <p:cNvPr id="43" name="Text 41"/>
+          <p:cNvSpPr/>
+          <p:nvPr/>
+        </p:nvSpPr>
+        <p:spPr>
+          <a:xfrm>
+            <a:off x="2023872" y="4169664"/>
             <a:ext cx="685800" cy="475488"/>
           </a:xfrm>
           <a:prstGeom prst="rect">
@@ -31381,13 +33946,13 @@
       </p:sp>
       <p:sp>
         <p:nvSpPr>
-          <p:cNvPr id="35" name="Shape 33"/>
-          <p:cNvSpPr/>
-          <p:nvPr/>
-        </p:nvSpPr>
-        <p:spPr>
-          <a:xfrm>
-            <a:off x="3639312" y="4169664"/>
+          <p:cNvPr id="44" name="Shape 42"/>
+          <p:cNvSpPr/>
+          <p:nvPr/>
+        </p:nvSpPr>
+        <p:spPr>
+          <a:xfrm>
+            <a:off x="2831592" y="4169664"/>
             <a:ext cx="685800" cy="475488"/>
           </a:xfrm>
           <a:prstGeom prst="rect">
@@ -31408,13 +33973,13 @@
       </p:sp>
       <p:sp>
         <p:nvSpPr>
-          <p:cNvPr id="36" name="Text 34"/>
-          <p:cNvSpPr/>
-          <p:nvPr/>
-        </p:nvSpPr>
-        <p:spPr>
-          <a:xfrm>
-            <a:off x="3639312" y="4169664"/>
+          <p:cNvPr id="45" name="Text 43"/>
+          <p:cNvSpPr/>
+          <p:nvPr/>
+        </p:nvSpPr>
+        <p:spPr>
+          <a:xfrm>
+            <a:off x="2831592" y="4169664"/>
             <a:ext cx="685800" cy="475488"/>
           </a:xfrm>
           <a:prstGeom prst="rect">
@@ -31447,13 +34012,13 @@
       </p:sp>
       <p:sp>
         <p:nvSpPr>
-          <p:cNvPr id="37" name="Shape 35"/>
-          <p:cNvSpPr/>
-          <p:nvPr/>
-        </p:nvSpPr>
-        <p:spPr>
-          <a:xfrm>
-            <a:off x="4850892" y="4169664"/>
+          <p:cNvPr id="46" name="Shape 44"/>
+          <p:cNvSpPr/>
+          <p:nvPr/>
+        </p:nvSpPr>
+        <p:spPr>
+          <a:xfrm>
+            <a:off x="3639312" y="4169664"/>
             <a:ext cx="685800" cy="475488"/>
           </a:xfrm>
           <a:prstGeom prst="rect">
@@ -31474,13 +34039,13 @@
       </p:sp>
       <p:sp>
         <p:nvSpPr>
-          <p:cNvPr id="38" name="Text 36"/>
-          <p:cNvSpPr/>
-          <p:nvPr/>
-        </p:nvSpPr>
-        <p:spPr>
-          <a:xfrm>
-            <a:off x="4850892" y="4169664"/>
+          <p:cNvPr id="47" name="Text 45"/>
+          <p:cNvSpPr/>
+          <p:nvPr/>
+        </p:nvSpPr>
+        <p:spPr>
+          <a:xfrm>
+            <a:off x="3639312" y="4169664"/>
             <a:ext cx="685800" cy="475488"/>
           </a:xfrm>
           <a:prstGeom prst="rect">
@@ -31505,7 +34070,7 @@
                 <a:ea typeface="Trebuchet MS" pitchFamily="34" charset="-122"/>
                 <a:cs typeface="Trebuchet MS" pitchFamily="34" charset="-120"/>
               </a:rPr>
-              <a:t>r</a:t>
+              <a:t>c</a:t>
             </a:r>
             <a:endParaRPr lang="en-US" sz="900" dirty="0"/>
           </a:p>
@@ -31513,13 +34078,13 @@
       </p:sp>
       <p:sp>
         <p:nvSpPr>
-          <p:cNvPr id="39" name="Shape 37"/>
-          <p:cNvSpPr/>
-          <p:nvPr/>
-        </p:nvSpPr>
-        <p:spPr>
-          <a:xfrm>
-            <a:off x="6062472" y="4169664"/>
+          <p:cNvPr id="48" name="Shape 46"/>
+          <p:cNvSpPr/>
+          <p:nvPr/>
+        </p:nvSpPr>
+        <p:spPr>
+          <a:xfrm>
+            <a:off x="4447032" y="4169664"/>
             <a:ext cx="685800" cy="475488"/>
           </a:xfrm>
           <a:prstGeom prst="rect">
@@ -31540,13 +34105,13 @@
       </p:sp>
       <p:sp>
         <p:nvSpPr>
-          <p:cNvPr id="40" name="Text 38"/>
-          <p:cNvSpPr/>
-          <p:nvPr/>
-        </p:nvSpPr>
-        <p:spPr>
-          <a:xfrm>
-            <a:off x="6062472" y="4169664"/>
+          <p:cNvPr id="49" name="Text 47"/>
+          <p:cNvSpPr/>
+          <p:nvPr/>
+        </p:nvSpPr>
+        <p:spPr>
+          <a:xfrm>
+            <a:off x="4447032" y="4169664"/>
             <a:ext cx="685800" cy="475488"/>
           </a:xfrm>
           <a:prstGeom prst="rect">
@@ -31571,7 +34136,7 @@
                 <a:ea typeface="Trebuchet MS" pitchFamily="34" charset="-122"/>
                 <a:cs typeface="Trebuchet MS" pitchFamily="34" charset="-120"/>
               </a:rPr>
-              <a:t>i</a:t>
+              <a:t>l</a:t>
             </a:r>
             <a:endParaRPr lang="en-US" sz="900" dirty="0"/>
           </a:p>
@@ -31579,13 +34144,13 @@
       </p:sp>
       <p:sp>
         <p:nvSpPr>
-          <p:cNvPr id="41" name="Shape 39"/>
-          <p:cNvSpPr/>
-          <p:nvPr/>
-        </p:nvSpPr>
-        <p:spPr>
-          <a:xfrm>
-            <a:off x="7274052" y="4169664"/>
+          <p:cNvPr id="50" name="Shape 48"/>
+          <p:cNvSpPr/>
+          <p:nvPr/>
+        </p:nvSpPr>
+        <p:spPr>
+          <a:xfrm>
+            <a:off x="5254752" y="4169664"/>
             <a:ext cx="685800" cy="475488"/>
           </a:xfrm>
           <a:prstGeom prst="rect">
@@ -31606,13 +34171,13 @@
       </p:sp>
       <p:sp>
         <p:nvSpPr>
-          <p:cNvPr id="42" name="Text 40"/>
-          <p:cNvSpPr/>
-          <p:nvPr/>
-        </p:nvSpPr>
-        <p:spPr>
-          <a:xfrm>
-            <a:off x="7274052" y="4169664"/>
+          <p:cNvPr id="51" name="Text 49"/>
+          <p:cNvSpPr/>
+          <p:nvPr/>
+        </p:nvSpPr>
+        <p:spPr>
+          <a:xfrm>
+            <a:off x="5254752" y="4169664"/>
             <a:ext cx="685800" cy="475488"/>
           </a:xfrm>
           <a:prstGeom prst="rect">
@@ -31637,7 +34202,205 @@
                 <a:ea typeface="Trebuchet MS" pitchFamily="34" charset="-122"/>
                 <a:cs typeface="Trebuchet MS" pitchFamily="34" charset="-120"/>
               </a:rPr>
-              <a:t>ch</a:t>
+              <a:t>o</a:t>
+            </a:r>
+            <a:endParaRPr lang="en-US" sz="900" dirty="0"/>
+          </a:p>
+        </p:txBody>
+      </p:sp>
+      <p:sp>
+        <p:nvSpPr>
+          <p:cNvPr id="52" name="Shape 50"/>
+          <p:cNvSpPr/>
+          <p:nvPr/>
+        </p:nvSpPr>
+        <p:spPr>
+          <a:xfrm>
+            <a:off x="6062472" y="4169664"/>
+            <a:ext cx="685800" cy="475488"/>
+          </a:xfrm>
+          <a:prstGeom prst="rect">
+            <a:avLst>
+              <a:gd name="adj" fmla="val 7692"/>
+            </a:avLst>
+          </a:prstGeom>
+          <a:solidFill>
+            <a:srgbClr val="FFFFFF"/>
+          </a:solidFill>
+          <a:ln w="12700">
+            <a:solidFill>
+              <a:srgbClr val="DB2777"/>
+            </a:solidFill>
+            <a:prstDash val="solid"/>
+          </a:ln>
+        </p:spPr>
+      </p:sp>
+      <p:sp>
+        <p:nvSpPr>
+          <p:cNvPr id="53" name="Text 51"/>
+          <p:cNvSpPr/>
+          <p:nvPr/>
+        </p:nvSpPr>
+        <p:spPr>
+          <a:xfrm>
+            <a:off x="6062472" y="4169664"/>
+            <a:ext cx="685800" cy="475488"/>
+          </a:xfrm>
+          <a:prstGeom prst="rect">
+            <a:avLst/>
+          </a:prstGeom>
+          <a:noFill/>
+          <a:ln/>
+        </p:spPr>
+        <p:txBody>
+          <a:bodyPr wrap="square" lIns="0" tIns="0" rIns="0" bIns="0" rtlCol="0" anchor="ctr"/>
+          <a:lstStyle/>
+          <a:p>
+            <a:pPr algn="ctr" indent="0" marL="0">
+              <a:buNone/>
+            </a:pPr>
+            <a:r>
+              <a:rPr lang="en-US" sz="900" b="1" dirty="0">
+                <a:solidFill>
+                  <a:srgbClr val="9D174D"/>
+                </a:solidFill>
+                <a:latin typeface="Trebuchet MS" pitchFamily="34" charset="0"/>
+                <a:ea typeface="Trebuchet MS" pitchFamily="34" charset="-122"/>
+                <a:cs typeface="Trebuchet MS" pitchFamily="34" charset="-120"/>
+              </a:rPr>
+              <a:t>s</a:t>
+            </a:r>
+            <a:endParaRPr lang="en-US" sz="900" dirty="0"/>
+          </a:p>
+        </p:txBody>
+      </p:sp>
+      <p:sp>
+        <p:nvSpPr>
+          <p:cNvPr id="54" name="Shape 52"/>
+          <p:cNvSpPr/>
+          <p:nvPr/>
+        </p:nvSpPr>
+        <p:spPr>
+          <a:xfrm>
+            <a:off x="6870192" y="4169664"/>
+            <a:ext cx="685800" cy="475488"/>
+          </a:xfrm>
+          <a:prstGeom prst="rect">
+            <a:avLst>
+              <a:gd name="adj" fmla="val 7692"/>
+            </a:avLst>
+          </a:prstGeom>
+          <a:solidFill>
+            <a:srgbClr val="FFFFFF"/>
+          </a:solidFill>
+          <a:ln w="12700">
+            <a:solidFill>
+              <a:srgbClr val="DB2777"/>
+            </a:solidFill>
+            <a:prstDash val="solid"/>
+          </a:ln>
+        </p:spPr>
+      </p:sp>
+      <p:sp>
+        <p:nvSpPr>
+          <p:cNvPr id="55" name="Text 53"/>
+          <p:cNvSpPr/>
+          <p:nvPr/>
+        </p:nvSpPr>
+        <p:spPr>
+          <a:xfrm>
+            <a:off x="6870192" y="4169664"/>
+            <a:ext cx="685800" cy="475488"/>
+          </a:xfrm>
+          <a:prstGeom prst="rect">
+            <a:avLst/>
+          </a:prstGeom>
+          <a:noFill/>
+          <a:ln/>
+        </p:spPr>
+        <p:txBody>
+          <a:bodyPr wrap="square" lIns="0" tIns="0" rIns="0" bIns="0" rtlCol="0" anchor="ctr"/>
+          <a:lstStyle/>
+          <a:p>
+            <a:pPr algn="ctr" indent="0" marL="0">
+              <a:buNone/>
+            </a:pPr>
+            <a:r>
+              <a:rPr lang="en-US" sz="900" b="1" dirty="0">
+                <a:solidFill>
+                  <a:srgbClr val="9D174D"/>
+                </a:solidFill>
+                <a:latin typeface="Trebuchet MS" pitchFamily="34" charset="0"/>
+                <a:ea typeface="Trebuchet MS" pitchFamily="34" charset="-122"/>
+                <a:cs typeface="Trebuchet MS" pitchFamily="34" charset="-120"/>
+              </a:rPr>
+              <a:t>ure</a:t>
+            </a:r>
+            <a:endParaRPr lang="en-US" sz="900" dirty="0"/>
+          </a:p>
+        </p:txBody>
+      </p:sp>
+      <p:sp>
+        <p:nvSpPr>
+          <p:cNvPr id="56" name="Shape 54"/>
+          <p:cNvSpPr/>
+          <p:nvPr/>
+        </p:nvSpPr>
+        <p:spPr>
+          <a:xfrm>
+            <a:off x="7677912" y="4169664"/>
+            <a:ext cx="685800" cy="475488"/>
+          </a:xfrm>
+          <a:prstGeom prst="rect">
+            <a:avLst>
+              <a:gd name="adj" fmla="val 7692"/>
+            </a:avLst>
+          </a:prstGeom>
+          <a:solidFill>
+            <a:srgbClr val="FFFFFF"/>
+          </a:solidFill>
+          <a:ln w="12700">
+            <a:solidFill>
+              <a:srgbClr val="DB2777"/>
+            </a:solidFill>
+            <a:prstDash val="solid"/>
+          </a:ln>
+        </p:spPr>
+      </p:sp>
+      <p:sp>
+        <p:nvSpPr>
+          <p:cNvPr id="57" name="Text 55"/>
+          <p:cNvSpPr/>
+          <p:nvPr/>
+        </p:nvSpPr>
+        <p:spPr>
+          <a:xfrm>
+            <a:off x="7677912" y="4169664"/>
+            <a:ext cx="685800" cy="475488"/>
+          </a:xfrm>
+          <a:prstGeom prst="rect">
+            <a:avLst/>
+          </a:prstGeom>
+          <a:noFill/>
+          <a:ln/>
+        </p:spPr>
+        <p:txBody>
+          <a:bodyPr wrap="square" lIns="0" tIns="0" rIns="0" bIns="0" rtlCol="0" anchor="ctr"/>
+          <a:lstStyle/>
+          <a:p>
+            <a:pPr algn="ctr" indent="0" marL="0">
+              <a:buNone/>
+            </a:pPr>
+            <a:r>
+              <a:rPr lang="en-US" sz="900" b="1" dirty="0">
+                <a:solidFill>
+                  <a:srgbClr val="9D174D"/>
+                </a:solidFill>
+                <a:latin typeface="Trebuchet MS" pitchFamily="34" charset="0"/>
+                <a:ea typeface="Trebuchet MS" pitchFamily="34" charset="-122"/>
+                <a:cs typeface="Trebuchet MS" pitchFamily="34" charset="-120"/>
+              </a:rPr>
+              <a:t>s</a:t>
             </a:r>
             <a:endParaRPr lang="en-US" sz="900" dirty="0"/>
           </a:p>
@@ -31929,7 +34692,7 @@
                 <a:ea typeface="Calibri" pitchFamily="34" charset="-122"/>
                 <a:cs typeface="Calibri" pitchFamily="34" charset="-120"/>
               </a:rPr>
-              <a:t>Word Labs  •  wordlabs.app  •  Prefix: 'en-' = to make, put into</a:t>
+              <a:t>Word Labs  •  wordlabs.app  •  Prefix: 'en-' = cause to; make</a:t>
             </a:r>
             <a:endParaRPr lang="en-US" sz="800" dirty="0"/>
           </a:p>
@@ -33098,7 +35861,7 @@
                 <a:ea typeface="Calibri" pitchFamily="34" charset="-122"/>
                 <a:cs typeface="Calibri" pitchFamily="34" charset="-120"/>
               </a:rPr>
-              <a:t>Word Labs  •  wordlabs.app  •  Prefix: 'en-' = to make, put into</a:t>
+              <a:t>Word Labs  •  wordlabs.app  •  Prefix: 'en-' = cause to; make</a:t>
             </a:r>
             <a:endParaRPr lang="en-US" sz="800" dirty="0"/>
           </a:p>
@@ -33463,7 +36226,7 @@
                 <a:ea typeface="Trebuchet MS" pitchFamily="34" charset="-122"/>
                 <a:cs typeface="Trebuchet MS" pitchFamily="34" charset="-120"/>
               </a:rPr>
-              <a:t>joy</a:t>
+              <a:t>path</a:t>
             </a:r>
             <a:endParaRPr lang="en-US" sz="1300" dirty="0"/>
           </a:p>
@@ -33527,7 +36290,7 @@
                 <a:ea typeface="Trebuchet MS" pitchFamily="34" charset="-122"/>
                 <a:cs typeface="Trebuchet MS" pitchFamily="34" charset="-120"/>
               </a:rPr>
-              <a:t>-ed</a:t>
+              <a:t>-y</a:t>
             </a:r>
             <a:endParaRPr lang="en-US" sz="1300" dirty="0"/>
           </a:p>
@@ -33616,7 +36379,7 @@
                 <a:ea typeface="Trebuchet MS" pitchFamily="34" charset="-122"/>
                 <a:cs typeface="Trebuchet MS" pitchFamily="34" charset="-120"/>
               </a:rPr>
-              <a:t>large</a:t>
+              <a:t>power</a:t>
             </a:r>
             <a:endParaRPr lang="en-US" sz="1300" dirty="0"/>
           </a:p>
@@ -33680,7 +36443,7 @@
                 <a:ea typeface="Trebuchet MS" pitchFamily="34" charset="-122"/>
                 <a:cs typeface="Trebuchet MS" pitchFamily="34" charset="-120"/>
               </a:rPr>
-              <a:t>-ing</a:t>
+              <a:t>-ed</a:t>
             </a:r>
             <a:endParaRPr lang="en-US" sz="1300" dirty="0"/>
           </a:p>
@@ -33769,7 +36532,7 @@
                 <a:ea typeface="Trebuchet MS" pitchFamily="34" charset="-122"/>
                 <a:cs typeface="Trebuchet MS" pitchFamily="34" charset="-120"/>
               </a:rPr>
-              <a:t>courage</a:t>
+              <a:t>act</a:t>
             </a:r>
             <a:endParaRPr lang="en-US" sz="1300" dirty="0"/>
           </a:p>
@@ -33833,7 +36596,7 @@
                 <a:ea typeface="Trebuchet MS" pitchFamily="34" charset="-122"/>
                 <a:cs typeface="Trebuchet MS" pitchFamily="34" charset="-120"/>
               </a:rPr>
-              <a:t>-ment</a:t>
+              <a:t>-ing</a:t>
             </a:r>
             <a:endParaRPr lang="en-US" sz="1300" dirty="0"/>
           </a:p>
@@ -33922,7 +36685,7 @@
                 <a:ea typeface="Trebuchet MS" pitchFamily="34" charset="-122"/>
                 <a:cs typeface="Trebuchet MS" pitchFamily="34" charset="-120"/>
               </a:rPr>
-              <a:t>rich</a:t>
+              <a:t>clos</a:t>
             </a:r>
             <a:endParaRPr lang="en-US" sz="1300" dirty="0"/>
           </a:p>
@@ -33986,7 +36749,7 @@
                 <a:ea typeface="Trebuchet MS" pitchFamily="34" charset="-122"/>
                 <a:cs typeface="Trebuchet MS" pitchFamily="34" charset="-120"/>
               </a:rPr>
-              <a:t>-able</a:t>
+              <a:t>-ment</a:t>
             </a:r>
             <a:endParaRPr lang="en-US" sz="1300" dirty="0"/>
           </a:p>
@@ -34075,7 +36838,7 @@
                 <a:ea typeface="Trebuchet MS" pitchFamily="34" charset="-122"/>
                 <a:cs typeface="Trebuchet MS" pitchFamily="34" charset="-120"/>
               </a:rPr>
-              <a:t>force</a:t>
+              <a:t>count</a:t>
             </a:r>
             <a:endParaRPr lang="en-US" sz="1300" dirty="0"/>
           </a:p>
@@ -34139,7 +36902,7 @@
                 <a:ea typeface="Trebuchet MS" pitchFamily="34" charset="-122"/>
                 <a:cs typeface="Trebuchet MS" pitchFamily="34" charset="-120"/>
               </a:rPr>
-              <a:t>-er</a:t>
+              <a:t>-ure</a:t>
             </a:r>
             <a:endParaRPr lang="en-US" sz="1300" dirty="0"/>
           </a:p>
@@ -34147,37 +36910,190 @@
       </p:sp>
       <p:sp>
         <p:nvSpPr>
-          <p:cNvPr id="43" name="Text 41"/>
-          <p:cNvSpPr/>
-          <p:nvPr/>
-        </p:nvSpPr>
-        <p:spPr>
-          <a:xfrm>
-            <a:off x="365760" y="3611880"/>
-            <a:ext cx="1828800" cy="347472"/>
-          </a:xfrm>
-          <a:prstGeom prst="rect">
-            <a:avLst/>
-          </a:prstGeom>
-          <a:noFill/>
-          <a:ln/>
-        </p:spPr>
-        <p:txBody>
-          <a:bodyPr wrap="square" lIns="0" tIns="0" rIns="0" bIns="0" rtlCol="0" anchor="ctr"/>
-          <a:lstStyle/>
-          <a:p>
-            <a:pPr algn="l" indent="0" marL="0">
-              <a:buNone/>
-            </a:pPr>
-            <a:r>
-              <a:rPr lang="en-US" sz="1200" b="1" dirty="0">
-                <a:solidFill>
-                  <a:srgbClr val="0F172A"/>
+          <p:cNvPr id="43" name="Shape 41"/>
+          <p:cNvSpPr/>
+          <p:nvPr/>
+        </p:nvSpPr>
+        <p:spPr>
+          <a:xfrm>
+            <a:off x="365760" y="3666744"/>
+            <a:ext cx="2468880" cy="402336"/>
+          </a:xfrm>
+          <a:prstGeom prst="rect">
+            <a:avLst/>
+          </a:prstGeom>
+          <a:solidFill>
+            <a:srgbClr val="F1F5F9"/>
+          </a:solidFill>
+          <a:ln w="12700">
+            <a:solidFill>
+              <a:srgbClr val="E2E8F0"/>
+            </a:solidFill>
+            <a:prstDash val="solid"/>
+          </a:ln>
+        </p:spPr>
+      </p:sp>
+      <p:sp>
+        <p:nvSpPr>
+          <p:cNvPr id="44" name="Shape 42"/>
+          <p:cNvSpPr/>
+          <p:nvPr/>
+        </p:nvSpPr>
+        <p:spPr>
+          <a:xfrm>
+            <a:off x="2971800" y="3666744"/>
+            <a:ext cx="2834640" cy="402336"/>
+          </a:xfrm>
+          <a:prstGeom prst="rect">
+            <a:avLst/>
+          </a:prstGeom>
+          <a:solidFill>
+            <a:srgbClr val="CCFBF1"/>
+          </a:solidFill>
+          <a:ln w="12700">
+            <a:solidFill>
+              <a:srgbClr val="E2E8F0"/>
+            </a:solidFill>
+            <a:prstDash val="solid"/>
+          </a:ln>
+        </p:spPr>
+      </p:sp>
+      <p:sp>
+        <p:nvSpPr>
+          <p:cNvPr id="45" name="Text 43"/>
+          <p:cNvSpPr/>
+          <p:nvPr/>
+        </p:nvSpPr>
+        <p:spPr>
+          <a:xfrm>
+            <a:off x="2971800" y="3666744"/>
+            <a:ext cx="2834640" cy="402336"/>
+          </a:xfrm>
+          <a:prstGeom prst="rect">
+            <a:avLst/>
+          </a:prstGeom>
+          <a:noFill/>
+          <a:ln/>
+        </p:spPr>
+        <p:txBody>
+          <a:bodyPr wrap="square" lIns="0" tIns="0" rIns="0" bIns="0" rtlCol="0" anchor="ctr"/>
+          <a:lstStyle/>
+          <a:p>
+            <a:pPr algn="ctr" indent="0" marL="0">
+              <a:buNone/>
+            </a:pPr>
+            <a:r>
+              <a:rPr lang="en-US" sz="1300" b="1" dirty="0">
+                <a:solidFill>
+                  <a:srgbClr val="0F766E"/>
                 </a:solidFill>
                 <a:latin typeface="Trebuchet MS" pitchFamily="34" charset="0"/>
                 <a:ea typeface="Trebuchet MS" pitchFamily="34" charset="-122"/>
                 <a:cs typeface="Trebuchet MS" pitchFamily="34" charset="-120"/>
               </a:rPr>
+              <a:t>danger</a:t>
+            </a:r>
+            <a:endParaRPr lang="en-US" sz="1300" dirty="0"/>
+          </a:p>
+        </p:txBody>
+      </p:sp>
+      <p:sp>
+        <p:nvSpPr>
+          <p:cNvPr id="46" name="Shape 44"/>
+          <p:cNvSpPr/>
+          <p:nvPr/>
+        </p:nvSpPr>
+        <p:spPr>
+          <a:xfrm>
+            <a:off x="5943600" y="3666744"/>
+            <a:ext cx="2834640" cy="402336"/>
+          </a:xfrm>
+          <a:prstGeom prst="rect">
+            <a:avLst/>
+          </a:prstGeom>
+          <a:solidFill>
+            <a:srgbClr val="FCE7F3"/>
+          </a:solidFill>
+          <a:ln w="12700">
+            <a:solidFill>
+              <a:srgbClr val="E2E8F0"/>
+            </a:solidFill>
+            <a:prstDash val="solid"/>
+          </a:ln>
+        </p:spPr>
+      </p:sp>
+      <p:sp>
+        <p:nvSpPr>
+          <p:cNvPr id="47" name="Text 45"/>
+          <p:cNvSpPr/>
+          <p:nvPr/>
+        </p:nvSpPr>
+        <p:spPr>
+          <a:xfrm>
+            <a:off x="5943600" y="3666744"/>
+            <a:ext cx="2834640" cy="402336"/>
+          </a:xfrm>
+          <a:prstGeom prst="rect">
+            <a:avLst/>
+          </a:prstGeom>
+          <a:noFill/>
+          <a:ln/>
+        </p:spPr>
+        <p:txBody>
+          <a:bodyPr wrap="square" lIns="0" tIns="0" rIns="0" bIns="0" rtlCol="0" anchor="ctr"/>
+          <a:lstStyle/>
+          <a:p>
+            <a:pPr algn="ctr" indent="0" marL="0">
+              <a:buNone/>
+            </a:pPr>
+            <a:r>
+              <a:rPr lang="en-US" sz="1300" b="1" dirty="0">
+                <a:solidFill>
+                  <a:srgbClr val="9D174D"/>
+                </a:solidFill>
+                <a:latin typeface="Trebuchet MS" pitchFamily="34" charset="0"/>
+                <a:ea typeface="Trebuchet MS" pitchFamily="34" charset="-122"/>
+                <a:cs typeface="Trebuchet MS" pitchFamily="34" charset="-120"/>
+              </a:rPr>
+              <a:t>-er</a:t>
+            </a:r>
+            <a:endParaRPr lang="en-US" sz="1300" dirty="0"/>
+          </a:p>
+        </p:txBody>
+      </p:sp>
+      <p:sp>
+        <p:nvSpPr>
+          <p:cNvPr id="48" name="Text 46"/>
+          <p:cNvSpPr/>
+          <p:nvPr/>
+        </p:nvSpPr>
+        <p:spPr>
+          <a:xfrm>
+            <a:off x="365760" y="3611880"/>
+            <a:ext cx="1828800" cy="347472"/>
+          </a:xfrm>
+          <a:prstGeom prst="rect">
+            <a:avLst/>
+          </a:prstGeom>
+          <a:noFill/>
+          <a:ln/>
+        </p:spPr>
+        <p:txBody>
+          <a:bodyPr wrap="square" lIns="0" tIns="0" rIns="0" bIns="0" rtlCol="0" anchor="ctr"/>
+          <a:lstStyle/>
+          <a:p>
+            <a:pPr algn="l" indent="0" marL="0">
+              <a:buNone/>
+            </a:pPr>
+            <a:r>
+              <a:rPr lang="en-US" sz="1200" b="1" dirty="0">
+                <a:solidFill>
+                  <a:srgbClr val="0F172A"/>
+                </a:solidFill>
+                <a:latin typeface="Trebuchet MS" pitchFamily="34" charset="0"/>
+                <a:ea typeface="Trebuchet MS" pitchFamily="34" charset="-122"/>
+                <a:cs typeface="Trebuchet MS" pitchFamily="34" charset="-120"/>
+              </a:rPr>
               <a:t>Sample words:</a:t>
             </a:r>
             <a:endParaRPr lang="en-US" sz="1200" dirty="0"/>
@@ -34186,7 +37102,7 @@
       </p:sp>
       <p:sp>
         <p:nvSpPr>
-          <p:cNvPr id="44" name="Shape 42"/>
+          <p:cNvPr id="49" name="Shape 47"/>
           <p:cNvSpPr/>
           <p:nvPr/>
         </p:nvSpPr>
@@ -34213,7 +37129,7 @@
       </p:sp>
       <p:sp>
         <p:nvSpPr>
-          <p:cNvPr id="45" name="Text 43"/>
+          <p:cNvPr id="50" name="Text 48"/>
           <p:cNvSpPr/>
           <p:nvPr/>
         </p:nvSpPr>
@@ -34244,7 +37160,7 @@
                 <a:ea typeface="Trebuchet MS" pitchFamily="34" charset="-122"/>
                 <a:cs typeface="Trebuchet MS" pitchFamily="34" charset="-120"/>
               </a:rPr>
-              <a:t>enjoy</a:t>
+              <a:t>empower</a:t>
             </a:r>
             <a:endParaRPr lang="en-US" sz="1200" dirty="0"/>
           </a:p>
@@ -34252,7 +37168,7 @@
       </p:sp>
       <p:sp>
         <p:nvSpPr>
-          <p:cNvPr id="46" name="Shape 44"/>
+          <p:cNvPr id="51" name="Shape 49"/>
           <p:cNvSpPr/>
           <p:nvPr/>
         </p:nvSpPr>
@@ -34279,7 +37195,7 @@
       </p:sp>
       <p:sp>
         <p:nvSpPr>
-          <p:cNvPr id="47" name="Text 45"/>
+          <p:cNvPr id="52" name="Text 50"/>
           <p:cNvSpPr/>
           <p:nvPr/>
         </p:nvSpPr>
@@ -34310,7 +37226,7 @@
                 <a:ea typeface="Trebuchet MS" pitchFamily="34" charset="-122"/>
                 <a:cs typeface="Trebuchet MS" pitchFamily="34" charset="-120"/>
               </a:rPr>
-              <a:t>enlarge</a:t>
+              <a:t>enacted</a:t>
             </a:r>
             <a:endParaRPr lang="en-US" sz="1200" dirty="0"/>
           </a:p>
@@ -34318,7 +37234,7 @@
       </p:sp>
       <p:sp>
         <p:nvSpPr>
-          <p:cNvPr id="48" name="Shape 46"/>
+          <p:cNvPr id="53" name="Shape 51"/>
           <p:cNvSpPr/>
           <p:nvPr/>
         </p:nvSpPr>
@@ -34345,7 +37261,7 @@
       </p:sp>
       <p:sp>
         <p:nvSpPr>
-          <p:cNvPr id="49" name="Text 47"/>
+          <p:cNvPr id="54" name="Text 52"/>
           <p:cNvSpPr/>
           <p:nvPr/>
         </p:nvSpPr>
@@ -34376,7 +37292,7 @@
                 <a:ea typeface="Trebuchet MS" pitchFamily="34" charset="-122"/>
                 <a:cs typeface="Trebuchet MS" pitchFamily="34" charset="-120"/>
               </a:rPr>
-              <a:t>encourage</a:t>
+              <a:t>entrust</a:t>
             </a:r>
             <a:endParaRPr lang="en-US" sz="1200" dirty="0"/>
           </a:p>
@@ -34384,7 +37300,7 @@
       </p:sp>
       <p:sp>
         <p:nvSpPr>
-          <p:cNvPr id="50" name="Shape 48"/>
+          <p:cNvPr id="55" name="Shape 53"/>
           <p:cNvSpPr/>
           <p:nvPr/>
         </p:nvSpPr>
@@ -34411,7 +37327,7 @@
       </p:sp>
       <p:sp>
         <p:nvSpPr>
-          <p:cNvPr id="51" name="Text 49"/>
+          <p:cNvPr id="56" name="Text 54"/>
           <p:cNvSpPr/>
           <p:nvPr/>
         </p:nvSpPr>
@@ -34442,7 +37358,7 @@
                 <a:ea typeface="Trebuchet MS" pitchFamily="34" charset="-122"/>
                 <a:cs typeface="Trebuchet MS" pitchFamily="34" charset="-120"/>
               </a:rPr>
-              <a:t>enrich</a:t>
+              <a:t>empowered</a:t>
             </a:r>
             <a:endParaRPr lang="en-US" sz="1200" dirty="0"/>
           </a:p>
@@ -34450,7 +37366,7 @@
       </p:sp>
       <p:sp>
         <p:nvSpPr>
-          <p:cNvPr id="52" name="Shape 50"/>
+          <p:cNvPr id="57" name="Shape 55"/>
           <p:cNvSpPr/>
           <p:nvPr/>
         </p:nvSpPr>
@@ -34477,7 +37393,7 @@
       </p:sp>
       <p:sp>
         <p:nvSpPr>
-          <p:cNvPr id="53" name="Text 51"/>
+          <p:cNvPr id="58" name="Text 56"/>
           <p:cNvSpPr/>
           <p:nvPr/>
         </p:nvSpPr>
@@ -34508,7 +37424,7 @@
                 <a:ea typeface="Trebuchet MS" pitchFamily="34" charset="-122"/>
                 <a:cs typeface="Trebuchet MS" pitchFamily="34" charset="-120"/>
               </a:rPr>
-              <a:t>enforce</a:t>
+              <a:t>enactment</a:t>
             </a:r>
             <a:endParaRPr lang="en-US" sz="1200" dirty="0"/>
           </a:p>
@@ -34516,7 +37432,7 @@
       </p:sp>
       <p:sp>
         <p:nvSpPr>
-          <p:cNvPr id="54" name="Shape 52"/>
+          <p:cNvPr id="59" name="Shape 57"/>
           <p:cNvSpPr/>
           <p:nvPr/>
         </p:nvSpPr>
@@ -34543,7 +37459,7 @@
       </p:sp>
       <p:sp>
         <p:nvSpPr>
-          <p:cNvPr id="55" name="Text 53"/>
+          <p:cNvPr id="60" name="Text 58"/>
           <p:cNvSpPr/>
           <p:nvPr/>
         </p:nvSpPr>
@@ -34574,7 +37490,7 @@
                 <a:ea typeface="Trebuchet MS" pitchFamily="34" charset="-122"/>
                 <a:cs typeface="Trebuchet MS" pitchFamily="34" charset="-120"/>
               </a:rPr>
-              <a:t>enclose</a:t>
+              <a:t>encounter</a:t>
             </a:r>
             <a:endParaRPr lang="en-US" sz="1200" dirty="0"/>
           </a:p>
@@ -34582,7 +37498,7 @@
       </p:sp>
       <p:sp>
         <p:nvSpPr>
-          <p:cNvPr id="56" name="Shape 54"/>
+          <p:cNvPr id="61" name="Shape 59"/>
           <p:cNvSpPr/>
           <p:nvPr/>
         </p:nvSpPr>
@@ -34609,7 +37525,7 @@
       </p:sp>
       <p:sp>
         <p:nvSpPr>
-          <p:cNvPr id="57" name="Text 55"/>
+          <p:cNvPr id="62" name="Text 60"/>
           <p:cNvSpPr/>
           <p:nvPr/>
         </p:nvSpPr>
@@ -34640,73 +37556,7 @@
                 <a:ea typeface="Trebuchet MS" pitchFamily="34" charset="-122"/>
                 <a:cs typeface="Trebuchet MS" pitchFamily="34" charset="-120"/>
               </a:rPr>
-              <a:t>endanger</a:t>
-            </a:r>
-            <a:endParaRPr lang="en-US" sz="1200" dirty="0"/>
-          </a:p>
-        </p:txBody>
-      </p:sp>
-      <p:sp>
-        <p:nvSpPr>
-          <p:cNvPr id="58" name="Shape 56"/>
-          <p:cNvSpPr/>
-          <p:nvPr/>
-        </p:nvSpPr>
-        <p:spPr>
-          <a:xfrm>
-            <a:off x="6894576" y="4498848"/>
-            <a:ext cx="2011680" cy="402336"/>
-          </a:xfrm>
-          <a:prstGeom prst="rect">
-            <a:avLst>
-              <a:gd name="adj" fmla="val 13636"/>
-            </a:avLst>
-          </a:prstGeom>
-          <a:solidFill>
-            <a:srgbClr val="EEF2FF"/>
-          </a:solidFill>
-          <a:ln w="12700">
-            <a:solidFill>
-              <a:srgbClr val="6366F1"/>
-            </a:solidFill>
-            <a:prstDash val="solid"/>
-          </a:ln>
-        </p:spPr>
-      </p:sp>
-      <p:sp>
-        <p:nvSpPr>
-          <p:cNvPr id="59" name="Text 57"/>
-          <p:cNvSpPr/>
-          <p:nvPr/>
-        </p:nvSpPr>
-        <p:spPr>
-          <a:xfrm>
-            <a:off x="6894576" y="4498848"/>
-            <a:ext cx="2011680" cy="402336"/>
-          </a:xfrm>
-          <a:prstGeom prst="rect">
-            <a:avLst/>
-          </a:prstGeom>
-          <a:noFill/>
-          <a:ln/>
-        </p:spPr>
-        <p:txBody>
-          <a:bodyPr wrap="square" lIns="0" tIns="0" rIns="0" bIns="0" rtlCol="0" anchor="ctr"/>
-          <a:lstStyle/>
-          <a:p>
-            <a:pPr algn="ctr" indent="0" marL="0">
-              <a:buNone/>
-            </a:pPr>
-            <a:r>
-              <a:rPr lang="en-US" sz="1200" b="1" dirty="0">
-                <a:solidFill>
-                  <a:srgbClr val="4338CA"/>
-                </a:solidFill>
-                <a:latin typeface="Trebuchet MS" pitchFamily="34" charset="0"/>
-                <a:ea typeface="Trebuchet MS" pitchFamily="34" charset="-122"/>
-                <a:cs typeface="Trebuchet MS" pitchFamily="34" charset="-120"/>
-              </a:rPr>
-              <a:t>ensure</a:t>
+              <a:t>entrusted</a:t>
             </a:r>
             <a:endParaRPr lang="en-US" sz="1200" dirty="0"/>
           </a:p>
@@ -34998,7 +37848,7 @@
                 <a:ea typeface="Calibri" pitchFamily="34" charset="-122"/>
                 <a:cs typeface="Calibri" pitchFamily="34" charset="-120"/>
               </a:rPr>
-              <a:t>Word Labs  •  wordlabs.app  •  Prefix: 'en-' = to make, put into</a:t>
+              <a:t>Word Labs  •  wordlabs.app  •  Prefix: 'en-' = cause to; make</a:t>
             </a:r>
             <a:endParaRPr lang="en-US" sz="800" dirty="0"/>
           </a:p>
@@ -35162,7 +38012,7 @@
                 <a:ea typeface="Calibri" pitchFamily="34" charset="-122"/>
                 <a:cs typeface="Calibri" pitchFamily="34" charset="-120"/>
               </a:rPr>
-              <a:t>A meaningful word part added to the beginning of a root to change its meaning. The prefix 'en-' means 'to make, put into'.</a:t>
+              <a:t>A meaningful word part added to the beginning of a root to change its meaning. The prefix 'en-' means 'cause to; make'.</a:t>
             </a:r>
             <a:endParaRPr lang="en-US" sz="1350" dirty="0"/>
           </a:p>
@@ -35326,7 +38176,7 @@
                 <a:ea typeface="Calibri" pitchFamily="34" charset="-122"/>
                 <a:cs typeface="Calibri" pitchFamily="34" charset="-120"/>
               </a:rPr>
-              <a:t>The core part of a word carrying its basic meaning. In 'enjoy', the root is the part after the prefix 'en-'.</a:t>
+              <a:t>The core part of a word carrying its basic meaning. In 'empower', the root is the part after the prefix 'en-'.</a:t>
             </a:r>
             <a:endParaRPr lang="en-US" sz="1350" dirty="0"/>
           </a:p>
@@ -35782,7 +38632,7 @@
                 <a:ea typeface="Calibri" pitchFamily="34" charset="-122"/>
                 <a:cs typeface="Calibri" pitchFamily="34" charset="-120"/>
               </a:rPr>
-              <a:t>Word Labs  •  wordlabs.app  •  Prefix: 'en-' = to make, put into</a:t>
+              <a:t>Word Labs  •  wordlabs.app  •  Prefix: 'en-' = cause to; make</a:t>
             </a:r>
             <a:endParaRPr lang="en-US" sz="800" dirty="0"/>
           </a:p>
@@ -35894,7 +38744,7 @@
                 <a:ea typeface="Calibri" pitchFamily="34" charset="-122"/>
                 <a:cs typeface="Calibri" pitchFamily="34" charset="-120"/>
               </a:rPr>
-              <a:t>1.  The prefix 'en-' always makes a word mean the opposite of its base word.</a:t>
+              <a:t>1.  'empower' means 'to give someone the confidence or power to do something'.</a:t>
             </a:r>
             <a:endParaRPr lang="en-US" sz="1300" dirty="0"/>
           </a:p>
@@ -35917,11 +38767,11 @@
             </a:avLst>
           </a:prstGeom>
           <a:solidFill>
-            <a:srgbClr val="FEE2E2"/>
-          </a:solidFill>
-          <a:ln w="12700">
-            <a:solidFill>
-              <a:srgbClr val="DC2626"/>
+            <a:srgbClr val="DCFCE7"/>
+          </a:solidFill>
+          <a:ln w="12700">
+            <a:solidFill>
+              <a:srgbClr val="16A34A"/>
             </a:solidFill>
             <a:prstDash val="solid"/>
           </a:ln>
@@ -35954,13 +38804,13 @@
             <a:r>
               <a:rPr lang="en-US" sz="1100" b="1" dirty="0">
                 <a:solidFill>
-                  <a:srgbClr val="DC2626"/>
+                  <a:srgbClr val="16A34A"/>
                 </a:solidFill>
                 <a:latin typeface="Trebuchet MS" pitchFamily="34" charset="0"/>
                 <a:ea typeface="Trebuchet MS" pitchFamily="34" charset="-122"/>
                 <a:cs typeface="Trebuchet MS" pitchFamily="34" charset="-120"/>
               </a:rPr>
-              <a:t>FALSE</a:t>
+              <a:t>TRUE</a:t>
             </a:r>
             <a:endParaRPr lang="en-US" sz="1100" dirty="0"/>
           </a:p>
@@ -36033,7 +38883,7 @@
                 <a:ea typeface="Calibri" pitchFamily="34" charset="-122"/>
                 <a:cs typeface="Calibri" pitchFamily="34" charset="-120"/>
               </a:rPr>
-              <a:t>2.  The word 'enlarge' contains the prefix 'en-' and means to make something bigger.</a:t>
+              <a:t>2.  'en' means 'cause to; make'.</a:t>
             </a:r>
             <a:endParaRPr lang="en-US" sz="1300" dirty="0"/>
           </a:p>
@@ -36172,7 +39022,7 @@
                 <a:ea typeface="Calibri" pitchFamily="34" charset="-122"/>
                 <a:cs typeface="Calibri" pitchFamily="34" charset="-120"/>
               </a:rPr>
-              <a:t>3.  The prefix 'en-' is only ever used at the end of a word.</a:t>
+              <a:t>3.  'enacted' means 'eaten completely without leaving anything'.</a:t>
             </a:r>
             <a:endParaRPr lang="en-US" sz="1300" dirty="0"/>
           </a:p>
@@ -36311,7 +39161,7 @@
                 <a:ea typeface="Calibri" pitchFamily="34" charset="-122"/>
                 <a:cs typeface="Calibri" pitchFamily="34" charset="-120"/>
               </a:rPr>
-              <a:t>4.  The prefix 'en-' comes from Latin.</a:t>
+              <a:t>4.  'empower' means 'to take away someone's belongings'.</a:t>
             </a:r>
             <a:endParaRPr lang="en-US" sz="1300" dirty="0"/>
           </a:p>
@@ -36334,11 +39184,11 @@
             </a:avLst>
           </a:prstGeom>
           <a:solidFill>
-            <a:srgbClr val="DCFCE7"/>
-          </a:solidFill>
-          <a:ln w="12700">
-            <a:solidFill>
-              <a:srgbClr val="16A34A"/>
+            <a:srgbClr val="FEE2E2"/>
+          </a:solidFill>
+          <a:ln w="12700">
+            <a:solidFill>
+              <a:srgbClr val="DC2626"/>
             </a:solidFill>
             <a:prstDash val="solid"/>
           </a:ln>
@@ -36371,13 +39221,13 @@
             <a:r>
               <a:rPr lang="en-US" sz="1100" b="1" dirty="0">
                 <a:solidFill>
-                  <a:srgbClr val="16A34A"/>
+                  <a:srgbClr val="DC2626"/>
                 </a:solidFill>
                 <a:latin typeface="Trebuchet MS" pitchFamily="34" charset="0"/>
                 <a:ea typeface="Trebuchet MS" pitchFamily="34" charset="-122"/>
                 <a:cs typeface="Trebuchet MS" pitchFamily="34" charset="-120"/>
               </a:rPr>
-              <a:t>TRUE</a:t>
+              <a:t>FALSE</a:t>
             </a:r>
             <a:endParaRPr lang="en-US" sz="1100" dirty="0"/>
           </a:p>
@@ -36450,7 +39300,7 @@
                 <a:ea typeface="Calibri" pitchFamily="34" charset="-122"/>
                 <a:cs typeface="Calibri" pitchFamily="34" charset="-120"/>
               </a:rPr>
-              <a:t>5.  The prefix 'en-' can mean 'to make something' or 'to put into a state'.</a:t>
+              <a:t>5.  'enacted' means 'made into law; performed or acted out'.</a:t>
             </a:r>
             <a:endParaRPr lang="en-US" sz="1300" dirty="0"/>
           </a:p>
@@ -36808,7 +39658,7 @@
                 <a:ea typeface="Calibri" pitchFamily="34" charset="-122"/>
                 <a:cs typeface="Calibri" pitchFamily="34" charset="-120"/>
               </a:rPr>
-              <a:t>Word Labs  •  wordlabs.app  •  Prefix: 'en-' = to make, put into</a:t>
+              <a:t>Word Labs  •  wordlabs.app  •  Prefix: 'en-' = cause to; make</a:t>
             </a:r>
             <a:endParaRPr lang="en-US" sz="800" dirty="0"/>
           </a:p>
@@ -36945,7 +39795,7 @@
                 <a:ea typeface="Trebuchet MS" pitchFamily="34" charset="-122"/>
                 <a:cs typeface="Trebuchet MS" pitchFamily="34" charset="-120"/>
               </a:rPr>
-              <a:t>to make, put into</a:t>
+              <a:t>cause to; make</a:t>
             </a:r>
             <a:endParaRPr lang="en-US" sz="2000" dirty="0"/>
           </a:p>
@@ -36984,7 +39834,7 @@
                 <a:ea typeface="Calibri" pitchFamily="34" charset="-122"/>
                 <a:cs typeface="Calibri" pitchFamily="34" charset="-120"/>
               </a:rPr>
-              <a:t>Origin: Latin: in</a:t>
+              <a:t>Origin: Prefix</a:t>
             </a:r>
             <a:endParaRPr lang="en-US" sz="1100" dirty="0"/>
           </a:p>
@@ -37089,7 +39939,7 @@
                 <a:ea typeface="Trebuchet MS" pitchFamily="34" charset="-122"/>
                 <a:cs typeface="Trebuchet MS" pitchFamily="34" charset="-120"/>
               </a:rPr>
-              <a:t>enjoy</a:t>
+              <a:t>empower</a:t>
             </a:r>
             <a:endParaRPr lang="en-US" sz="1300" dirty="0"/>
           </a:p>
@@ -37155,7 +40005,7 @@
                 <a:ea typeface="Trebuchet MS" pitchFamily="34" charset="-122"/>
                 <a:cs typeface="Trebuchet MS" pitchFamily="34" charset="-120"/>
               </a:rPr>
-              <a:t>enlarge</a:t>
+              <a:t>enacted</a:t>
             </a:r>
             <a:endParaRPr lang="en-US" sz="1300" dirty="0"/>
           </a:p>
@@ -37221,7 +40071,7 @@
                 <a:ea typeface="Trebuchet MS" pitchFamily="34" charset="-122"/>
                 <a:cs typeface="Trebuchet MS" pitchFamily="34" charset="-120"/>
               </a:rPr>
-              <a:t>encourage</a:t>
+              <a:t>entrust</a:t>
             </a:r>
             <a:endParaRPr lang="en-US" sz="1300" dirty="0"/>
           </a:p>
@@ -37287,7 +40137,7 @@
                 <a:ea typeface="Trebuchet MS" pitchFamily="34" charset="-122"/>
                 <a:cs typeface="Trebuchet MS" pitchFamily="34" charset="-120"/>
               </a:rPr>
-              <a:t>enrich</a:t>
+              <a:t>empowered</a:t>
             </a:r>
             <a:endParaRPr lang="en-US" sz="1300" dirty="0"/>
           </a:p>
@@ -37353,7 +40203,7 @@
                 <a:ea typeface="Trebuchet MS" pitchFamily="34" charset="-122"/>
                 <a:cs typeface="Trebuchet MS" pitchFamily="34" charset="-120"/>
               </a:rPr>
-              <a:t>enforce</a:t>
+              <a:t>enactment</a:t>
             </a:r>
             <a:endParaRPr lang="en-US" sz="1300" dirty="0"/>
           </a:p>
@@ -37419,7 +40269,7 @@
                 <a:ea typeface="Trebuchet MS" pitchFamily="34" charset="-122"/>
                 <a:cs typeface="Trebuchet MS" pitchFamily="34" charset="-120"/>
               </a:rPr>
-              <a:t>enclose</a:t>
+              <a:t>encounter</a:t>
             </a:r>
             <a:endParaRPr lang="en-US" sz="1300" dirty="0"/>
           </a:p>
@@ -37485,7 +40335,7 @@
                 <a:ea typeface="Trebuchet MS" pitchFamily="34" charset="-122"/>
                 <a:cs typeface="Trebuchet MS" pitchFamily="34" charset="-120"/>
               </a:rPr>
-              <a:t>endanger</a:t>
+              <a:t>entrusted</a:t>
             </a:r>
             <a:endParaRPr lang="en-US" sz="1300" dirty="0"/>
           </a:p>
@@ -37777,7 +40627,7 @@
                 <a:ea typeface="Calibri" pitchFamily="34" charset="-122"/>
                 <a:cs typeface="Calibri" pitchFamily="34" charset="-120"/>
               </a:rPr>
-              <a:t>Word Labs  •  wordlabs.app  •  Prefix: 'en-' = to make, put into</a:t>
+              <a:t>Word Labs  •  wordlabs.app  •  Prefix: 'en-' = cause to; make</a:t>
             </a:r>
             <a:endParaRPr lang="en-US" sz="800" dirty="0"/>
           </a:p>
@@ -38142,7 +40992,7 @@
                 <a:ea typeface="Trebuchet MS" pitchFamily="34" charset="-122"/>
                 <a:cs typeface="Trebuchet MS" pitchFamily="34" charset="-120"/>
               </a:rPr>
-              <a:t>joy</a:t>
+              <a:t>path</a:t>
             </a:r>
             <a:endParaRPr lang="en-US" sz="1300" dirty="0"/>
           </a:p>
@@ -38206,7 +41056,7 @@
                 <a:ea typeface="Trebuchet MS" pitchFamily="34" charset="-122"/>
                 <a:cs typeface="Trebuchet MS" pitchFamily="34" charset="-120"/>
               </a:rPr>
-              <a:t>-ed</a:t>
+              <a:t>-y</a:t>
             </a:r>
             <a:endParaRPr lang="en-US" sz="1300" dirty="0"/>
           </a:p>
@@ -38295,7 +41145,7 @@
                 <a:ea typeface="Trebuchet MS" pitchFamily="34" charset="-122"/>
                 <a:cs typeface="Trebuchet MS" pitchFamily="34" charset="-120"/>
               </a:rPr>
-              <a:t>large</a:t>
+              <a:t>power</a:t>
             </a:r>
             <a:endParaRPr lang="en-US" sz="1300" dirty="0"/>
           </a:p>
@@ -38359,7 +41209,7 @@
                 <a:ea typeface="Trebuchet MS" pitchFamily="34" charset="-122"/>
                 <a:cs typeface="Trebuchet MS" pitchFamily="34" charset="-120"/>
               </a:rPr>
-              <a:t>-ing</a:t>
+              <a:t>-ed</a:t>
             </a:r>
             <a:endParaRPr lang="en-US" sz="1300" dirty="0"/>
           </a:p>
@@ -38448,7 +41298,7 @@
                 <a:ea typeface="Trebuchet MS" pitchFamily="34" charset="-122"/>
                 <a:cs typeface="Trebuchet MS" pitchFamily="34" charset="-120"/>
               </a:rPr>
-              <a:t>courage</a:t>
+              <a:t>act</a:t>
             </a:r>
             <a:endParaRPr lang="en-US" sz="1300" dirty="0"/>
           </a:p>
@@ -38512,7 +41362,7 @@
                 <a:ea typeface="Trebuchet MS" pitchFamily="34" charset="-122"/>
                 <a:cs typeface="Trebuchet MS" pitchFamily="34" charset="-120"/>
               </a:rPr>
-              <a:t>-ment</a:t>
+              <a:t>-ing</a:t>
             </a:r>
             <a:endParaRPr lang="en-US" sz="1300" dirty="0"/>
           </a:p>
@@ -38601,7 +41451,7 @@
                 <a:ea typeface="Trebuchet MS" pitchFamily="34" charset="-122"/>
                 <a:cs typeface="Trebuchet MS" pitchFamily="34" charset="-120"/>
               </a:rPr>
-              <a:t>rich</a:t>
+              <a:t>clos</a:t>
             </a:r>
             <a:endParaRPr lang="en-US" sz="1300" dirty="0"/>
           </a:p>
@@ -38665,7 +41515,7 @@
                 <a:ea typeface="Trebuchet MS" pitchFamily="34" charset="-122"/>
                 <a:cs typeface="Trebuchet MS" pitchFamily="34" charset="-120"/>
               </a:rPr>
-              <a:t>-able</a:t>
+              <a:t>-ment</a:t>
             </a:r>
             <a:endParaRPr lang="en-US" sz="1300" dirty="0"/>
           </a:p>
@@ -38754,7 +41604,7 @@
                 <a:ea typeface="Trebuchet MS" pitchFamily="34" charset="-122"/>
                 <a:cs typeface="Trebuchet MS" pitchFamily="34" charset="-120"/>
               </a:rPr>
-              <a:t>force</a:t>
+              <a:t>count</a:t>
             </a:r>
             <a:endParaRPr lang="en-US" sz="1300" dirty="0"/>
           </a:p>
@@ -38818,6 +41668,159 @@
                 <a:ea typeface="Trebuchet MS" pitchFamily="34" charset="-122"/>
                 <a:cs typeface="Trebuchet MS" pitchFamily="34" charset="-120"/>
               </a:rPr>
+              <a:t>-ure</a:t>
+            </a:r>
+            <a:endParaRPr lang="en-US" sz="1300" dirty="0"/>
+          </a:p>
+        </p:txBody>
+      </p:sp>
+      <p:sp>
+        <p:nvSpPr>
+          <p:cNvPr id="43" name="Shape 41"/>
+          <p:cNvSpPr/>
+          <p:nvPr/>
+        </p:nvSpPr>
+        <p:spPr>
+          <a:xfrm>
+            <a:off x="640080" y="4041648"/>
+            <a:ext cx="1463040" cy="420624"/>
+          </a:xfrm>
+          <a:prstGeom prst="rect">
+            <a:avLst/>
+          </a:prstGeom>
+          <a:solidFill>
+            <a:srgbClr val="F1F5F9"/>
+          </a:solidFill>
+          <a:ln w="12700">
+            <a:solidFill>
+              <a:srgbClr val="E5E7EB"/>
+            </a:solidFill>
+            <a:prstDash val="solid"/>
+          </a:ln>
+        </p:spPr>
+      </p:sp>
+      <p:sp>
+        <p:nvSpPr>
+          <p:cNvPr id="44" name="Shape 42"/>
+          <p:cNvSpPr/>
+          <p:nvPr/>
+        </p:nvSpPr>
+        <p:spPr>
+          <a:xfrm>
+            <a:off x="3291840" y="4041648"/>
+            <a:ext cx="1645920" cy="420624"/>
+          </a:xfrm>
+          <a:prstGeom prst="rect">
+            <a:avLst/>
+          </a:prstGeom>
+          <a:solidFill>
+            <a:srgbClr val="CCFBF1"/>
+          </a:solidFill>
+          <a:ln w="12700">
+            <a:solidFill>
+              <a:srgbClr val="E5E7EB"/>
+            </a:solidFill>
+            <a:prstDash val="solid"/>
+          </a:ln>
+        </p:spPr>
+      </p:sp>
+      <p:sp>
+        <p:nvSpPr>
+          <p:cNvPr id="45" name="Text 43"/>
+          <p:cNvSpPr/>
+          <p:nvPr/>
+        </p:nvSpPr>
+        <p:spPr>
+          <a:xfrm>
+            <a:off x="3291840" y="4041648"/>
+            <a:ext cx="1645920" cy="420624"/>
+          </a:xfrm>
+          <a:prstGeom prst="rect">
+            <a:avLst/>
+          </a:prstGeom>
+          <a:noFill/>
+          <a:ln/>
+        </p:spPr>
+        <p:txBody>
+          <a:bodyPr wrap="square" lIns="0" tIns="0" rIns="0" bIns="0" rtlCol="0" anchor="ctr"/>
+          <a:lstStyle/>
+          <a:p>
+            <a:pPr algn="ctr" indent="0" marL="0">
+              <a:buNone/>
+            </a:pPr>
+            <a:r>
+              <a:rPr lang="en-US" sz="1300" b="1" dirty="0">
+                <a:solidFill>
+                  <a:srgbClr val="0F766E"/>
+                </a:solidFill>
+                <a:latin typeface="Trebuchet MS" pitchFamily="34" charset="0"/>
+                <a:ea typeface="Trebuchet MS" pitchFamily="34" charset="-122"/>
+                <a:cs typeface="Trebuchet MS" pitchFamily="34" charset="-120"/>
+              </a:rPr>
+              <a:t>danger</a:t>
+            </a:r>
+            <a:endParaRPr lang="en-US" sz="1300" dirty="0"/>
+          </a:p>
+        </p:txBody>
+      </p:sp>
+      <p:sp>
+        <p:nvSpPr>
+          <p:cNvPr id="46" name="Shape 44"/>
+          <p:cNvSpPr/>
+          <p:nvPr/>
+        </p:nvSpPr>
+        <p:spPr>
+          <a:xfrm>
+            <a:off x="5943600" y="4041648"/>
+            <a:ext cx="1463040" cy="420624"/>
+          </a:xfrm>
+          <a:prstGeom prst="rect">
+            <a:avLst/>
+          </a:prstGeom>
+          <a:solidFill>
+            <a:srgbClr val="FCE7F3"/>
+          </a:solidFill>
+          <a:ln w="12700">
+            <a:solidFill>
+              <a:srgbClr val="E5E7EB"/>
+            </a:solidFill>
+            <a:prstDash val="solid"/>
+          </a:ln>
+        </p:spPr>
+      </p:sp>
+      <p:sp>
+        <p:nvSpPr>
+          <p:cNvPr id="47" name="Text 45"/>
+          <p:cNvSpPr/>
+          <p:nvPr/>
+        </p:nvSpPr>
+        <p:spPr>
+          <a:xfrm>
+            <a:off x="5943600" y="4041648"/>
+            <a:ext cx="1463040" cy="420624"/>
+          </a:xfrm>
+          <a:prstGeom prst="rect">
+            <a:avLst/>
+          </a:prstGeom>
+          <a:noFill/>
+          <a:ln/>
+        </p:spPr>
+        <p:txBody>
+          <a:bodyPr wrap="square" lIns="0" tIns="0" rIns="0" bIns="0" rtlCol="0" anchor="ctr"/>
+          <a:lstStyle/>
+          <a:p>
+            <a:pPr algn="ctr" indent="0" marL="0">
+              <a:buNone/>
+            </a:pPr>
+            <a:r>
+              <a:rPr lang="en-US" sz="1300" b="1" dirty="0">
+                <a:solidFill>
+                  <a:srgbClr val="9D174D"/>
+                </a:solidFill>
+                <a:latin typeface="Trebuchet MS" pitchFamily="34" charset="0"/>
+                <a:ea typeface="Trebuchet MS" pitchFamily="34" charset="-122"/>
+                <a:cs typeface="Trebuchet MS" pitchFamily="34" charset="-120"/>
+              </a:rPr>
               <a:t>-er</a:t>
             </a:r>
             <a:endParaRPr lang="en-US" sz="1300" dirty="0"/>
@@ -38826,13 +41829,13 @@
       </p:sp>
       <p:sp>
         <p:nvSpPr>
-          <p:cNvPr id="43" name="Text 41"/>
-          <p:cNvSpPr/>
-          <p:nvPr/>
-        </p:nvSpPr>
-        <p:spPr>
-          <a:xfrm>
-            <a:off x="365760" y="4178808"/>
+          <p:cNvPr id="48" name="Text 46"/>
+          <p:cNvSpPr/>
+          <p:nvPr/>
+        </p:nvSpPr>
+        <p:spPr>
+          <a:xfrm>
+            <a:off x="365760" y="4636008"/>
             <a:ext cx="1097280" cy="420624"/>
           </a:xfrm>
           <a:prstGeom prst="rect">
@@ -38865,13 +41868,13 @@
       </p:sp>
       <p:sp>
         <p:nvSpPr>
-          <p:cNvPr id="44" name="Shape 42"/>
-          <p:cNvSpPr/>
-          <p:nvPr/>
-        </p:nvSpPr>
-        <p:spPr>
-          <a:xfrm>
-            <a:off x="1508760" y="4178808"/>
+          <p:cNvPr id="49" name="Shape 47"/>
+          <p:cNvSpPr/>
+          <p:nvPr/>
+        </p:nvSpPr>
+        <p:spPr>
+          <a:xfrm>
+            <a:off x="1508760" y="4636008"/>
             <a:ext cx="822960" cy="420624"/>
           </a:xfrm>
           <a:prstGeom prst="rect">
@@ -38899,13 +41902,13 @@
       </p:sp>
       <p:sp>
         <p:nvSpPr>
-          <p:cNvPr id="45" name="Text 43"/>
-          <p:cNvSpPr/>
-          <p:nvPr/>
-        </p:nvSpPr>
-        <p:spPr>
-          <a:xfrm>
-            <a:off x="1508760" y="4178808"/>
+          <p:cNvPr id="50" name="Text 48"/>
+          <p:cNvSpPr/>
+          <p:nvPr/>
+        </p:nvSpPr>
+        <p:spPr>
+          <a:xfrm>
+            <a:off x="1508760" y="4636008"/>
             <a:ext cx="822960" cy="420624"/>
           </a:xfrm>
           <a:prstGeom prst="rect">
@@ -38938,13 +41941,13 @@
       </p:sp>
       <p:sp>
         <p:nvSpPr>
-          <p:cNvPr id="46" name="Text 44"/>
-          <p:cNvSpPr/>
-          <p:nvPr/>
-        </p:nvSpPr>
-        <p:spPr>
-          <a:xfrm>
-            <a:off x="2359152" y="4178808"/>
+          <p:cNvPr id="51" name="Text 49"/>
+          <p:cNvSpPr/>
+          <p:nvPr/>
+        </p:nvSpPr>
+        <p:spPr>
+          <a:xfrm>
+            <a:off x="2359152" y="4636008"/>
             <a:ext cx="320040" cy="420624"/>
           </a:xfrm>
           <a:prstGeom prst="rect">
@@ -38977,14 +41980,14 @@
       </p:sp>
       <p:sp>
         <p:nvSpPr>
-          <p:cNvPr id="47" name="Shape 45"/>
-          <p:cNvSpPr/>
-          <p:nvPr/>
-        </p:nvSpPr>
-        <p:spPr>
-          <a:xfrm>
-            <a:off x="2706624" y="4178808"/>
-            <a:ext cx="822960" cy="420624"/>
+          <p:cNvPr id="52" name="Shape 50"/>
+          <p:cNvSpPr/>
+          <p:nvPr/>
+        </p:nvSpPr>
+        <p:spPr>
+          <a:xfrm>
+            <a:off x="2706624" y="4636008"/>
+            <a:ext cx="950976" cy="420624"/>
           </a:xfrm>
           <a:prstGeom prst="rect">
             <a:avLst>
@@ -39011,14 +42014,14 @@
       </p:sp>
       <p:sp>
         <p:nvSpPr>
-          <p:cNvPr id="48" name="Text 46"/>
-          <p:cNvSpPr/>
-          <p:nvPr/>
-        </p:nvSpPr>
-        <p:spPr>
-          <a:xfrm>
-            <a:off x="2706624" y="4178808"/>
-            <a:ext cx="822960" cy="420624"/>
+          <p:cNvPr id="53" name="Text 51"/>
+          <p:cNvSpPr/>
+          <p:nvPr/>
+        </p:nvSpPr>
+        <p:spPr>
+          <a:xfrm>
+            <a:off x="2706624" y="4636008"/>
+            <a:ext cx="950976" cy="420624"/>
           </a:xfrm>
           <a:prstGeom prst="rect">
             <a:avLst/>
@@ -39042,7 +42045,7 @@
                 <a:ea typeface="Trebuchet MS" pitchFamily="34" charset="-122"/>
                 <a:cs typeface="Trebuchet MS" pitchFamily="34" charset="-120"/>
               </a:rPr>
-              <a:t>joy</a:t>
+              <a:t>path</a:t>
             </a:r>
             <a:endParaRPr lang="en-US" sz="1300" dirty="0"/>
           </a:p>
@@ -39050,13 +42053,13 @@
       </p:sp>
       <p:sp>
         <p:nvSpPr>
-          <p:cNvPr id="49" name="Text 47"/>
-          <p:cNvSpPr/>
-          <p:nvPr/>
-        </p:nvSpPr>
-        <p:spPr>
-          <a:xfrm>
-            <a:off x="3557016" y="4178808"/>
+          <p:cNvPr id="54" name="Text 52"/>
+          <p:cNvSpPr/>
+          <p:nvPr/>
+        </p:nvSpPr>
+        <p:spPr>
+          <a:xfrm>
+            <a:off x="3685032" y="4636008"/>
             <a:ext cx="320040" cy="420624"/>
           </a:xfrm>
           <a:prstGeom prst="rect">
@@ -39089,13 +42092,13 @@
       </p:sp>
       <p:sp>
         <p:nvSpPr>
-          <p:cNvPr id="50" name="Shape 48"/>
-          <p:cNvSpPr/>
-          <p:nvPr/>
-        </p:nvSpPr>
-        <p:spPr>
-          <a:xfrm>
-            <a:off x="3904488" y="4178808"/>
+          <p:cNvPr id="55" name="Shape 53"/>
+          <p:cNvSpPr/>
+          <p:nvPr/>
+        </p:nvSpPr>
+        <p:spPr>
+          <a:xfrm>
+            <a:off x="4032504" y="4636008"/>
             <a:ext cx="822960" cy="420624"/>
           </a:xfrm>
           <a:prstGeom prst="rect">
@@ -39123,13 +42126,13 @@
       </p:sp>
       <p:sp>
         <p:nvSpPr>
-          <p:cNvPr id="51" name="Text 49"/>
-          <p:cNvSpPr/>
-          <p:nvPr/>
-        </p:nvSpPr>
-        <p:spPr>
-          <a:xfrm>
-            <a:off x="3904488" y="4178808"/>
+          <p:cNvPr id="56" name="Text 54"/>
+          <p:cNvSpPr/>
+          <p:nvPr/>
+        </p:nvSpPr>
+        <p:spPr>
+          <a:xfrm>
+            <a:off x="4032504" y="4636008"/>
             <a:ext cx="822960" cy="420624"/>
           </a:xfrm>
           <a:prstGeom prst="rect">
@@ -39154,7 +42157,7 @@
                 <a:ea typeface="Trebuchet MS" pitchFamily="34" charset="-122"/>
                 <a:cs typeface="Trebuchet MS" pitchFamily="34" charset="-120"/>
               </a:rPr>
-              <a:t>-ed</a:t>
+              <a:t>-y</a:t>
             </a:r>
             <a:endParaRPr lang="en-US" sz="1300" dirty="0"/>
           </a:p>
@@ -39162,13 +42165,13 @@
       </p:sp>
       <p:sp>
         <p:nvSpPr>
-          <p:cNvPr id="52" name="Text 50"/>
-          <p:cNvSpPr/>
-          <p:nvPr/>
-        </p:nvSpPr>
-        <p:spPr>
-          <a:xfrm>
-            <a:off x="4800600" y="4178808"/>
+          <p:cNvPr id="57" name="Text 55"/>
+          <p:cNvSpPr/>
+          <p:nvPr/>
+        </p:nvSpPr>
+        <p:spPr>
+          <a:xfrm>
+            <a:off x="4928616" y="4636008"/>
             <a:ext cx="365760" cy="420624"/>
           </a:xfrm>
           <a:prstGeom prst="rect">
@@ -39201,13 +42204,13 @@
       </p:sp>
       <p:sp>
         <p:nvSpPr>
-          <p:cNvPr id="53" name="Shape 51"/>
-          <p:cNvSpPr/>
-          <p:nvPr/>
-        </p:nvSpPr>
-        <p:spPr>
-          <a:xfrm>
-            <a:off x="5212080" y="4178808"/>
+          <p:cNvPr id="58" name="Shape 56"/>
+          <p:cNvSpPr/>
+          <p:nvPr/>
+        </p:nvSpPr>
+        <p:spPr>
+          <a:xfrm>
+            <a:off x="5340096" y="4636008"/>
             <a:ext cx="2194560" cy="420624"/>
           </a:xfrm>
           <a:prstGeom prst="rect">
@@ -39228,13 +42231,13 @@
       </p:sp>
       <p:sp>
         <p:nvSpPr>
-          <p:cNvPr id="54" name="Text 52"/>
-          <p:cNvSpPr/>
-          <p:nvPr/>
-        </p:nvSpPr>
-        <p:spPr>
-          <a:xfrm>
-            <a:off x="5212080" y="4178808"/>
+          <p:cNvPr id="59" name="Text 57"/>
+          <p:cNvSpPr/>
+          <p:nvPr/>
+        </p:nvSpPr>
+        <p:spPr>
+          <a:xfrm>
+            <a:off x="5340096" y="4636008"/>
             <a:ext cx="2194560" cy="420624"/>
           </a:xfrm>
           <a:prstGeom prst="rect">
@@ -39259,7 +42262,7 @@
                 <a:ea typeface="Trebuchet MS" pitchFamily="34" charset="-122"/>
                 <a:cs typeface="Trebuchet MS" pitchFamily="34" charset="-120"/>
               </a:rPr>
-              <a:t>enjoy</a:t>
+              <a:t>empower</a:t>
             </a:r>
             <a:endParaRPr lang="en-US" sz="1400" dirty="0"/>
           </a:p>
@@ -39551,7 +42554,7 @@
                 <a:ea typeface="Calibri" pitchFamily="34" charset="-122"/>
                 <a:cs typeface="Calibri" pitchFamily="34" charset="-120"/>
               </a:rPr>
-              <a:t>Word Labs  •  wordlabs.app  •  Prefix: 'en-' = to make, put into</a:t>
+              <a:t>Word Labs  •  wordlabs.app  •  Prefix: 'en-' = cause to; make</a:t>
             </a:r>
             <a:endParaRPr lang="en-US" sz="800" dirty="0"/>
           </a:p>
@@ -39663,7 +42666,7 @@
                 <a:ea typeface="Trebuchet MS" pitchFamily="34" charset="-122"/>
                 <a:cs typeface="Trebuchet MS" pitchFamily="34" charset="-120"/>
               </a:rPr>
-              <a:t>enjoy</a:t>
+              <a:t>empower</a:t>
             </a:r>
             <a:endParaRPr lang="en-US" sz="1200" dirty="0"/>
           </a:p>
@@ -39729,7 +42732,7 @@
                 <a:ea typeface="Calibri" pitchFamily="34" charset="-122"/>
                 <a:cs typeface="Calibri" pitchFamily="34" charset="-120"/>
               </a:rPr>
-              <a:t>To improve something by adding good things to it.</a:t>
+              <a:t>given the confidence or power to do something</a:t>
             </a:r>
             <a:endParaRPr lang="en-US" sz="1200" dirty="0"/>
           </a:p>
@@ -39802,7 +42805,7 @@
                 <a:ea typeface="Trebuchet MS" pitchFamily="34" charset="-122"/>
                 <a:cs typeface="Trebuchet MS" pitchFamily="34" charset="-120"/>
               </a:rPr>
-              <a:t>enlarge</a:t>
+              <a:t>enacted</a:t>
             </a:r>
             <a:endParaRPr lang="en-US" sz="1200" dirty="0"/>
           </a:p>
@@ -39868,7 +42871,7 @@
                 <a:ea typeface="Calibri" pitchFamily="34" charset="-122"/>
                 <a:cs typeface="Calibri" pitchFamily="34" charset="-120"/>
               </a:rPr>
-              <a:t>To get pleasure or happiness from something.</a:t>
+              <a:t>to give someone the confidence or power to do something</a:t>
             </a:r>
             <a:endParaRPr lang="en-US" sz="1200" dirty="0"/>
           </a:p>
@@ -39941,7 +42944,7 @@
                 <a:ea typeface="Trebuchet MS" pitchFamily="34" charset="-122"/>
                 <a:cs typeface="Trebuchet MS" pitchFamily="34" charset="-120"/>
               </a:rPr>
-              <a:t>encourage</a:t>
+              <a:t>entrust</a:t>
             </a:r>
             <a:endParaRPr lang="en-US" sz="1200" dirty="0"/>
           </a:p>
@@ -40007,7 +43010,7 @@
                 <a:ea typeface="Calibri" pitchFamily="34" charset="-122"/>
                 <a:cs typeface="Calibri" pitchFamily="34" charset="-120"/>
               </a:rPr>
-              <a:t>To put someone or something at risk of being hurt.</a:t>
+              <a:t>given responsibility for something important, past tense of entrust</a:t>
             </a:r>
             <a:endParaRPr lang="en-US" sz="1200" dirty="0"/>
           </a:p>
@@ -40080,7 +43083,7 @@
                 <a:ea typeface="Trebuchet MS" pitchFamily="34" charset="-122"/>
                 <a:cs typeface="Trebuchet MS" pitchFamily="34" charset="-120"/>
               </a:rPr>
-              <a:t>enrich</a:t>
+              <a:t>empowered</a:t>
             </a:r>
             <a:endParaRPr lang="en-US" sz="1200" dirty="0"/>
           </a:p>
@@ -40146,7 +43149,7 @@
                 <a:ea typeface="Calibri" pitchFamily="34" charset="-122"/>
                 <a:cs typeface="Calibri" pitchFamily="34" charset="-120"/>
               </a:rPr>
-              <a:t>To give someone confidence to do something.</a:t>
+              <a:t>to give someone the responsibility for something important</a:t>
             </a:r>
             <a:endParaRPr lang="en-US" sz="1200" dirty="0"/>
           </a:p>
@@ -40219,7 +43222,7 @@
                 <a:ea typeface="Trebuchet MS" pitchFamily="34" charset="-122"/>
                 <a:cs typeface="Trebuchet MS" pitchFamily="34" charset="-120"/>
               </a:rPr>
-              <a:t>enforce</a:t>
+              <a:t>enactment</a:t>
             </a:r>
             <a:endParaRPr lang="en-US" sz="1200" dirty="0"/>
           </a:p>
@@ -40285,7 +43288,7 @@
                 <a:ea typeface="Calibri" pitchFamily="34" charset="-122"/>
                 <a:cs typeface="Calibri" pitchFamily="34" charset="-120"/>
               </a:rPr>
-              <a:t>To surround something or put it inside something else.</a:t>
+              <a:t>to meet someone or something, often unexpectedly</a:t>
             </a:r>
             <a:endParaRPr lang="en-US" sz="1200" dirty="0"/>
           </a:p>
@@ -40358,7 +43361,7 @@
                 <a:ea typeface="Trebuchet MS" pitchFamily="34" charset="-122"/>
                 <a:cs typeface="Trebuchet MS" pitchFamily="34" charset="-120"/>
               </a:rPr>
-              <a:t>enclose</a:t>
+              <a:t>encounter</a:t>
             </a:r>
             <a:endParaRPr lang="en-US" sz="1200" dirty="0"/>
           </a:p>
@@ -40424,7 +43427,7 @@
                 <a:ea typeface="Calibri" pitchFamily="34" charset="-122"/>
                 <a:cs typeface="Calibri" pitchFamily="34" charset="-120"/>
               </a:rPr>
-              <a:t>To make sure a rule or law is followed.</a:t>
+              <a:t>the process of making something into law, or acting something out</a:t>
             </a:r>
             <a:endParaRPr lang="en-US" sz="1200" dirty="0"/>
           </a:p>
@@ -40497,7 +43500,7 @@
                 <a:ea typeface="Trebuchet MS" pitchFamily="34" charset="-122"/>
                 <a:cs typeface="Trebuchet MS" pitchFamily="34" charset="-120"/>
               </a:rPr>
-              <a:t>endanger</a:t>
+              <a:t>entrusted</a:t>
             </a:r>
             <a:endParaRPr lang="en-US" sz="1200" dirty="0"/>
           </a:p>
@@ -40563,7 +43566,7 @@
                 <a:ea typeface="Calibri" pitchFamily="34" charset="-122"/>
                 <a:cs typeface="Calibri" pitchFamily="34" charset="-120"/>
               </a:rPr>
-              <a:t>To make something bigger in size.</a:t>
+              <a:t>made into law; performed or acted out</a:t>
             </a:r>
             <a:endParaRPr lang="en-US" sz="1200" dirty="0"/>
           </a:p>
@@ -40855,7 +43858,7 @@
                 <a:ea typeface="Calibri" pitchFamily="34" charset="-122"/>
                 <a:cs typeface="Calibri" pitchFamily="34" charset="-120"/>
               </a:rPr>
-              <a:t>Word Labs  •  wordlabs.app  •  Prefix: 'en-' = to make, put into</a:t>
+              <a:t>Word Labs  •  wordlabs.app  •  Prefix: 'en-' = cause to; make</a:t>
             </a:r>
             <a:endParaRPr lang="en-US" sz="800" dirty="0"/>
           </a:p>
@@ -41058,7 +44061,7 @@
                 <a:ea typeface="Calibri" pitchFamily="34" charset="-122"/>
                 <a:cs typeface="Calibri" pitchFamily="34" charset="-120"/>
               </a:rPr>
-              <a:t>We should encourage our friends when they are trying something new.</a:t>
+              <a:t>The programme aims to empower young people to speak up.</a:t>
             </a:r>
             <a:endParaRPr lang="en-US" sz="1500" dirty="0"/>
           </a:p>
@@ -41222,7 +44225,7 @@
                 <a:ea typeface="Calibri" pitchFamily="34" charset="-122"/>
                 <a:cs typeface="Calibri" pitchFamily="34" charset="-120"/>
               </a:rPr>
-              <a:t>The scientist wanted to ensure the experiment was done safely.</a:t>
+              <a:t>The new road safety rules were enacted last month.</a:t>
             </a:r>
             <a:endParaRPr lang="en-US" sz="1500" dirty="0"/>
           </a:p>
@@ -41386,7 +44389,7 @@
                 <a:ea typeface="Calibri" pitchFamily="34" charset="-122"/>
                 <a:cs typeface="Calibri" pitchFamily="34" charset="-120"/>
               </a:rPr>
-              <a:t>The fence was built to enclose the animals in the paddock.</a:t>
+              <a:t>The teacher decided to entrust Maya with the classroom keys.</a:t>
             </a:r>
             <a:endParaRPr lang="en-US" sz="1500" dirty="0"/>
           </a:p>
